--- a/modules/module-01-industrial-demand-generation/delivery-pack/slide-decks/exports/lesson-07-signal-routing-and-demand-capture.pptx
+++ b/modules/module-01-industrial-demand-generation/delivery-pack/slide-decks/exports/lesson-07-signal-routing-and-demand-capture.pptx
@@ -2,27 +2,27 @@
 <file path=ppt/presentation.xml><?xml version="1.0" encoding="utf-8"?>
 <p:presentation xmlns:p="http://schemas.openxmlformats.org/presentationml/2006/main">
   <p:sldMasterIdLst>
-    <p:sldMasterId xmlns:r="http://schemas.openxmlformats.org/officeDocument/2006/relationships" id="2147483648" r:id="Radeab60fc02c4410"/>
+    <p:sldMasterId xmlns:r="http://schemas.openxmlformats.org/officeDocument/2006/relationships" id="2147483648" r:id="R6a117e1ff0e24094"/>
   </p:sldMasterIdLst>
   <p:notesMasterIdLst>
-    <p:notesMasterId xmlns:r="http://schemas.openxmlformats.org/officeDocument/2006/relationships" r:id="R762c359cc358435a"/>
+    <p:notesMasterId xmlns:r="http://schemas.openxmlformats.org/officeDocument/2006/relationships" r:id="Rab141270e39f4670"/>
   </p:notesMasterIdLst>
   <p:sldIdLst>
-    <p:sldId xmlns:r="http://schemas.openxmlformats.org/officeDocument/2006/relationships" id="256" r:id="Rf925228683e94fda"/>
-    <p:sldId xmlns:r="http://schemas.openxmlformats.org/officeDocument/2006/relationships" id="257" r:id="R4b7fc66cf5c34347"/>
-    <p:sldId xmlns:r="http://schemas.openxmlformats.org/officeDocument/2006/relationships" id="258" r:id="Rba7663aae11043b7"/>
-    <p:sldId xmlns:r="http://schemas.openxmlformats.org/officeDocument/2006/relationships" id="259" r:id="R1fc19ef0691f4eab"/>
-    <p:sldId xmlns:r="http://schemas.openxmlformats.org/officeDocument/2006/relationships" id="260" r:id="R37599066487e4f14"/>
-    <p:sldId xmlns:r="http://schemas.openxmlformats.org/officeDocument/2006/relationships" id="261" r:id="R3d36b00c40494207"/>
-    <p:sldId xmlns:r="http://schemas.openxmlformats.org/officeDocument/2006/relationships" id="262" r:id="R3d88685782214377"/>
-    <p:sldId xmlns:r="http://schemas.openxmlformats.org/officeDocument/2006/relationships" id="263" r:id="R5f3275dcf8fc4256"/>
-    <p:sldId xmlns:r="http://schemas.openxmlformats.org/officeDocument/2006/relationships" id="264" r:id="Rd1adbb2013d34030"/>
-    <p:sldId xmlns:r="http://schemas.openxmlformats.org/officeDocument/2006/relationships" id="265" r:id="Rd7259f62574843f7"/>
-    <p:sldId xmlns:r="http://schemas.openxmlformats.org/officeDocument/2006/relationships" id="266" r:id="R425473857c7d4e92"/>
-    <p:sldId xmlns:r="http://schemas.openxmlformats.org/officeDocument/2006/relationships" id="267" r:id="Rcade6378238b40a6"/>
-    <p:sldId xmlns:r="http://schemas.openxmlformats.org/officeDocument/2006/relationships" id="268" r:id="Rea8db5ee3dac4cae"/>
-    <p:sldId xmlns:r="http://schemas.openxmlformats.org/officeDocument/2006/relationships" id="269" r:id="R8cb0d38eed0e4853"/>
-    <p:sldId xmlns:r="http://schemas.openxmlformats.org/officeDocument/2006/relationships" id="270" r:id="Ra04f88fef752447e"/>
+    <p:sldId xmlns:r="http://schemas.openxmlformats.org/officeDocument/2006/relationships" id="256" r:id="R5a58c507dace4a3c"/>
+    <p:sldId xmlns:r="http://schemas.openxmlformats.org/officeDocument/2006/relationships" id="257" r:id="Rfcdb1e2d2caf4276"/>
+    <p:sldId xmlns:r="http://schemas.openxmlformats.org/officeDocument/2006/relationships" id="258" r:id="R8951cf0961a04312"/>
+    <p:sldId xmlns:r="http://schemas.openxmlformats.org/officeDocument/2006/relationships" id="259" r:id="Rb54577f2cd034675"/>
+    <p:sldId xmlns:r="http://schemas.openxmlformats.org/officeDocument/2006/relationships" id="260" r:id="R883cfb9877d54126"/>
+    <p:sldId xmlns:r="http://schemas.openxmlformats.org/officeDocument/2006/relationships" id="261" r:id="Racc271ff0c884e4e"/>
+    <p:sldId xmlns:r="http://schemas.openxmlformats.org/officeDocument/2006/relationships" id="262" r:id="R1f72ee119e0f4b2e"/>
+    <p:sldId xmlns:r="http://schemas.openxmlformats.org/officeDocument/2006/relationships" id="263" r:id="R5fc7b4130c1e432e"/>
+    <p:sldId xmlns:r="http://schemas.openxmlformats.org/officeDocument/2006/relationships" id="264" r:id="Rce4b0841757e46a8"/>
+    <p:sldId xmlns:r="http://schemas.openxmlformats.org/officeDocument/2006/relationships" id="265" r:id="R76a4f9d004e94e1a"/>
+    <p:sldId xmlns:r="http://schemas.openxmlformats.org/officeDocument/2006/relationships" id="266" r:id="R0e71521650e442f8"/>
+    <p:sldId xmlns:r="http://schemas.openxmlformats.org/officeDocument/2006/relationships" id="267" r:id="R2294ee8cc5674dcd"/>
+    <p:sldId xmlns:r="http://schemas.openxmlformats.org/officeDocument/2006/relationships" id="268" r:id="Rc7b53cbe6da94e9a"/>
+    <p:sldId xmlns:r="http://schemas.openxmlformats.org/officeDocument/2006/relationships" id="269" r:id="R267b6f1321d043cf"/>
+    <p:sldId xmlns:r="http://schemas.openxmlformats.org/officeDocument/2006/relationships" id="270" r:id="R2abf88b123a84a6f"/>
   </p:sldIdLst>
   <p:sldSz cx="12192000" cy="6858000"/>
   <p:notesSz cx="6858000" cy="9144000"/>
@@ -1493,7 +1493,7 @@
   </p:cSld>
   <p:clrMap bg1="lt1" tx1="dk1" bg2="lt2" tx2="dk2" accent1="accent1" accent2="accent2" accent3="accent3" accent4="accent4" accent5="accent5" accent6="accent6" hlink="hlink" folHlink="folHlink"/>
   <p:sldLayoutIdLst>
-    <p:sldLayoutId xmlns:r="http://schemas.openxmlformats.org/officeDocument/2006/relationships" id="2147483649" r:id="R4f4a0680133e4c1e"/>
+    <p:sldLayoutId xmlns:r="http://schemas.openxmlformats.org/officeDocument/2006/relationships" id="2147483649" r:id="R1c836f6f13254326"/>
   </p:sldLayoutIdLst>
   <p:txStyles>
     <p:titleStyle>
@@ -1792,7 +1792,7 @@
           <p:cNvPr id="1" name="">
             <a:extLst xmlns:a="http://schemas.openxmlformats.org/drawingml/2006/main">
               <a:ext uri="{FF2B5EF4-FFF2-40B4-BE49-F238E27FC236}">
-                <a16:creationId xmlns:a16="http://schemas.microsoft.com/office/drawing/2014/main" id="{F2D058F4-94C8-4367-8314-84F63F42F6AD}"/>
+                <a16:creationId xmlns:a16="http://schemas.microsoft.com/office/drawing/2014/main" id="{31F25E2C-C5F1-4A3C-94F0-FD3841936B8E}"/>
               </a:ext>
             </a:extLst>
           </p:cNvPr>
@@ -1827,7 +1827,7 @@
           <p:cNvPr id="2" name="">
             <a:extLst xmlns:a="http://schemas.openxmlformats.org/drawingml/2006/main">
               <a:ext uri="{FF2B5EF4-FFF2-40B4-BE49-F238E27FC236}">
-                <a16:creationId xmlns:a16="http://schemas.microsoft.com/office/drawing/2014/main" id="{CA78B078-69B5-491B-881B-1FB053BD793B}"/>
+                <a16:creationId xmlns:a16="http://schemas.microsoft.com/office/drawing/2014/main" id="{3E65A7D2-711C-4837-BCE4-72312FAE1840}"/>
               </a:ext>
             </a:extLst>
           </p:cNvPr>
@@ -1862,7 +1862,7 @@
           <p:cNvPr id="3" name="">
             <a:extLst xmlns:a="http://schemas.openxmlformats.org/drawingml/2006/main">
               <a:ext uri="{FF2B5EF4-FFF2-40B4-BE49-F238E27FC236}">
-                <a16:creationId xmlns:a16="http://schemas.microsoft.com/office/drawing/2014/main" id="{DAF30956-A224-40A1-B1CC-7EC55BCEB921}"/>
+                <a16:creationId xmlns:a16="http://schemas.microsoft.com/office/drawing/2014/main" id="{F880325F-CCE1-402A-A555-30FC84C7D262}"/>
               </a:ext>
             </a:extLst>
           </p:cNvPr>
@@ -1897,7 +1897,7 @@
           <p:cNvPr id="4" name="kicker-07-marker">
             <a:extLst xmlns:a="http://schemas.openxmlformats.org/drawingml/2006/main">
               <a:ext uri="{FF2B5EF4-FFF2-40B4-BE49-F238E27FC236}">
-                <a16:creationId xmlns:a16="http://schemas.microsoft.com/office/drawing/2014/main" id="{DF815FA6-FB64-4A2F-B268-AF2FD34F4CA6}"/>
+                <a16:creationId xmlns:a16="http://schemas.microsoft.com/office/drawing/2014/main" id="{19A74D43-6D69-4F2B-9253-A6E57E08DC75}"/>
               </a:ext>
             </a:extLst>
           </p:cNvPr>
@@ -1932,7 +1932,7 @@
           <p:cNvPr id="5" name="kicker-07-label">
             <a:extLst xmlns:a="http://schemas.openxmlformats.org/drawingml/2006/main">
               <a:ext uri="{FF2B5EF4-FFF2-40B4-BE49-F238E27FC236}">
-                <a16:creationId xmlns:a16="http://schemas.microsoft.com/office/drawing/2014/main" id="{E73368A1-E4E0-47CF-B621-10311CCC9AC5}"/>
+                <a16:creationId xmlns:a16="http://schemas.microsoft.com/office/drawing/2014/main" id="{D96930E6-6E57-4D92-8F90-657D6CDD4CEB}"/>
               </a:ext>
             </a:extLst>
           </p:cNvPr>
@@ -1996,7 +1996,7 @@
           <p:cNvPr id="6" name="">
             <a:extLst xmlns:a="http://schemas.openxmlformats.org/drawingml/2006/main">
               <a:ext uri="{FF2B5EF4-FFF2-40B4-BE49-F238E27FC236}">
-                <a16:creationId xmlns:a16="http://schemas.microsoft.com/office/drawing/2014/main" id="{FA612741-6A54-42B9-BE37-EB5A86D0449F}"/>
+                <a16:creationId xmlns:a16="http://schemas.microsoft.com/office/drawing/2014/main" id="{E4945F86-453C-447F-B478-9D1CD660C644}"/>
               </a:ext>
             </a:extLst>
           </p:cNvPr>
@@ -2060,7 +2060,7 @@
           <p:cNvPr id="7" name="">
             <a:extLst xmlns:a="http://schemas.openxmlformats.org/drawingml/2006/main">
               <a:ext uri="{FF2B5EF4-FFF2-40B4-BE49-F238E27FC236}">
-                <a16:creationId xmlns:a16="http://schemas.microsoft.com/office/drawing/2014/main" id="{D150F221-A276-4279-BD14-D9CBD7DFA401}"/>
+                <a16:creationId xmlns:a16="http://schemas.microsoft.com/office/drawing/2014/main" id="{7D102C7A-A820-4FFD-87EF-2D3873B09D9D}"/>
               </a:ext>
             </a:extLst>
           </p:cNvPr>
@@ -2124,7 +2124,7 @@
           <p:cNvPr id="8" name="">
             <a:extLst xmlns:a="http://schemas.openxmlformats.org/drawingml/2006/main">
               <a:ext uri="{FF2B5EF4-FFF2-40B4-BE49-F238E27FC236}">
-                <a16:creationId xmlns:a16="http://schemas.microsoft.com/office/drawing/2014/main" id="{F642AFA6-1BDB-4A59-87FC-42674E5A419A}"/>
+                <a16:creationId xmlns:a16="http://schemas.microsoft.com/office/drawing/2014/main" id="{50B64DB9-3B8C-4234-A0C2-E260FC5B07E6}"/>
               </a:ext>
             </a:extLst>
           </p:cNvPr>
@@ -2157,7 +2157,7 @@
           <p:cNvPr id="9" name="">
             <a:extLst xmlns:a="http://schemas.openxmlformats.org/drawingml/2006/main">
               <a:ext uri="{FF2B5EF4-FFF2-40B4-BE49-F238E27FC236}">
-                <a16:creationId xmlns:a16="http://schemas.microsoft.com/office/drawing/2014/main" id="{4B54AA6E-0DBE-456F-B8B5-8B95D92CCE60}"/>
+                <a16:creationId xmlns:a16="http://schemas.microsoft.com/office/drawing/2014/main" id="{BB753A65-F8BD-4C55-9A10-AD1EA4C0E1A2}"/>
               </a:ext>
             </a:extLst>
           </p:cNvPr>
@@ -2221,7 +2221,7 @@
           <p:cNvPr id="10" name="">
             <a:extLst xmlns:a="http://schemas.openxmlformats.org/drawingml/2006/main">
               <a:ext uri="{FF2B5EF4-FFF2-40B4-BE49-F238E27FC236}">
-                <a16:creationId xmlns:a16="http://schemas.microsoft.com/office/drawing/2014/main" id="{12D97041-06F2-4FB1-B0D6-865352F4C52D}"/>
+                <a16:creationId xmlns:a16="http://schemas.microsoft.com/office/drawing/2014/main" id="{9DD0D4B1-C25A-4C75-87C9-FC51F4BEA6FE}"/>
               </a:ext>
             </a:extLst>
           </p:cNvPr>
@@ -2254,7 +2254,7 @@
           <p:cNvPr id="11" name="">
             <a:extLst xmlns:a="http://schemas.openxmlformats.org/drawingml/2006/main">
               <a:ext uri="{FF2B5EF4-FFF2-40B4-BE49-F238E27FC236}">
-                <a16:creationId xmlns:a16="http://schemas.microsoft.com/office/drawing/2014/main" id="{C52FCE09-1340-4303-BEFB-967C7A20ED3E}"/>
+                <a16:creationId xmlns:a16="http://schemas.microsoft.com/office/drawing/2014/main" id="{57E76A96-6078-4E3D-A001-41B6E2DA9A9E}"/>
               </a:ext>
             </a:extLst>
           </p:cNvPr>
@@ -2318,7 +2318,7 @@
           <p:cNvPr id="12" name="">
             <a:extLst xmlns:a="http://schemas.openxmlformats.org/drawingml/2006/main">
               <a:ext uri="{FF2B5EF4-FFF2-40B4-BE49-F238E27FC236}">
-                <a16:creationId xmlns:a16="http://schemas.microsoft.com/office/drawing/2014/main" id="{6FC5B2C3-2A52-4FC2-A98E-74B822779DFA}"/>
+                <a16:creationId xmlns:a16="http://schemas.microsoft.com/office/drawing/2014/main" id="{5374D6D1-6724-45BB-9B2D-494AF0E84404}"/>
               </a:ext>
             </a:extLst>
           </p:cNvPr>
@@ -2351,7 +2351,7 @@
           <p:cNvPr id="13" name="">
             <a:extLst xmlns:a="http://schemas.openxmlformats.org/drawingml/2006/main">
               <a:ext uri="{FF2B5EF4-FFF2-40B4-BE49-F238E27FC236}">
-                <a16:creationId xmlns:a16="http://schemas.microsoft.com/office/drawing/2014/main" id="{7FE3C183-DD39-42DF-BF58-95A40E18FF7B}"/>
+                <a16:creationId xmlns:a16="http://schemas.microsoft.com/office/drawing/2014/main" id="{7D7ED45F-34F9-4686-9FBB-D3D38ACAD8FF}"/>
               </a:ext>
             </a:extLst>
           </p:cNvPr>
@@ -2415,7 +2415,7 @@
           <p:cNvPr id="14" name="">
             <a:extLst xmlns:a="http://schemas.openxmlformats.org/drawingml/2006/main">
               <a:ext uri="{FF2B5EF4-FFF2-40B4-BE49-F238E27FC236}">
-                <a16:creationId xmlns:a16="http://schemas.microsoft.com/office/drawing/2014/main" id="{D7F9ACB4-7621-4AA5-91B2-009748281482}"/>
+                <a16:creationId xmlns:a16="http://schemas.microsoft.com/office/drawing/2014/main" id="{EE352E16-7F94-43BB-B91A-806F19B552E5}"/>
               </a:ext>
             </a:extLst>
           </p:cNvPr>
@@ -2448,7 +2448,7 @@
           <p:cNvPr id="15" name="">
             <a:extLst xmlns:a="http://schemas.openxmlformats.org/drawingml/2006/main">
               <a:ext uri="{FF2B5EF4-FFF2-40B4-BE49-F238E27FC236}">
-                <a16:creationId xmlns:a16="http://schemas.microsoft.com/office/drawing/2014/main" id="{43158C2E-65BA-4A87-88A5-7794503063AC}"/>
+                <a16:creationId xmlns:a16="http://schemas.microsoft.com/office/drawing/2014/main" id="{B63BE83E-3E8B-4CBC-B368-8D29298EF7CF}"/>
               </a:ext>
             </a:extLst>
           </p:cNvPr>
@@ -2483,7 +2483,7 @@
           <p:cNvPr id="16" name="">
             <a:extLst xmlns:a="http://schemas.openxmlformats.org/drawingml/2006/main">
               <a:ext uri="{FF2B5EF4-FFF2-40B4-BE49-F238E27FC236}">
-                <a16:creationId xmlns:a16="http://schemas.microsoft.com/office/drawing/2014/main" id="{1459AC37-8A19-4B6C-A7A7-E6C45201FFCA}"/>
+                <a16:creationId xmlns:a16="http://schemas.microsoft.com/office/drawing/2014/main" id="{A121AF53-FCE3-415C-87E0-003B7BB01935}"/>
               </a:ext>
             </a:extLst>
           </p:cNvPr>
@@ -2547,7 +2547,7 @@
           <p:cNvPr id="17" name="">
             <a:extLst xmlns:a="http://schemas.openxmlformats.org/drawingml/2006/main">
               <a:ext uri="{FF2B5EF4-FFF2-40B4-BE49-F238E27FC236}">
-                <a16:creationId xmlns:a16="http://schemas.microsoft.com/office/drawing/2014/main" id="{D6D2EC9D-F5F0-4126-8ABF-6E68A271B284}"/>
+                <a16:creationId xmlns:a16="http://schemas.microsoft.com/office/drawing/2014/main" id="{CF236CD6-E42A-420D-A97D-EE73EC6A60E4}"/>
               </a:ext>
             </a:extLst>
           </p:cNvPr>
@@ -2611,7 +2611,7 @@
           <p:cNvPr id="18" name="">
             <a:extLst xmlns:a="http://schemas.openxmlformats.org/drawingml/2006/main">
               <a:ext uri="{FF2B5EF4-FFF2-40B4-BE49-F238E27FC236}">
-                <a16:creationId xmlns:a16="http://schemas.microsoft.com/office/drawing/2014/main" id="{0035D0E1-D8CB-4E30-9F1B-368B16CDA62E}"/>
+                <a16:creationId xmlns:a16="http://schemas.microsoft.com/office/drawing/2014/main" id="{18263EFB-CF19-4768-9704-EA3603DC51B8}"/>
               </a:ext>
             </a:extLst>
           </p:cNvPr>
@@ -2646,7 +2646,7 @@
           <p:cNvPr id="19" name="">
             <a:extLst xmlns:a="http://schemas.openxmlformats.org/drawingml/2006/main">
               <a:ext uri="{FF2B5EF4-FFF2-40B4-BE49-F238E27FC236}">
-                <a16:creationId xmlns:a16="http://schemas.microsoft.com/office/drawing/2014/main" id="{A4048AA2-5C08-42FE-A189-3C7767D3EB81}"/>
+                <a16:creationId xmlns:a16="http://schemas.microsoft.com/office/drawing/2014/main" id="{383E7062-0B21-4370-A603-B2BC46D14F63}"/>
               </a:ext>
             </a:extLst>
           </p:cNvPr>
@@ -2710,7 +2710,7 @@
           <p:cNvPr id="20" name="">
             <a:extLst xmlns:a="http://schemas.openxmlformats.org/drawingml/2006/main">
               <a:ext uri="{FF2B5EF4-FFF2-40B4-BE49-F238E27FC236}">
-                <a16:creationId xmlns:a16="http://schemas.microsoft.com/office/drawing/2014/main" id="{A5018284-F302-42BD-8F13-1761DB9A910B}"/>
+                <a16:creationId xmlns:a16="http://schemas.microsoft.com/office/drawing/2014/main" id="{38945757-2016-449E-BD2B-B22165BB52BA}"/>
               </a:ext>
             </a:extLst>
           </p:cNvPr>
@@ -2764,7 +2764,7 @@
                 <a:ea typeface="Aptos"/>
                 <a:cs typeface="Aptos"/>
               </a:rPr>
-              <a:t>Teach the operating decision, run the diagnostic, then force a usable artifact. The slide is a prompt, not the handout.</a:t>
+              <a:t>Teach the operating decision, run the diagnostic, then force a usable artifact. The slide is a teaching cue, not the handout.</a:t>
             </a:r>
           </a:p>
         </p:txBody>
@@ -2774,7 +2774,7 @@
           <p:cNvPr id="21" name="">
             <a:extLst xmlns:a="http://schemas.openxmlformats.org/drawingml/2006/main">
               <a:ext uri="{FF2B5EF4-FFF2-40B4-BE49-F238E27FC236}">
-                <a16:creationId xmlns:a16="http://schemas.microsoft.com/office/drawing/2014/main" id="{34C23BE3-AA1B-4437-A400-EAF3759D4649}"/>
+                <a16:creationId xmlns:a16="http://schemas.microsoft.com/office/drawing/2014/main" id="{1AF4FFBC-3D53-4274-84F9-0FDCEB4823CD}"/>
               </a:ext>
             </a:extLst>
           </p:cNvPr>
@@ -2809,7 +2809,7 @@
           <p:cNvPr id="22" name="">
             <a:extLst xmlns:a="http://schemas.openxmlformats.org/drawingml/2006/main">
               <a:ext uri="{FF2B5EF4-FFF2-40B4-BE49-F238E27FC236}">
-                <a16:creationId xmlns:a16="http://schemas.microsoft.com/office/drawing/2014/main" id="{551E1398-CAB6-4F9A-A13E-20291D27A25C}"/>
+                <a16:creationId xmlns:a16="http://schemas.microsoft.com/office/drawing/2014/main" id="{3EDC5BA6-9446-4EDE-BE23-A75AB37B991C}"/>
               </a:ext>
             </a:extLst>
           </p:cNvPr>
@@ -2873,7 +2873,7 @@
           <p:cNvPr id="23" name="">
             <a:extLst xmlns:a="http://schemas.openxmlformats.org/drawingml/2006/main">
               <a:ext uri="{FF2B5EF4-FFF2-40B4-BE49-F238E27FC236}">
-                <a16:creationId xmlns:a16="http://schemas.microsoft.com/office/drawing/2014/main" id="{367EA6CA-7D00-4FC8-A885-A0DA988D0C29}"/>
+                <a16:creationId xmlns:a16="http://schemas.microsoft.com/office/drawing/2014/main" id="{4A4DCC21-525B-475A-88FE-7E0B465294A7}"/>
               </a:ext>
             </a:extLst>
           </p:cNvPr>
@@ -2937,7 +2937,7 @@
           <p:cNvPr id="24" name="">
             <a:extLst xmlns:a="http://schemas.openxmlformats.org/drawingml/2006/main">
               <a:ext uri="{FF2B5EF4-FFF2-40B4-BE49-F238E27FC236}">
-                <a16:creationId xmlns:a16="http://schemas.microsoft.com/office/drawing/2014/main" id="{BBFC5D20-D9D1-4BE6-B51B-62E345FD8536}"/>
+                <a16:creationId xmlns:a16="http://schemas.microsoft.com/office/drawing/2014/main" id="{10E7F0EC-6AF6-4B92-B068-5BF4326EE630}"/>
               </a:ext>
             </a:extLst>
           </p:cNvPr>
@@ -2972,7 +2972,7 @@
           <p:cNvPr id="25" name="">
             <a:extLst xmlns:a="http://schemas.openxmlformats.org/drawingml/2006/main">
               <a:ext uri="{FF2B5EF4-FFF2-40B4-BE49-F238E27FC236}">
-                <a16:creationId xmlns:a16="http://schemas.microsoft.com/office/drawing/2014/main" id="{4E81B181-BD30-42D7-A8D8-5FDBAAAA1BC4}"/>
+                <a16:creationId xmlns:a16="http://schemas.microsoft.com/office/drawing/2014/main" id="{2528AEBF-444B-4826-A708-1E240EC48822}"/>
               </a:ext>
             </a:extLst>
           </p:cNvPr>
@@ -3036,7 +3036,7 @@
           <p:cNvPr id="26" name="">
             <a:extLst xmlns:a="http://schemas.openxmlformats.org/drawingml/2006/main">
               <a:ext uri="{FF2B5EF4-FFF2-40B4-BE49-F238E27FC236}">
-                <a16:creationId xmlns:a16="http://schemas.microsoft.com/office/drawing/2014/main" id="{F82A96EC-7E6D-4EB6-B798-D4727BADE832}"/>
+                <a16:creationId xmlns:a16="http://schemas.microsoft.com/office/drawing/2014/main" id="{3BE896A4-2BE1-4D3F-BD95-64C39C0BD141}"/>
               </a:ext>
             </a:extLst>
           </p:cNvPr>
@@ -3100,7 +3100,7 @@
           <p:cNvPr id="27" name="">
             <a:extLst xmlns:a="http://schemas.openxmlformats.org/drawingml/2006/main">
               <a:ext uri="{FF2B5EF4-FFF2-40B4-BE49-F238E27FC236}">
-                <a16:creationId xmlns:a16="http://schemas.microsoft.com/office/drawing/2014/main" id="{1D845603-DCF3-46CF-8A78-6EA5F1A4F900}"/>
+                <a16:creationId xmlns:a16="http://schemas.microsoft.com/office/drawing/2014/main" id="{0F8C4773-6F8D-496A-88E3-789E2782C6C5}"/>
               </a:ext>
             </a:extLst>
           </p:cNvPr>
@@ -3162,7 +3162,7 @@
     </p:spTree>
     <p:extLst>
       <p:ext uri="{BB962C8B-B14F-4D97-AF65-F5344CB8AC3E}">
-        <p14:creationId xmlns:p14="http://schemas.microsoft.com/office/powerpoint/2010/main" val="1791598721"/>
+        <p14:creationId xmlns:p14="http://schemas.microsoft.com/office/powerpoint/2010/main" val="1032234109"/>
       </p:ext>
     </p:extLst>
   </p:cSld>
@@ -3186,7 +3186,7 @@
           <p:cNvPr id="1" name="">
             <a:extLst xmlns:a="http://schemas.openxmlformats.org/drawingml/2006/main">
               <a:ext uri="{FF2B5EF4-FFF2-40B4-BE49-F238E27FC236}">
-                <a16:creationId xmlns:a16="http://schemas.microsoft.com/office/drawing/2014/main" id="{B60E3808-A34C-4F6F-BB9A-C669FBAC17BB}"/>
+                <a16:creationId xmlns:a16="http://schemas.microsoft.com/office/drawing/2014/main" id="{71736A28-5287-4ABD-93B6-B88902D66BFA}"/>
               </a:ext>
             </a:extLst>
           </p:cNvPr>
@@ -3221,7 +3221,7 @@
           <p:cNvPr id="2" name="">
             <a:extLst xmlns:a="http://schemas.openxmlformats.org/drawingml/2006/main">
               <a:ext uri="{FF2B5EF4-FFF2-40B4-BE49-F238E27FC236}">
-                <a16:creationId xmlns:a16="http://schemas.microsoft.com/office/drawing/2014/main" id="{03835650-9AB9-464F-AA4F-11C4061E6025}"/>
+                <a16:creationId xmlns:a16="http://schemas.microsoft.com/office/drawing/2014/main" id="{C075F546-7FCB-452E-B07F-DF633009B0A9}"/>
               </a:ext>
             </a:extLst>
           </p:cNvPr>
@@ -3256,7 +3256,7 @@
           <p:cNvPr id="3" name="">
             <a:extLst xmlns:a="http://schemas.openxmlformats.org/drawingml/2006/main">
               <a:ext uri="{FF2B5EF4-FFF2-40B4-BE49-F238E27FC236}">
-                <a16:creationId xmlns:a16="http://schemas.microsoft.com/office/drawing/2014/main" id="{9BC8CC1D-9E89-413D-84FB-4806856DDE8C}"/>
+                <a16:creationId xmlns:a16="http://schemas.microsoft.com/office/drawing/2014/main" id="{56CA4474-3516-4E75-8814-C2B9864CB9BF}"/>
               </a:ext>
             </a:extLst>
           </p:cNvPr>
@@ -3291,7 +3291,7 @@
           <p:cNvPr id="4" name="kicker-07-marker">
             <a:extLst xmlns:a="http://schemas.openxmlformats.org/drawingml/2006/main">
               <a:ext uri="{FF2B5EF4-FFF2-40B4-BE49-F238E27FC236}">
-                <a16:creationId xmlns:a16="http://schemas.microsoft.com/office/drawing/2014/main" id="{4D19C622-BC0A-4BC2-B4C3-BFE73C1258B7}"/>
+                <a16:creationId xmlns:a16="http://schemas.microsoft.com/office/drawing/2014/main" id="{21300192-FED0-4E33-ABFB-F4C00EFCA88E}"/>
               </a:ext>
             </a:extLst>
           </p:cNvPr>
@@ -3326,7 +3326,7 @@
           <p:cNvPr id="5" name="kicker-07-label">
             <a:extLst xmlns:a="http://schemas.openxmlformats.org/drawingml/2006/main">
               <a:ext uri="{FF2B5EF4-FFF2-40B4-BE49-F238E27FC236}">
-                <a16:creationId xmlns:a16="http://schemas.microsoft.com/office/drawing/2014/main" id="{202135DF-6062-4B4A-A50E-9E5A18A67E97}"/>
+                <a16:creationId xmlns:a16="http://schemas.microsoft.com/office/drawing/2014/main" id="{C5586C9A-9816-43C9-A59C-78080E4D8BAA}"/>
               </a:ext>
             </a:extLst>
           </p:cNvPr>
@@ -3380,7 +3380,7 @@
                 <a:ea typeface="Aptos"/>
                 <a:cs typeface="Aptos"/>
               </a:rPr>
-              <a:t>MODULE 1 / LESSON 07 / AI-ASSISTED EXERCISE</a:t>
+              <a:t>MODULE 1 / LESSON 07 / STRUCTURED DRAFTING DRILL</a:t>
             </a:r>
           </a:p>
         </p:txBody>
@@ -3390,7 +3390,7 @@
           <p:cNvPr id="6" name="">
             <a:extLst xmlns:a="http://schemas.openxmlformats.org/drawingml/2006/main">
               <a:ext uri="{FF2B5EF4-FFF2-40B4-BE49-F238E27FC236}">
-                <a16:creationId xmlns:a16="http://schemas.microsoft.com/office/drawing/2014/main" id="{C8D926F2-EF50-47C1-A010-3F2A7F53EB56}"/>
+                <a16:creationId xmlns:a16="http://schemas.microsoft.com/office/drawing/2014/main" id="{0318AD82-AF22-4C13-B50D-13A66002C4E3}"/>
               </a:ext>
             </a:extLst>
           </p:cNvPr>
@@ -3444,7 +3444,7 @@
                 <a:ea typeface="Aptos Display"/>
                 <a:cs typeface="Aptos Display"/>
               </a:rPr>
-              <a:t>Use AI to structure the attempt, then make humans responsible for judgment.</a:t>
+              <a:t>Structure the first draft before the room critiques it.</a:t>
             </a:r>
           </a:p>
         </p:txBody>
@@ -3454,7 +3454,7 @@
           <p:cNvPr id="7" name="">
             <a:extLst xmlns:a="http://schemas.openxmlformats.org/drawingml/2006/main">
               <a:ext uri="{FF2B5EF4-FFF2-40B4-BE49-F238E27FC236}">
-                <a16:creationId xmlns:a16="http://schemas.microsoft.com/office/drawing/2014/main" id="{7B9ADE60-F95D-4074-AF23-9BC93840602D}"/>
+                <a16:creationId xmlns:a16="http://schemas.microsoft.com/office/drawing/2014/main" id="{3D71B853-6A67-4928-BC5A-62B0AA1018A1}"/>
               </a:ext>
             </a:extLst>
           </p:cNvPr>
@@ -3508,7 +3508,7 @@
                 <a:ea typeface="Aptos"/>
                 <a:cs typeface="Aptos"/>
               </a:rPr>
-              <a:t>The prompt is constrained by source, assumptions, output standard, and human validation.</a:t>
+              <a:t>The brief is constrained by source evidence, assumptions, output standard, and validation.</a:t>
             </a:r>
           </a:p>
         </p:txBody>
@@ -3518,7 +3518,7 @@
           <p:cNvPr id="8" name="">
             <a:extLst xmlns:a="http://schemas.openxmlformats.org/drawingml/2006/main">
               <a:ext uri="{FF2B5EF4-FFF2-40B4-BE49-F238E27FC236}">
-                <a16:creationId xmlns:a16="http://schemas.microsoft.com/office/drawing/2014/main" id="{F845FCE2-9F16-40AD-B92E-1E1674D13286}"/>
+                <a16:creationId xmlns:a16="http://schemas.microsoft.com/office/drawing/2014/main" id="{04959698-6A82-4B78-A3F7-0C4915ACFD22}"/>
               </a:ext>
             </a:extLst>
           </p:cNvPr>
@@ -3553,7 +3553,7 @@
           <p:cNvPr id="9" name="">
             <a:extLst xmlns:a="http://schemas.openxmlformats.org/drawingml/2006/main">
               <a:ext uri="{FF2B5EF4-FFF2-40B4-BE49-F238E27FC236}">
-                <a16:creationId xmlns:a16="http://schemas.microsoft.com/office/drawing/2014/main" id="{A4867D6A-0B76-4BA2-AEBE-636862154E53}"/>
+                <a16:creationId xmlns:a16="http://schemas.microsoft.com/office/drawing/2014/main" id="{8B41B244-BB9F-4C57-9044-429EEFFFB184}"/>
               </a:ext>
             </a:extLst>
           </p:cNvPr>
@@ -3617,7 +3617,7 @@
           <p:cNvPr id="10" name="">
             <a:extLst xmlns:a="http://schemas.openxmlformats.org/drawingml/2006/main">
               <a:ext uri="{FF2B5EF4-FFF2-40B4-BE49-F238E27FC236}">
-                <a16:creationId xmlns:a16="http://schemas.microsoft.com/office/drawing/2014/main" id="{90D48DFD-FFAD-4D55-8ACC-B19C77773A7E}"/>
+                <a16:creationId xmlns:a16="http://schemas.microsoft.com/office/drawing/2014/main" id="{D639675E-74A7-4667-B1E0-AA0F40B59098}"/>
               </a:ext>
             </a:extLst>
           </p:cNvPr>
@@ -3681,7 +3681,7 @@
           <p:cNvPr id="11" name="">
             <a:extLst xmlns:a="http://schemas.openxmlformats.org/drawingml/2006/main">
               <a:ext uri="{FF2B5EF4-FFF2-40B4-BE49-F238E27FC236}">
-                <a16:creationId xmlns:a16="http://schemas.microsoft.com/office/drawing/2014/main" id="{CD51935B-59B4-4088-A4A0-5521E751316F}"/>
+                <a16:creationId xmlns:a16="http://schemas.microsoft.com/office/drawing/2014/main" id="{5FB0D75F-3AC4-46F2-A4F0-E0E0B429B0FE}"/>
               </a:ext>
             </a:extLst>
           </p:cNvPr>
@@ -3745,19 +3745,19 @@
           <p:cNvPr id="12" name="">
             <a:extLst xmlns:a="http://schemas.openxmlformats.org/drawingml/2006/main">
               <a:ext uri="{FF2B5EF4-FFF2-40B4-BE49-F238E27FC236}">
-                <a16:creationId xmlns:a16="http://schemas.microsoft.com/office/drawing/2014/main" id="{6C5E04F2-94C2-4E78-9912-AEFF6EAB0DC0}"/>
-              </a:ext>
-            </a:extLst>
-          </p:cNvPr>
-          <p:cNvSpPr>
-            <a:spLocks xmlns:a="http://schemas.openxmlformats.org/drawingml/2006/main" noGrp="1"/>
-          </p:cNvSpPr>
-          <p:nvPr/>
-        </p:nvSpPr>
-        <p:spPr>
-          <a:xfrm xmlns:a="http://schemas.openxmlformats.org/drawingml/2006/main">
-            <a:off x="228600" y="1809750"/>
-            <a:ext cx="11963400" cy="4591050"/>
+                <a16:creationId xmlns:a16="http://schemas.microsoft.com/office/drawing/2014/main" id="{C7B6D448-48B4-4C5D-974D-7025F4B18404}"/>
+              </a:ext>
+            </a:extLst>
+          </p:cNvPr>
+          <p:cNvSpPr>
+            <a:spLocks xmlns:a="http://schemas.openxmlformats.org/drawingml/2006/main" noGrp="1"/>
+          </p:cNvSpPr>
+          <p:nvPr/>
+        </p:nvSpPr>
+        <p:spPr>
+          <a:xfrm xmlns:a="http://schemas.openxmlformats.org/drawingml/2006/main">
+            <a:off x="0" y="1809750"/>
+            <a:ext cx="12192000" cy="4591050"/>
           </a:xfrm>
           <a:prstGeom xmlns:a="http://schemas.openxmlformats.org/drawingml/2006/main" prst="rect">
             <a:avLst/>
@@ -3765,11 +3765,9 @@
           <a:solidFill xmlns:a="http://schemas.openxmlformats.org/drawingml/2006/main">
             <a:srgbClr val="F5F6F2"/>
           </a:solidFill>
-          <a:ln xmlns:a="http://schemas.openxmlformats.org/drawingml/2006/main" w="0">
-            <a:solidFill>
-              <a:srgbClr val="000000">
-                <a:alpha val="0"/>
-              </a:srgbClr>
+          <a:ln xmlns:a="http://schemas.openxmlformats.org/drawingml/2006/main" w="9525">
+            <a:solidFill>
+              <a:srgbClr val="F5F6F2"/>
             </a:solidFill>
             <a:prstDash val="solid"/>
           </a:ln>
@@ -3780,29 +3778,29 @@
           <p:cNvPr id="13" name="">
             <a:extLst xmlns:a="http://schemas.openxmlformats.org/drawingml/2006/main">
               <a:ext uri="{FF2B5EF4-FFF2-40B4-BE49-F238E27FC236}">
-                <a16:creationId xmlns:a16="http://schemas.microsoft.com/office/drawing/2014/main" id="{45336EA4-E2EA-4CE8-AA0A-45DA4A1704F0}"/>
-              </a:ext>
-            </a:extLst>
-          </p:cNvPr>
-          <p:cNvSpPr>
-            <a:spLocks xmlns:a="http://schemas.openxmlformats.org/drawingml/2006/main" noGrp="1"/>
-          </p:cNvSpPr>
-          <p:nvPr/>
-        </p:nvSpPr>
-        <p:spPr>
-          <a:xfrm xmlns:a="http://schemas.openxmlformats.org/drawingml/2006/main">
-            <a:off x="228600" y="1809750"/>
-            <a:ext cx="6096000" cy="4591050"/>
-          </a:xfrm>
-          <a:prstGeom xmlns:a="http://schemas.openxmlformats.org/drawingml/2006/main" prst="rect">
-            <a:avLst/>
-          </a:prstGeom>
-          <a:solidFill xmlns:a="http://schemas.openxmlformats.org/drawingml/2006/main">
-            <a:srgbClr val="12232B"/>
+                <a16:creationId xmlns:a16="http://schemas.microsoft.com/office/drawing/2014/main" id="{E92BC9A4-F9C0-4078-82AB-4D1A76D926DB}"/>
+              </a:ext>
+            </a:extLst>
+          </p:cNvPr>
+          <p:cNvSpPr>
+            <a:spLocks xmlns:a="http://schemas.openxmlformats.org/drawingml/2006/main" noGrp="1"/>
+          </p:cNvSpPr>
+          <p:nvPr/>
+        </p:nvSpPr>
+        <p:spPr>
+          <a:xfrm xmlns:a="http://schemas.openxmlformats.org/drawingml/2006/main">
+            <a:off x="514350" y="2038350"/>
+            <a:ext cx="5619750" cy="3181350"/>
+          </a:xfrm>
+          <a:prstGeom xmlns:a="http://schemas.openxmlformats.org/drawingml/2006/main" prst="rect">
+            <a:avLst/>
+          </a:prstGeom>
+          <a:solidFill xmlns:a="http://schemas.openxmlformats.org/drawingml/2006/main">
+            <a:srgbClr val="FFFFFF"/>
           </a:solidFill>
           <a:ln xmlns:a="http://schemas.openxmlformats.org/drawingml/2006/main" w="9525">
             <a:solidFill>
-              <a:srgbClr val="12232B"/>
+              <a:srgbClr val="D9DDD6"/>
             </a:solidFill>
             <a:prstDash val="solid"/>
           </a:ln>
@@ -3813,25 +3811,25 @@
           <p:cNvPr id="14" name="">
             <a:extLst xmlns:a="http://schemas.openxmlformats.org/drawingml/2006/main">
               <a:ext uri="{FF2B5EF4-FFF2-40B4-BE49-F238E27FC236}">
-                <a16:creationId xmlns:a16="http://schemas.microsoft.com/office/drawing/2014/main" id="{FE73F459-6A06-4D8C-87E3-FB6D19E5A903}"/>
-              </a:ext>
-            </a:extLst>
-          </p:cNvPr>
-          <p:cNvSpPr>
-            <a:spLocks xmlns:a="http://schemas.openxmlformats.org/drawingml/2006/main" noGrp="1"/>
-          </p:cNvSpPr>
-          <p:nvPr/>
-        </p:nvSpPr>
-        <p:spPr>
-          <a:xfrm xmlns:a="http://schemas.openxmlformats.org/drawingml/2006/main">
-            <a:off x="609600" y="2266950"/>
+                <a16:creationId xmlns:a16="http://schemas.microsoft.com/office/drawing/2014/main" id="{ABC645A8-73CD-4083-BA94-05CA96DF7C7E}"/>
+              </a:ext>
+            </a:extLst>
+          </p:cNvPr>
+          <p:cNvSpPr>
+            <a:spLocks xmlns:a="http://schemas.openxmlformats.org/drawingml/2006/main" noGrp="1"/>
+          </p:cNvSpPr>
+          <p:nvPr/>
+        </p:nvSpPr>
+        <p:spPr>
+          <a:xfrm xmlns:a="http://schemas.openxmlformats.org/drawingml/2006/main">
+            <a:off x="819150" y="2419350"/>
             <a:ext cx="266700" cy="19050"/>
           </a:xfrm>
           <a:prstGeom xmlns:a="http://schemas.openxmlformats.org/drawingml/2006/main" prst="rect">
             <a:avLst/>
           </a:prstGeom>
           <a:solidFill xmlns:a="http://schemas.openxmlformats.org/drawingml/2006/main">
-            <a:srgbClr val="B7953B"/>
+            <a:srgbClr val="A85D2A"/>
           </a:solidFill>
           <a:ln xmlns:a="http://schemas.openxmlformats.org/drawingml/2006/main" w="0">
             <a:solidFill>
@@ -3848,18 +3846,18 @@
           <p:cNvPr id="15" name="">
             <a:extLst xmlns:a="http://schemas.openxmlformats.org/drawingml/2006/main">
               <a:ext uri="{FF2B5EF4-FFF2-40B4-BE49-F238E27FC236}">
-                <a16:creationId xmlns:a16="http://schemas.microsoft.com/office/drawing/2014/main" id="{830146D4-3131-4FD6-8AA7-41EDFBED43E6}"/>
-              </a:ext>
-            </a:extLst>
-          </p:cNvPr>
-          <p:cNvSpPr>
-            <a:spLocks xmlns:a="http://schemas.openxmlformats.org/drawingml/2006/main" noGrp="1"/>
-          </p:cNvSpPr>
-          <p:nvPr/>
-        </p:nvSpPr>
-        <p:spPr>
-          <a:xfrm xmlns:a="http://schemas.openxmlformats.org/drawingml/2006/main">
-            <a:off x="971550" y="2190750"/>
+                <a16:creationId xmlns:a16="http://schemas.microsoft.com/office/drawing/2014/main" id="{3A81D1B9-AB86-476F-BEEF-EBB068BB311D}"/>
+              </a:ext>
+            </a:extLst>
+          </p:cNvPr>
+          <p:cNvSpPr>
+            <a:spLocks xmlns:a="http://schemas.openxmlformats.org/drawingml/2006/main" noGrp="1"/>
+          </p:cNvSpPr>
+          <p:nvPr/>
+        </p:nvSpPr>
+        <p:spPr>
+          <a:xfrm xmlns:a="http://schemas.openxmlformats.org/drawingml/2006/main">
+            <a:off x="1181100" y="2343150"/>
             <a:ext cx="2476500" cy="171450"/>
           </a:xfrm>
           <a:prstGeom xmlns:a="http://schemas.openxmlformats.org/drawingml/2006/main" prst="rect">
@@ -3902,7 +3900,7 @@
                 <a:ea typeface="Aptos"/>
                 <a:cs typeface="Aptos"/>
               </a:rPr>
-              <a:t>PROMPT TO GIVE AI</a:t>
+              <a:t>DRAFTING BRIEF</a:t>
             </a:r>
           </a:p>
         </p:txBody>
@@ -3912,19 +3910,19 @@
           <p:cNvPr id="16" name="">
             <a:extLst xmlns:a="http://schemas.openxmlformats.org/drawingml/2006/main">
               <a:ext uri="{FF2B5EF4-FFF2-40B4-BE49-F238E27FC236}">
-                <a16:creationId xmlns:a16="http://schemas.microsoft.com/office/drawing/2014/main" id="{99BA179D-E321-4701-AADF-EEE3F95A0E12}"/>
-              </a:ext>
-            </a:extLst>
-          </p:cNvPr>
-          <p:cNvSpPr>
-            <a:spLocks xmlns:a="http://schemas.openxmlformats.org/drawingml/2006/main" noGrp="1"/>
-          </p:cNvSpPr>
-          <p:nvPr/>
-        </p:nvSpPr>
-        <p:spPr>
-          <a:xfrm xmlns:a="http://schemas.openxmlformats.org/drawingml/2006/main">
-            <a:off x="609600" y="2647950"/>
-            <a:ext cx="5048250" cy="2190750"/>
+                <a16:creationId xmlns:a16="http://schemas.microsoft.com/office/drawing/2014/main" id="{71950E2C-D888-4119-8341-393582CBE456}"/>
+              </a:ext>
+            </a:extLst>
+          </p:cNvPr>
+          <p:cNvSpPr>
+            <a:spLocks xmlns:a="http://schemas.openxmlformats.org/drawingml/2006/main" noGrp="1"/>
+          </p:cNvSpPr>
+          <p:nvPr/>
+        </p:nvSpPr>
+        <p:spPr>
+          <a:xfrm xmlns:a="http://schemas.openxmlformats.org/drawingml/2006/main">
+            <a:off x="819150" y="2762250"/>
+            <a:ext cx="4610100" cy="1752600"/>
           </a:xfrm>
           <a:prstGeom xmlns:a="http://schemas.openxmlformats.org/drawingml/2006/main" prst="rect">
             <a:avLst/>
@@ -3948,9 +3946,240 @@
           <a:lstStyle xmlns:a="http://schemas.openxmlformats.org/drawingml/2006/main"/>
           <a:p xmlns:a="http://schemas.openxmlformats.org/drawingml/2006/main">
             <a:pPr algn="l">
+              <a:defRPr sz="1200" b="0">
+                <a:solidFill>
+                  <a:srgbClr val="172026"/>
+                </a:solidFill>
+                <a:latin typeface="Aptos"/>
+                <a:ea typeface="Aptos"/>
+                <a:cs typeface="Aptos"/>
+              </a:defRPr>
+            </a:pPr>
+            <a:r>
+              <a:rPr sz="1200" b="0">
+                <a:solidFill>
+                  <a:srgbClr val="172026"/>
+                </a:solidFill>
+                <a:latin typeface="Aptos"/>
+                <a:ea typeface="Aptos"/>
+                <a:cs typeface="Aptos"/>
+              </a:rPr>
+              <a:t>Classify the signal table. For each signal, assign demand state, strength, progression state, owner, SLA, next action, false-positive concern, and missing evidence. Explain why the signal is or is not buying intent. Do not route weak engagement as an opportunity.</a:t>
+            </a:r>
+          </a:p>
+        </p:txBody>
+      </p:sp>
+      <p:sp>
+        <p:nvSpPr>
+          <p:cNvPr id="17" name="">
+            <a:extLst xmlns:a="http://schemas.openxmlformats.org/drawingml/2006/main">
+              <a:ext uri="{FF2B5EF4-FFF2-40B4-BE49-F238E27FC236}">
+                <a16:creationId xmlns:a16="http://schemas.microsoft.com/office/drawing/2014/main" id="{32CAED26-D015-4B6A-968D-3E1729BB0DEE}"/>
+              </a:ext>
+            </a:extLst>
+          </p:cNvPr>
+          <p:cNvSpPr>
+            <a:spLocks xmlns:a="http://schemas.openxmlformats.org/drawingml/2006/main" noGrp="1"/>
+          </p:cNvSpPr>
+          <p:nvPr/>
+        </p:nvSpPr>
+        <p:spPr>
+          <a:xfrm xmlns:a="http://schemas.openxmlformats.org/drawingml/2006/main">
+            <a:off x="6496050" y="2038350"/>
+            <a:ext cx="4933950" cy="3181350"/>
+          </a:xfrm>
+          <a:prstGeom xmlns:a="http://schemas.openxmlformats.org/drawingml/2006/main" prst="rect">
+            <a:avLst/>
+          </a:prstGeom>
+          <a:solidFill xmlns:a="http://schemas.openxmlformats.org/drawingml/2006/main">
+            <a:srgbClr val="F9FAF7"/>
+          </a:solidFill>
+          <a:ln xmlns:a="http://schemas.openxmlformats.org/drawingml/2006/main" w="9525">
+            <a:solidFill>
+              <a:srgbClr val="D9DDD6"/>
+            </a:solidFill>
+            <a:prstDash val="solid"/>
+          </a:ln>
+        </p:spPr>
+      </p:sp>
+      <p:sp>
+        <p:nvSpPr>
+          <p:cNvPr id="18" name="">
+            <a:extLst xmlns:a="http://schemas.openxmlformats.org/drawingml/2006/main">
+              <a:ext uri="{FF2B5EF4-FFF2-40B4-BE49-F238E27FC236}">
+                <a16:creationId xmlns:a16="http://schemas.microsoft.com/office/drawing/2014/main" id="{5AF6C469-2A7D-4DFA-A070-93A4FA2F5188}"/>
+              </a:ext>
+            </a:extLst>
+          </p:cNvPr>
+          <p:cNvSpPr>
+            <a:spLocks xmlns:a="http://schemas.openxmlformats.org/drawingml/2006/main" noGrp="1"/>
+          </p:cNvSpPr>
+          <p:nvPr/>
+        </p:nvSpPr>
+        <p:spPr>
+          <a:xfrm xmlns:a="http://schemas.openxmlformats.org/drawingml/2006/main">
+            <a:off x="6819900" y="2419350"/>
+            <a:ext cx="266700" cy="19050"/>
+          </a:xfrm>
+          <a:prstGeom xmlns:a="http://schemas.openxmlformats.org/drawingml/2006/main" prst="rect">
+            <a:avLst/>
+          </a:prstGeom>
+          <a:solidFill xmlns:a="http://schemas.openxmlformats.org/drawingml/2006/main">
+            <a:srgbClr val="1D6072"/>
+          </a:solidFill>
+          <a:ln xmlns:a="http://schemas.openxmlformats.org/drawingml/2006/main" w="0">
+            <a:solidFill>
+              <a:srgbClr val="000000">
+                <a:alpha val="0"/>
+              </a:srgbClr>
+            </a:solidFill>
+            <a:prstDash val="solid"/>
+          </a:ln>
+        </p:spPr>
+      </p:sp>
+      <p:sp>
+        <p:nvSpPr>
+          <p:cNvPr id="19" name="">
+            <a:extLst xmlns:a="http://schemas.openxmlformats.org/drawingml/2006/main">
+              <a:ext uri="{FF2B5EF4-FFF2-40B4-BE49-F238E27FC236}">
+                <a16:creationId xmlns:a16="http://schemas.microsoft.com/office/drawing/2014/main" id="{99DFD504-A923-41AC-9E0D-295BD1EC8831}"/>
+              </a:ext>
+            </a:extLst>
+          </p:cNvPr>
+          <p:cNvSpPr>
+            <a:spLocks xmlns:a="http://schemas.openxmlformats.org/drawingml/2006/main" noGrp="1"/>
+          </p:cNvSpPr>
+          <p:nvPr/>
+        </p:nvSpPr>
+        <p:spPr>
+          <a:xfrm xmlns:a="http://schemas.openxmlformats.org/drawingml/2006/main">
+            <a:off x="7181850" y="2343150"/>
+            <a:ext cx="2476500" cy="171450"/>
+          </a:xfrm>
+          <a:prstGeom xmlns:a="http://schemas.openxmlformats.org/drawingml/2006/main" prst="rect">
+            <a:avLst/>
+          </a:prstGeom>
+          <a:solidFill xmlns:a="http://schemas.openxmlformats.org/drawingml/2006/main">
+            <a:srgbClr val="000000">
+              <a:alpha val="0"/>
+            </a:srgbClr>
+          </a:solidFill>
+          <a:ln xmlns:a="http://schemas.openxmlformats.org/drawingml/2006/main" w="0">
+            <a:solidFill>
+              <a:srgbClr val="000000">
+                <a:alpha val="0"/>
+              </a:srgbClr>
+            </a:solidFill>
+            <a:prstDash val="solid"/>
+          </a:ln>
+        </p:spPr>
+        <p:txBody>
+          <a:bodyPr xmlns:a="http://schemas.openxmlformats.org/drawingml/2006/main" lIns="0" tIns="0" rIns="0" bIns="0" anchor="t"/>
+          <a:lstStyle xmlns:a="http://schemas.openxmlformats.org/drawingml/2006/main"/>
+          <a:p xmlns:a="http://schemas.openxmlformats.org/drawingml/2006/main">
+            <a:pPr algn="l">
+              <a:defRPr sz="750" b="1">
+                <a:solidFill>
+                  <a:srgbClr val="59646A"/>
+                </a:solidFill>
+                <a:latin typeface="Aptos"/>
+                <a:ea typeface="Aptos"/>
+                <a:cs typeface="Aptos"/>
+              </a:defRPr>
+            </a:pPr>
+            <a:r>
+              <a:rPr sz="750" b="1">
+                <a:solidFill>
+                  <a:srgbClr val="59646A"/>
+                </a:solidFill>
+                <a:latin typeface="Aptos"/>
+                <a:ea typeface="Aptos"/>
+                <a:cs typeface="Aptos"/>
+              </a:rPr>
+              <a:t>REQUIRED OUTPUT STANDARD</a:t>
+            </a:r>
+          </a:p>
+        </p:txBody>
+      </p:sp>
+      <p:sp>
+        <p:nvSpPr>
+          <p:cNvPr id="20" name="">
+            <a:extLst xmlns:a="http://schemas.openxmlformats.org/drawingml/2006/main">
+              <a:ext uri="{FF2B5EF4-FFF2-40B4-BE49-F238E27FC236}">
+                <a16:creationId xmlns:a16="http://schemas.microsoft.com/office/drawing/2014/main" id="{9F931974-6A58-4BFA-AF3C-1E9A82D3719D}"/>
+              </a:ext>
+            </a:extLst>
+          </p:cNvPr>
+          <p:cNvSpPr>
+            <a:spLocks xmlns:a="http://schemas.openxmlformats.org/drawingml/2006/main" noGrp="1"/>
+          </p:cNvSpPr>
+          <p:nvPr/>
+        </p:nvSpPr>
+        <p:spPr>
+          <a:xfrm xmlns:a="http://schemas.openxmlformats.org/drawingml/2006/main">
+            <a:off x="6819900" y="2847975"/>
+            <a:ext cx="57150" cy="57150"/>
+          </a:xfrm>
+          <a:prstGeom xmlns:a="http://schemas.openxmlformats.org/drawingml/2006/main" prst="rect">
+            <a:avLst/>
+          </a:prstGeom>
+          <a:solidFill xmlns:a="http://schemas.openxmlformats.org/drawingml/2006/main">
+            <a:srgbClr val="1D6072"/>
+          </a:solidFill>
+          <a:ln xmlns:a="http://schemas.openxmlformats.org/drawingml/2006/main" w="0">
+            <a:solidFill>
+              <a:srgbClr val="000000">
+                <a:alpha val="0"/>
+              </a:srgbClr>
+            </a:solidFill>
+            <a:prstDash val="solid"/>
+          </a:ln>
+        </p:spPr>
+      </p:sp>
+      <p:sp>
+        <p:nvSpPr>
+          <p:cNvPr id="21" name="">
+            <a:extLst xmlns:a="http://schemas.openxmlformats.org/drawingml/2006/main">
+              <a:ext uri="{FF2B5EF4-FFF2-40B4-BE49-F238E27FC236}">
+                <a16:creationId xmlns:a16="http://schemas.microsoft.com/office/drawing/2014/main" id="{A569628A-DA62-452B-97D2-7B9D79A4FD4B}"/>
+              </a:ext>
+            </a:extLst>
+          </p:cNvPr>
+          <p:cNvSpPr>
+            <a:spLocks xmlns:a="http://schemas.openxmlformats.org/drawingml/2006/main" noGrp="1"/>
+          </p:cNvSpPr>
+          <p:nvPr/>
+        </p:nvSpPr>
+        <p:spPr>
+          <a:xfrm xmlns:a="http://schemas.openxmlformats.org/drawingml/2006/main">
+            <a:off x="6991350" y="2781300"/>
+            <a:ext cx="3619500" cy="438150"/>
+          </a:xfrm>
+          <a:prstGeom xmlns:a="http://schemas.openxmlformats.org/drawingml/2006/main" prst="rect">
+            <a:avLst/>
+          </a:prstGeom>
+          <a:solidFill xmlns:a="http://schemas.openxmlformats.org/drawingml/2006/main">
+            <a:srgbClr val="000000">
+              <a:alpha val="0"/>
+            </a:srgbClr>
+          </a:solidFill>
+          <a:ln xmlns:a="http://schemas.openxmlformats.org/drawingml/2006/main" w="0">
+            <a:solidFill>
+              <a:srgbClr val="000000">
+                <a:alpha val="0"/>
+              </a:srgbClr>
+            </a:solidFill>
+            <a:prstDash val="solid"/>
+          </a:ln>
+        </p:spPr>
+        <p:txBody>
+          <a:bodyPr xmlns:a="http://schemas.openxmlformats.org/drawingml/2006/main" lIns="0" tIns="0" rIns="0" bIns="0" anchor="t"/>
+          <a:lstStyle xmlns:a="http://schemas.openxmlformats.org/drawingml/2006/main"/>
+          <a:p xmlns:a="http://schemas.openxmlformats.org/drawingml/2006/main">
+            <a:pPr algn="l">
               <a:defRPr sz="1125" b="0">
                 <a:solidFill>
-                  <a:srgbClr val="FFFFFF"/>
+                  <a:srgbClr val="172026"/>
                 </a:solidFill>
                 <a:latin typeface="Aptos"/>
                 <a:ea typeface="Aptos"/>
@@ -3960,68 +4189,35 @@
             <a:r>
               <a:rPr sz="1125" b="0">
                 <a:solidFill>
-                  <a:srgbClr val="FFFFFF"/>
+                  <a:srgbClr val="172026"/>
                 </a:solidFill>
                 <a:latin typeface="Aptos"/>
                 <a:ea typeface="Aptos"/>
                 <a:cs typeface="Aptos"/>
               </a:rPr>
-              <a:t>Classify the signal table. For each signal, assign demand state, strength, progression state, owner, SLA, next action, false-positive concern, and missing evidence. Explain why the signal is or is not buying intent. Do not route weak engagement as an opportunity.</a:t>
+              <a:t>Demand state with rationale</a:t>
             </a:r>
           </a:p>
         </p:txBody>
       </p:sp>
       <p:sp>
         <p:nvSpPr>
-          <p:cNvPr id="17" name="">
-            <a:extLst xmlns:a="http://schemas.openxmlformats.org/drawingml/2006/main">
-              <a:ext uri="{FF2B5EF4-FFF2-40B4-BE49-F238E27FC236}">
-                <a16:creationId xmlns:a16="http://schemas.microsoft.com/office/drawing/2014/main" id="{F14FEFDC-4F57-4E8B-A305-7F358DE058A4}"/>
-              </a:ext>
-            </a:extLst>
-          </p:cNvPr>
-          <p:cNvSpPr>
-            <a:spLocks xmlns:a="http://schemas.openxmlformats.org/drawingml/2006/main" noGrp="1"/>
-          </p:cNvSpPr>
-          <p:nvPr/>
-        </p:nvSpPr>
-        <p:spPr>
-          <a:xfrm xmlns:a="http://schemas.openxmlformats.org/drawingml/2006/main">
-            <a:off x="6324600" y="1809750"/>
-            <a:ext cx="5867400" cy="4591050"/>
-          </a:xfrm>
-          <a:prstGeom xmlns:a="http://schemas.openxmlformats.org/drawingml/2006/main" prst="rect">
-            <a:avLst/>
-          </a:prstGeom>
-          <a:solidFill xmlns:a="http://schemas.openxmlformats.org/drawingml/2006/main">
-            <a:srgbClr val="FFFFFF"/>
-          </a:solidFill>
-          <a:ln xmlns:a="http://schemas.openxmlformats.org/drawingml/2006/main" w="9525">
-            <a:solidFill>
-              <a:srgbClr val="D9DDD6"/>
-            </a:solidFill>
-            <a:prstDash val="solid"/>
-          </a:ln>
-        </p:spPr>
-      </p:sp>
-      <p:sp>
-        <p:nvSpPr>
-          <p:cNvPr id="18" name="">
-            <a:extLst xmlns:a="http://schemas.openxmlformats.org/drawingml/2006/main">
-              <a:ext uri="{FF2B5EF4-FFF2-40B4-BE49-F238E27FC236}">
-                <a16:creationId xmlns:a16="http://schemas.microsoft.com/office/drawing/2014/main" id="{8E0DAC75-6F5B-4A27-9A36-C22723E94DE6}"/>
-              </a:ext>
-            </a:extLst>
-          </p:cNvPr>
-          <p:cNvSpPr>
-            <a:spLocks xmlns:a="http://schemas.openxmlformats.org/drawingml/2006/main" noGrp="1"/>
-          </p:cNvSpPr>
-          <p:nvPr/>
-        </p:nvSpPr>
-        <p:spPr>
-          <a:xfrm xmlns:a="http://schemas.openxmlformats.org/drawingml/2006/main">
-            <a:off x="6705600" y="2266950"/>
-            <a:ext cx="266700" cy="19050"/>
+          <p:cNvPr id="22" name="">
+            <a:extLst xmlns:a="http://schemas.openxmlformats.org/drawingml/2006/main">
+              <a:ext uri="{FF2B5EF4-FFF2-40B4-BE49-F238E27FC236}">
+                <a16:creationId xmlns:a16="http://schemas.microsoft.com/office/drawing/2014/main" id="{DE88BD58-0672-4209-ABD8-B7D281FABFE8}"/>
+              </a:ext>
+            </a:extLst>
+          </p:cNvPr>
+          <p:cNvSpPr>
+            <a:spLocks xmlns:a="http://schemas.openxmlformats.org/drawingml/2006/main" noGrp="1"/>
+          </p:cNvSpPr>
+          <p:nvPr/>
+        </p:nvSpPr>
+        <p:spPr>
+          <a:xfrm xmlns:a="http://schemas.openxmlformats.org/drawingml/2006/main">
+            <a:off x="6819900" y="3324225"/>
+            <a:ext cx="57150" cy="57150"/>
           </a:xfrm>
           <a:prstGeom xmlns:a="http://schemas.openxmlformats.org/drawingml/2006/main" prst="rect">
             <a:avLst/>
@@ -4041,22 +4237,22 @@
       </p:sp>
       <p:sp>
         <p:nvSpPr>
-          <p:cNvPr id="19" name="">
-            <a:extLst xmlns:a="http://schemas.openxmlformats.org/drawingml/2006/main">
-              <a:ext uri="{FF2B5EF4-FFF2-40B4-BE49-F238E27FC236}">
-                <a16:creationId xmlns:a16="http://schemas.microsoft.com/office/drawing/2014/main" id="{0FB64EC1-F730-4923-8429-63C5C80BED20}"/>
-              </a:ext>
-            </a:extLst>
-          </p:cNvPr>
-          <p:cNvSpPr>
-            <a:spLocks xmlns:a="http://schemas.openxmlformats.org/drawingml/2006/main" noGrp="1"/>
-          </p:cNvSpPr>
-          <p:nvPr/>
-        </p:nvSpPr>
-        <p:spPr>
-          <a:xfrm xmlns:a="http://schemas.openxmlformats.org/drawingml/2006/main">
-            <a:off x="7067550" y="2190750"/>
-            <a:ext cx="2476500" cy="171450"/>
+          <p:cNvPr id="23" name="">
+            <a:extLst xmlns:a="http://schemas.openxmlformats.org/drawingml/2006/main">
+              <a:ext uri="{FF2B5EF4-FFF2-40B4-BE49-F238E27FC236}">
+                <a16:creationId xmlns:a16="http://schemas.microsoft.com/office/drawing/2014/main" id="{8765FDE9-6F39-4FE2-9B6C-95C7C6CA2849}"/>
+              </a:ext>
+            </a:extLst>
+          </p:cNvPr>
+          <p:cNvSpPr>
+            <a:spLocks xmlns:a="http://schemas.openxmlformats.org/drawingml/2006/main" noGrp="1"/>
+          </p:cNvSpPr>
+          <p:nvPr/>
+        </p:nvSpPr>
+        <p:spPr>
+          <a:xfrm xmlns:a="http://schemas.openxmlformats.org/drawingml/2006/main">
+            <a:off x="6991350" y="3257550"/>
+            <a:ext cx="3619500" cy="438150"/>
           </a:xfrm>
           <a:prstGeom xmlns:a="http://schemas.openxmlformats.org/drawingml/2006/main" prst="rect">
             <a:avLst/>
@@ -4077,6 +4273,833 @@
         </p:spPr>
         <p:txBody>
           <a:bodyPr xmlns:a="http://schemas.openxmlformats.org/drawingml/2006/main" lIns="0" tIns="0" rIns="0" bIns="0" anchor="t"/>
+          <a:lstStyle xmlns:a="http://schemas.openxmlformats.org/drawingml/2006/main"/>
+          <a:p xmlns:a="http://schemas.openxmlformats.org/drawingml/2006/main">
+            <a:pPr algn="l">
+              <a:defRPr sz="1125" b="0">
+                <a:solidFill>
+                  <a:srgbClr val="172026"/>
+                </a:solidFill>
+                <a:latin typeface="Aptos"/>
+                <a:ea typeface="Aptos"/>
+                <a:cs typeface="Aptos"/>
+              </a:defRPr>
+            </a:pPr>
+            <a:r>
+              <a:rPr sz="1125" b="0">
+                <a:solidFill>
+                  <a:srgbClr val="172026"/>
+                </a:solidFill>
+                <a:latin typeface="Aptos"/>
+                <a:ea typeface="Aptos"/>
+                <a:cs typeface="Aptos"/>
+              </a:rPr>
+              <a:t>Signal strength and progression state</a:t>
+            </a:r>
+          </a:p>
+        </p:txBody>
+      </p:sp>
+      <p:sp>
+        <p:nvSpPr>
+          <p:cNvPr id="24" name="">
+            <a:extLst xmlns:a="http://schemas.openxmlformats.org/drawingml/2006/main">
+              <a:ext uri="{FF2B5EF4-FFF2-40B4-BE49-F238E27FC236}">
+                <a16:creationId xmlns:a16="http://schemas.microsoft.com/office/drawing/2014/main" id="{DA2D53F9-AAFC-4A18-8E01-AFE497A292E1}"/>
+              </a:ext>
+            </a:extLst>
+          </p:cNvPr>
+          <p:cNvSpPr>
+            <a:spLocks xmlns:a="http://schemas.openxmlformats.org/drawingml/2006/main" noGrp="1"/>
+          </p:cNvSpPr>
+          <p:nvPr/>
+        </p:nvSpPr>
+        <p:spPr>
+          <a:xfrm xmlns:a="http://schemas.openxmlformats.org/drawingml/2006/main">
+            <a:off x="6819900" y="3800475"/>
+            <a:ext cx="57150" cy="57150"/>
+          </a:xfrm>
+          <a:prstGeom xmlns:a="http://schemas.openxmlformats.org/drawingml/2006/main" prst="rect">
+            <a:avLst/>
+          </a:prstGeom>
+          <a:solidFill xmlns:a="http://schemas.openxmlformats.org/drawingml/2006/main">
+            <a:srgbClr val="1D6072"/>
+          </a:solidFill>
+          <a:ln xmlns:a="http://schemas.openxmlformats.org/drawingml/2006/main" w="0">
+            <a:solidFill>
+              <a:srgbClr val="000000">
+                <a:alpha val="0"/>
+              </a:srgbClr>
+            </a:solidFill>
+            <a:prstDash val="solid"/>
+          </a:ln>
+        </p:spPr>
+      </p:sp>
+      <p:sp>
+        <p:nvSpPr>
+          <p:cNvPr id="25" name="">
+            <a:extLst xmlns:a="http://schemas.openxmlformats.org/drawingml/2006/main">
+              <a:ext uri="{FF2B5EF4-FFF2-40B4-BE49-F238E27FC236}">
+                <a16:creationId xmlns:a16="http://schemas.microsoft.com/office/drawing/2014/main" id="{A9BA8A04-5F81-46E4-82DD-7B70FCE0D1FD}"/>
+              </a:ext>
+            </a:extLst>
+          </p:cNvPr>
+          <p:cNvSpPr>
+            <a:spLocks xmlns:a="http://schemas.openxmlformats.org/drawingml/2006/main" noGrp="1"/>
+          </p:cNvSpPr>
+          <p:nvPr/>
+        </p:nvSpPr>
+        <p:spPr>
+          <a:xfrm xmlns:a="http://schemas.openxmlformats.org/drawingml/2006/main">
+            <a:off x="6991350" y="3733800"/>
+            <a:ext cx="3619500" cy="438150"/>
+          </a:xfrm>
+          <a:prstGeom xmlns:a="http://schemas.openxmlformats.org/drawingml/2006/main" prst="rect">
+            <a:avLst/>
+          </a:prstGeom>
+          <a:solidFill xmlns:a="http://schemas.openxmlformats.org/drawingml/2006/main">
+            <a:srgbClr val="000000">
+              <a:alpha val="0"/>
+            </a:srgbClr>
+          </a:solidFill>
+          <a:ln xmlns:a="http://schemas.openxmlformats.org/drawingml/2006/main" w="0">
+            <a:solidFill>
+              <a:srgbClr val="000000">
+                <a:alpha val="0"/>
+              </a:srgbClr>
+            </a:solidFill>
+            <a:prstDash val="solid"/>
+          </a:ln>
+        </p:spPr>
+        <p:txBody>
+          <a:bodyPr xmlns:a="http://schemas.openxmlformats.org/drawingml/2006/main" lIns="0" tIns="0" rIns="0" bIns="0" anchor="t"/>
+          <a:lstStyle xmlns:a="http://schemas.openxmlformats.org/drawingml/2006/main"/>
+          <a:p xmlns:a="http://schemas.openxmlformats.org/drawingml/2006/main">
+            <a:pPr algn="l">
+              <a:defRPr sz="1125" b="0">
+                <a:solidFill>
+                  <a:srgbClr val="172026"/>
+                </a:solidFill>
+                <a:latin typeface="Aptos"/>
+                <a:ea typeface="Aptos"/>
+                <a:cs typeface="Aptos"/>
+              </a:defRPr>
+            </a:pPr>
+            <a:r>
+              <a:rPr sz="1125" b="0">
+                <a:solidFill>
+                  <a:srgbClr val="172026"/>
+                </a:solidFill>
+                <a:latin typeface="Aptos"/>
+                <a:ea typeface="Aptos"/>
+                <a:cs typeface="Aptos"/>
+              </a:rPr>
+              <a:t>Owner and SLA</a:t>
+            </a:r>
+          </a:p>
+        </p:txBody>
+      </p:sp>
+      <p:sp>
+        <p:nvSpPr>
+          <p:cNvPr id="26" name="">
+            <a:extLst xmlns:a="http://schemas.openxmlformats.org/drawingml/2006/main">
+              <a:ext uri="{FF2B5EF4-FFF2-40B4-BE49-F238E27FC236}">
+                <a16:creationId xmlns:a16="http://schemas.microsoft.com/office/drawing/2014/main" id="{AC8A240D-DC24-4A3B-9284-1E9BE5D54290}"/>
+              </a:ext>
+            </a:extLst>
+          </p:cNvPr>
+          <p:cNvSpPr>
+            <a:spLocks xmlns:a="http://schemas.openxmlformats.org/drawingml/2006/main" noGrp="1"/>
+          </p:cNvSpPr>
+          <p:nvPr/>
+        </p:nvSpPr>
+        <p:spPr>
+          <a:xfrm xmlns:a="http://schemas.openxmlformats.org/drawingml/2006/main">
+            <a:off x="6819900" y="4276725"/>
+            <a:ext cx="57150" cy="57150"/>
+          </a:xfrm>
+          <a:prstGeom xmlns:a="http://schemas.openxmlformats.org/drawingml/2006/main" prst="rect">
+            <a:avLst/>
+          </a:prstGeom>
+          <a:solidFill xmlns:a="http://schemas.openxmlformats.org/drawingml/2006/main">
+            <a:srgbClr val="1D6072"/>
+          </a:solidFill>
+          <a:ln xmlns:a="http://schemas.openxmlformats.org/drawingml/2006/main" w="0">
+            <a:solidFill>
+              <a:srgbClr val="000000">
+                <a:alpha val="0"/>
+              </a:srgbClr>
+            </a:solidFill>
+            <a:prstDash val="solid"/>
+          </a:ln>
+        </p:spPr>
+      </p:sp>
+      <p:sp>
+        <p:nvSpPr>
+          <p:cNvPr id="27" name="">
+            <a:extLst xmlns:a="http://schemas.openxmlformats.org/drawingml/2006/main">
+              <a:ext uri="{FF2B5EF4-FFF2-40B4-BE49-F238E27FC236}">
+                <a16:creationId xmlns:a16="http://schemas.microsoft.com/office/drawing/2014/main" id="{88462EEE-EC0C-4DDE-9EC6-B72473A01717}"/>
+              </a:ext>
+            </a:extLst>
+          </p:cNvPr>
+          <p:cNvSpPr>
+            <a:spLocks xmlns:a="http://schemas.openxmlformats.org/drawingml/2006/main" noGrp="1"/>
+          </p:cNvSpPr>
+          <p:nvPr/>
+        </p:nvSpPr>
+        <p:spPr>
+          <a:xfrm xmlns:a="http://schemas.openxmlformats.org/drawingml/2006/main">
+            <a:off x="6991350" y="4210050"/>
+            <a:ext cx="3619500" cy="438150"/>
+          </a:xfrm>
+          <a:prstGeom xmlns:a="http://schemas.openxmlformats.org/drawingml/2006/main" prst="rect">
+            <a:avLst/>
+          </a:prstGeom>
+          <a:solidFill xmlns:a="http://schemas.openxmlformats.org/drawingml/2006/main">
+            <a:srgbClr val="000000">
+              <a:alpha val="0"/>
+            </a:srgbClr>
+          </a:solidFill>
+          <a:ln xmlns:a="http://schemas.openxmlformats.org/drawingml/2006/main" w="0">
+            <a:solidFill>
+              <a:srgbClr val="000000">
+                <a:alpha val="0"/>
+              </a:srgbClr>
+            </a:solidFill>
+            <a:prstDash val="solid"/>
+          </a:ln>
+        </p:spPr>
+        <p:txBody>
+          <a:bodyPr xmlns:a="http://schemas.openxmlformats.org/drawingml/2006/main" lIns="0" tIns="0" rIns="0" bIns="0" anchor="t"/>
+          <a:lstStyle xmlns:a="http://schemas.openxmlformats.org/drawingml/2006/main"/>
+          <a:p xmlns:a="http://schemas.openxmlformats.org/drawingml/2006/main">
+            <a:pPr algn="l">
+              <a:defRPr sz="1125" b="0">
+                <a:solidFill>
+                  <a:srgbClr val="172026"/>
+                </a:solidFill>
+                <a:latin typeface="Aptos"/>
+                <a:ea typeface="Aptos"/>
+                <a:cs typeface="Aptos"/>
+              </a:defRPr>
+            </a:pPr>
+            <a:r>
+              <a:rPr sz="1125" b="0">
+                <a:solidFill>
+                  <a:srgbClr val="172026"/>
+                </a:solidFill>
+                <a:latin typeface="Aptos"/>
+                <a:ea typeface="Aptos"/>
+                <a:cs typeface="Aptos"/>
+              </a:rPr>
+              <a:t>Specific next action</a:t>
+            </a:r>
+          </a:p>
+        </p:txBody>
+      </p:sp>
+      <p:sp>
+        <p:nvSpPr>
+          <p:cNvPr id="28" name="">
+            <a:extLst xmlns:a="http://schemas.openxmlformats.org/drawingml/2006/main">
+              <a:ext uri="{FF2B5EF4-FFF2-40B4-BE49-F238E27FC236}">
+                <a16:creationId xmlns:a16="http://schemas.microsoft.com/office/drawing/2014/main" id="{1B5EA52D-89E8-4A97-84F5-1DA44E751EE4}"/>
+              </a:ext>
+            </a:extLst>
+          </p:cNvPr>
+          <p:cNvSpPr>
+            <a:spLocks xmlns:a="http://schemas.openxmlformats.org/drawingml/2006/main" noGrp="1"/>
+          </p:cNvSpPr>
+          <p:nvPr/>
+        </p:nvSpPr>
+        <p:spPr>
+          <a:xfrm xmlns:a="http://schemas.openxmlformats.org/drawingml/2006/main">
+            <a:off x="6819900" y="4752975"/>
+            <a:ext cx="57150" cy="57150"/>
+          </a:xfrm>
+          <a:prstGeom xmlns:a="http://schemas.openxmlformats.org/drawingml/2006/main" prst="rect">
+            <a:avLst/>
+          </a:prstGeom>
+          <a:solidFill xmlns:a="http://schemas.openxmlformats.org/drawingml/2006/main">
+            <a:srgbClr val="1D6072"/>
+          </a:solidFill>
+          <a:ln xmlns:a="http://schemas.openxmlformats.org/drawingml/2006/main" w="0">
+            <a:solidFill>
+              <a:srgbClr val="000000">
+                <a:alpha val="0"/>
+              </a:srgbClr>
+            </a:solidFill>
+            <a:prstDash val="solid"/>
+          </a:ln>
+        </p:spPr>
+      </p:sp>
+      <p:sp>
+        <p:nvSpPr>
+          <p:cNvPr id="29" name="">
+            <a:extLst xmlns:a="http://schemas.openxmlformats.org/drawingml/2006/main">
+              <a:ext uri="{FF2B5EF4-FFF2-40B4-BE49-F238E27FC236}">
+                <a16:creationId xmlns:a16="http://schemas.microsoft.com/office/drawing/2014/main" id="{ADA5F14A-6540-433B-9170-B9C34F48399A}"/>
+              </a:ext>
+            </a:extLst>
+          </p:cNvPr>
+          <p:cNvSpPr>
+            <a:spLocks xmlns:a="http://schemas.openxmlformats.org/drawingml/2006/main" noGrp="1"/>
+          </p:cNvSpPr>
+          <p:nvPr/>
+        </p:nvSpPr>
+        <p:spPr>
+          <a:xfrm xmlns:a="http://schemas.openxmlformats.org/drawingml/2006/main">
+            <a:off x="6991350" y="4686300"/>
+            <a:ext cx="3619500" cy="438150"/>
+          </a:xfrm>
+          <a:prstGeom xmlns:a="http://schemas.openxmlformats.org/drawingml/2006/main" prst="rect">
+            <a:avLst/>
+          </a:prstGeom>
+          <a:solidFill xmlns:a="http://schemas.openxmlformats.org/drawingml/2006/main">
+            <a:srgbClr val="000000">
+              <a:alpha val="0"/>
+            </a:srgbClr>
+          </a:solidFill>
+          <a:ln xmlns:a="http://schemas.openxmlformats.org/drawingml/2006/main" w="0">
+            <a:solidFill>
+              <a:srgbClr val="000000">
+                <a:alpha val="0"/>
+              </a:srgbClr>
+            </a:solidFill>
+            <a:prstDash val="solid"/>
+          </a:ln>
+        </p:spPr>
+        <p:txBody>
+          <a:bodyPr xmlns:a="http://schemas.openxmlformats.org/drawingml/2006/main" lIns="0" tIns="0" rIns="0" bIns="0" anchor="t"/>
+          <a:lstStyle xmlns:a="http://schemas.openxmlformats.org/drawingml/2006/main"/>
+          <a:p xmlns:a="http://schemas.openxmlformats.org/drawingml/2006/main">
+            <a:pPr algn="l">
+              <a:defRPr sz="1125" b="0">
+                <a:solidFill>
+                  <a:srgbClr val="172026"/>
+                </a:solidFill>
+                <a:latin typeface="Aptos"/>
+                <a:ea typeface="Aptos"/>
+                <a:cs typeface="Aptos"/>
+              </a:defRPr>
+            </a:pPr>
+            <a:r>
+              <a:rPr sz="1125" b="0">
+                <a:solidFill>
+                  <a:srgbClr val="172026"/>
+                </a:solidFill>
+                <a:latin typeface="Aptos"/>
+                <a:ea typeface="Aptos"/>
+                <a:cs typeface="Aptos"/>
+              </a:rPr>
+              <a:t>False-positive concern</a:t>
+            </a:r>
+          </a:p>
+        </p:txBody>
+      </p:sp>
+      <p:sp>
+        <p:nvSpPr>
+          <p:cNvPr id="30" name="">
+            <a:extLst xmlns:a="http://schemas.openxmlformats.org/drawingml/2006/main">
+              <a:ext uri="{FF2B5EF4-FFF2-40B4-BE49-F238E27FC236}">
+                <a16:creationId xmlns:a16="http://schemas.microsoft.com/office/drawing/2014/main" id="{C6119211-27D1-4E6D-B1C3-33F3897ACA0B}"/>
+              </a:ext>
+            </a:extLst>
+          </p:cNvPr>
+          <p:cNvSpPr>
+            <a:spLocks xmlns:a="http://schemas.openxmlformats.org/drawingml/2006/main" noGrp="1"/>
+          </p:cNvSpPr>
+          <p:nvPr/>
+        </p:nvSpPr>
+        <p:spPr>
+          <a:xfrm xmlns:a="http://schemas.openxmlformats.org/drawingml/2006/main">
+            <a:off x="6819900" y="5229225"/>
+            <a:ext cx="57150" cy="57150"/>
+          </a:xfrm>
+          <a:prstGeom xmlns:a="http://schemas.openxmlformats.org/drawingml/2006/main" prst="rect">
+            <a:avLst/>
+          </a:prstGeom>
+          <a:solidFill xmlns:a="http://schemas.openxmlformats.org/drawingml/2006/main">
+            <a:srgbClr val="1D6072"/>
+          </a:solidFill>
+          <a:ln xmlns:a="http://schemas.openxmlformats.org/drawingml/2006/main" w="0">
+            <a:solidFill>
+              <a:srgbClr val="000000">
+                <a:alpha val="0"/>
+              </a:srgbClr>
+            </a:solidFill>
+            <a:prstDash val="solid"/>
+          </a:ln>
+        </p:spPr>
+      </p:sp>
+      <p:sp>
+        <p:nvSpPr>
+          <p:cNvPr id="31" name="">
+            <a:extLst xmlns:a="http://schemas.openxmlformats.org/drawingml/2006/main">
+              <a:ext uri="{FF2B5EF4-FFF2-40B4-BE49-F238E27FC236}">
+                <a16:creationId xmlns:a16="http://schemas.microsoft.com/office/drawing/2014/main" id="{390901DB-9223-4509-B86E-96716BCEDCEE}"/>
+              </a:ext>
+            </a:extLst>
+          </p:cNvPr>
+          <p:cNvSpPr>
+            <a:spLocks xmlns:a="http://schemas.openxmlformats.org/drawingml/2006/main" noGrp="1"/>
+          </p:cNvSpPr>
+          <p:nvPr/>
+        </p:nvSpPr>
+        <p:spPr>
+          <a:xfrm xmlns:a="http://schemas.openxmlformats.org/drawingml/2006/main">
+            <a:off x="6991350" y="5162550"/>
+            <a:ext cx="3619500" cy="438150"/>
+          </a:xfrm>
+          <a:prstGeom xmlns:a="http://schemas.openxmlformats.org/drawingml/2006/main" prst="rect">
+            <a:avLst/>
+          </a:prstGeom>
+          <a:solidFill xmlns:a="http://schemas.openxmlformats.org/drawingml/2006/main">
+            <a:srgbClr val="000000">
+              <a:alpha val="0"/>
+            </a:srgbClr>
+          </a:solidFill>
+          <a:ln xmlns:a="http://schemas.openxmlformats.org/drawingml/2006/main" w="0">
+            <a:solidFill>
+              <a:srgbClr val="000000">
+                <a:alpha val="0"/>
+              </a:srgbClr>
+            </a:solidFill>
+            <a:prstDash val="solid"/>
+          </a:ln>
+        </p:spPr>
+        <p:txBody>
+          <a:bodyPr xmlns:a="http://schemas.openxmlformats.org/drawingml/2006/main" lIns="0" tIns="0" rIns="0" bIns="0" anchor="t"/>
+          <a:lstStyle xmlns:a="http://schemas.openxmlformats.org/drawingml/2006/main"/>
+          <a:p xmlns:a="http://schemas.openxmlformats.org/drawingml/2006/main">
+            <a:pPr algn="l">
+              <a:defRPr sz="1125" b="0">
+                <a:solidFill>
+                  <a:srgbClr val="172026"/>
+                </a:solidFill>
+                <a:latin typeface="Aptos"/>
+                <a:ea typeface="Aptos"/>
+                <a:cs typeface="Aptos"/>
+              </a:defRPr>
+            </a:pPr>
+            <a:r>
+              <a:rPr sz="1125" b="0">
+                <a:solidFill>
+                  <a:srgbClr val="172026"/>
+                </a:solidFill>
+                <a:latin typeface="Aptos"/>
+                <a:ea typeface="Aptos"/>
+                <a:cs typeface="Aptos"/>
+              </a:rPr>
+              <a:t>Missing evidence before escalation</a:t>
+            </a:r>
+          </a:p>
+        </p:txBody>
+      </p:sp>
+      <p:sp>
+        <p:nvSpPr>
+          <p:cNvPr id="32" name="">
+            <a:extLst xmlns:a="http://schemas.openxmlformats.org/drawingml/2006/main">
+              <a:ext uri="{FF2B5EF4-FFF2-40B4-BE49-F238E27FC236}">
+                <a16:creationId xmlns:a16="http://schemas.microsoft.com/office/drawing/2014/main" id="{5519A7E4-9F91-42EB-B9F5-DAF906E58157}"/>
+              </a:ext>
+            </a:extLst>
+          </p:cNvPr>
+          <p:cNvSpPr>
+            <a:spLocks xmlns:a="http://schemas.openxmlformats.org/drawingml/2006/main" noGrp="1"/>
+          </p:cNvSpPr>
+          <p:nvPr/>
+        </p:nvSpPr>
+        <p:spPr>
+          <a:xfrm xmlns:a="http://schemas.openxmlformats.org/drawingml/2006/main">
+            <a:off x="514350" y="6438900"/>
+            <a:ext cx="10915650" cy="9525"/>
+          </a:xfrm>
+          <a:prstGeom xmlns:a="http://schemas.openxmlformats.org/drawingml/2006/main" prst="rect">
+            <a:avLst/>
+          </a:prstGeom>
+          <a:solidFill xmlns:a="http://schemas.openxmlformats.org/drawingml/2006/main">
+            <a:srgbClr val="D9DDD6"/>
+          </a:solidFill>
+          <a:ln xmlns:a="http://schemas.openxmlformats.org/drawingml/2006/main" w="0">
+            <a:solidFill>
+              <a:srgbClr val="000000">
+                <a:alpha val="0"/>
+              </a:srgbClr>
+            </a:solidFill>
+            <a:prstDash val="solid"/>
+          </a:ln>
+        </p:spPr>
+      </p:sp>
+      <p:sp>
+        <p:nvSpPr>
+          <p:cNvPr id="33" name="">
+            <a:extLst xmlns:a="http://schemas.openxmlformats.org/drawingml/2006/main">
+              <a:ext uri="{FF2B5EF4-FFF2-40B4-BE49-F238E27FC236}">
+                <a16:creationId xmlns:a16="http://schemas.microsoft.com/office/drawing/2014/main" id="{D0FEC5A7-728B-4E65-8324-C166B8A5B63C}"/>
+              </a:ext>
+            </a:extLst>
+          </p:cNvPr>
+          <p:cNvSpPr>
+            <a:spLocks xmlns:a="http://schemas.openxmlformats.org/drawingml/2006/main" noGrp="1"/>
+          </p:cNvSpPr>
+          <p:nvPr/>
+        </p:nvSpPr>
+        <p:spPr>
+          <a:xfrm xmlns:a="http://schemas.openxmlformats.org/drawingml/2006/main">
+            <a:off x="514350" y="6553200"/>
+            <a:ext cx="5905500" cy="171450"/>
+          </a:xfrm>
+          <a:prstGeom xmlns:a="http://schemas.openxmlformats.org/drawingml/2006/main" prst="rect">
+            <a:avLst/>
+          </a:prstGeom>
+          <a:solidFill xmlns:a="http://schemas.openxmlformats.org/drawingml/2006/main">
+            <a:srgbClr val="000000">
+              <a:alpha val="0"/>
+            </a:srgbClr>
+          </a:solidFill>
+          <a:ln xmlns:a="http://schemas.openxmlformats.org/drawingml/2006/main" w="0">
+            <a:solidFill>
+              <a:srgbClr val="000000">
+                <a:alpha val="0"/>
+              </a:srgbClr>
+            </a:solidFill>
+            <a:prstDash val="solid"/>
+          </a:ln>
+        </p:spPr>
+        <p:txBody>
+          <a:bodyPr xmlns:a="http://schemas.openxmlformats.org/drawingml/2006/main" lIns="0" tIns="0" rIns="0" bIns="0" anchor="t"/>
+          <a:lstStyle xmlns:a="http://schemas.openxmlformats.org/drawingml/2006/main"/>
+          <a:p xmlns:a="http://schemas.openxmlformats.org/drawingml/2006/main">
+            <a:pPr algn="l">
+              <a:defRPr sz="675" b="0">
+                <a:solidFill>
+                  <a:srgbClr val="59646A"/>
+                </a:solidFill>
+                <a:latin typeface="Aptos"/>
+                <a:ea typeface="Aptos"/>
+                <a:cs typeface="Aptos"/>
+              </a:defRPr>
+            </a:pPr>
+            <a:r>
+              <a:rPr sz="675" b="0">
+                <a:solidFill>
+                  <a:srgbClr val="59646A"/>
+                </a:solidFill>
+                <a:latin typeface="Aptos"/>
+                <a:ea typeface="Aptos"/>
+                <a:cs typeface="Aptos"/>
+              </a:rPr>
+              <a:t>Lesson 07 - Signal Routing And Demand Capture</a:t>
+            </a:r>
+          </a:p>
+        </p:txBody>
+      </p:sp>
+      <p:sp>
+        <p:nvSpPr>
+          <p:cNvPr id="34" name="">
+            <a:extLst xmlns:a="http://schemas.openxmlformats.org/drawingml/2006/main">
+              <a:ext uri="{FF2B5EF4-FFF2-40B4-BE49-F238E27FC236}">
+                <a16:creationId xmlns:a16="http://schemas.microsoft.com/office/drawing/2014/main" id="{3C4479E4-36ED-4D95-A989-6369C157CF93}"/>
+              </a:ext>
+            </a:extLst>
+          </p:cNvPr>
+          <p:cNvSpPr>
+            <a:spLocks xmlns:a="http://schemas.openxmlformats.org/drawingml/2006/main" noGrp="1"/>
+          </p:cNvSpPr>
+          <p:nvPr/>
+        </p:nvSpPr>
+        <p:spPr>
+          <a:xfrm xmlns:a="http://schemas.openxmlformats.org/drawingml/2006/main">
+            <a:off x="5334000" y="6553200"/>
+            <a:ext cx="4095750" cy="171450"/>
+          </a:xfrm>
+          <a:prstGeom xmlns:a="http://schemas.openxmlformats.org/drawingml/2006/main" prst="rect">
+            <a:avLst/>
+          </a:prstGeom>
+          <a:solidFill xmlns:a="http://schemas.openxmlformats.org/drawingml/2006/main">
+            <a:srgbClr val="000000">
+              <a:alpha val="0"/>
+            </a:srgbClr>
+          </a:solidFill>
+          <a:ln xmlns:a="http://schemas.openxmlformats.org/drawingml/2006/main" w="0">
+            <a:solidFill>
+              <a:srgbClr val="000000">
+                <a:alpha val="0"/>
+              </a:srgbClr>
+            </a:solidFill>
+            <a:prstDash val="solid"/>
+          </a:ln>
+        </p:spPr>
+        <p:txBody>
+          <a:bodyPr xmlns:a="http://schemas.openxmlformats.org/drawingml/2006/main" lIns="0" tIns="0" rIns="0" bIns="0" anchor="t"/>
+          <a:lstStyle xmlns:a="http://schemas.openxmlformats.org/drawingml/2006/main"/>
+          <a:p xmlns:a="http://schemas.openxmlformats.org/drawingml/2006/main">
+            <a:pPr algn="r">
+              <a:defRPr sz="600" b="0">
+                <a:solidFill>
+                  <a:srgbClr val="59646A"/>
+                </a:solidFill>
+                <a:latin typeface="Aptos"/>
+                <a:ea typeface="Aptos"/>
+                <a:cs typeface="Aptos"/>
+              </a:defRPr>
+            </a:pPr>
+            <a:r>
+              <a:rPr sz="600" b="0">
+                <a:solidFill>
+                  <a:srgbClr val="59646A"/>
+                </a:solidFill>
+                <a:latin typeface="Aptos"/>
+                <a:ea typeface="Aptos"/>
+                <a:cs typeface="Aptos"/>
+              </a:rPr>
+              <a:t>Source: modules/module-01-industrial-demand-generation/lessons/07-signal-routing-and-demand-capture.md @ 9e28222</a:t>
+            </a:r>
+          </a:p>
+        </p:txBody>
+      </p:sp>
+      <p:sp>
+        <p:nvSpPr>
+          <p:cNvPr id="35" name="">
+            <a:extLst xmlns:a="http://schemas.openxmlformats.org/drawingml/2006/main">
+              <a:ext uri="{FF2B5EF4-FFF2-40B4-BE49-F238E27FC236}">
+                <a16:creationId xmlns:a16="http://schemas.microsoft.com/office/drawing/2014/main" id="{E4B1CC19-20AC-43F5-823C-D7472C37C5CF}"/>
+              </a:ext>
+            </a:extLst>
+          </p:cNvPr>
+          <p:cNvSpPr>
+            <a:spLocks xmlns:a="http://schemas.openxmlformats.org/drawingml/2006/main" noGrp="1"/>
+          </p:cNvSpPr>
+          <p:nvPr/>
+        </p:nvSpPr>
+        <p:spPr>
+          <a:xfrm xmlns:a="http://schemas.openxmlformats.org/drawingml/2006/main">
+            <a:off x="10668000" y="6553200"/>
+            <a:ext cx="762000" cy="171450"/>
+          </a:xfrm>
+          <a:prstGeom xmlns:a="http://schemas.openxmlformats.org/drawingml/2006/main" prst="rect">
+            <a:avLst/>
+          </a:prstGeom>
+          <a:solidFill xmlns:a="http://schemas.openxmlformats.org/drawingml/2006/main">
+            <a:srgbClr val="000000">
+              <a:alpha val="0"/>
+            </a:srgbClr>
+          </a:solidFill>
+          <a:ln xmlns:a="http://schemas.openxmlformats.org/drawingml/2006/main" w="0">
+            <a:solidFill>
+              <a:srgbClr val="000000">
+                <a:alpha val="0"/>
+              </a:srgbClr>
+            </a:solidFill>
+            <a:prstDash val="solid"/>
+          </a:ln>
+        </p:spPr>
+        <p:txBody>
+          <a:bodyPr xmlns:a="http://schemas.openxmlformats.org/drawingml/2006/main" lIns="0" tIns="0" rIns="0" bIns="0" anchor="t"/>
+          <a:lstStyle xmlns:a="http://schemas.openxmlformats.org/drawingml/2006/main"/>
+          <a:p xmlns:a="http://schemas.openxmlformats.org/drawingml/2006/main">
+            <a:pPr algn="r">
+              <a:defRPr sz="675" b="0">
+                <a:solidFill>
+                  <a:srgbClr val="59646A"/>
+                </a:solidFill>
+                <a:latin typeface="Aptos"/>
+                <a:ea typeface="Aptos"/>
+                <a:cs typeface="Aptos"/>
+              </a:defRPr>
+            </a:pPr>
+            <a:r>
+              <a:rPr sz="675" b="0">
+                <a:solidFill>
+                  <a:srgbClr val="59646A"/>
+                </a:solidFill>
+                <a:latin typeface="Aptos"/>
+                <a:ea typeface="Aptos"/>
+                <a:cs typeface="Aptos"/>
+              </a:rPr>
+              <a:t>10/15</a:t>
+            </a:r>
+          </a:p>
+        </p:txBody>
+      </p:sp>
+      <p:sp>
+        <p:nvSpPr>
+          <p:cNvPr id="36" name="">
+            <a:extLst xmlns:a="http://schemas.openxmlformats.org/drawingml/2006/main">
+              <a:ext uri="{FF2B5EF4-FFF2-40B4-BE49-F238E27FC236}">
+                <a16:creationId xmlns:a16="http://schemas.microsoft.com/office/drawing/2014/main" id="{8BB9625F-9238-4ADB-9FBE-BA905E2B3CC0}"/>
+              </a:ext>
+            </a:extLst>
+          </p:cNvPr>
+          <p:cNvSpPr>
+            <a:spLocks xmlns:a="http://schemas.openxmlformats.org/drawingml/2006/main" noGrp="1"/>
+          </p:cNvSpPr>
+          <p:nvPr/>
+        </p:nvSpPr>
+        <p:spPr>
+          <a:xfrm xmlns:a="http://schemas.openxmlformats.org/drawingml/2006/main">
+            <a:off x="0" y="0"/>
+            <a:ext cx="12192000" cy="1809750"/>
+          </a:xfrm>
+          <a:prstGeom xmlns:a="http://schemas.openxmlformats.org/drawingml/2006/main" prst="rect">
+            <a:avLst/>
+          </a:prstGeom>
+          <a:solidFill xmlns:a="http://schemas.openxmlformats.org/drawingml/2006/main">
+            <a:srgbClr val="F5F6F2"/>
+          </a:solidFill>
+          <a:ln xmlns:a="http://schemas.openxmlformats.org/drawingml/2006/main" w="0">
+            <a:solidFill>
+              <a:srgbClr val="000000">
+                <a:alpha val="0"/>
+              </a:srgbClr>
+            </a:solidFill>
+            <a:prstDash val="solid"/>
+          </a:ln>
+        </p:spPr>
+      </p:sp>
+      <p:sp>
+        <p:nvSpPr>
+          <p:cNvPr id="37" name="">
+            <a:extLst xmlns:a="http://schemas.openxmlformats.org/drawingml/2006/main">
+              <a:ext uri="{FF2B5EF4-FFF2-40B4-BE49-F238E27FC236}">
+                <a16:creationId xmlns:a16="http://schemas.microsoft.com/office/drawing/2014/main" id="{ACB67BFF-18C7-401A-AAAE-5393019667FD}"/>
+              </a:ext>
+            </a:extLst>
+          </p:cNvPr>
+          <p:cNvSpPr>
+            <a:spLocks xmlns:a="http://schemas.openxmlformats.org/drawingml/2006/main" noGrp="1"/>
+          </p:cNvSpPr>
+          <p:nvPr/>
+        </p:nvSpPr>
+        <p:spPr>
+          <a:xfrm xmlns:a="http://schemas.openxmlformats.org/drawingml/2006/main">
+            <a:off x="0" y="0"/>
+            <a:ext cx="171450" cy="1809750"/>
+          </a:xfrm>
+          <a:prstGeom xmlns:a="http://schemas.openxmlformats.org/drawingml/2006/main" prst="rect">
+            <a:avLst/>
+          </a:prstGeom>
+          <a:solidFill xmlns:a="http://schemas.openxmlformats.org/drawingml/2006/main">
+            <a:srgbClr val="12232B"/>
+          </a:solidFill>
+          <a:ln xmlns:a="http://schemas.openxmlformats.org/drawingml/2006/main" w="0">
+            <a:solidFill>
+              <a:srgbClr val="000000">
+                <a:alpha val="0"/>
+              </a:srgbClr>
+            </a:solidFill>
+            <a:prstDash val="solid"/>
+          </a:ln>
+        </p:spPr>
+      </p:sp>
+      <p:sp>
+        <p:nvSpPr>
+          <p:cNvPr id="38" name="">
+            <a:extLst xmlns:a="http://schemas.openxmlformats.org/drawingml/2006/main">
+              <a:ext uri="{FF2B5EF4-FFF2-40B4-BE49-F238E27FC236}">
+                <a16:creationId xmlns:a16="http://schemas.microsoft.com/office/drawing/2014/main" id="{D5BE3031-E6A0-4EAA-9D25-8300F025EC8B}"/>
+              </a:ext>
+            </a:extLst>
+          </p:cNvPr>
+          <p:cNvSpPr>
+            <a:spLocks xmlns:a="http://schemas.openxmlformats.org/drawingml/2006/main" noGrp="1"/>
+          </p:cNvSpPr>
+          <p:nvPr/>
+        </p:nvSpPr>
+        <p:spPr>
+          <a:xfrm xmlns:a="http://schemas.openxmlformats.org/drawingml/2006/main">
+            <a:off x="171450" y="0"/>
+            <a:ext cx="57150" cy="1809750"/>
+          </a:xfrm>
+          <a:prstGeom xmlns:a="http://schemas.openxmlformats.org/drawingml/2006/main" prst="rect">
+            <a:avLst/>
+          </a:prstGeom>
+          <a:solidFill xmlns:a="http://schemas.openxmlformats.org/drawingml/2006/main">
+            <a:srgbClr val="A85D2A"/>
+          </a:solidFill>
+          <a:ln xmlns:a="http://schemas.openxmlformats.org/drawingml/2006/main" w="0">
+            <a:solidFill>
+              <a:srgbClr val="000000">
+                <a:alpha val="0"/>
+              </a:srgbClr>
+            </a:solidFill>
+            <a:prstDash val="solid"/>
+          </a:ln>
+        </p:spPr>
+      </p:sp>
+      <p:sp>
+        <p:nvSpPr>
+          <p:cNvPr id="39" name="kicker-07-marker">
+            <a:extLst xmlns:a="http://schemas.openxmlformats.org/drawingml/2006/main">
+              <a:ext uri="{FF2B5EF4-FFF2-40B4-BE49-F238E27FC236}">
+                <a16:creationId xmlns:a16="http://schemas.microsoft.com/office/drawing/2014/main" id="{173881D4-6A26-4E25-9DB5-33C954F778E3}"/>
+              </a:ext>
+            </a:extLst>
+          </p:cNvPr>
+          <p:cNvSpPr>
+            <a:spLocks xmlns:a="http://schemas.openxmlformats.org/drawingml/2006/main" noGrp="1"/>
+          </p:cNvSpPr>
+          <p:nvPr/>
+        </p:nvSpPr>
+        <p:spPr>
+          <a:xfrm xmlns:a="http://schemas.openxmlformats.org/drawingml/2006/main">
+            <a:off x="514350" y="390525"/>
+            <a:ext cx="76200" cy="76200"/>
+          </a:xfrm>
+          <a:prstGeom xmlns:a="http://schemas.openxmlformats.org/drawingml/2006/main" prst="rect">
+            <a:avLst/>
+          </a:prstGeom>
+          <a:solidFill xmlns:a="http://schemas.openxmlformats.org/drawingml/2006/main">
+            <a:srgbClr val="A85D2A"/>
+          </a:solidFill>
+          <a:ln xmlns:a="http://schemas.openxmlformats.org/drawingml/2006/main" w="0">
+            <a:solidFill>
+              <a:srgbClr val="000000">
+                <a:alpha val="0"/>
+              </a:srgbClr>
+            </a:solidFill>
+            <a:prstDash val="solid"/>
+          </a:ln>
+        </p:spPr>
+      </p:sp>
+      <p:sp>
+        <p:nvSpPr>
+          <p:cNvPr id="40" name="kicker-07-label">
+            <a:extLst xmlns:a="http://schemas.openxmlformats.org/drawingml/2006/main">
+              <a:ext uri="{FF2B5EF4-FFF2-40B4-BE49-F238E27FC236}">
+                <a16:creationId xmlns:a16="http://schemas.microsoft.com/office/drawing/2014/main" id="{29F35395-27A4-4A55-BB81-0EA11C073788}"/>
+              </a:ext>
+            </a:extLst>
+          </p:cNvPr>
+          <p:cNvSpPr>
+            <a:spLocks xmlns:a="http://schemas.openxmlformats.org/drawingml/2006/main" noGrp="1"/>
+          </p:cNvSpPr>
+          <p:nvPr/>
+        </p:nvSpPr>
+        <p:spPr>
+          <a:xfrm xmlns:a="http://schemas.openxmlformats.org/drawingml/2006/main">
+            <a:off x="685800" y="323850"/>
+            <a:ext cx="7524750" cy="228600"/>
+          </a:xfrm>
+          <a:prstGeom xmlns:a="http://schemas.openxmlformats.org/drawingml/2006/main" prst="rect">
+            <a:avLst/>
+          </a:prstGeom>
+          <a:solidFill xmlns:a="http://schemas.openxmlformats.org/drawingml/2006/main">
+            <a:srgbClr val="000000">
+              <a:alpha val="0"/>
+            </a:srgbClr>
+          </a:solidFill>
+          <a:ln xmlns:a="http://schemas.openxmlformats.org/drawingml/2006/main" w="0">
+            <a:solidFill>
+              <a:srgbClr val="000000">
+                <a:alpha val="0"/>
+              </a:srgbClr>
+            </a:solidFill>
+            <a:prstDash val="solid"/>
+          </a:ln>
+        </p:spPr>
+        <p:txBody>
+          <a:bodyPr xmlns:a="http://schemas.openxmlformats.org/drawingml/2006/main" lIns="0" tIns="0" rIns="0" bIns="0" anchor="ctr"/>
           <a:lstStyle xmlns:a="http://schemas.openxmlformats.org/drawingml/2006/main"/>
           <a:p xmlns:a="http://schemas.openxmlformats.org/drawingml/2006/main">
             <a:pPr algn="l">
@@ -4098,1042 +5121,17 @@
                 <a:ea typeface="Aptos"/>
                 <a:cs typeface="Aptos"/>
               </a:rPr>
-              <a:t>REQUIRED OUTPUT STANDARD</a:t>
+              <a:t>MODULE 1 / LESSON 07 / STRUCTURED DRAFTING DRILL</a:t>
             </a:r>
           </a:p>
         </p:txBody>
       </p:sp>
       <p:sp>
         <p:nvSpPr>
-          <p:cNvPr id="20" name="">
-            <a:extLst xmlns:a="http://schemas.openxmlformats.org/drawingml/2006/main">
-              <a:ext uri="{FF2B5EF4-FFF2-40B4-BE49-F238E27FC236}">
-                <a16:creationId xmlns:a16="http://schemas.microsoft.com/office/drawing/2014/main" id="{74A6AF54-5A89-4575-AAB3-38F76C724283}"/>
-              </a:ext>
-            </a:extLst>
-          </p:cNvPr>
-          <p:cNvSpPr>
-            <a:spLocks xmlns:a="http://schemas.openxmlformats.org/drawingml/2006/main" noGrp="1"/>
-          </p:cNvSpPr>
-          <p:nvPr/>
-        </p:nvSpPr>
-        <p:spPr>
-          <a:xfrm xmlns:a="http://schemas.openxmlformats.org/drawingml/2006/main">
-            <a:off x="6705600" y="2714625"/>
-            <a:ext cx="57150" cy="57150"/>
-          </a:xfrm>
-          <a:prstGeom xmlns:a="http://schemas.openxmlformats.org/drawingml/2006/main" prst="rect">
-            <a:avLst/>
-          </a:prstGeom>
-          <a:solidFill xmlns:a="http://schemas.openxmlformats.org/drawingml/2006/main">
-            <a:srgbClr val="1D6072"/>
-          </a:solidFill>
-          <a:ln xmlns:a="http://schemas.openxmlformats.org/drawingml/2006/main" w="0">
-            <a:solidFill>
-              <a:srgbClr val="000000">
-                <a:alpha val="0"/>
-              </a:srgbClr>
-            </a:solidFill>
-            <a:prstDash val="solid"/>
-          </a:ln>
-        </p:spPr>
-      </p:sp>
-      <p:sp>
-        <p:nvSpPr>
-          <p:cNvPr id="21" name="">
-            <a:extLst xmlns:a="http://schemas.openxmlformats.org/drawingml/2006/main">
-              <a:ext uri="{FF2B5EF4-FFF2-40B4-BE49-F238E27FC236}">
-                <a16:creationId xmlns:a16="http://schemas.microsoft.com/office/drawing/2014/main" id="{FC2EAC5A-F53C-4C04-A98F-D712B8F8DBEC}"/>
-              </a:ext>
-            </a:extLst>
-          </p:cNvPr>
-          <p:cNvSpPr>
-            <a:spLocks xmlns:a="http://schemas.openxmlformats.org/drawingml/2006/main" noGrp="1"/>
-          </p:cNvSpPr>
-          <p:nvPr/>
-        </p:nvSpPr>
-        <p:spPr>
-          <a:xfrm xmlns:a="http://schemas.openxmlformats.org/drawingml/2006/main">
-            <a:off x="6877050" y="2647950"/>
-            <a:ext cx="4210050" cy="438150"/>
-          </a:xfrm>
-          <a:prstGeom xmlns:a="http://schemas.openxmlformats.org/drawingml/2006/main" prst="rect">
-            <a:avLst/>
-          </a:prstGeom>
-          <a:solidFill xmlns:a="http://schemas.openxmlformats.org/drawingml/2006/main">
-            <a:srgbClr val="000000">
-              <a:alpha val="0"/>
-            </a:srgbClr>
-          </a:solidFill>
-          <a:ln xmlns:a="http://schemas.openxmlformats.org/drawingml/2006/main" w="0">
-            <a:solidFill>
-              <a:srgbClr val="000000">
-                <a:alpha val="0"/>
-              </a:srgbClr>
-            </a:solidFill>
-            <a:prstDash val="solid"/>
-          </a:ln>
-        </p:spPr>
-        <p:txBody>
-          <a:bodyPr xmlns:a="http://schemas.openxmlformats.org/drawingml/2006/main" lIns="0" tIns="0" rIns="0" bIns="0" anchor="t"/>
-          <a:lstStyle xmlns:a="http://schemas.openxmlformats.org/drawingml/2006/main"/>
-          <a:p xmlns:a="http://schemas.openxmlformats.org/drawingml/2006/main">
-            <a:pPr algn="l">
-              <a:defRPr sz="1125" b="0">
-                <a:solidFill>
-                  <a:srgbClr val="172026"/>
-                </a:solidFill>
-                <a:latin typeface="Aptos"/>
-                <a:ea typeface="Aptos"/>
-                <a:cs typeface="Aptos"/>
-              </a:defRPr>
-            </a:pPr>
-            <a:r>
-              <a:rPr sz="1125" b="0">
-                <a:solidFill>
-                  <a:srgbClr val="172026"/>
-                </a:solidFill>
-                <a:latin typeface="Aptos"/>
-                <a:ea typeface="Aptos"/>
-                <a:cs typeface="Aptos"/>
-              </a:rPr>
-              <a:t>Demand state with rationale</a:t>
-            </a:r>
-          </a:p>
-        </p:txBody>
-      </p:sp>
-      <p:sp>
-        <p:nvSpPr>
-          <p:cNvPr id="22" name="">
-            <a:extLst xmlns:a="http://schemas.openxmlformats.org/drawingml/2006/main">
-              <a:ext uri="{FF2B5EF4-FFF2-40B4-BE49-F238E27FC236}">
-                <a16:creationId xmlns:a16="http://schemas.microsoft.com/office/drawing/2014/main" id="{E6E63C57-4637-4C50-99E2-F94F654FF0EF}"/>
-              </a:ext>
-            </a:extLst>
-          </p:cNvPr>
-          <p:cNvSpPr>
-            <a:spLocks xmlns:a="http://schemas.openxmlformats.org/drawingml/2006/main" noGrp="1"/>
-          </p:cNvSpPr>
-          <p:nvPr/>
-        </p:nvSpPr>
-        <p:spPr>
-          <a:xfrm xmlns:a="http://schemas.openxmlformats.org/drawingml/2006/main">
-            <a:off x="6705600" y="3190875"/>
-            <a:ext cx="57150" cy="57150"/>
-          </a:xfrm>
-          <a:prstGeom xmlns:a="http://schemas.openxmlformats.org/drawingml/2006/main" prst="rect">
-            <a:avLst/>
-          </a:prstGeom>
-          <a:solidFill xmlns:a="http://schemas.openxmlformats.org/drawingml/2006/main">
-            <a:srgbClr val="1D6072"/>
-          </a:solidFill>
-          <a:ln xmlns:a="http://schemas.openxmlformats.org/drawingml/2006/main" w="0">
-            <a:solidFill>
-              <a:srgbClr val="000000">
-                <a:alpha val="0"/>
-              </a:srgbClr>
-            </a:solidFill>
-            <a:prstDash val="solid"/>
-          </a:ln>
-        </p:spPr>
-      </p:sp>
-      <p:sp>
-        <p:nvSpPr>
-          <p:cNvPr id="23" name="">
-            <a:extLst xmlns:a="http://schemas.openxmlformats.org/drawingml/2006/main">
-              <a:ext uri="{FF2B5EF4-FFF2-40B4-BE49-F238E27FC236}">
-                <a16:creationId xmlns:a16="http://schemas.microsoft.com/office/drawing/2014/main" id="{AF93A940-503B-49B8-A8E0-07736F19C967}"/>
-              </a:ext>
-            </a:extLst>
-          </p:cNvPr>
-          <p:cNvSpPr>
-            <a:spLocks xmlns:a="http://schemas.openxmlformats.org/drawingml/2006/main" noGrp="1"/>
-          </p:cNvSpPr>
-          <p:nvPr/>
-        </p:nvSpPr>
-        <p:spPr>
-          <a:xfrm xmlns:a="http://schemas.openxmlformats.org/drawingml/2006/main">
-            <a:off x="6877050" y="3124200"/>
-            <a:ext cx="4210050" cy="438150"/>
-          </a:xfrm>
-          <a:prstGeom xmlns:a="http://schemas.openxmlformats.org/drawingml/2006/main" prst="rect">
-            <a:avLst/>
-          </a:prstGeom>
-          <a:solidFill xmlns:a="http://schemas.openxmlformats.org/drawingml/2006/main">
-            <a:srgbClr val="000000">
-              <a:alpha val="0"/>
-            </a:srgbClr>
-          </a:solidFill>
-          <a:ln xmlns:a="http://schemas.openxmlformats.org/drawingml/2006/main" w="0">
-            <a:solidFill>
-              <a:srgbClr val="000000">
-                <a:alpha val="0"/>
-              </a:srgbClr>
-            </a:solidFill>
-            <a:prstDash val="solid"/>
-          </a:ln>
-        </p:spPr>
-        <p:txBody>
-          <a:bodyPr xmlns:a="http://schemas.openxmlformats.org/drawingml/2006/main" lIns="0" tIns="0" rIns="0" bIns="0" anchor="t"/>
-          <a:lstStyle xmlns:a="http://schemas.openxmlformats.org/drawingml/2006/main"/>
-          <a:p xmlns:a="http://schemas.openxmlformats.org/drawingml/2006/main">
-            <a:pPr algn="l">
-              <a:defRPr sz="1125" b="0">
-                <a:solidFill>
-                  <a:srgbClr val="172026"/>
-                </a:solidFill>
-                <a:latin typeface="Aptos"/>
-                <a:ea typeface="Aptos"/>
-                <a:cs typeface="Aptos"/>
-              </a:defRPr>
-            </a:pPr>
-            <a:r>
-              <a:rPr sz="1125" b="0">
-                <a:solidFill>
-                  <a:srgbClr val="172026"/>
-                </a:solidFill>
-                <a:latin typeface="Aptos"/>
-                <a:ea typeface="Aptos"/>
-                <a:cs typeface="Aptos"/>
-              </a:rPr>
-              <a:t>Signal strength and progression state</a:t>
-            </a:r>
-          </a:p>
-        </p:txBody>
-      </p:sp>
-      <p:sp>
-        <p:nvSpPr>
-          <p:cNvPr id="24" name="">
-            <a:extLst xmlns:a="http://schemas.openxmlformats.org/drawingml/2006/main">
-              <a:ext uri="{FF2B5EF4-FFF2-40B4-BE49-F238E27FC236}">
-                <a16:creationId xmlns:a16="http://schemas.microsoft.com/office/drawing/2014/main" id="{729FD8ED-F7D2-4610-B99F-608427458233}"/>
-              </a:ext>
-            </a:extLst>
-          </p:cNvPr>
-          <p:cNvSpPr>
-            <a:spLocks xmlns:a="http://schemas.openxmlformats.org/drawingml/2006/main" noGrp="1"/>
-          </p:cNvSpPr>
-          <p:nvPr/>
-        </p:nvSpPr>
-        <p:spPr>
-          <a:xfrm xmlns:a="http://schemas.openxmlformats.org/drawingml/2006/main">
-            <a:off x="6705600" y="3667125"/>
-            <a:ext cx="57150" cy="57150"/>
-          </a:xfrm>
-          <a:prstGeom xmlns:a="http://schemas.openxmlformats.org/drawingml/2006/main" prst="rect">
-            <a:avLst/>
-          </a:prstGeom>
-          <a:solidFill xmlns:a="http://schemas.openxmlformats.org/drawingml/2006/main">
-            <a:srgbClr val="1D6072"/>
-          </a:solidFill>
-          <a:ln xmlns:a="http://schemas.openxmlformats.org/drawingml/2006/main" w="0">
-            <a:solidFill>
-              <a:srgbClr val="000000">
-                <a:alpha val="0"/>
-              </a:srgbClr>
-            </a:solidFill>
-            <a:prstDash val="solid"/>
-          </a:ln>
-        </p:spPr>
-      </p:sp>
-      <p:sp>
-        <p:nvSpPr>
-          <p:cNvPr id="25" name="">
-            <a:extLst xmlns:a="http://schemas.openxmlformats.org/drawingml/2006/main">
-              <a:ext uri="{FF2B5EF4-FFF2-40B4-BE49-F238E27FC236}">
-                <a16:creationId xmlns:a16="http://schemas.microsoft.com/office/drawing/2014/main" id="{7F7F3C78-A8A9-4116-971C-94CEBE0A7C53}"/>
-              </a:ext>
-            </a:extLst>
-          </p:cNvPr>
-          <p:cNvSpPr>
-            <a:spLocks xmlns:a="http://schemas.openxmlformats.org/drawingml/2006/main" noGrp="1"/>
-          </p:cNvSpPr>
-          <p:nvPr/>
-        </p:nvSpPr>
-        <p:spPr>
-          <a:xfrm xmlns:a="http://schemas.openxmlformats.org/drawingml/2006/main">
-            <a:off x="6877050" y="3600450"/>
-            <a:ext cx="4210050" cy="438150"/>
-          </a:xfrm>
-          <a:prstGeom xmlns:a="http://schemas.openxmlformats.org/drawingml/2006/main" prst="rect">
-            <a:avLst/>
-          </a:prstGeom>
-          <a:solidFill xmlns:a="http://schemas.openxmlformats.org/drawingml/2006/main">
-            <a:srgbClr val="000000">
-              <a:alpha val="0"/>
-            </a:srgbClr>
-          </a:solidFill>
-          <a:ln xmlns:a="http://schemas.openxmlformats.org/drawingml/2006/main" w="0">
-            <a:solidFill>
-              <a:srgbClr val="000000">
-                <a:alpha val="0"/>
-              </a:srgbClr>
-            </a:solidFill>
-            <a:prstDash val="solid"/>
-          </a:ln>
-        </p:spPr>
-        <p:txBody>
-          <a:bodyPr xmlns:a="http://schemas.openxmlformats.org/drawingml/2006/main" lIns="0" tIns="0" rIns="0" bIns="0" anchor="t"/>
-          <a:lstStyle xmlns:a="http://schemas.openxmlformats.org/drawingml/2006/main"/>
-          <a:p xmlns:a="http://schemas.openxmlformats.org/drawingml/2006/main">
-            <a:pPr algn="l">
-              <a:defRPr sz="1125" b="0">
-                <a:solidFill>
-                  <a:srgbClr val="172026"/>
-                </a:solidFill>
-                <a:latin typeface="Aptos"/>
-                <a:ea typeface="Aptos"/>
-                <a:cs typeface="Aptos"/>
-              </a:defRPr>
-            </a:pPr>
-            <a:r>
-              <a:rPr sz="1125" b="0">
-                <a:solidFill>
-                  <a:srgbClr val="172026"/>
-                </a:solidFill>
-                <a:latin typeface="Aptos"/>
-                <a:ea typeface="Aptos"/>
-                <a:cs typeface="Aptos"/>
-              </a:rPr>
-              <a:t>Owner and SLA</a:t>
-            </a:r>
-          </a:p>
-        </p:txBody>
-      </p:sp>
-      <p:sp>
-        <p:nvSpPr>
-          <p:cNvPr id="26" name="">
-            <a:extLst xmlns:a="http://schemas.openxmlformats.org/drawingml/2006/main">
-              <a:ext uri="{FF2B5EF4-FFF2-40B4-BE49-F238E27FC236}">
-                <a16:creationId xmlns:a16="http://schemas.microsoft.com/office/drawing/2014/main" id="{D43AD600-F9FC-476E-B3A7-7B5B24ACCDDD}"/>
-              </a:ext>
-            </a:extLst>
-          </p:cNvPr>
-          <p:cNvSpPr>
-            <a:spLocks xmlns:a="http://schemas.openxmlformats.org/drawingml/2006/main" noGrp="1"/>
-          </p:cNvSpPr>
-          <p:nvPr/>
-        </p:nvSpPr>
-        <p:spPr>
-          <a:xfrm xmlns:a="http://schemas.openxmlformats.org/drawingml/2006/main">
-            <a:off x="6705600" y="4143375"/>
-            <a:ext cx="57150" cy="57150"/>
-          </a:xfrm>
-          <a:prstGeom xmlns:a="http://schemas.openxmlformats.org/drawingml/2006/main" prst="rect">
-            <a:avLst/>
-          </a:prstGeom>
-          <a:solidFill xmlns:a="http://schemas.openxmlformats.org/drawingml/2006/main">
-            <a:srgbClr val="1D6072"/>
-          </a:solidFill>
-          <a:ln xmlns:a="http://schemas.openxmlformats.org/drawingml/2006/main" w="0">
-            <a:solidFill>
-              <a:srgbClr val="000000">
-                <a:alpha val="0"/>
-              </a:srgbClr>
-            </a:solidFill>
-            <a:prstDash val="solid"/>
-          </a:ln>
-        </p:spPr>
-      </p:sp>
-      <p:sp>
-        <p:nvSpPr>
-          <p:cNvPr id="27" name="">
-            <a:extLst xmlns:a="http://schemas.openxmlformats.org/drawingml/2006/main">
-              <a:ext uri="{FF2B5EF4-FFF2-40B4-BE49-F238E27FC236}">
-                <a16:creationId xmlns:a16="http://schemas.microsoft.com/office/drawing/2014/main" id="{C0A306D6-A4A9-4866-9413-DC3E9369123F}"/>
-              </a:ext>
-            </a:extLst>
-          </p:cNvPr>
-          <p:cNvSpPr>
-            <a:spLocks xmlns:a="http://schemas.openxmlformats.org/drawingml/2006/main" noGrp="1"/>
-          </p:cNvSpPr>
-          <p:nvPr/>
-        </p:nvSpPr>
-        <p:spPr>
-          <a:xfrm xmlns:a="http://schemas.openxmlformats.org/drawingml/2006/main">
-            <a:off x="6877050" y="4076700"/>
-            <a:ext cx="4210050" cy="438150"/>
-          </a:xfrm>
-          <a:prstGeom xmlns:a="http://schemas.openxmlformats.org/drawingml/2006/main" prst="rect">
-            <a:avLst/>
-          </a:prstGeom>
-          <a:solidFill xmlns:a="http://schemas.openxmlformats.org/drawingml/2006/main">
-            <a:srgbClr val="000000">
-              <a:alpha val="0"/>
-            </a:srgbClr>
-          </a:solidFill>
-          <a:ln xmlns:a="http://schemas.openxmlformats.org/drawingml/2006/main" w="0">
-            <a:solidFill>
-              <a:srgbClr val="000000">
-                <a:alpha val="0"/>
-              </a:srgbClr>
-            </a:solidFill>
-            <a:prstDash val="solid"/>
-          </a:ln>
-        </p:spPr>
-        <p:txBody>
-          <a:bodyPr xmlns:a="http://schemas.openxmlformats.org/drawingml/2006/main" lIns="0" tIns="0" rIns="0" bIns="0" anchor="t"/>
-          <a:lstStyle xmlns:a="http://schemas.openxmlformats.org/drawingml/2006/main"/>
-          <a:p xmlns:a="http://schemas.openxmlformats.org/drawingml/2006/main">
-            <a:pPr algn="l">
-              <a:defRPr sz="1125" b="0">
-                <a:solidFill>
-                  <a:srgbClr val="172026"/>
-                </a:solidFill>
-                <a:latin typeface="Aptos"/>
-                <a:ea typeface="Aptos"/>
-                <a:cs typeface="Aptos"/>
-              </a:defRPr>
-            </a:pPr>
-            <a:r>
-              <a:rPr sz="1125" b="0">
-                <a:solidFill>
-                  <a:srgbClr val="172026"/>
-                </a:solidFill>
-                <a:latin typeface="Aptos"/>
-                <a:ea typeface="Aptos"/>
-                <a:cs typeface="Aptos"/>
-              </a:rPr>
-              <a:t>Specific next action</a:t>
-            </a:r>
-          </a:p>
-        </p:txBody>
-      </p:sp>
-      <p:sp>
-        <p:nvSpPr>
-          <p:cNvPr id="28" name="">
-            <a:extLst xmlns:a="http://schemas.openxmlformats.org/drawingml/2006/main">
-              <a:ext uri="{FF2B5EF4-FFF2-40B4-BE49-F238E27FC236}">
-                <a16:creationId xmlns:a16="http://schemas.microsoft.com/office/drawing/2014/main" id="{19AD4217-3C38-4BAB-A8CB-767ADCE519D5}"/>
-              </a:ext>
-            </a:extLst>
-          </p:cNvPr>
-          <p:cNvSpPr>
-            <a:spLocks xmlns:a="http://schemas.openxmlformats.org/drawingml/2006/main" noGrp="1"/>
-          </p:cNvSpPr>
-          <p:nvPr/>
-        </p:nvSpPr>
-        <p:spPr>
-          <a:xfrm xmlns:a="http://schemas.openxmlformats.org/drawingml/2006/main">
-            <a:off x="6705600" y="4619625"/>
-            <a:ext cx="57150" cy="57150"/>
-          </a:xfrm>
-          <a:prstGeom xmlns:a="http://schemas.openxmlformats.org/drawingml/2006/main" prst="rect">
-            <a:avLst/>
-          </a:prstGeom>
-          <a:solidFill xmlns:a="http://schemas.openxmlformats.org/drawingml/2006/main">
-            <a:srgbClr val="1D6072"/>
-          </a:solidFill>
-          <a:ln xmlns:a="http://schemas.openxmlformats.org/drawingml/2006/main" w="0">
-            <a:solidFill>
-              <a:srgbClr val="000000">
-                <a:alpha val="0"/>
-              </a:srgbClr>
-            </a:solidFill>
-            <a:prstDash val="solid"/>
-          </a:ln>
-        </p:spPr>
-      </p:sp>
-      <p:sp>
-        <p:nvSpPr>
-          <p:cNvPr id="29" name="">
-            <a:extLst xmlns:a="http://schemas.openxmlformats.org/drawingml/2006/main">
-              <a:ext uri="{FF2B5EF4-FFF2-40B4-BE49-F238E27FC236}">
-                <a16:creationId xmlns:a16="http://schemas.microsoft.com/office/drawing/2014/main" id="{2F89C80B-44CE-4B06-BA0D-5C1DC5737C75}"/>
-              </a:ext>
-            </a:extLst>
-          </p:cNvPr>
-          <p:cNvSpPr>
-            <a:spLocks xmlns:a="http://schemas.openxmlformats.org/drawingml/2006/main" noGrp="1"/>
-          </p:cNvSpPr>
-          <p:nvPr/>
-        </p:nvSpPr>
-        <p:spPr>
-          <a:xfrm xmlns:a="http://schemas.openxmlformats.org/drawingml/2006/main">
-            <a:off x="6877050" y="4552950"/>
-            <a:ext cx="4210050" cy="438150"/>
-          </a:xfrm>
-          <a:prstGeom xmlns:a="http://schemas.openxmlformats.org/drawingml/2006/main" prst="rect">
-            <a:avLst/>
-          </a:prstGeom>
-          <a:solidFill xmlns:a="http://schemas.openxmlformats.org/drawingml/2006/main">
-            <a:srgbClr val="000000">
-              <a:alpha val="0"/>
-            </a:srgbClr>
-          </a:solidFill>
-          <a:ln xmlns:a="http://schemas.openxmlformats.org/drawingml/2006/main" w="0">
-            <a:solidFill>
-              <a:srgbClr val="000000">
-                <a:alpha val="0"/>
-              </a:srgbClr>
-            </a:solidFill>
-            <a:prstDash val="solid"/>
-          </a:ln>
-        </p:spPr>
-        <p:txBody>
-          <a:bodyPr xmlns:a="http://schemas.openxmlformats.org/drawingml/2006/main" lIns="0" tIns="0" rIns="0" bIns="0" anchor="t"/>
-          <a:lstStyle xmlns:a="http://schemas.openxmlformats.org/drawingml/2006/main"/>
-          <a:p xmlns:a="http://schemas.openxmlformats.org/drawingml/2006/main">
-            <a:pPr algn="l">
-              <a:defRPr sz="1125" b="0">
-                <a:solidFill>
-                  <a:srgbClr val="172026"/>
-                </a:solidFill>
-                <a:latin typeface="Aptos"/>
-                <a:ea typeface="Aptos"/>
-                <a:cs typeface="Aptos"/>
-              </a:defRPr>
-            </a:pPr>
-            <a:r>
-              <a:rPr sz="1125" b="0">
-                <a:solidFill>
-                  <a:srgbClr val="172026"/>
-                </a:solidFill>
-                <a:latin typeface="Aptos"/>
-                <a:ea typeface="Aptos"/>
-                <a:cs typeface="Aptos"/>
-              </a:rPr>
-              <a:t>False-positive concern</a:t>
-            </a:r>
-          </a:p>
-        </p:txBody>
-      </p:sp>
-      <p:sp>
-        <p:nvSpPr>
-          <p:cNvPr id="30" name="">
-            <a:extLst xmlns:a="http://schemas.openxmlformats.org/drawingml/2006/main">
-              <a:ext uri="{FF2B5EF4-FFF2-40B4-BE49-F238E27FC236}">
-                <a16:creationId xmlns:a16="http://schemas.microsoft.com/office/drawing/2014/main" id="{CCBF4EC3-01B1-4EEF-9953-F67E7371D229}"/>
-              </a:ext>
-            </a:extLst>
-          </p:cNvPr>
-          <p:cNvSpPr>
-            <a:spLocks xmlns:a="http://schemas.openxmlformats.org/drawingml/2006/main" noGrp="1"/>
-          </p:cNvSpPr>
-          <p:nvPr/>
-        </p:nvSpPr>
-        <p:spPr>
-          <a:xfrm xmlns:a="http://schemas.openxmlformats.org/drawingml/2006/main">
-            <a:off x="6705600" y="5095875"/>
-            <a:ext cx="57150" cy="57150"/>
-          </a:xfrm>
-          <a:prstGeom xmlns:a="http://schemas.openxmlformats.org/drawingml/2006/main" prst="rect">
-            <a:avLst/>
-          </a:prstGeom>
-          <a:solidFill xmlns:a="http://schemas.openxmlformats.org/drawingml/2006/main">
-            <a:srgbClr val="1D6072"/>
-          </a:solidFill>
-          <a:ln xmlns:a="http://schemas.openxmlformats.org/drawingml/2006/main" w="0">
-            <a:solidFill>
-              <a:srgbClr val="000000">
-                <a:alpha val="0"/>
-              </a:srgbClr>
-            </a:solidFill>
-            <a:prstDash val="solid"/>
-          </a:ln>
-        </p:spPr>
-      </p:sp>
-      <p:sp>
-        <p:nvSpPr>
-          <p:cNvPr id="31" name="">
-            <a:extLst xmlns:a="http://schemas.openxmlformats.org/drawingml/2006/main">
-              <a:ext uri="{FF2B5EF4-FFF2-40B4-BE49-F238E27FC236}">
-                <a16:creationId xmlns:a16="http://schemas.microsoft.com/office/drawing/2014/main" id="{7E9468CC-9DA6-4C2D-A026-014FF5B388DA}"/>
-              </a:ext>
-            </a:extLst>
-          </p:cNvPr>
-          <p:cNvSpPr>
-            <a:spLocks xmlns:a="http://schemas.openxmlformats.org/drawingml/2006/main" noGrp="1"/>
-          </p:cNvSpPr>
-          <p:nvPr/>
-        </p:nvSpPr>
-        <p:spPr>
-          <a:xfrm xmlns:a="http://schemas.openxmlformats.org/drawingml/2006/main">
-            <a:off x="6877050" y="5029200"/>
-            <a:ext cx="4210050" cy="438150"/>
-          </a:xfrm>
-          <a:prstGeom xmlns:a="http://schemas.openxmlformats.org/drawingml/2006/main" prst="rect">
-            <a:avLst/>
-          </a:prstGeom>
-          <a:solidFill xmlns:a="http://schemas.openxmlformats.org/drawingml/2006/main">
-            <a:srgbClr val="000000">
-              <a:alpha val="0"/>
-            </a:srgbClr>
-          </a:solidFill>
-          <a:ln xmlns:a="http://schemas.openxmlformats.org/drawingml/2006/main" w="0">
-            <a:solidFill>
-              <a:srgbClr val="000000">
-                <a:alpha val="0"/>
-              </a:srgbClr>
-            </a:solidFill>
-            <a:prstDash val="solid"/>
-          </a:ln>
-        </p:spPr>
-        <p:txBody>
-          <a:bodyPr xmlns:a="http://schemas.openxmlformats.org/drawingml/2006/main" lIns="0" tIns="0" rIns="0" bIns="0" anchor="t"/>
-          <a:lstStyle xmlns:a="http://schemas.openxmlformats.org/drawingml/2006/main"/>
-          <a:p xmlns:a="http://schemas.openxmlformats.org/drawingml/2006/main">
-            <a:pPr algn="l">
-              <a:defRPr sz="1125" b="0">
-                <a:solidFill>
-                  <a:srgbClr val="172026"/>
-                </a:solidFill>
-                <a:latin typeface="Aptos"/>
-                <a:ea typeface="Aptos"/>
-                <a:cs typeface="Aptos"/>
-              </a:defRPr>
-            </a:pPr>
-            <a:r>
-              <a:rPr sz="1125" b="0">
-                <a:solidFill>
-                  <a:srgbClr val="172026"/>
-                </a:solidFill>
-                <a:latin typeface="Aptos"/>
-                <a:ea typeface="Aptos"/>
-                <a:cs typeface="Aptos"/>
-              </a:rPr>
-              <a:t>Missing evidence before escalation</a:t>
-            </a:r>
-          </a:p>
-        </p:txBody>
-      </p:sp>
-      <p:sp>
-        <p:nvSpPr>
-          <p:cNvPr id="32" name="">
-            <a:extLst xmlns:a="http://schemas.openxmlformats.org/drawingml/2006/main">
-              <a:ext uri="{FF2B5EF4-FFF2-40B4-BE49-F238E27FC236}">
-                <a16:creationId xmlns:a16="http://schemas.microsoft.com/office/drawing/2014/main" id="{87F9903F-5452-4CF4-A885-129FE1F852DB}"/>
-              </a:ext>
-            </a:extLst>
-          </p:cNvPr>
-          <p:cNvSpPr>
-            <a:spLocks xmlns:a="http://schemas.openxmlformats.org/drawingml/2006/main" noGrp="1"/>
-          </p:cNvSpPr>
-          <p:nvPr/>
-        </p:nvSpPr>
-        <p:spPr>
-          <a:xfrm xmlns:a="http://schemas.openxmlformats.org/drawingml/2006/main">
-            <a:off x="514350" y="6438900"/>
-            <a:ext cx="10915650" cy="9525"/>
-          </a:xfrm>
-          <a:prstGeom xmlns:a="http://schemas.openxmlformats.org/drawingml/2006/main" prst="rect">
-            <a:avLst/>
-          </a:prstGeom>
-          <a:solidFill xmlns:a="http://schemas.openxmlformats.org/drawingml/2006/main">
-            <a:srgbClr val="D9DDD6"/>
-          </a:solidFill>
-          <a:ln xmlns:a="http://schemas.openxmlformats.org/drawingml/2006/main" w="0">
-            <a:solidFill>
-              <a:srgbClr val="000000">
-                <a:alpha val="0"/>
-              </a:srgbClr>
-            </a:solidFill>
-            <a:prstDash val="solid"/>
-          </a:ln>
-        </p:spPr>
-      </p:sp>
-      <p:sp>
-        <p:nvSpPr>
-          <p:cNvPr id="33" name="">
-            <a:extLst xmlns:a="http://schemas.openxmlformats.org/drawingml/2006/main">
-              <a:ext uri="{FF2B5EF4-FFF2-40B4-BE49-F238E27FC236}">
-                <a16:creationId xmlns:a16="http://schemas.microsoft.com/office/drawing/2014/main" id="{EC4FE0FA-0DD2-4DFD-9000-44047BBA86D5}"/>
-              </a:ext>
-            </a:extLst>
-          </p:cNvPr>
-          <p:cNvSpPr>
-            <a:spLocks xmlns:a="http://schemas.openxmlformats.org/drawingml/2006/main" noGrp="1"/>
-          </p:cNvSpPr>
-          <p:nvPr/>
-        </p:nvSpPr>
-        <p:spPr>
-          <a:xfrm xmlns:a="http://schemas.openxmlformats.org/drawingml/2006/main">
-            <a:off x="514350" y="6553200"/>
-            <a:ext cx="5905500" cy="171450"/>
-          </a:xfrm>
-          <a:prstGeom xmlns:a="http://schemas.openxmlformats.org/drawingml/2006/main" prst="rect">
-            <a:avLst/>
-          </a:prstGeom>
-          <a:solidFill xmlns:a="http://schemas.openxmlformats.org/drawingml/2006/main">
-            <a:srgbClr val="000000">
-              <a:alpha val="0"/>
-            </a:srgbClr>
-          </a:solidFill>
-          <a:ln xmlns:a="http://schemas.openxmlformats.org/drawingml/2006/main" w="0">
-            <a:solidFill>
-              <a:srgbClr val="000000">
-                <a:alpha val="0"/>
-              </a:srgbClr>
-            </a:solidFill>
-            <a:prstDash val="solid"/>
-          </a:ln>
-        </p:spPr>
-        <p:txBody>
-          <a:bodyPr xmlns:a="http://schemas.openxmlformats.org/drawingml/2006/main" lIns="0" tIns="0" rIns="0" bIns="0" anchor="t"/>
-          <a:lstStyle xmlns:a="http://schemas.openxmlformats.org/drawingml/2006/main"/>
-          <a:p xmlns:a="http://schemas.openxmlformats.org/drawingml/2006/main">
-            <a:pPr algn="l">
-              <a:defRPr sz="675" b="0">
-                <a:solidFill>
-                  <a:srgbClr val="59646A"/>
-                </a:solidFill>
-                <a:latin typeface="Aptos"/>
-                <a:ea typeface="Aptos"/>
-                <a:cs typeface="Aptos"/>
-              </a:defRPr>
-            </a:pPr>
-            <a:r>
-              <a:rPr sz="675" b="0">
-                <a:solidFill>
-                  <a:srgbClr val="59646A"/>
-                </a:solidFill>
-                <a:latin typeface="Aptos"/>
-                <a:ea typeface="Aptos"/>
-                <a:cs typeface="Aptos"/>
-              </a:rPr>
-              <a:t>Lesson 07 - Signal Routing And Demand Capture</a:t>
-            </a:r>
-          </a:p>
-        </p:txBody>
-      </p:sp>
-      <p:sp>
-        <p:nvSpPr>
-          <p:cNvPr id="34" name="">
-            <a:extLst xmlns:a="http://schemas.openxmlformats.org/drawingml/2006/main">
-              <a:ext uri="{FF2B5EF4-FFF2-40B4-BE49-F238E27FC236}">
-                <a16:creationId xmlns:a16="http://schemas.microsoft.com/office/drawing/2014/main" id="{C9A92D04-130D-40B3-93DF-A7F5A725C430}"/>
-              </a:ext>
-            </a:extLst>
-          </p:cNvPr>
-          <p:cNvSpPr>
-            <a:spLocks xmlns:a="http://schemas.openxmlformats.org/drawingml/2006/main" noGrp="1"/>
-          </p:cNvSpPr>
-          <p:nvPr/>
-        </p:nvSpPr>
-        <p:spPr>
-          <a:xfrm xmlns:a="http://schemas.openxmlformats.org/drawingml/2006/main">
-            <a:off x="5334000" y="6553200"/>
-            <a:ext cx="4095750" cy="171450"/>
-          </a:xfrm>
-          <a:prstGeom xmlns:a="http://schemas.openxmlformats.org/drawingml/2006/main" prst="rect">
-            <a:avLst/>
-          </a:prstGeom>
-          <a:solidFill xmlns:a="http://schemas.openxmlformats.org/drawingml/2006/main">
-            <a:srgbClr val="000000">
-              <a:alpha val="0"/>
-            </a:srgbClr>
-          </a:solidFill>
-          <a:ln xmlns:a="http://schemas.openxmlformats.org/drawingml/2006/main" w="0">
-            <a:solidFill>
-              <a:srgbClr val="000000">
-                <a:alpha val="0"/>
-              </a:srgbClr>
-            </a:solidFill>
-            <a:prstDash val="solid"/>
-          </a:ln>
-        </p:spPr>
-        <p:txBody>
-          <a:bodyPr xmlns:a="http://schemas.openxmlformats.org/drawingml/2006/main" lIns="0" tIns="0" rIns="0" bIns="0" anchor="t"/>
-          <a:lstStyle xmlns:a="http://schemas.openxmlformats.org/drawingml/2006/main"/>
-          <a:p xmlns:a="http://schemas.openxmlformats.org/drawingml/2006/main">
-            <a:pPr algn="r">
-              <a:defRPr sz="600" b="0">
-                <a:solidFill>
-                  <a:srgbClr val="59646A"/>
-                </a:solidFill>
-                <a:latin typeface="Aptos"/>
-                <a:ea typeface="Aptos"/>
-                <a:cs typeface="Aptos"/>
-              </a:defRPr>
-            </a:pPr>
-            <a:r>
-              <a:rPr sz="600" b="0">
-                <a:solidFill>
-                  <a:srgbClr val="59646A"/>
-                </a:solidFill>
-                <a:latin typeface="Aptos"/>
-                <a:ea typeface="Aptos"/>
-                <a:cs typeface="Aptos"/>
-              </a:rPr>
-              <a:t>Source: modules/module-01-industrial-demand-generation/lessons/07-signal-routing-and-demand-capture.md @ 9e28222</a:t>
-            </a:r>
-          </a:p>
-        </p:txBody>
-      </p:sp>
-      <p:sp>
-        <p:nvSpPr>
-          <p:cNvPr id="35" name="">
-            <a:extLst xmlns:a="http://schemas.openxmlformats.org/drawingml/2006/main">
-              <a:ext uri="{FF2B5EF4-FFF2-40B4-BE49-F238E27FC236}">
-                <a16:creationId xmlns:a16="http://schemas.microsoft.com/office/drawing/2014/main" id="{5027ACC0-D622-4D45-828C-7FC9A79DE333}"/>
-              </a:ext>
-            </a:extLst>
-          </p:cNvPr>
-          <p:cNvSpPr>
-            <a:spLocks xmlns:a="http://schemas.openxmlformats.org/drawingml/2006/main" noGrp="1"/>
-          </p:cNvSpPr>
-          <p:nvPr/>
-        </p:nvSpPr>
-        <p:spPr>
-          <a:xfrm xmlns:a="http://schemas.openxmlformats.org/drawingml/2006/main">
-            <a:off x="10668000" y="6553200"/>
-            <a:ext cx="762000" cy="171450"/>
-          </a:xfrm>
-          <a:prstGeom xmlns:a="http://schemas.openxmlformats.org/drawingml/2006/main" prst="rect">
-            <a:avLst/>
-          </a:prstGeom>
-          <a:solidFill xmlns:a="http://schemas.openxmlformats.org/drawingml/2006/main">
-            <a:srgbClr val="000000">
-              <a:alpha val="0"/>
-            </a:srgbClr>
-          </a:solidFill>
-          <a:ln xmlns:a="http://schemas.openxmlformats.org/drawingml/2006/main" w="0">
-            <a:solidFill>
-              <a:srgbClr val="000000">
-                <a:alpha val="0"/>
-              </a:srgbClr>
-            </a:solidFill>
-            <a:prstDash val="solid"/>
-          </a:ln>
-        </p:spPr>
-        <p:txBody>
-          <a:bodyPr xmlns:a="http://schemas.openxmlformats.org/drawingml/2006/main" lIns="0" tIns="0" rIns="0" bIns="0" anchor="t"/>
-          <a:lstStyle xmlns:a="http://schemas.openxmlformats.org/drawingml/2006/main"/>
-          <a:p xmlns:a="http://schemas.openxmlformats.org/drawingml/2006/main">
-            <a:pPr algn="r">
-              <a:defRPr sz="675" b="0">
-                <a:solidFill>
-                  <a:srgbClr val="59646A"/>
-                </a:solidFill>
-                <a:latin typeface="Aptos"/>
-                <a:ea typeface="Aptos"/>
-                <a:cs typeface="Aptos"/>
-              </a:defRPr>
-            </a:pPr>
-            <a:r>
-              <a:rPr sz="675" b="0">
-                <a:solidFill>
-                  <a:srgbClr val="59646A"/>
-                </a:solidFill>
-                <a:latin typeface="Aptos"/>
-                <a:ea typeface="Aptos"/>
-                <a:cs typeface="Aptos"/>
-              </a:rPr>
-              <a:t>10/15</a:t>
-            </a:r>
-          </a:p>
-        </p:txBody>
-      </p:sp>
-      <p:sp>
-        <p:nvSpPr>
-          <p:cNvPr id="36" name="">
-            <a:extLst xmlns:a="http://schemas.openxmlformats.org/drawingml/2006/main">
-              <a:ext uri="{FF2B5EF4-FFF2-40B4-BE49-F238E27FC236}">
-                <a16:creationId xmlns:a16="http://schemas.microsoft.com/office/drawing/2014/main" id="{14BD6FD4-9005-499D-8D60-7185329FBD9C}"/>
-              </a:ext>
-            </a:extLst>
-          </p:cNvPr>
-          <p:cNvSpPr>
-            <a:spLocks xmlns:a="http://schemas.openxmlformats.org/drawingml/2006/main" noGrp="1"/>
-          </p:cNvSpPr>
-          <p:nvPr/>
-        </p:nvSpPr>
-        <p:spPr>
-          <a:xfrm xmlns:a="http://schemas.openxmlformats.org/drawingml/2006/main">
-            <a:off x="0" y="0"/>
-            <a:ext cx="12192000" cy="1809750"/>
-          </a:xfrm>
-          <a:prstGeom xmlns:a="http://schemas.openxmlformats.org/drawingml/2006/main" prst="rect">
-            <a:avLst/>
-          </a:prstGeom>
-          <a:solidFill xmlns:a="http://schemas.openxmlformats.org/drawingml/2006/main">
-            <a:srgbClr val="F5F6F2"/>
-          </a:solidFill>
-          <a:ln xmlns:a="http://schemas.openxmlformats.org/drawingml/2006/main" w="0">
-            <a:solidFill>
-              <a:srgbClr val="000000">
-                <a:alpha val="0"/>
-              </a:srgbClr>
-            </a:solidFill>
-            <a:prstDash val="solid"/>
-          </a:ln>
-        </p:spPr>
-      </p:sp>
-      <p:sp>
-        <p:nvSpPr>
-          <p:cNvPr id="37" name="">
-            <a:extLst xmlns:a="http://schemas.openxmlformats.org/drawingml/2006/main">
-              <a:ext uri="{FF2B5EF4-FFF2-40B4-BE49-F238E27FC236}">
-                <a16:creationId xmlns:a16="http://schemas.microsoft.com/office/drawing/2014/main" id="{6B090D55-DBBE-4B2E-9BB6-CC74352C19E6}"/>
-              </a:ext>
-            </a:extLst>
-          </p:cNvPr>
-          <p:cNvSpPr>
-            <a:spLocks xmlns:a="http://schemas.openxmlformats.org/drawingml/2006/main" noGrp="1"/>
-          </p:cNvSpPr>
-          <p:nvPr/>
-        </p:nvSpPr>
-        <p:spPr>
-          <a:xfrm xmlns:a="http://schemas.openxmlformats.org/drawingml/2006/main">
-            <a:off x="0" y="0"/>
-            <a:ext cx="171450" cy="1809750"/>
-          </a:xfrm>
-          <a:prstGeom xmlns:a="http://schemas.openxmlformats.org/drawingml/2006/main" prst="rect">
-            <a:avLst/>
-          </a:prstGeom>
-          <a:solidFill xmlns:a="http://schemas.openxmlformats.org/drawingml/2006/main">
-            <a:srgbClr val="12232B"/>
-          </a:solidFill>
-          <a:ln xmlns:a="http://schemas.openxmlformats.org/drawingml/2006/main" w="0">
-            <a:solidFill>
-              <a:srgbClr val="000000">
-                <a:alpha val="0"/>
-              </a:srgbClr>
-            </a:solidFill>
-            <a:prstDash val="solid"/>
-          </a:ln>
-        </p:spPr>
-      </p:sp>
-      <p:sp>
-        <p:nvSpPr>
-          <p:cNvPr id="38" name="">
-            <a:extLst xmlns:a="http://schemas.openxmlformats.org/drawingml/2006/main">
-              <a:ext uri="{FF2B5EF4-FFF2-40B4-BE49-F238E27FC236}">
-                <a16:creationId xmlns:a16="http://schemas.microsoft.com/office/drawing/2014/main" id="{A9FD4820-7953-4F9E-B34A-99BEFDA316F0}"/>
-              </a:ext>
-            </a:extLst>
-          </p:cNvPr>
-          <p:cNvSpPr>
-            <a:spLocks xmlns:a="http://schemas.openxmlformats.org/drawingml/2006/main" noGrp="1"/>
-          </p:cNvSpPr>
-          <p:nvPr/>
-        </p:nvSpPr>
-        <p:spPr>
-          <a:xfrm xmlns:a="http://schemas.openxmlformats.org/drawingml/2006/main">
-            <a:off x="171450" y="0"/>
-            <a:ext cx="57150" cy="1809750"/>
-          </a:xfrm>
-          <a:prstGeom xmlns:a="http://schemas.openxmlformats.org/drawingml/2006/main" prst="rect">
-            <a:avLst/>
-          </a:prstGeom>
-          <a:solidFill xmlns:a="http://schemas.openxmlformats.org/drawingml/2006/main">
-            <a:srgbClr val="A85D2A"/>
-          </a:solidFill>
-          <a:ln xmlns:a="http://schemas.openxmlformats.org/drawingml/2006/main" w="0">
-            <a:solidFill>
-              <a:srgbClr val="000000">
-                <a:alpha val="0"/>
-              </a:srgbClr>
-            </a:solidFill>
-            <a:prstDash val="solid"/>
-          </a:ln>
-        </p:spPr>
-      </p:sp>
-      <p:sp>
-        <p:nvSpPr>
-          <p:cNvPr id="39" name="kicker-07-marker">
-            <a:extLst xmlns:a="http://schemas.openxmlformats.org/drawingml/2006/main">
-              <a:ext uri="{FF2B5EF4-FFF2-40B4-BE49-F238E27FC236}">
-                <a16:creationId xmlns:a16="http://schemas.microsoft.com/office/drawing/2014/main" id="{F362D38F-6D4B-498E-9445-5666E37C51E7}"/>
-              </a:ext>
-            </a:extLst>
-          </p:cNvPr>
-          <p:cNvSpPr>
-            <a:spLocks xmlns:a="http://schemas.openxmlformats.org/drawingml/2006/main" noGrp="1"/>
-          </p:cNvSpPr>
-          <p:nvPr/>
-        </p:nvSpPr>
-        <p:spPr>
-          <a:xfrm xmlns:a="http://schemas.openxmlformats.org/drawingml/2006/main">
-            <a:off x="514350" y="390525"/>
-            <a:ext cx="76200" cy="76200"/>
-          </a:xfrm>
-          <a:prstGeom xmlns:a="http://schemas.openxmlformats.org/drawingml/2006/main" prst="rect">
-            <a:avLst/>
-          </a:prstGeom>
-          <a:solidFill xmlns:a="http://schemas.openxmlformats.org/drawingml/2006/main">
-            <a:srgbClr val="A85D2A"/>
-          </a:solidFill>
-          <a:ln xmlns:a="http://schemas.openxmlformats.org/drawingml/2006/main" w="0">
-            <a:solidFill>
-              <a:srgbClr val="000000">
-                <a:alpha val="0"/>
-              </a:srgbClr>
-            </a:solidFill>
-            <a:prstDash val="solid"/>
-          </a:ln>
-        </p:spPr>
-      </p:sp>
-      <p:sp>
-        <p:nvSpPr>
-          <p:cNvPr id="40" name="kicker-07-label">
-            <a:extLst xmlns:a="http://schemas.openxmlformats.org/drawingml/2006/main">
-              <a:ext uri="{FF2B5EF4-FFF2-40B4-BE49-F238E27FC236}">
-                <a16:creationId xmlns:a16="http://schemas.microsoft.com/office/drawing/2014/main" id="{9DBF8C3C-A499-41E4-9C87-94E3F22C39F6}"/>
-              </a:ext>
-            </a:extLst>
-          </p:cNvPr>
-          <p:cNvSpPr>
-            <a:spLocks xmlns:a="http://schemas.openxmlformats.org/drawingml/2006/main" noGrp="1"/>
-          </p:cNvSpPr>
-          <p:nvPr/>
-        </p:nvSpPr>
-        <p:spPr>
-          <a:xfrm xmlns:a="http://schemas.openxmlformats.org/drawingml/2006/main">
-            <a:off x="685800" y="323850"/>
-            <a:ext cx="7524750" cy="228600"/>
-          </a:xfrm>
-          <a:prstGeom xmlns:a="http://schemas.openxmlformats.org/drawingml/2006/main" prst="rect">
-            <a:avLst/>
-          </a:prstGeom>
-          <a:solidFill xmlns:a="http://schemas.openxmlformats.org/drawingml/2006/main">
-            <a:srgbClr val="000000">
-              <a:alpha val="0"/>
-            </a:srgbClr>
-          </a:solidFill>
-          <a:ln xmlns:a="http://schemas.openxmlformats.org/drawingml/2006/main" w="0">
-            <a:solidFill>
-              <a:srgbClr val="000000">
-                <a:alpha val="0"/>
-              </a:srgbClr>
-            </a:solidFill>
-            <a:prstDash val="solid"/>
-          </a:ln>
-        </p:spPr>
-        <p:txBody>
-          <a:bodyPr xmlns:a="http://schemas.openxmlformats.org/drawingml/2006/main" lIns="0" tIns="0" rIns="0" bIns="0" anchor="ctr"/>
-          <a:lstStyle xmlns:a="http://schemas.openxmlformats.org/drawingml/2006/main"/>
-          <a:p xmlns:a="http://schemas.openxmlformats.org/drawingml/2006/main">
-            <a:pPr algn="l">
-              <a:defRPr sz="750" b="1">
-                <a:solidFill>
-                  <a:srgbClr val="59646A"/>
-                </a:solidFill>
-                <a:latin typeface="Aptos"/>
-                <a:ea typeface="Aptos"/>
-                <a:cs typeface="Aptos"/>
-              </a:defRPr>
-            </a:pPr>
-            <a:r>
-              <a:rPr sz="750" b="1">
-                <a:solidFill>
-                  <a:srgbClr val="59646A"/>
-                </a:solidFill>
-                <a:latin typeface="Aptos"/>
-                <a:ea typeface="Aptos"/>
-                <a:cs typeface="Aptos"/>
-              </a:rPr>
-              <a:t>MODULE 1 / LESSON 07 / AI-ASSISTED EXERCISE</a:t>
-            </a:r>
-          </a:p>
-        </p:txBody>
-      </p:sp>
-      <p:sp>
-        <p:nvSpPr>
           <p:cNvPr id="41" name="">
             <a:extLst xmlns:a="http://schemas.openxmlformats.org/drawingml/2006/main">
               <a:ext uri="{FF2B5EF4-FFF2-40B4-BE49-F238E27FC236}">
-                <a16:creationId xmlns:a16="http://schemas.microsoft.com/office/drawing/2014/main" id="{80BA9CD0-9EA6-49F8-9271-4247468FDD7E}"/>
+                <a16:creationId xmlns:a16="http://schemas.microsoft.com/office/drawing/2014/main" id="{979DE01B-C0A2-4522-9008-8A2737997573}"/>
               </a:ext>
             </a:extLst>
           </p:cNvPr>
@@ -5187,7 +5185,7 @@
                 <a:ea typeface="Aptos Display"/>
                 <a:cs typeface="Aptos Display"/>
               </a:rPr>
-              <a:t>Use AI to structure the attempt, then make humans responsible for judgment.</a:t>
+              <a:t>Structure the first draft before the room critiques it.</a:t>
             </a:r>
           </a:p>
         </p:txBody>
@@ -5197,7 +5195,7 @@
           <p:cNvPr id="42" name="">
             <a:extLst xmlns:a="http://schemas.openxmlformats.org/drawingml/2006/main">
               <a:ext uri="{FF2B5EF4-FFF2-40B4-BE49-F238E27FC236}">
-                <a16:creationId xmlns:a16="http://schemas.microsoft.com/office/drawing/2014/main" id="{35BC17D1-CF70-45AE-B2B0-07AC7580B05E}"/>
+                <a16:creationId xmlns:a16="http://schemas.microsoft.com/office/drawing/2014/main" id="{C7EBBDC1-73FF-4F3A-8E9B-1A4C91A76C22}"/>
               </a:ext>
             </a:extLst>
           </p:cNvPr>
@@ -5251,7 +5249,7 @@
                 <a:ea typeface="Aptos"/>
                 <a:cs typeface="Aptos"/>
               </a:rPr>
-              <a:t>The prompt is constrained by source, assumptions, output standard, and human validation.</a:t>
+              <a:t>The brief is constrained by source evidence, assumptions, output standard, and validation.</a:t>
             </a:r>
           </a:p>
         </p:txBody>
@@ -5261,7 +5259,7 @@
           <p:cNvPr id="43" name="">
             <a:extLst xmlns:a="http://schemas.openxmlformats.org/drawingml/2006/main">
               <a:ext uri="{FF2B5EF4-FFF2-40B4-BE49-F238E27FC236}">
-                <a16:creationId xmlns:a16="http://schemas.microsoft.com/office/drawing/2014/main" id="{862AE71C-BF94-49AF-B558-4EF123A3E617}"/>
+                <a16:creationId xmlns:a16="http://schemas.microsoft.com/office/drawing/2014/main" id="{2A2492C6-C79F-4A91-85AF-4654903966F3}"/>
               </a:ext>
             </a:extLst>
           </p:cNvPr>
@@ -5296,7 +5294,7 @@
           <p:cNvPr id="44" name="">
             <a:extLst xmlns:a="http://schemas.openxmlformats.org/drawingml/2006/main">
               <a:ext uri="{FF2B5EF4-FFF2-40B4-BE49-F238E27FC236}">
-                <a16:creationId xmlns:a16="http://schemas.microsoft.com/office/drawing/2014/main" id="{B94519B8-976C-402E-A49D-A6BC843C58A8}"/>
+                <a16:creationId xmlns:a16="http://schemas.microsoft.com/office/drawing/2014/main" id="{7ACD7DD9-8333-4228-BA26-A621704C8083}"/>
               </a:ext>
             </a:extLst>
           </p:cNvPr>
@@ -5331,7 +5329,7 @@
           <p:cNvPr id="45" name="">
             <a:extLst xmlns:a="http://schemas.openxmlformats.org/drawingml/2006/main">
               <a:ext uri="{FF2B5EF4-FFF2-40B4-BE49-F238E27FC236}">
-                <a16:creationId xmlns:a16="http://schemas.microsoft.com/office/drawing/2014/main" id="{90932DDE-49F1-4E98-AB0C-1C882A325543}"/>
+                <a16:creationId xmlns:a16="http://schemas.microsoft.com/office/drawing/2014/main" id="{A1DA4344-2CD2-4A7D-BAB7-67FDD848B65B}"/>
               </a:ext>
             </a:extLst>
           </p:cNvPr>
@@ -5366,7 +5364,7 @@
           <p:cNvPr id="46" name="">
             <a:extLst xmlns:a="http://schemas.openxmlformats.org/drawingml/2006/main">
               <a:ext uri="{FF2B5EF4-FFF2-40B4-BE49-F238E27FC236}">
-                <a16:creationId xmlns:a16="http://schemas.microsoft.com/office/drawing/2014/main" id="{005C9F90-5701-4ECF-B229-C2D1A8E2907C}"/>
+                <a16:creationId xmlns:a16="http://schemas.microsoft.com/office/drawing/2014/main" id="{BE704EE2-69C2-4BEF-B1E9-BF7098788D70}"/>
               </a:ext>
             </a:extLst>
           </p:cNvPr>
@@ -5401,7 +5399,7 @@
           <p:cNvPr id="47" name="">
             <a:extLst xmlns:a="http://schemas.openxmlformats.org/drawingml/2006/main">
               <a:ext uri="{FF2B5EF4-FFF2-40B4-BE49-F238E27FC236}">
-                <a16:creationId xmlns:a16="http://schemas.microsoft.com/office/drawing/2014/main" id="{1CB6893E-15E2-48CA-967A-00870AA0A0C2}"/>
+                <a16:creationId xmlns:a16="http://schemas.microsoft.com/office/drawing/2014/main" id="{C645A304-5DEA-4545-8871-8E9F4D93823C}"/>
               </a:ext>
             </a:extLst>
           </p:cNvPr>
@@ -5465,7 +5463,7 @@
           <p:cNvPr id="48" name="">
             <a:extLst xmlns:a="http://schemas.openxmlformats.org/drawingml/2006/main">
               <a:ext uri="{FF2B5EF4-FFF2-40B4-BE49-F238E27FC236}">
-                <a16:creationId xmlns:a16="http://schemas.microsoft.com/office/drawing/2014/main" id="{23CA6776-E99B-428B-A692-090F2D0A1AB7}"/>
+                <a16:creationId xmlns:a16="http://schemas.microsoft.com/office/drawing/2014/main" id="{7D4638E8-F511-4AA3-8EF0-AF0ABDB99C40}"/>
               </a:ext>
             </a:extLst>
           </p:cNvPr>
@@ -5529,7 +5527,7 @@
           <p:cNvPr id="49" name="">
             <a:extLst xmlns:a="http://schemas.openxmlformats.org/drawingml/2006/main">
               <a:ext uri="{FF2B5EF4-FFF2-40B4-BE49-F238E27FC236}">
-                <a16:creationId xmlns:a16="http://schemas.microsoft.com/office/drawing/2014/main" id="{766162EA-5305-436E-9441-72F9DA667B0A}"/>
+                <a16:creationId xmlns:a16="http://schemas.microsoft.com/office/drawing/2014/main" id="{F0DC7360-BCA4-40C4-8AB8-DDA23977A29D}"/>
               </a:ext>
             </a:extLst>
           </p:cNvPr>
@@ -5591,7 +5589,7 @@
     </p:spTree>
     <p:extLst>
       <p:ext uri="{BB962C8B-B14F-4D97-AF65-F5344CB8AC3E}">
-        <p14:creationId xmlns:p14="http://schemas.microsoft.com/office/powerpoint/2010/main" val="2053167030"/>
+        <p14:creationId xmlns:p14="http://schemas.microsoft.com/office/powerpoint/2010/main" val="1840576322"/>
       </p:ext>
     </p:extLst>
   </p:cSld>
@@ -5615,7 +5613,7 @@
           <p:cNvPr id="1" name="">
             <a:extLst xmlns:a="http://schemas.openxmlformats.org/drawingml/2006/main">
               <a:ext uri="{FF2B5EF4-FFF2-40B4-BE49-F238E27FC236}">
-                <a16:creationId xmlns:a16="http://schemas.microsoft.com/office/drawing/2014/main" id="{5681F244-4BA4-4A23-9202-506922D3991A}"/>
+                <a16:creationId xmlns:a16="http://schemas.microsoft.com/office/drawing/2014/main" id="{3C08A086-E80D-48DC-A288-8BFB0AA11975}"/>
               </a:ext>
             </a:extLst>
           </p:cNvPr>
@@ -5650,7 +5648,7 @@
           <p:cNvPr id="2" name="">
             <a:extLst xmlns:a="http://schemas.openxmlformats.org/drawingml/2006/main">
               <a:ext uri="{FF2B5EF4-FFF2-40B4-BE49-F238E27FC236}">
-                <a16:creationId xmlns:a16="http://schemas.microsoft.com/office/drawing/2014/main" id="{317A19A1-9028-41FC-BB1A-BA915AF82DF3}"/>
+                <a16:creationId xmlns:a16="http://schemas.microsoft.com/office/drawing/2014/main" id="{FD39253D-BCC6-4396-A9B8-CF5888E71C85}"/>
               </a:ext>
             </a:extLst>
           </p:cNvPr>
@@ -5685,7 +5683,7 @@
           <p:cNvPr id="3" name="">
             <a:extLst xmlns:a="http://schemas.openxmlformats.org/drawingml/2006/main">
               <a:ext uri="{FF2B5EF4-FFF2-40B4-BE49-F238E27FC236}">
-                <a16:creationId xmlns:a16="http://schemas.microsoft.com/office/drawing/2014/main" id="{CD556958-04C6-4954-91EB-09E934945054}"/>
+                <a16:creationId xmlns:a16="http://schemas.microsoft.com/office/drawing/2014/main" id="{4C953986-35A6-4B78-812A-0C885DC78DB2}"/>
               </a:ext>
             </a:extLst>
           </p:cNvPr>
@@ -5720,7 +5718,7 @@
           <p:cNvPr id="4" name="kicker-07-marker">
             <a:extLst xmlns:a="http://schemas.openxmlformats.org/drawingml/2006/main">
               <a:ext uri="{FF2B5EF4-FFF2-40B4-BE49-F238E27FC236}">
-                <a16:creationId xmlns:a16="http://schemas.microsoft.com/office/drawing/2014/main" id="{D1CFC253-E2E0-4B4C-B7E8-AC6D132BDEFC}"/>
+                <a16:creationId xmlns:a16="http://schemas.microsoft.com/office/drawing/2014/main" id="{8002A7E3-E566-43E2-8666-35D4A845A7E5}"/>
               </a:ext>
             </a:extLst>
           </p:cNvPr>
@@ -5755,7 +5753,7 @@
           <p:cNvPr id="5" name="kicker-07-label">
             <a:extLst xmlns:a="http://schemas.openxmlformats.org/drawingml/2006/main">
               <a:ext uri="{FF2B5EF4-FFF2-40B4-BE49-F238E27FC236}">
-                <a16:creationId xmlns:a16="http://schemas.microsoft.com/office/drawing/2014/main" id="{A9527FA8-CC36-464D-98E2-B15CB00E4478}"/>
+                <a16:creationId xmlns:a16="http://schemas.microsoft.com/office/drawing/2014/main" id="{3467790B-14DC-4D78-B814-7766FE923A45}"/>
               </a:ext>
             </a:extLst>
           </p:cNvPr>
@@ -5809,7 +5807,7 @@
                 <a:ea typeface="Aptos"/>
                 <a:cs typeface="Aptos"/>
               </a:rPr>
-              <a:t>MODULE 1 / LESSON 07 / HUMAN CORRECTION</a:t>
+              <a:t>MODULE 1 / LESSON 07 / QUALITY CONTROL</a:t>
             </a:r>
           </a:p>
         </p:txBody>
@@ -5819,7 +5817,7 @@
           <p:cNvPr id="6" name="">
             <a:extLst xmlns:a="http://schemas.openxmlformats.org/drawingml/2006/main">
               <a:ext uri="{FF2B5EF4-FFF2-40B4-BE49-F238E27FC236}">
-                <a16:creationId xmlns:a16="http://schemas.microsoft.com/office/drawing/2014/main" id="{B08814FB-E247-4CCF-98C9-94514502E5C0}"/>
+                <a16:creationId xmlns:a16="http://schemas.microsoft.com/office/drawing/2014/main" id="{4B4CCA7A-1967-4729-871A-84C456E273C1}"/>
               </a:ext>
             </a:extLst>
           </p:cNvPr>
@@ -5873,7 +5871,7 @@
                 <a:ea typeface="Aptos Display"/>
                 <a:cs typeface="Aptos Display"/>
               </a:rPr>
-              <a:t>AI can draft structure. Humans must repair industrial reality.</a:t>
+              <a:t>Reject weak artifacts before they become operating practice.</a:t>
             </a:r>
           </a:p>
         </p:txBody>
@@ -5883,7 +5881,7 @@
           <p:cNvPr id="7" name="">
             <a:extLst xmlns:a="http://schemas.openxmlformats.org/drawingml/2006/main">
               <a:ext uri="{FF2B5EF4-FFF2-40B4-BE49-F238E27FC236}">
-                <a16:creationId xmlns:a16="http://schemas.microsoft.com/office/drawing/2014/main" id="{EA1423F3-4374-4ED4-B595-74D8B1EB9C7B}"/>
+                <a16:creationId xmlns:a16="http://schemas.microsoft.com/office/drawing/2014/main" id="{604F6F0A-E87E-4777-A0A8-7960F2EAD345}"/>
               </a:ext>
             </a:extLst>
           </p:cNvPr>
@@ -5947,7 +5945,7 @@
           <p:cNvPr id="8" name="">
             <a:extLst xmlns:a="http://schemas.openxmlformats.org/drawingml/2006/main">
               <a:ext uri="{FF2B5EF4-FFF2-40B4-BE49-F238E27FC236}">
-                <a16:creationId xmlns:a16="http://schemas.microsoft.com/office/drawing/2014/main" id="{C953948F-CE84-4143-A46D-C3339C83E696}"/>
+                <a16:creationId xmlns:a16="http://schemas.microsoft.com/office/drawing/2014/main" id="{CD23B303-03BE-415D-BFE2-CFEC50ECB47C}"/>
               </a:ext>
             </a:extLst>
           </p:cNvPr>
@@ -5982,7 +5980,7 @@
           <p:cNvPr id="9" name="">
             <a:extLst xmlns:a="http://schemas.openxmlformats.org/drawingml/2006/main">
               <a:ext uri="{FF2B5EF4-FFF2-40B4-BE49-F238E27FC236}">
-                <a16:creationId xmlns:a16="http://schemas.microsoft.com/office/drawing/2014/main" id="{0E9EB1C0-00DD-4E3D-AE50-4EC18B89C167}"/>
+                <a16:creationId xmlns:a16="http://schemas.microsoft.com/office/drawing/2014/main" id="{3821B510-6BB7-4B09-81D5-352257B83E8A}"/>
               </a:ext>
             </a:extLst>
           </p:cNvPr>
@@ -6046,7 +6044,7 @@
           <p:cNvPr id="10" name="">
             <a:extLst xmlns:a="http://schemas.openxmlformats.org/drawingml/2006/main">
               <a:ext uri="{FF2B5EF4-FFF2-40B4-BE49-F238E27FC236}">
-                <a16:creationId xmlns:a16="http://schemas.microsoft.com/office/drawing/2014/main" id="{2FA9C7DA-B648-4AB1-839E-4AC6FD4FB84E}"/>
+                <a16:creationId xmlns:a16="http://schemas.microsoft.com/office/drawing/2014/main" id="{442AA0F1-18B7-425F-A881-8B6B9E0EC9E8}"/>
               </a:ext>
             </a:extLst>
           </p:cNvPr>
@@ -6110,7 +6108,7 @@
           <p:cNvPr id="11" name="">
             <a:extLst xmlns:a="http://schemas.openxmlformats.org/drawingml/2006/main">
               <a:ext uri="{FF2B5EF4-FFF2-40B4-BE49-F238E27FC236}">
-                <a16:creationId xmlns:a16="http://schemas.microsoft.com/office/drawing/2014/main" id="{E08A3894-1043-46B3-889D-FF45518B4CF5}"/>
+                <a16:creationId xmlns:a16="http://schemas.microsoft.com/office/drawing/2014/main" id="{CEC15DE7-A3F0-42E3-A6AF-864118C04803}"/>
               </a:ext>
             </a:extLst>
           </p:cNvPr>
@@ -6174,7 +6172,7 @@
           <p:cNvPr id="12" name="">
             <a:extLst xmlns:a="http://schemas.openxmlformats.org/drawingml/2006/main">
               <a:ext uri="{FF2B5EF4-FFF2-40B4-BE49-F238E27FC236}">
-                <a16:creationId xmlns:a16="http://schemas.microsoft.com/office/drawing/2014/main" id="{BC3D6ABE-3132-4B4B-81B4-8793D03B3421}"/>
+                <a16:creationId xmlns:a16="http://schemas.microsoft.com/office/drawing/2014/main" id="{0EC9CA01-6506-4519-B428-7D5DCA34ADB7}"/>
               </a:ext>
             </a:extLst>
           </p:cNvPr>
@@ -6209,7 +6207,7 @@
           <p:cNvPr id="13" name="">
             <a:extLst xmlns:a="http://schemas.openxmlformats.org/drawingml/2006/main">
               <a:ext uri="{FF2B5EF4-FFF2-40B4-BE49-F238E27FC236}">
-                <a16:creationId xmlns:a16="http://schemas.microsoft.com/office/drawing/2014/main" id="{10A2B59F-4499-42B8-AB32-8A3F27BCF5C4}"/>
+                <a16:creationId xmlns:a16="http://schemas.microsoft.com/office/drawing/2014/main" id="{C9A72147-52D5-4BC8-843A-31C72158CD25}"/>
               </a:ext>
             </a:extLst>
           </p:cNvPr>
@@ -6242,7 +6240,7 @@
           <p:cNvPr id="14" name="">
             <a:extLst xmlns:a="http://schemas.openxmlformats.org/drawingml/2006/main">
               <a:ext uri="{FF2B5EF4-FFF2-40B4-BE49-F238E27FC236}">
-                <a16:creationId xmlns:a16="http://schemas.microsoft.com/office/drawing/2014/main" id="{B6F07619-DAB0-456F-96A2-E9A110EE727F}"/>
+                <a16:creationId xmlns:a16="http://schemas.microsoft.com/office/drawing/2014/main" id="{FFAA943A-63DC-4FE5-B077-2F90F669D660}"/>
               </a:ext>
             </a:extLst>
           </p:cNvPr>
@@ -6277,7 +6275,7 @@
           <p:cNvPr id="15" name="">
             <a:extLst xmlns:a="http://schemas.openxmlformats.org/drawingml/2006/main">
               <a:ext uri="{FF2B5EF4-FFF2-40B4-BE49-F238E27FC236}">
-                <a16:creationId xmlns:a16="http://schemas.microsoft.com/office/drawing/2014/main" id="{85EF1C32-2202-4D57-BD0F-43339C71FE07}"/>
+                <a16:creationId xmlns:a16="http://schemas.microsoft.com/office/drawing/2014/main" id="{852A09B7-A06E-4AE1-B058-1ED0E49F4CCC}"/>
               </a:ext>
             </a:extLst>
           </p:cNvPr>
@@ -6331,7 +6329,7 @@
                 <a:ea typeface="Aptos"/>
                 <a:cs typeface="Aptos"/>
               </a:rPr>
-              <a:t>REJECT OR REPAIR WHEN AI OUTPUT...</a:t>
+              <a:t>REJECT OR REPAIR WHEN THE ARTIFACT...</a:t>
             </a:r>
           </a:p>
         </p:txBody>
@@ -6341,7 +6339,7 @@
           <p:cNvPr id="16" name="">
             <a:extLst xmlns:a="http://schemas.openxmlformats.org/drawingml/2006/main">
               <a:ext uri="{FF2B5EF4-FFF2-40B4-BE49-F238E27FC236}">
-                <a16:creationId xmlns:a16="http://schemas.microsoft.com/office/drawing/2014/main" id="{7FB6595F-BB6D-4151-86A7-AD05E538F82B}"/>
+                <a16:creationId xmlns:a16="http://schemas.microsoft.com/office/drawing/2014/main" id="{522E89A8-53E9-40F7-AB96-461FEFBB49EC}"/>
               </a:ext>
             </a:extLst>
           </p:cNvPr>
@@ -6376,7 +6374,7 @@
           <p:cNvPr id="17" name="">
             <a:extLst xmlns:a="http://schemas.openxmlformats.org/drawingml/2006/main">
               <a:ext uri="{FF2B5EF4-FFF2-40B4-BE49-F238E27FC236}">
-                <a16:creationId xmlns:a16="http://schemas.microsoft.com/office/drawing/2014/main" id="{F2D9A650-7722-4C2B-AF96-594D4F1E4465}"/>
+                <a16:creationId xmlns:a16="http://schemas.microsoft.com/office/drawing/2014/main" id="{7043E609-4FCC-4F0F-B43C-6F6FB3209E9D}"/>
               </a:ext>
             </a:extLst>
           </p:cNvPr>
@@ -6440,7 +6438,7 @@
           <p:cNvPr id="18" name="">
             <a:extLst xmlns:a="http://schemas.openxmlformats.org/drawingml/2006/main">
               <a:ext uri="{FF2B5EF4-FFF2-40B4-BE49-F238E27FC236}">
-                <a16:creationId xmlns:a16="http://schemas.microsoft.com/office/drawing/2014/main" id="{9C648A13-9BE4-4970-95D6-0482B80F2740}"/>
+                <a16:creationId xmlns:a16="http://schemas.microsoft.com/office/drawing/2014/main" id="{140C61F0-80D9-409F-BC54-28F4B544C7CF}"/>
               </a:ext>
             </a:extLst>
           </p:cNvPr>
@@ -6475,7 +6473,7 @@
           <p:cNvPr id="19" name="">
             <a:extLst xmlns:a="http://schemas.openxmlformats.org/drawingml/2006/main">
               <a:ext uri="{FF2B5EF4-FFF2-40B4-BE49-F238E27FC236}">
-                <a16:creationId xmlns:a16="http://schemas.microsoft.com/office/drawing/2014/main" id="{D7150225-566A-4730-80DC-A1186C827120}"/>
+                <a16:creationId xmlns:a16="http://schemas.microsoft.com/office/drawing/2014/main" id="{5839089B-4DA9-4C22-AEF8-56BD312A1EC7}"/>
               </a:ext>
             </a:extLst>
           </p:cNvPr>
@@ -6539,7 +6537,7 @@
           <p:cNvPr id="20" name="">
             <a:extLst xmlns:a="http://schemas.openxmlformats.org/drawingml/2006/main">
               <a:ext uri="{FF2B5EF4-FFF2-40B4-BE49-F238E27FC236}">
-                <a16:creationId xmlns:a16="http://schemas.microsoft.com/office/drawing/2014/main" id="{541E7D34-D435-4158-9F18-200DCB7C53FE}"/>
+                <a16:creationId xmlns:a16="http://schemas.microsoft.com/office/drawing/2014/main" id="{0D1AF9F2-5BA9-463B-894C-1CEDC719275F}"/>
               </a:ext>
             </a:extLst>
           </p:cNvPr>
@@ -6574,7 +6572,7 @@
           <p:cNvPr id="21" name="">
             <a:extLst xmlns:a="http://schemas.openxmlformats.org/drawingml/2006/main">
               <a:ext uri="{FF2B5EF4-FFF2-40B4-BE49-F238E27FC236}">
-                <a16:creationId xmlns:a16="http://schemas.microsoft.com/office/drawing/2014/main" id="{4ADB874C-12CF-45B1-8B81-6ACC2C9A2195}"/>
+                <a16:creationId xmlns:a16="http://schemas.microsoft.com/office/drawing/2014/main" id="{D7C3D5ED-E046-4086-9189-B5F71876F0AD}"/>
               </a:ext>
             </a:extLst>
           </p:cNvPr>
@@ -6638,7 +6636,7 @@
           <p:cNvPr id="22" name="">
             <a:extLst xmlns:a="http://schemas.openxmlformats.org/drawingml/2006/main">
               <a:ext uri="{FF2B5EF4-FFF2-40B4-BE49-F238E27FC236}">
-                <a16:creationId xmlns:a16="http://schemas.microsoft.com/office/drawing/2014/main" id="{40C2C055-22FE-4542-A930-EE7FC3C84413}"/>
+                <a16:creationId xmlns:a16="http://schemas.microsoft.com/office/drawing/2014/main" id="{99FA8CF6-F817-403B-BF63-98B01EB65AB7}"/>
               </a:ext>
             </a:extLst>
           </p:cNvPr>
@@ -6673,7 +6671,7 @@
           <p:cNvPr id="23" name="">
             <a:extLst xmlns:a="http://schemas.openxmlformats.org/drawingml/2006/main">
               <a:ext uri="{FF2B5EF4-FFF2-40B4-BE49-F238E27FC236}">
-                <a16:creationId xmlns:a16="http://schemas.microsoft.com/office/drawing/2014/main" id="{AC478BD3-91F0-466B-B3C2-937A4D24BAB9}"/>
+                <a16:creationId xmlns:a16="http://schemas.microsoft.com/office/drawing/2014/main" id="{AFF7CFC4-46BE-44A4-8829-07520A96525E}"/>
               </a:ext>
             </a:extLst>
           </p:cNvPr>
@@ -6737,7 +6735,7 @@
           <p:cNvPr id="24" name="">
             <a:extLst xmlns:a="http://schemas.openxmlformats.org/drawingml/2006/main">
               <a:ext uri="{FF2B5EF4-FFF2-40B4-BE49-F238E27FC236}">
-                <a16:creationId xmlns:a16="http://schemas.microsoft.com/office/drawing/2014/main" id="{4E0A59BF-47C4-4A76-8E50-0420D85E719E}"/>
+                <a16:creationId xmlns:a16="http://schemas.microsoft.com/office/drawing/2014/main" id="{CC14D990-A485-4A82-B616-5ED7DCC6C74D}"/>
               </a:ext>
             </a:extLst>
           </p:cNvPr>
@@ -6772,7 +6770,7 @@
           <p:cNvPr id="25" name="">
             <a:extLst xmlns:a="http://schemas.openxmlformats.org/drawingml/2006/main">
               <a:ext uri="{FF2B5EF4-FFF2-40B4-BE49-F238E27FC236}">
-                <a16:creationId xmlns:a16="http://schemas.microsoft.com/office/drawing/2014/main" id="{5B9AB9F7-E6E9-458A-9D6D-5BAAB2123AB5}"/>
+                <a16:creationId xmlns:a16="http://schemas.microsoft.com/office/drawing/2014/main" id="{888A4C80-1F7F-431A-A9A7-E660BC505FA4}"/>
               </a:ext>
             </a:extLst>
           </p:cNvPr>
@@ -6836,7 +6834,7 @@
           <p:cNvPr id="26" name="">
             <a:extLst xmlns:a="http://schemas.openxmlformats.org/drawingml/2006/main">
               <a:ext uri="{FF2B5EF4-FFF2-40B4-BE49-F238E27FC236}">
-                <a16:creationId xmlns:a16="http://schemas.microsoft.com/office/drawing/2014/main" id="{4A0EF0AE-1045-4427-BE6D-618E1DBC0D33}"/>
+                <a16:creationId xmlns:a16="http://schemas.microsoft.com/office/drawing/2014/main" id="{CB1F47FD-EE67-4737-9569-6ECAAAE87EA8}"/>
               </a:ext>
             </a:extLst>
           </p:cNvPr>
@@ -6871,7 +6869,7 @@
           <p:cNvPr id="27" name="">
             <a:extLst xmlns:a="http://schemas.openxmlformats.org/drawingml/2006/main">
               <a:ext uri="{FF2B5EF4-FFF2-40B4-BE49-F238E27FC236}">
-                <a16:creationId xmlns:a16="http://schemas.microsoft.com/office/drawing/2014/main" id="{12040E8D-C0BD-4041-9EEA-991D76945742}"/>
+                <a16:creationId xmlns:a16="http://schemas.microsoft.com/office/drawing/2014/main" id="{1BA41579-F95A-4835-B36D-15A5E9C42CC9}"/>
               </a:ext>
             </a:extLst>
           </p:cNvPr>
@@ -6935,7 +6933,7 @@
           <p:cNvPr id="28" name="">
             <a:extLst xmlns:a="http://schemas.openxmlformats.org/drawingml/2006/main">
               <a:ext uri="{FF2B5EF4-FFF2-40B4-BE49-F238E27FC236}">
-                <a16:creationId xmlns:a16="http://schemas.microsoft.com/office/drawing/2014/main" id="{6414D73D-A0E4-4D16-AC56-37BD38CEDDE0}"/>
+                <a16:creationId xmlns:a16="http://schemas.microsoft.com/office/drawing/2014/main" id="{326590ED-7B0A-4C91-AC88-375B17F41C16}"/>
               </a:ext>
             </a:extLst>
           </p:cNvPr>
@@ -6968,7 +6966,7 @@
           <p:cNvPr id="29" name="">
             <a:extLst xmlns:a="http://schemas.openxmlformats.org/drawingml/2006/main">
               <a:ext uri="{FF2B5EF4-FFF2-40B4-BE49-F238E27FC236}">
-                <a16:creationId xmlns:a16="http://schemas.microsoft.com/office/drawing/2014/main" id="{0E82DF70-18F6-4F11-BF37-5CCE464DF3FA}"/>
+                <a16:creationId xmlns:a16="http://schemas.microsoft.com/office/drawing/2014/main" id="{113BECC3-1974-41B3-838A-276159592D87}"/>
               </a:ext>
             </a:extLst>
           </p:cNvPr>
@@ -7003,7 +7001,7 @@
           <p:cNvPr id="30" name="">
             <a:extLst xmlns:a="http://schemas.openxmlformats.org/drawingml/2006/main">
               <a:ext uri="{FF2B5EF4-FFF2-40B4-BE49-F238E27FC236}">
-                <a16:creationId xmlns:a16="http://schemas.microsoft.com/office/drawing/2014/main" id="{FE0999EE-1A4B-4DAB-B270-389934B669B5}"/>
+                <a16:creationId xmlns:a16="http://schemas.microsoft.com/office/drawing/2014/main" id="{4392D455-562F-4095-96DD-E4ABD534B792}"/>
               </a:ext>
             </a:extLst>
           </p:cNvPr>
@@ -7067,7 +7065,7 @@
           <p:cNvPr id="31" name="">
             <a:extLst xmlns:a="http://schemas.openxmlformats.org/drawingml/2006/main">
               <a:ext uri="{FF2B5EF4-FFF2-40B4-BE49-F238E27FC236}">
-                <a16:creationId xmlns:a16="http://schemas.microsoft.com/office/drawing/2014/main" id="{D939B370-C451-4E1A-91BF-24480C293338}"/>
+                <a16:creationId xmlns:a16="http://schemas.microsoft.com/office/drawing/2014/main" id="{0CF6DBB7-28B4-4C87-B71E-8FC02E8A2DE9}"/>
               </a:ext>
             </a:extLst>
           </p:cNvPr>
@@ -7131,7 +7129,7 @@
           <p:cNvPr id="32" name="">
             <a:extLst xmlns:a="http://schemas.openxmlformats.org/drawingml/2006/main">
               <a:ext uri="{FF2B5EF4-FFF2-40B4-BE49-F238E27FC236}">
-                <a16:creationId xmlns:a16="http://schemas.microsoft.com/office/drawing/2014/main" id="{6314DF2C-B132-461F-8867-3EA316AA68A9}"/>
+                <a16:creationId xmlns:a16="http://schemas.microsoft.com/office/drawing/2014/main" id="{ECC7F2CB-C471-441C-9FDF-76FE261F0011}"/>
               </a:ext>
             </a:extLst>
           </p:cNvPr>
@@ -7164,7 +7162,7 @@
           <p:cNvPr id="33" name="">
             <a:extLst xmlns:a="http://schemas.openxmlformats.org/drawingml/2006/main">
               <a:ext uri="{FF2B5EF4-FFF2-40B4-BE49-F238E27FC236}">
-                <a16:creationId xmlns:a16="http://schemas.microsoft.com/office/drawing/2014/main" id="{08E09F8E-4D49-401B-8393-92A16CDEFEC1}"/>
+                <a16:creationId xmlns:a16="http://schemas.microsoft.com/office/drawing/2014/main" id="{F729ABB4-89A3-4B7B-B035-36B175FAF4E9}"/>
               </a:ext>
             </a:extLst>
           </p:cNvPr>
@@ -7228,7 +7226,7 @@
           <p:cNvPr id="34" name="">
             <a:extLst xmlns:a="http://schemas.openxmlformats.org/drawingml/2006/main">
               <a:ext uri="{FF2B5EF4-FFF2-40B4-BE49-F238E27FC236}">
-                <a16:creationId xmlns:a16="http://schemas.microsoft.com/office/drawing/2014/main" id="{0B3A167F-FAA6-4F57-9E74-B4F1A041905B}"/>
+                <a16:creationId xmlns:a16="http://schemas.microsoft.com/office/drawing/2014/main" id="{05729E01-1559-49EB-B2BF-7011DF6F9F35}"/>
               </a:ext>
             </a:extLst>
           </p:cNvPr>
@@ -7282,7 +7280,7 @@
                 <a:ea typeface="Aptos"/>
                 <a:cs typeface="Aptos"/>
               </a:rPr>
-              <a:t>Ask what the AI is guessing.</a:t>
+              <a:t>Ask what the artifact assumes.</a:t>
             </a:r>
           </a:p>
         </p:txBody>
@@ -7292,7 +7290,7 @@
           <p:cNvPr id="35" name="">
             <a:extLst xmlns:a="http://schemas.openxmlformats.org/drawingml/2006/main">
               <a:ext uri="{FF2B5EF4-FFF2-40B4-BE49-F238E27FC236}">
-                <a16:creationId xmlns:a16="http://schemas.microsoft.com/office/drawing/2014/main" id="{0E8672D5-1AA5-49EA-89EE-581221F88B42}"/>
+                <a16:creationId xmlns:a16="http://schemas.microsoft.com/office/drawing/2014/main" id="{78E9E262-C025-499A-AB3C-64292E8126D5}"/>
               </a:ext>
             </a:extLst>
           </p:cNvPr>
@@ -7327,7 +7325,7 @@
           <p:cNvPr id="36" name="">
             <a:extLst xmlns:a="http://schemas.openxmlformats.org/drawingml/2006/main">
               <a:ext uri="{FF2B5EF4-FFF2-40B4-BE49-F238E27FC236}">
-                <a16:creationId xmlns:a16="http://schemas.microsoft.com/office/drawing/2014/main" id="{66EA87F1-390B-4D65-A54E-071AAE8CF671}"/>
+                <a16:creationId xmlns:a16="http://schemas.microsoft.com/office/drawing/2014/main" id="{47DBA603-7DCB-458A-B8CB-0D09325A059D}"/>
               </a:ext>
             </a:extLst>
           </p:cNvPr>
@@ -7391,7 +7389,7 @@
           <p:cNvPr id="37" name="">
             <a:extLst xmlns:a="http://schemas.openxmlformats.org/drawingml/2006/main">
               <a:ext uri="{FF2B5EF4-FFF2-40B4-BE49-F238E27FC236}">
-                <a16:creationId xmlns:a16="http://schemas.microsoft.com/office/drawing/2014/main" id="{922600A7-C968-4494-A4AB-DA878F02F28C}"/>
+                <a16:creationId xmlns:a16="http://schemas.microsoft.com/office/drawing/2014/main" id="{526FFB11-79EC-43F2-84D6-DAA27636E523}"/>
               </a:ext>
             </a:extLst>
           </p:cNvPr>
@@ -7455,7 +7453,7 @@
           <p:cNvPr id="38" name="">
             <a:extLst xmlns:a="http://schemas.openxmlformats.org/drawingml/2006/main">
               <a:ext uri="{FF2B5EF4-FFF2-40B4-BE49-F238E27FC236}">
-                <a16:creationId xmlns:a16="http://schemas.microsoft.com/office/drawing/2014/main" id="{3FA55FFB-7FFA-4116-9DA3-EAC213D48299}"/>
+                <a16:creationId xmlns:a16="http://schemas.microsoft.com/office/drawing/2014/main" id="{F328AE47-91E7-4269-94B0-0C05AF82D4E1}"/>
               </a:ext>
             </a:extLst>
           </p:cNvPr>
@@ -7519,7 +7517,7 @@
           <p:cNvPr id="39" name="">
             <a:extLst xmlns:a="http://schemas.openxmlformats.org/drawingml/2006/main">
               <a:ext uri="{FF2B5EF4-FFF2-40B4-BE49-F238E27FC236}">
-                <a16:creationId xmlns:a16="http://schemas.microsoft.com/office/drawing/2014/main" id="{571E6784-70D3-438C-BB5B-7349043DF0E0}"/>
+                <a16:creationId xmlns:a16="http://schemas.microsoft.com/office/drawing/2014/main" id="{AD03094D-29CB-4988-BC24-133624A73D6A}"/>
               </a:ext>
             </a:extLst>
           </p:cNvPr>
@@ -7554,7 +7552,7 @@
           <p:cNvPr id="40" name="">
             <a:extLst xmlns:a="http://schemas.openxmlformats.org/drawingml/2006/main">
               <a:ext uri="{FF2B5EF4-FFF2-40B4-BE49-F238E27FC236}">
-                <a16:creationId xmlns:a16="http://schemas.microsoft.com/office/drawing/2014/main" id="{2F5AC4AA-681D-43C9-B641-C87CEE12D540}"/>
+                <a16:creationId xmlns:a16="http://schemas.microsoft.com/office/drawing/2014/main" id="{323A2834-5EFB-450F-968B-D6E25F866968}"/>
               </a:ext>
             </a:extLst>
           </p:cNvPr>
@@ -7589,7 +7587,7 @@
           <p:cNvPr id="41" name="">
             <a:extLst xmlns:a="http://schemas.openxmlformats.org/drawingml/2006/main">
               <a:ext uri="{FF2B5EF4-FFF2-40B4-BE49-F238E27FC236}">
-                <a16:creationId xmlns:a16="http://schemas.microsoft.com/office/drawing/2014/main" id="{3F18D9B7-20B2-4FA0-9564-B6A3115159C8}"/>
+                <a16:creationId xmlns:a16="http://schemas.microsoft.com/office/drawing/2014/main" id="{308E7BC0-35A8-4AFD-9FFC-86C857315E58}"/>
               </a:ext>
             </a:extLst>
           </p:cNvPr>
@@ -7624,7 +7622,7 @@
           <p:cNvPr id="42" name="kicker-07-marker">
             <a:extLst xmlns:a="http://schemas.openxmlformats.org/drawingml/2006/main">
               <a:ext uri="{FF2B5EF4-FFF2-40B4-BE49-F238E27FC236}">
-                <a16:creationId xmlns:a16="http://schemas.microsoft.com/office/drawing/2014/main" id="{1744B262-2971-4586-86BB-98CF37153EC3}"/>
+                <a16:creationId xmlns:a16="http://schemas.microsoft.com/office/drawing/2014/main" id="{3F64F31A-076A-474F-B21E-37EABC950B11}"/>
               </a:ext>
             </a:extLst>
           </p:cNvPr>
@@ -7659,7 +7657,7 @@
           <p:cNvPr id="43" name="kicker-07-label">
             <a:extLst xmlns:a="http://schemas.openxmlformats.org/drawingml/2006/main">
               <a:ext uri="{FF2B5EF4-FFF2-40B4-BE49-F238E27FC236}">
-                <a16:creationId xmlns:a16="http://schemas.microsoft.com/office/drawing/2014/main" id="{FC8979B1-0567-4039-97FD-E28537BE8720}"/>
+                <a16:creationId xmlns:a16="http://schemas.microsoft.com/office/drawing/2014/main" id="{D62ADAE6-5148-4BD3-894A-91C2235A587E}"/>
               </a:ext>
             </a:extLst>
           </p:cNvPr>
@@ -7713,7 +7711,7 @@
                 <a:ea typeface="Aptos"/>
                 <a:cs typeface="Aptos"/>
               </a:rPr>
-              <a:t>MODULE 1 / LESSON 07 / HUMAN CORRECTION</a:t>
+              <a:t>MODULE 1 / LESSON 07 / QUALITY CONTROL</a:t>
             </a:r>
           </a:p>
         </p:txBody>
@@ -7723,7 +7721,7 @@
           <p:cNvPr id="44" name="">
             <a:extLst xmlns:a="http://schemas.openxmlformats.org/drawingml/2006/main">
               <a:ext uri="{FF2B5EF4-FFF2-40B4-BE49-F238E27FC236}">
-                <a16:creationId xmlns:a16="http://schemas.microsoft.com/office/drawing/2014/main" id="{CD086FA1-FE66-4785-8EF3-AF3436F32248}"/>
+                <a16:creationId xmlns:a16="http://schemas.microsoft.com/office/drawing/2014/main" id="{DB13D27C-E7A6-41E2-82FF-D23B64ECDC7A}"/>
               </a:ext>
             </a:extLst>
           </p:cNvPr>
@@ -7777,7 +7775,7 @@
                 <a:ea typeface="Aptos Display"/>
                 <a:cs typeface="Aptos Display"/>
               </a:rPr>
-              <a:t>AI can draft structure. Humans must repair industrial reality.</a:t>
+              <a:t>Reject weak artifacts before they become operating practice.</a:t>
             </a:r>
           </a:p>
         </p:txBody>
@@ -7787,7 +7785,7 @@
           <p:cNvPr id="45" name="">
             <a:extLst xmlns:a="http://schemas.openxmlformats.org/drawingml/2006/main">
               <a:ext uri="{FF2B5EF4-FFF2-40B4-BE49-F238E27FC236}">
-                <a16:creationId xmlns:a16="http://schemas.microsoft.com/office/drawing/2014/main" id="{0A712284-48D6-44A4-8FC5-B052EB2067AB}"/>
+                <a16:creationId xmlns:a16="http://schemas.microsoft.com/office/drawing/2014/main" id="{0A00886E-9B7F-4F21-AB32-27DEE8C0A74D}"/>
               </a:ext>
             </a:extLst>
           </p:cNvPr>
@@ -7851,7 +7849,7 @@
           <p:cNvPr id="46" name="">
             <a:extLst xmlns:a="http://schemas.openxmlformats.org/drawingml/2006/main">
               <a:ext uri="{FF2B5EF4-FFF2-40B4-BE49-F238E27FC236}">
-                <a16:creationId xmlns:a16="http://schemas.microsoft.com/office/drawing/2014/main" id="{3798D615-E426-40AB-8D8A-B5D4C7E09CB9}"/>
+                <a16:creationId xmlns:a16="http://schemas.microsoft.com/office/drawing/2014/main" id="{87B800C6-ADB2-453C-B020-03F16C4A0A8F}"/>
               </a:ext>
             </a:extLst>
           </p:cNvPr>
@@ -7886,7 +7884,7 @@
           <p:cNvPr id="47" name="">
             <a:extLst xmlns:a="http://schemas.openxmlformats.org/drawingml/2006/main">
               <a:ext uri="{FF2B5EF4-FFF2-40B4-BE49-F238E27FC236}">
-                <a16:creationId xmlns:a16="http://schemas.microsoft.com/office/drawing/2014/main" id="{78026EC6-EEAB-4EB8-9730-02778F18586D}"/>
+                <a16:creationId xmlns:a16="http://schemas.microsoft.com/office/drawing/2014/main" id="{8356A45A-080C-40A9-BB26-ECB4EC946349}"/>
               </a:ext>
             </a:extLst>
           </p:cNvPr>
@@ -7921,7 +7919,7 @@
           <p:cNvPr id="48" name="">
             <a:extLst xmlns:a="http://schemas.openxmlformats.org/drawingml/2006/main">
               <a:ext uri="{FF2B5EF4-FFF2-40B4-BE49-F238E27FC236}">
-                <a16:creationId xmlns:a16="http://schemas.microsoft.com/office/drawing/2014/main" id="{BD1A5505-9566-4B1F-9B53-4F1BF7B6B597}"/>
+                <a16:creationId xmlns:a16="http://schemas.microsoft.com/office/drawing/2014/main" id="{A6320BC9-0076-4050-A3ED-4DF3B3112C19}"/>
               </a:ext>
             </a:extLst>
           </p:cNvPr>
@@ -7956,7 +7954,7 @@
           <p:cNvPr id="49" name="">
             <a:extLst xmlns:a="http://schemas.openxmlformats.org/drawingml/2006/main">
               <a:ext uri="{FF2B5EF4-FFF2-40B4-BE49-F238E27FC236}">
-                <a16:creationId xmlns:a16="http://schemas.microsoft.com/office/drawing/2014/main" id="{6D52126F-8C79-401D-A88B-7757DE158C6D}"/>
+                <a16:creationId xmlns:a16="http://schemas.microsoft.com/office/drawing/2014/main" id="{3DF2EC36-5C6B-48FD-9C3D-6233341F9F2E}"/>
               </a:ext>
             </a:extLst>
           </p:cNvPr>
@@ -7991,7 +7989,7 @@
           <p:cNvPr id="50" name="">
             <a:extLst xmlns:a="http://schemas.openxmlformats.org/drawingml/2006/main">
               <a:ext uri="{FF2B5EF4-FFF2-40B4-BE49-F238E27FC236}">
-                <a16:creationId xmlns:a16="http://schemas.microsoft.com/office/drawing/2014/main" id="{EA8D4E2F-95FB-482F-8539-6D2CF9605685}"/>
+                <a16:creationId xmlns:a16="http://schemas.microsoft.com/office/drawing/2014/main" id="{F35BC628-6577-41C6-921D-B6D976853DD7}"/>
               </a:ext>
             </a:extLst>
           </p:cNvPr>
@@ -8055,7 +8053,7 @@
           <p:cNvPr id="51" name="">
             <a:extLst xmlns:a="http://schemas.openxmlformats.org/drawingml/2006/main">
               <a:ext uri="{FF2B5EF4-FFF2-40B4-BE49-F238E27FC236}">
-                <a16:creationId xmlns:a16="http://schemas.microsoft.com/office/drawing/2014/main" id="{9C63C38B-2D7F-4CFF-B537-B30C52A6193D}"/>
+                <a16:creationId xmlns:a16="http://schemas.microsoft.com/office/drawing/2014/main" id="{875DB658-2CB0-4D54-9916-C4689DF63F5D}"/>
               </a:ext>
             </a:extLst>
           </p:cNvPr>
@@ -8119,7 +8117,7 @@
           <p:cNvPr id="52" name="">
             <a:extLst xmlns:a="http://schemas.openxmlformats.org/drawingml/2006/main">
               <a:ext uri="{FF2B5EF4-FFF2-40B4-BE49-F238E27FC236}">
-                <a16:creationId xmlns:a16="http://schemas.microsoft.com/office/drawing/2014/main" id="{89D050CB-E879-403A-94E0-DE52AB944F01}"/>
+                <a16:creationId xmlns:a16="http://schemas.microsoft.com/office/drawing/2014/main" id="{7DA2A521-CCA4-47C4-B6C8-4BEE912F35AD}"/>
               </a:ext>
             </a:extLst>
           </p:cNvPr>
@@ -8181,7 +8179,7 @@
     </p:spTree>
     <p:extLst>
       <p:ext uri="{BB962C8B-B14F-4D97-AF65-F5344CB8AC3E}">
-        <p14:creationId xmlns:p14="http://schemas.microsoft.com/office/powerpoint/2010/main" val="136697611"/>
+        <p14:creationId xmlns:p14="http://schemas.microsoft.com/office/powerpoint/2010/main" val="1133141606"/>
       </p:ext>
     </p:extLst>
   </p:cSld>
@@ -8205,7 +8203,7 @@
           <p:cNvPr id="1" name="">
             <a:extLst xmlns:a="http://schemas.openxmlformats.org/drawingml/2006/main">
               <a:ext uri="{FF2B5EF4-FFF2-40B4-BE49-F238E27FC236}">
-                <a16:creationId xmlns:a16="http://schemas.microsoft.com/office/drawing/2014/main" id="{2447163D-2D51-4B8C-9F0E-C20F96AF6DC2}"/>
+                <a16:creationId xmlns:a16="http://schemas.microsoft.com/office/drawing/2014/main" id="{17FC8614-A02C-4E02-9074-A09E787678C2}"/>
               </a:ext>
             </a:extLst>
           </p:cNvPr>
@@ -8240,7 +8238,7 @@
           <p:cNvPr id="2" name="">
             <a:extLst xmlns:a="http://schemas.openxmlformats.org/drawingml/2006/main">
               <a:ext uri="{FF2B5EF4-FFF2-40B4-BE49-F238E27FC236}">
-                <a16:creationId xmlns:a16="http://schemas.microsoft.com/office/drawing/2014/main" id="{F34D23B3-CAA9-46CD-8B90-615B76CBB04C}"/>
+                <a16:creationId xmlns:a16="http://schemas.microsoft.com/office/drawing/2014/main" id="{9E33B50F-7BA2-411F-9B30-D085BED6183A}"/>
               </a:ext>
             </a:extLst>
           </p:cNvPr>
@@ -8275,7 +8273,7 @@
           <p:cNvPr id="3" name="">
             <a:extLst xmlns:a="http://schemas.openxmlformats.org/drawingml/2006/main">
               <a:ext uri="{FF2B5EF4-FFF2-40B4-BE49-F238E27FC236}">
-                <a16:creationId xmlns:a16="http://schemas.microsoft.com/office/drawing/2014/main" id="{81C9CF46-5B1D-41D2-B250-51F4C5A8FC9E}"/>
+                <a16:creationId xmlns:a16="http://schemas.microsoft.com/office/drawing/2014/main" id="{1CFC2D36-1442-4B1D-87A5-B43DC85CADCA}"/>
               </a:ext>
             </a:extLst>
           </p:cNvPr>
@@ -8310,7 +8308,7 @@
           <p:cNvPr id="4" name="kicker-07-marker">
             <a:extLst xmlns:a="http://schemas.openxmlformats.org/drawingml/2006/main">
               <a:ext uri="{FF2B5EF4-FFF2-40B4-BE49-F238E27FC236}">
-                <a16:creationId xmlns:a16="http://schemas.microsoft.com/office/drawing/2014/main" id="{BAD3B7C1-E25F-4E5C-9219-50896D079ECA}"/>
+                <a16:creationId xmlns:a16="http://schemas.microsoft.com/office/drawing/2014/main" id="{4E378EE3-E154-4F79-92E9-05BAF7A1C08C}"/>
               </a:ext>
             </a:extLst>
           </p:cNvPr>
@@ -8345,7 +8343,7 @@
           <p:cNvPr id="5" name="kicker-07-label">
             <a:extLst xmlns:a="http://schemas.openxmlformats.org/drawingml/2006/main">
               <a:ext uri="{FF2B5EF4-FFF2-40B4-BE49-F238E27FC236}">
-                <a16:creationId xmlns:a16="http://schemas.microsoft.com/office/drawing/2014/main" id="{B590CC22-B198-4E8A-82B4-8B22861DD291}"/>
+                <a16:creationId xmlns:a16="http://schemas.microsoft.com/office/drawing/2014/main" id="{ADA0DEE9-109E-415E-817D-665663D233FD}"/>
               </a:ext>
             </a:extLst>
           </p:cNvPr>
@@ -8409,7 +8407,7 @@
           <p:cNvPr id="6" name="">
             <a:extLst xmlns:a="http://schemas.openxmlformats.org/drawingml/2006/main">
               <a:ext uri="{FF2B5EF4-FFF2-40B4-BE49-F238E27FC236}">
-                <a16:creationId xmlns:a16="http://schemas.microsoft.com/office/drawing/2014/main" id="{C9BE06EC-D0A2-44E6-A169-C0B1A051AD01}"/>
+                <a16:creationId xmlns:a16="http://schemas.microsoft.com/office/drawing/2014/main" id="{77746810-A200-45DD-A227-FCD21440C028}"/>
               </a:ext>
             </a:extLst>
           </p:cNvPr>
@@ -8473,7 +8471,7 @@
           <p:cNvPr id="7" name="">
             <a:extLst xmlns:a="http://schemas.openxmlformats.org/drawingml/2006/main">
               <a:ext uri="{FF2B5EF4-FFF2-40B4-BE49-F238E27FC236}">
-                <a16:creationId xmlns:a16="http://schemas.microsoft.com/office/drawing/2014/main" id="{A030295B-187A-44F8-9C7D-51FD68EEBB1D}"/>
+                <a16:creationId xmlns:a16="http://schemas.microsoft.com/office/drawing/2014/main" id="{1EE37B30-2608-4B47-8EBC-CB55366CD306}"/>
               </a:ext>
             </a:extLst>
           </p:cNvPr>
@@ -8537,7 +8535,7 @@
           <p:cNvPr id="8" name="">
             <a:extLst xmlns:a="http://schemas.openxmlformats.org/drawingml/2006/main">
               <a:ext uri="{FF2B5EF4-FFF2-40B4-BE49-F238E27FC236}">
-                <a16:creationId xmlns:a16="http://schemas.microsoft.com/office/drawing/2014/main" id="{375ED87A-0516-4DA2-8A96-707BCA73565C}"/>
+                <a16:creationId xmlns:a16="http://schemas.microsoft.com/office/drawing/2014/main" id="{AFDEFCA4-A948-4356-93B2-FD018D86BF23}"/>
               </a:ext>
             </a:extLst>
           </p:cNvPr>
@@ -8572,7 +8570,7 @@
           <p:cNvPr id="9" name="">
             <a:extLst xmlns:a="http://schemas.openxmlformats.org/drawingml/2006/main">
               <a:ext uri="{FF2B5EF4-FFF2-40B4-BE49-F238E27FC236}">
-                <a16:creationId xmlns:a16="http://schemas.microsoft.com/office/drawing/2014/main" id="{B4BBCB7E-E9A0-4E6F-8827-A9C6EC2EF350}"/>
+                <a16:creationId xmlns:a16="http://schemas.microsoft.com/office/drawing/2014/main" id="{54C16771-2DEA-4033-930B-2CA115E4DFB1}"/>
               </a:ext>
             </a:extLst>
           </p:cNvPr>
@@ -8636,7 +8634,7 @@
           <p:cNvPr id="10" name="">
             <a:extLst xmlns:a="http://schemas.openxmlformats.org/drawingml/2006/main">
               <a:ext uri="{FF2B5EF4-FFF2-40B4-BE49-F238E27FC236}">
-                <a16:creationId xmlns:a16="http://schemas.microsoft.com/office/drawing/2014/main" id="{90A99ECA-CFDD-4494-A1A4-61B13AE573A0}"/>
+                <a16:creationId xmlns:a16="http://schemas.microsoft.com/office/drawing/2014/main" id="{E4733882-48F5-4D25-A477-3CC6B7A7BA0A}"/>
               </a:ext>
             </a:extLst>
           </p:cNvPr>
@@ -8700,7 +8698,7 @@
           <p:cNvPr id="11" name="">
             <a:extLst xmlns:a="http://schemas.openxmlformats.org/drawingml/2006/main">
               <a:ext uri="{FF2B5EF4-FFF2-40B4-BE49-F238E27FC236}">
-                <a16:creationId xmlns:a16="http://schemas.microsoft.com/office/drawing/2014/main" id="{F88C8204-53A6-48B1-9DB1-FE2DC42E1C7D}"/>
+                <a16:creationId xmlns:a16="http://schemas.microsoft.com/office/drawing/2014/main" id="{3B440797-1D92-499B-9A29-45722B042A10}"/>
               </a:ext>
             </a:extLst>
           </p:cNvPr>
@@ -8764,7 +8762,7 @@
           <p:cNvPr id="12" name="">
             <a:extLst xmlns:a="http://schemas.openxmlformats.org/drawingml/2006/main">
               <a:ext uri="{FF2B5EF4-FFF2-40B4-BE49-F238E27FC236}">
-                <a16:creationId xmlns:a16="http://schemas.microsoft.com/office/drawing/2014/main" id="{9875905E-4942-44D9-9DDF-A2EE76193B62}"/>
+                <a16:creationId xmlns:a16="http://schemas.microsoft.com/office/drawing/2014/main" id="{A22EA1D5-3E5B-4E34-9115-2ACD14536D7F}"/>
               </a:ext>
             </a:extLst>
           </p:cNvPr>
@@ -8797,7 +8795,7 @@
           <p:cNvPr id="13" name="">
             <a:extLst xmlns:a="http://schemas.openxmlformats.org/drawingml/2006/main">
               <a:ext uri="{FF2B5EF4-FFF2-40B4-BE49-F238E27FC236}">
-                <a16:creationId xmlns:a16="http://schemas.microsoft.com/office/drawing/2014/main" id="{C503C15A-D8FA-4E50-B2B9-F99758D7F675}"/>
+                <a16:creationId xmlns:a16="http://schemas.microsoft.com/office/drawing/2014/main" id="{362DFFA9-6C97-4AEB-85F4-6059AAE14C84}"/>
               </a:ext>
             </a:extLst>
           </p:cNvPr>
@@ -8832,7 +8830,7 @@
           <p:cNvPr id="14" name="">
             <a:extLst xmlns:a="http://schemas.openxmlformats.org/drawingml/2006/main">
               <a:ext uri="{FF2B5EF4-FFF2-40B4-BE49-F238E27FC236}">
-                <a16:creationId xmlns:a16="http://schemas.microsoft.com/office/drawing/2014/main" id="{8C27A396-89FF-400B-BECD-4397AD7529E3}"/>
+                <a16:creationId xmlns:a16="http://schemas.microsoft.com/office/drawing/2014/main" id="{A0E94C1A-FB0D-4461-833B-1539F4417081}"/>
               </a:ext>
             </a:extLst>
           </p:cNvPr>
@@ -8896,7 +8894,7 @@
           <p:cNvPr id="15" name="">
             <a:extLst xmlns:a="http://schemas.openxmlformats.org/drawingml/2006/main">
               <a:ext uri="{FF2B5EF4-FFF2-40B4-BE49-F238E27FC236}">
-                <a16:creationId xmlns:a16="http://schemas.microsoft.com/office/drawing/2014/main" id="{AB4267C9-D899-4551-A409-89C294316085}"/>
+                <a16:creationId xmlns:a16="http://schemas.microsoft.com/office/drawing/2014/main" id="{0B6953BF-8959-49D0-9707-79CF30D209C2}"/>
               </a:ext>
             </a:extLst>
           </p:cNvPr>
@@ -8929,7 +8927,7 @@
           <p:cNvPr id="16" name="">
             <a:extLst xmlns:a="http://schemas.openxmlformats.org/drawingml/2006/main">
               <a:ext uri="{FF2B5EF4-FFF2-40B4-BE49-F238E27FC236}">
-                <a16:creationId xmlns:a16="http://schemas.microsoft.com/office/drawing/2014/main" id="{B91E3C95-EFAE-42C5-ADAD-582B29335721}"/>
+                <a16:creationId xmlns:a16="http://schemas.microsoft.com/office/drawing/2014/main" id="{53E837DC-EC84-446D-BF2B-FF52E1128064}"/>
               </a:ext>
             </a:extLst>
           </p:cNvPr>
@@ -8964,7 +8962,7 @@
           <p:cNvPr id="17" name="">
             <a:extLst xmlns:a="http://schemas.openxmlformats.org/drawingml/2006/main">
               <a:ext uri="{FF2B5EF4-FFF2-40B4-BE49-F238E27FC236}">
-                <a16:creationId xmlns:a16="http://schemas.microsoft.com/office/drawing/2014/main" id="{0DFD309A-46B3-4F60-AEDB-8FF47697AC66}"/>
+                <a16:creationId xmlns:a16="http://schemas.microsoft.com/office/drawing/2014/main" id="{E30A32B7-A0FA-47E2-8C53-65AC343D8D81}"/>
               </a:ext>
             </a:extLst>
           </p:cNvPr>
@@ -9028,7 +9026,7 @@
           <p:cNvPr id="18" name="">
             <a:extLst xmlns:a="http://schemas.openxmlformats.org/drawingml/2006/main">
               <a:ext uri="{FF2B5EF4-FFF2-40B4-BE49-F238E27FC236}">
-                <a16:creationId xmlns:a16="http://schemas.microsoft.com/office/drawing/2014/main" id="{3441E847-1CA4-46A9-8719-6F526CDA401E}"/>
+                <a16:creationId xmlns:a16="http://schemas.microsoft.com/office/drawing/2014/main" id="{1118FE24-4E89-498A-9DDB-51C2E1417392}"/>
               </a:ext>
             </a:extLst>
           </p:cNvPr>
@@ -9061,7 +9059,7 @@
           <p:cNvPr id="19" name="">
             <a:extLst xmlns:a="http://schemas.openxmlformats.org/drawingml/2006/main">
               <a:ext uri="{FF2B5EF4-FFF2-40B4-BE49-F238E27FC236}">
-                <a16:creationId xmlns:a16="http://schemas.microsoft.com/office/drawing/2014/main" id="{9FA8E979-9F3C-4077-8930-1BB4727D2377}"/>
+                <a16:creationId xmlns:a16="http://schemas.microsoft.com/office/drawing/2014/main" id="{5EB5DCAB-403A-44D4-BA47-9A28AA20ED7C}"/>
               </a:ext>
             </a:extLst>
           </p:cNvPr>
@@ -9096,7 +9094,7 @@
           <p:cNvPr id="20" name="">
             <a:extLst xmlns:a="http://schemas.openxmlformats.org/drawingml/2006/main">
               <a:ext uri="{FF2B5EF4-FFF2-40B4-BE49-F238E27FC236}">
-                <a16:creationId xmlns:a16="http://schemas.microsoft.com/office/drawing/2014/main" id="{7FD22CFD-DC78-48E3-A437-9C2B49F962FA}"/>
+                <a16:creationId xmlns:a16="http://schemas.microsoft.com/office/drawing/2014/main" id="{FFEF9B40-243B-4D05-AAD7-82CAD1ABEC5D}"/>
               </a:ext>
             </a:extLst>
           </p:cNvPr>
@@ -9160,7 +9158,7 @@
           <p:cNvPr id="21" name="">
             <a:extLst xmlns:a="http://schemas.openxmlformats.org/drawingml/2006/main">
               <a:ext uri="{FF2B5EF4-FFF2-40B4-BE49-F238E27FC236}">
-                <a16:creationId xmlns:a16="http://schemas.microsoft.com/office/drawing/2014/main" id="{0C86D635-B8AB-48D5-A64C-A58D6FD59DAB}"/>
+                <a16:creationId xmlns:a16="http://schemas.microsoft.com/office/drawing/2014/main" id="{E56A957E-7121-46EC-919D-058733C80732}"/>
               </a:ext>
             </a:extLst>
           </p:cNvPr>
@@ -9193,7 +9191,7 @@
           <p:cNvPr id="22" name="">
             <a:extLst xmlns:a="http://schemas.openxmlformats.org/drawingml/2006/main">
               <a:ext uri="{FF2B5EF4-FFF2-40B4-BE49-F238E27FC236}">
-                <a16:creationId xmlns:a16="http://schemas.microsoft.com/office/drawing/2014/main" id="{6185749F-3625-4DD9-864E-A1552FD64EA0}"/>
+                <a16:creationId xmlns:a16="http://schemas.microsoft.com/office/drawing/2014/main" id="{4F88B17E-B7D7-4E30-B8E8-6DF99D5091F1}"/>
               </a:ext>
             </a:extLst>
           </p:cNvPr>
@@ -9228,7 +9226,7 @@
           <p:cNvPr id="23" name="">
             <a:extLst xmlns:a="http://schemas.openxmlformats.org/drawingml/2006/main">
               <a:ext uri="{FF2B5EF4-FFF2-40B4-BE49-F238E27FC236}">
-                <a16:creationId xmlns:a16="http://schemas.microsoft.com/office/drawing/2014/main" id="{B99D4D27-085C-47AB-BF8F-52F9BC1EFD7B}"/>
+                <a16:creationId xmlns:a16="http://schemas.microsoft.com/office/drawing/2014/main" id="{821853E0-58D6-4D57-B5D3-E4D1538E9C18}"/>
               </a:ext>
             </a:extLst>
           </p:cNvPr>
@@ -9292,7 +9290,7 @@
           <p:cNvPr id="24" name="">
             <a:extLst xmlns:a="http://schemas.openxmlformats.org/drawingml/2006/main">
               <a:ext uri="{FF2B5EF4-FFF2-40B4-BE49-F238E27FC236}">
-                <a16:creationId xmlns:a16="http://schemas.microsoft.com/office/drawing/2014/main" id="{98D1C58A-0A44-4B4C-9EB6-C420AC199E9A}"/>
+                <a16:creationId xmlns:a16="http://schemas.microsoft.com/office/drawing/2014/main" id="{69FD7226-5AA7-46B5-82AD-6DB6C85C38F5}"/>
               </a:ext>
             </a:extLst>
           </p:cNvPr>
@@ -9325,7 +9323,7 @@
           <p:cNvPr id="25" name="">
             <a:extLst xmlns:a="http://schemas.openxmlformats.org/drawingml/2006/main">
               <a:ext uri="{FF2B5EF4-FFF2-40B4-BE49-F238E27FC236}">
-                <a16:creationId xmlns:a16="http://schemas.microsoft.com/office/drawing/2014/main" id="{8226B890-AA2B-40EF-B822-5423BAEF98AC}"/>
+                <a16:creationId xmlns:a16="http://schemas.microsoft.com/office/drawing/2014/main" id="{AC94F662-2C6F-4A94-AF0F-E0DD3FDDA9CD}"/>
               </a:ext>
             </a:extLst>
           </p:cNvPr>
@@ -9360,7 +9358,7 @@
           <p:cNvPr id="26" name="">
             <a:extLst xmlns:a="http://schemas.openxmlformats.org/drawingml/2006/main">
               <a:ext uri="{FF2B5EF4-FFF2-40B4-BE49-F238E27FC236}">
-                <a16:creationId xmlns:a16="http://schemas.microsoft.com/office/drawing/2014/main" id="{2308F53F-DF8C-4A14-89A3-5E02A988BB37}"/>
+                <a16:creationId xmlns:a16="http://schemas.microsoft.com/office/drawing/2014/main" id="{7297E436-BFA0-4E00-ACB4-FEB6242D0A00}"/>
               </a:ext>
             </a:extLst>
           </p:cNvPr>
@@ -9424,7 +9422,7 @@
           <p:cNvPr id="27" name="">
             <a:extLst xmlns:a="http://schemas.openxmlformats.org/drawingml/2006/main">
               <a:ext uri="{FF2B5EF4-FFF2-40B4-BE49-F238E27FC236}">
-                <a16:creationId xmlns:a16="http://schemas.microsoft.com/office/drawing/2014/main" id="{43400D91-DE4A-4FF7-9381-9269634ABFE2}"/>
+                <a16:creationId xmlns:a16="http://schemas.microsoft.com/office/drawing/2014/main" id="{3A1FCFAE-5FAE-4708-B796-1631FA4AFEAF}"/>
               </a:ext>
             </a:extLst>
           </p:cNvPr>
@@ -9457,7 +9455,7 @@
           <p:cNvPr id="28" name="">
             <a:extLst xmlns:a="http://schemas.openxmlformats.org/drawingml/2006/main">
               <a:ext uri="{FF2B5EF4-FFF2-40B4-BE49-F238E27FC236}">
-                <a16:creationId xmlns:a16="http://schemas.microsoft.com/office/drawing/2014/main" id="{913B08CA-1C8E-4285-977A-EF7B8A1E1A92}"/>
+                <a16:creationId xmlns:a16="http://schemas.microsoft.com/office/drawing/2014/main" id="{CF3862EC-6458-4AA9-B8F9-951A6B900D6E}"/>
               </a:ext>
             </a:extLst>
           </p:cNvPr>
@@ -9492,7 +9490,7 @@
           <p:cNvPr id="29" name="">
             <a:extLst xmlns:a="http://schemas.openxmlformats.org/drawingml/2006/main">
               <a:ext uri="{FF2B5EF4-FFF2-40B4-BE49-F238E27FC236}">
-                <a16:creationId xmlns:a16="http://schemas.microsoft.com/office/drawing/2014/main" id="{FA89B16C-C775-4A76-B4FC-5A710D2DDC0D}"/>
+                <a16:creationId xmlns:a16="http://schemas.microsoft.com/office/drawing/2014/main" id="{69315B19-3B67-4119-A5C6-7BFECA5EC7F5}"/>
               </a:ext>
             </a:extLst>
           </p:cNvPr>
@@ -9556,7 +9554,7 @@
           <p:cNvPr id="30" name="">
             <a:extLst xmlns:a="http://schemas.openxmlformats.org/drawingml/2006/main">
               <a:ext uri="{FF2B5EF4-FFF2-40B4-BE49-F238E27FC236}">
-                <a16:creationId xmlns:a16="http://schemas.microsoft.com/office/drawing/2014/main" id="{5C0B4BB0-2840-4385-9012-DA187058CF41}"/>
+                <a16:creationId xmlns:a16="http://schemas.microsoft.com/office/drawing/2014/main" id="{14D99CE2-3316-4543-81AB-A96A0A20C5E6}"/>
               </a:ext>
             </a:extLst>
           </p:cNvPr>
@@ -9589,7 +9587,7 @@
           <p:cNvPr id="31" name="">
             <a:extLst xmlns:a="http://schemas.openxmlformats.org/drawingml/2006/main">
               <a:ext uri="{FF2B5EF4-FFF2-40B4-BE49-F238E27FC236}">
-                <a16:creationId xmlns:a16="http://schemas.microsoft.com/office/drawing/2014/main" id="{5A56BEB9-BF0B-403F-88AB-EDF8038B03EA}"/>
+                <a16:creationId xmlns:a16="http://schemas.microsoft.com/office/drawing/2014/main" id="{E3CE80B1-F599-4CA8-B09C-DAF92967EA0D}"/>
               </a:ext>
             </a:extLst>
           </p:cNvPr>
@@ -9624,7 +9622,7 @@
           <p:cNvPr id="32" name="">
             <a:extLst xmlns:a="http://schemas.openxmlformats.org/drawingml/2006/main">
               <a:ext uri="{FF2B5EF4-FFF2-40B4-BE49-F238E27FC236}">
-                <a16:creationId xmlns:a16="http://schemas.microsoft.com/office/drawing/2014/main" id="{458DA16C-2529-470B-A72D-0045DE2B7D32}"/>
+                <a16:creationId xmlns:a16="http://schemas.microsoft.com/office/drawing/2014/main" id="{69A7B615-5A44-4AD6-8A01-2E1AEDB97658}"/>
               </a:ext>
             </a:extLst>
           </p:cNvPr>
@@ -9688,7 +9686,7 @@
           <p:cNvPr id="33" name="">
             <a:extLst xmlns:a="http://schemas.openxmlformats.org/drawingml/2006/main">
               <a:ext uri="{FF2B5EF4-FFF2-40B4-BE49-F238E27FC236}">
-                <a16:creationId xmlns:a16="http://schemas.microsoft.com/office/drawing/2014/main" id="{5ECAE81F-2AD4-4A7D-8697-90B0D4F5A6AD}"/>
+                <a16:creationId xmlns:a16="http://schemas.microsoft.com/office/drawing/2014/main" id="{1FC202C1-7E93-416E-B35C-A7D2CCD7BD04}"/>
               </a:ext>
             </a:extLst>
           </p:cNvPr>
@@ -9721,7 +9719,7 @@
           <p:cNvPr id="34" name="">
             <a:extLst xmlns:a="http://schemas.openxmlformats.org/drawingml/2006/main">
               <a:ext uri="{FF2B5EF4-FFF2-40B4-BE49-F238E27FC236}">
-                <a16:creationId xmlns:a16="http://schemas.microsoft.com/office/drawing/2014/main" id="{88BC3086-AD33-4359-AFCD-B30D9051464E}"/>
+                <a16:creationId xmlns:a16="http://schemas.microsoft.com/office/drawing/2014/main" id="{09810BF0-AC37-4DDD-BFBF-41F5324ED22A}"/>
               </a:ext>
             </a:extLst>
           </p:cNvPr>
@@ -9756,7 +9754,7 @@
           <p:cNvPr id="35" name="">
             <a:extLst xmlns:a="http://schemas.openxmlformats.org/drawingml/2006/main">
               <a:ext uri="{FF2B5EF4-FFF2-40B4-BE49-F238E27FC236}">
-                <a16:creationId xmlns:a16="http://schemas.microsoft.com/office/drawing/2014/main" id="{E73CA111-8ABF-4384-8900-8D97223C26B7}"/>
+                <a16:creationId xmlns:a16="http://schemas.microsoft.com/office/drawing/2014/main" id="{8685F500-E208-4862-B1BE-4A8F3F30C1EF}"/>
               </a:ext>
             </a:extLst>
           </p:cNvPr>
@@ -9820,7 +9818,7 @@
           <p:cNvPr id="36" name="">
             <a:extLst xmlns:a="http://schemas.openxmlformats.org/drawingml/2006/main">
               <a:ext uri="{FF2B5EF4-FFF2-40B4-BE49-F238E27FC236}">
-                <a16:creationId xmlns:a16="http://schemas.microsoft.com/office/drawing/2014/main" id="{CF8BD5F0-BCCF-480D-B730-B2E4A06504D3}"/>
+                <a16:creationId xmlns:a16="http://schemas.microsoft.com/office/drawing/2014/main" id="{CE6B79CD-7760-45B9-BA5E-64E1E96AE29C}"/>
               </a:ext>
             </a:extLst>
           </p:cNvPr>
@@ -9853,7 +9851,7 @@
           <p:cNvPr id="37" name="">
             <a:extLst xmlns:a="http://schemas.openxmlformats.org/drawingml/2006/main">
               <a:ext uri="{FF2B5EF4-FFF2-40B4-BE49-F238E27FC236}">
-                <a16:creationId xmlns:a16="http://schemas.microsoft.com/office/drawing/2014/main" id="{CA59D44D-F5B1-4C25-B6D6-C924B61998C8}"/>
+                <a16:creationId xmlns:a16="http://schemas.microsoft.com/office/drawing/2014/main" id="{DD60C06E-AF0E-41D0-AEB3-64C545D246DD}"/>
               </a:ext>
             </a:extLst>
           </p:cNvPr>
@@ -9888,7 +9886,7 @@
           <p:cNvPr id="38" name="">
             <a:extLst xmlns:a="http://schemas.openxmlformats.org/drawingml/2006/main">
               <a:ext uri="{FF2B5EF4-FFF2-40B4-BE49-F238E27FC236}">
-                <a16:creationId xmlns:a16="http://schemas.microsoft.com/office/drawing/2014/main" id="{25D40A79-BDD6-4701-BACC-DD52B3095F77}"/>
+                <a16:creationId xmlns:a16="http://schemas.microsoft.com/office/drawing/2014/main" id="{526A815C-C192-403E-BD6A-3BF2359190AA}"/>
               </a:ext>
             </a:extLst>
           </p:cNvPr>
@@ -9952,7 +9950,7 @@
           <p:cNvPr id="39" name="">
             <a:extLst xmlns:a="http://schemas.openxmlformats.org/drawingml/2006/main">
               <a:ext uri="{FF2B5EF4-FFF2-40B4-BE49-F238E27FC236}">
-                <a16:creationId xmlns:a16="http://schemas.microsoft.com/office/drawing/2014/main" id="{79BEE7AC-BE09-4723-B96B-7F8F3EE0B46E}"/>
+                <a16:creationId xmlns:a16="http://schemas.microsoft.com/office/drawing/2014/main" id="{A459D479-BDD7-4F56-B819-B090CC0299A2}"/>
               </a:ext>
             </a:extLst>
           </p:cNvPr>
@@ -9985,7 +9983,7 @@
           <p:cNvPr id="40" name="">
             <a:extLst xmlns:a="http://schemas.openxmlformats.org/drawingml/2006/main">
               <a:ext uri="{FF2B5EF4-FFF2-40B4-BE49-F238E27FC236}">
-                <a16:creationId xmlns:a16="http://schemas.microsoft.com/office/drawing/2014/main" id="{663B3279-197E-4E98-83A2-1719F5F99F97}"/>
+                <a16:creationId xmlns:a16="http://schemas.microsoft.com/office/drawing/2014/main" id="{B6A1CAA5-0F48-4AEA-9249-5DC1A58B74A0}"/>
               </a:ext>
             </a:extLst>
           </p:cNvPr>
@@ -10049,7 +10047,7 @@
           <p:cNvPr id="41" name="">
             <a:extLst xmlns:a="http://schemas.openxmlformats.org/drawingml/2006/main">
               <a:ext uri="{FF2B5EF4-FFF2-40B4-BE49-F238E27FC236}">
-                <a16:creationId xmlns:a16="http://schemas.microsoft.com/office/drawing/2014/main" id="{CB0C09DF-33BB-491A-99D0-9E27B374B61B}"/>
+                <a16:creationId xmlns:a16="http://schemas.microsoft.com/office/drawing/2014/main" id="{E2490D5A-913C-4630-BAE5-C135EDFFEFCB}"/>
               </a:ext>
             </a:extLst>
           </p:cNvPr>
@@ -10113,7 +10111,7 @@
           <p:cNvPr id="42" name="">
             <a:extLst xmlns:a="http://schemas.openxmlformats.org/drawingml/2006/main">
               <a:ext uri="{FF2B5EF4-FFF2-40B4-BE49-F238E27FC236}">
-                <a16:creationId xmlns:a16="http://schemas.microsoft.com/office/drawing/2014/main" id="{6197F1F1-C5FD-43E6-BFFD-3B67DFB0A27A}"/>
+                <a16:creationId xmlns:a16="http://schemas.microsoft.com/office/drawing/2014/main" id="{2134BC54-2920-4D16-9EAD-482B73AD97E0}"/>
               </a:ext>
             </a:extLst>
           </p:cNvPr>
@@ -10148,7 +10146,7 @@
           <p:cNvPr id="43" name="">
             <a:extLst xmlns:a="http://schemas.openxmlformats.org/drawingml/2006/main">
               <a:ext uri="{FF2B5EF4-FFF2-40B4-BE49-F238E27FC236}">
-                <a16:creationId xmlns:a16="http://schemas.microsoft.com/office/drawing/2014/main" id="{C753F4B9-5480-4929-990B-EEF5D52803F8}"/>
+                <a16:creationId xmlns:a16="http://schemas.microsoft.com/office/drawing/2014/main" id="{CB0CA04C-0834-4D98-9213-075EB9DD1F5D}"/>
               </a:ext>
             </a:extLst>
           </p:cNvPr>
@@ -10212,7 +10210,7 @@
           <p:cNvPr id="44" name="">
             <a:extLst xmlns:a="http://schemas.openxmlformats.org/drawingml/2006/main">
               <a:ext uri="{FF2B5EF4-FFF2-40B4-BE49-F238E27FC236}">
-                <a16:creationId xmlns:a16="http://schemas.microsoft.com/office/drawing/2014/main" id="{2D2CB796-BDF6-4325-BDEA-CAD9183A0642}"/>
+                <a16:creationId xmlns:a16="http://schemas.microsoft.com/office/drawing/2014/main" id="{DF76ABC7-385C-4372-B055-46C5E8D929BF}"/>
               </a:ext>
             </a:extLst>
           </p:cNvPr>
@@ -10276,7 +10274,7 @@
           <p:cNvPr id="45" name="">
             <a:extLst xmlns:a="http://schemas.openxmlformats.org/drawingml/2006/main">
               <a:ext uri="{FF2B5EF4-FFF2-40B4-BE49-F238E27FC236}">
-                <a16:creationId xmlns:a16="http://schemas.microsoft.com/office/drawing/2014/main" id="{EAB12AA2-B7ED-46E3-AF3E-9F89E186467C}"/>
+                <a16:creationId xmlns:a16="http://schemas.microsoft.com/office/drawing/2014/main" id="{88ECD979-21CA-4A8B-AA89-41296F9CD359}"/>
               </a:ext>
             </a:extLst>
           </p:cNvPr>
@@ -10338,7 +10336,7 @@
     </p:spTree>
     <p:extLst>
       <p:ext uri="{BB962C8B-B14F-4D97-AF65-F5344CB8AC3E}">
-        <p14:creationId xmlns:p14="http://schemas.microsoft.com/office/powerpoint/2010/main" val="886743692"/>
+        <p14:creationId xmlns:p14="http://schemas.microsoft.com/office/powerpoint/2010/main" val="1196291538"/>
       </p:ext>
     </p:extLst>
   </p:cSld>
@@ -10362,7 +10360,7 @@
           <p:cNvPr id="1" name="">
             <a:extLst xmlns:a="http://schemas.openxmlformats.org/drawingml/2006/main">
               <a:ext uri="{FF2B5EF4-FFF2-40B4-BE49-F238E27FC236}">
-                <a16:creationId xmlns:a16="http://schemas.microsoft.com/office/drawing/2014/main" id="{BAC555C0-FA14-4FA1-992D-2A9D2752995E}"/>
+                <a16:creationId xmlns:a16="http://schemas.microsoft.com/office/drawing/2014/main" id="{3541AB0B-A030-4162-AA6E-AA6A244CC3E2}"/>
               </a:ext>
             </a:extLst>
           </p:cNvPr>
@@ -10397,7 +10395,7 @@
           <p:cNvPr id="2" name="">
             <a:extLst xmlns:a="http://schemas.openxmlformats.org/drawingml/2006/main">
               <a:ext uri="{FF2B5EF4-FFF2-40B4-BE49-F238E27FC236}">
-                <a16:creationId xmlns:a16="http://schemas.microsoft.com/office/drawing/2014/main" id="{ED261ECE-2FCF-41C9-9086-6F01EDF8BD60}"/>
+                <a16:creationId xmlns:a16="http://schemas.microsoft.com/office/drawing/2014/main" id="{DFF136AF-5FFA-4FEF-A67B-0AE7F71400BA}"/>
               </a:ext>
             </a:extLst>
           </p:cNvPr>
@@ -10432,7 +10430,7 @@
           <p:cNvPr id="3" name="">
             <a:extLst xmlns:a="http://schemas.openxmlformats.org/drawingml/2006/main">
               <a:ext uri="{FF2B5EF4-FFF2-40B4-BE49-F238E27FC236}">
-                <a16:creationId xmlns:a16="http://schemas.microsoft.com/office/drawing/2014/main" id="{FA81CAC0-9070-44CA-A905-D8D3A7574517}"/>
+                <a16:creationId xmlns:a16="http://schemas.microsoft.com/office/drawing/2014/main" id="{1C811657-585C-4A44-AA35-5576FFBEFBAF}"/>
               </a:ext>
             </a:extLst>
           </p:cNvPr>
@@ -10467,7 +10465,7 @@
           <p:cNvPr id="4" name="kicker-07-marker">
             <a:extLst xmlns:a="http://schemas.openxmlformats.org/drawingml/2006/main">
               <a:ext uri="{FF2B5EF4-FFF2-40B4-BE49-F238E27FC236}">
-                <a16:creationId xmlns:a16="http://schemas.microsoft.com/office/drawing/2014/main" id="{DF88EF03-7592-41F7-94D3-EA7F8269E9A6}"/>
+                <a16:creationId xmlns:a16="http://schemas.microsoft.com/office/drawing/2014/main" id="{E51A783F-585D-4AF3-8B8A-730991F00E80}"/>
               </a:ext>
             </a:extLst>
           </p:cNvPr>
@@ -10502,7 +10500,7 @@
           <p:cNvPr id="5" name="kicker-07-label">
             <a:extLst xmlns:a="http://schemas.openxmlformats.org/drawingml/2006/main">
               <a:ext uri="{FF2B5EF4-FFF2-40B4-BE49-F238E27FC236}">
-                <a16:creationId xmlns:a16="http://schemas.microsoft.com/office/drawing/2014/main" id="{6164520E-7F97-4717-BE66-2CDB58B369A3}"/>
+                <a16:creationId xmlns:a16="http://schemas.microsoft.com/office/drawing/2014/main" id="{EAC196CA-8BC1-479B-B8A2-37E4CB52C439}"/>
               </a:ext>
             </a:extLst>
           </p:cNvPr>
@@ -10566,7 +10564,7 @@
           <p:cNvPr id="6" name="">
             <a:extLst xmlns:a="http://schemas.openxmlformats.org/drawingml/2006/main">
               <a:ext uri="{FF2B5EF4-FFF2-40B4-BE49-F238E27FC236}">
-                <a16:creationId xmlns:a16="http://schemas.microsoft.com/office/drawing/2014/main" id="{50DA6E42-74E7-45C9-8BA4-87387311981B}"/>
+                <a16:creationId xmlns:a16="http://schemas.microsoft.com/office/drawing/2014/main" id="{B1F3D140-6E05-4625-BF90-152C7A9A31B9}"/>
               </a:ext>
             </a:extLst>
           </p:cNvPr>
@@ -10630,7 +10628,7 @@
           <p:cNvPr id="7" name="">
             <a:extLst xmlns:a="http://schemas.openxmlformats.org/drawingml/2006/main">
               <a:ext uri="{FF2B5EF4-FFF2-40B4-BE49-F238E27FC236}">
-                <a16:creationId xmlns:a16="http://schemas.microsoft.com/office/drawing/2014/main" id="{E0857CAF-F5B3-4BED-8844-B895BC8B3D66}"/>
+                <a16:creationId xmlns:a16="http://schemas.microsoft.com/office/drawing/2014/main" id="{88AFB7C9-2B5B-45D8-8110-3A0680859093}"/>
               </a:ext>
             </a:extLst>
           </p:cNvPr>
@@ -10694,7 +10692,7 @@
           <p:cNvPr id="8" name="">
             <a:extLst xmlns:a="http://schemas.openxmlformats.org/drawingml/2006/main">
               <a:ext uri="{FF2B5EF4-FFF2-40B4-BE49-F238E27FC236}">
-                <a16:creationId xmlns:a16="http://schemas.microsoft.com/office/drawing/2014/main" id="{977B1B74-D70B-4F3F-830C-117102D4948E}"/>
+                <a16:creationId xmlns:a16="http://schemas.microsoft.com/office/drawing/2014/main" id="{63790938-6188-47C9-97D7-31F8D4A151E1}"/>
               </a:ext>
             </a:extLst>
           </p:cNvPr>
@@ -10729,7 +10727,7 @@
           <p:cNvPr id="9" name="">
             <a:extLst xmlns:a="http://schemas.openxmlformats.org/drawingml/2006/main">
               <a:ext uri="{FF2B5EF4-FFF2-40B4-BE49-F238E27FC236}">
-                <a16:creationId xmlns:a16="http://schemas.microsoft.com/office/drawing/2014/main" id="{D52DFF37-EECC-4B75-9FBA-484A1AFE3942}"/>
+                <a16:creationId xmlns:a16="http://schemas.microsoft.com/office/drawing/2014/main" id="{B0AC021E-F3E2-4248-AD1B-57768FC06740}"/>
               </a:ext>
             </a:extLst>
           </p:cNvPr>
@@ -10793,7 +10791,7 @@
           <p:cNvPr id="10" name="">
             <a:extLst xmlns:a="http://schemas.openxmlformats.org/drawingml/2006/main">
               <a:ext uri="{FF2B5EF4-FFF2-40B4-BE49-F238E27FC236}">
-                <a16:creationId xmlns:a16="http://schemas.microsoft.com/office/drawing/2014/main" id="{2BDF8472-B0CB-4A31-834D-6489A7142667}"/>
+                <a16:creationId xmlns:a16="http://schemas.microsoft.com/office/drawing/2014/main" id="{497293EC-B29D-43EE-AD7F-6ED2B5B70BC9}"/>
               </a:ext>
             </a:extLst>
           </p:cNvPr>
@@ -10857,7 +10855,7 @@
           <p:cNvPr id="11" name="">
             <a:extLst xmlns:a="http://schemas.openxmlformats.org/drawingml/2006/main">
               <a:ext uri="{FF2B5EF4-FFF2-40B4-BE49-F238E27FC236}">
-                <a16:creationId xmlns:a16="http://schemas.microsoft.com/office/drawing/2014/main" id="{40BBC2C8-F112-42C2-8565-68FA6C4D8C45}"/>
+                <a16:creationId xmlns:a16="http://schemas.microsoft.com/office/drawing/2014/main" id="{F99F419C-4423-4556-AAFE-D07F966AB9B3}"/>
               </a:ext>
             </a:extLst>
           </p:cNvPr>
@@ -10921,7 +10919,7 @@
           <p:cNvPr id="12" name="">
             <a:extLst xmlns:a="http://schemas.openxmlformats.org/drawingml/2006/main">
               <a:ext uri="{FF2B5EF4-FFF2-40B4-BE49-F238E27FC236}">
-                <a16:creationId xmlns:a16="http://schemas.microsoft.com/office/drawing/2014/main" id="{B95C6E12-0629-4E2A-9358-88CC89ED2631}"/>
+                <a16:creationId xmlns:a16="http://schemas.microsoft.com/office/drawing/2014/main" id="{8DC5A4AA-7775-4266-8E50-D02FDCD59098}"/>
               </a:ext>
             </a:extLst>
           </p:cNvPr>
@@ -10956,7 +10954,7 @@
           <p:cNvPr id="13" name="">
             <a:extLst xmlns:a="http://schemas.openxmlformats.org/drawingml/2006/main">
               <a:ext uri="{FF2B5EF4-FFF2-40B4-BE49-F238E27FC236}">
-                <a16:creationId xmlns:a16="http://schemas.microsoft.com/office/drawing/2014/main" id="{21E38612-6976-4FDB-983B-9672BF2B4508}"/>
+                <a16:creationId xmlns:a16="http://schemas.microsoft.com/office/drawing/2014/main" id="{2AD25D7E-EC4C-4602-95CA-1318A2BAE9A4}"/>
               </a:ext>
             </a:extLst>
           </p:cNvPr>
@@ -10989,7 +10987,7 @@
           <p:cNvPr id="14" name="">
             <a:extLst xmlns:a="http://schemas.openxmlformats.org/drawingml/2006/main">
               <a:ext uri="{FF2B5EF4-FFF2-40B4-BE49-F238E27FC236}">
-                <a16:creationId xmlns:a16="http://schemas.microsoft.com/office/drawing/2014/main" id="{1673A4C0-106A-41A5-90B3-1DB5DD2FAA4F}"/>
+                <a16:creationId xmlns:a16="http://schemas.microsoft.com/office/drawing/2014/main" id="{33BDE1EC-8BAA-4C5A-8C09-83D9DAA38B66}"/>
               </a:ext>
             </a:extLst>
           </p:cNvPr>
@@ -11022,7 +11020,7 @@
           <p:cNvPr id="15" name="">
             <a:extLst xmlns:a="http://schemas.openxmlformats.org/drawingml/2006/main">
               <a:ext uri="{FF2B5EF4-FFF2-40B4-BE49-F238E27FC236}">
-                <a16:creationId xmlns:a16="http://schemas.microsoft.com/office/drawing/2014/main" id="{5E8476A7-B488-4642-B210-A00CCCFC8E1A}"/>
+                <a16:creationId xmlns:a16="http://schemas.microsoft.com/office/drawing/2014/main" id="{C37855E7-E7EC-4BD8-95C0-12287B9F2CC7}"/>
               </a:ext>
             </a:extLst>
           </p:cNvPr>
@@ -11086,7 +11084,7 @@
           <p:cNvPr id="16" name="">
             <a:extLst xmlns:a="http://schemas.openxmlformats.org/drawingml/2006/main">
               <a:ext uri="{FF2B5EF4-FFF2-40B4-BE49-F238E27FC236}">
-                <a16:creationId xmlns:a16="http://schemas.microsoft.com/office/drawing/2014/main" id="{92818115-00DC-4076-AA7E-3104AAB33C59}"/>
+                <a16:creationId xmlns:a16="http://schemas.microsoft.com/office/drawing/2014/main" id="{6A0F963A-F99B-44EA-AF12-813708C3D112}"/>
               </a:ext>
             </a:extLst>
           </p:cNvPr>
@@ -11150,7 +11148,7 @@
           <p:cNvPr id="17" name="">
             <a:extLst xmlns:a="http://schemas.openxmlformats.org/drawingml/2006/main">
               <a:ext uri="{FF2B5EF4-FFF2-40B4-BE49-F238E27FC236}">
-                <a16:creationId xmlns:a16="http://schemas.microsoft.com/office/drawing/2014/main" id="{9B66AD85-B1B2-462F-B972-03113C1403B9}"/>
+                <a16:creationId xmlns:a16="http://schemas.microsoft.com/office/drawing/2014/main" id="{97DED1B8-B30C-4EC2-9D70-7A54A950DC31}"/>
               </a:ext>
             </a:extLst>
           </p:cNvPr>
@@ -11214,7 +11212,7 @@
           <p:cNvPr id="18" name="">
             <a:extLst xmlns:a="http://schemas.openxmlformats.org/drawingml/2006/main">
               <a:ext uri="{FF2B5EF4-FFF2-40B4-BE49-F238E27FC236}">
-                <a16:creationId xmlns:a16="http://schemas.microsoft.com/office/drawing/2014/main" id="{CE7B9209-5FE3-44CA-8BD8-B7F773892708}"/>
+                <a16:creationId xmlns:a16="http://schemas.microsoft.com/office/drawing/2014/main" id="{1205AB33-653B-4B68-9C7D-EC17AE47B6FD}"/>
               </a:ext>
             </a:extLst>
           </p:cNvPr>
@@ -11249,7 +11247,7 @@
           <p:cNvPr id="19" name="">
             <a:extLst xmlns:a="http://schemas.openxmlformats.org/drawingml/2006/main">
               <a:ext uri="{FF2B5EF4-FFF2-40B4-BE49-F238E27FC236}">
-                <a16:creationId xmlns:a16="http://schemas.microsoft.com/office/drawing/2014/main" id="{1FC3995F-BF35-46BC-8E5B-0E21B0455852}"/>
+                <a16:creationId xmlns:a16="http://schemas.microsoft.com/office/drawing/2014/main" id="{591BE9EE-46D5-41B0-BE75-A50449F6E187}"/>
               </a:ext>
             </a:extLst>
           </p:cNvPr>
@@ -11313,7 +11311,7 @@
           <p:cNvPr id="20" name="">
             <a:extLst xmlns:a="http://schemas.openxmlformats.org/drawingml/2006/main">
               <a:ext uri="{FF2B5EF4-FFF2-40B4-BE49-F238E27FC236}">
-                <a16:creationId xmlns:a16="http://schemas.microsoft.com/office/drawing/2014/main" id="{D516681B-CB84-44AA-8730-27AE15975886}"/>
+                <a16:creationId xmlns:a16="http://schemas.microsoft.com/office/drawing/2014/main" id="{D8611B80-A544-4A1B-B656-5C149575CE2A}"/>
               </a:ext>
             </a:extLst>
           </p:cNvPr>
@@ -11377,7 +11375,7 @@
           <p:cNvPr id="21" name="">
             <a:extLst xmlns:a="http://schemas.openxmlformats.org/drawingml/2006/main">
               <a:ext uri="{FF2B5EF4-FFF2-40B4-BE49-F238E27FC236}">
-                <a16:creationId xmlns:a16="http://schemas.microsoft.com/office/drawing/2014/main" id="{554682C6-0966-41B7-99AA-97E908DA8EAB}"/>
+                <a16:creationId xmlns:a16="http://schemas.microsoft.com/office/drawing/2014/main" id="{AA5D5ED3-EECF-4A0C-A74D-07FAC0DCF2F6}"/>
               </a:ext>
             </a:extLst>
           </p:cNvPr>
@@ -11441,7 +11439,7 @@
           <p:cNvPr id="22" name="">
             <a:extLst xmlns:a="http://schemas.openxmlformats.org/drawingml/2006/main">
               <a:ext uri="{FF2B5EF4-FFF2-40B4-BE49-F238E27FC236}">
-                <a16:creationId xmlns:a16="http://schemas.microsoft.com/office/drawing/2014/main" id="{E671EC7F-8E5E-48F9-A920-AEC76D509B7F}"/>
+                <a16:creationId xmlns:a16="http://schemas.microsoft.com/office/drawing/2014/main" id="{B24BB6B8-4A02-4835-B2BC-D5CC94D15773}"/>
               </a:ext>
             </a:extLst>
           </p:cNvPr>
@@ -11476,7 +11474,7 @@
           <p:cNvPr id="23" name="">
             <a:extLst xmlns:a="http://schemas.openxmlformats.org/drawingml/2006/main">
               <a:ext uri="{FF2B5EF4-FFF2-40B4-BE49-F238E27FC236}">
-                <a16:creationId xmlns:a16="http://schemas.microsoft.com/office/drawing/2014/main" id="{0C1F4C62-7CE0-49C4-ACFA-BA4401A94FB8}"/>
+                <a16:creationId xmlns:a16="http://schemas.microsoft.com/office/drawing/2014/main" id="{99A2795A-9244-473B-AE86-00C2F93061C1}"/>
               </a:ext>
             </a:extLst>
           </p:cNvPr>
@@ -11511,7 +11509,7 @@
           <p:cNvPr id="24" name="">
             <a:extLst xmlns:a="http://schemas.openxmlformats.org/drawingml/2006/main">
               <a:ext uri="{FF2B5EF4-FFF2-40B4-BE49-F238E27FC236}">
-                <a16:creationId xmlns:a16="http://schemas.microsoft.com/office/drawing/2014/main" id="{D46198CC-A462-4F3E-832C-DF877D432610}"/>
+                <a16:creationId xmlns:a16="http://schemas.microsoft.com/office/drawing/2014/main" id="{6D3A7E6B-E792-4827-9F69-FA025A9A0C47}"/>
               </a:ext>
             </a:extLst>
           </p:cNvPr>
@@ -11575,7 +11573,7 @@
           <p:cNvPr id="25" name="">
             <a:extLst xmlns:a="http://schemas.openxmlformats.org/drawingml/2006/main">
               <a:ext uri="{FF2B5EF4-FFF2-40B4-BE49-F238E27FC236}">
-                <a16:creationId xmlns:a16="http://schemas.microsoft.com/office/drawing/2014/main" id="{E4EF050C-8C68-4BFE-81E4-56D8E721969E}"/>
+                <a16:creationId xmlns:a16="http://schemas.microsoft.com/office/drawing/2014/main" id="{F08CC5A7-387E-45F0-9D01-F5A3204AA3BA}"/>
               </a:ext>
             </a:extLst>
           </p:cNvPr>
@@ -11639,7 +11637,7 @@
           <p:cNvPr id="26" name="">
             <a:extLst xmlns:a="http://schemas.openxmlformats.org/drawingml/2006/main">
               <a:ext uri="{FF2B5EF4-FFF2-40B4-BE49-F238E27FC236}">
-                <a16:creationId xmlns:a16="http://schemas.microsoft.com/office/drawing/2014/main" id="{C72BFB55-C3DE-49ED-B05F-F28040CF0D3C}"/>
+                <a16:creationId xmlns:a16="http://schemas.microsoft.com/office/drawing/2014/main" id="{EEA115F4-5590-4E09-A331-A8D55C5244E1}"/>
               </a:ext>
             </a:extLst>
           </p:cNvPr>
@@ -11703,7 +11701,7 @@
           <p:cNvPr id="27" name="">
             <a:extLst xmlns:a="http://schemas.openxmlformats.org/drawingml/2006/main">
               <a:ext uri="{FF2B5EF4-FFF2-40B4-BE49-F238E27FC236}">
-                <a16:creationId xmlns:a16="http://schemas.microsoft.com/office/drawing/2014/main" id="{FEF1C42C-D1EF-4744-A238-773FE25A1E8F}"/>
+                <a16:creationId xmlns:a16="http://schemas.microsoft.com/office/drawing/2014/main" id="{BB72283E-98D6-4E9D-9F22-1DF85F941E58}"/>
               </a:ext>
             </a:extLst>
           </p:cNvPr>
@@ -11738,7 +11736,7 @@
           <p:cNvPr id="28" name="">
             <a:extLst xmlns:a="http://schemas.openxmlformats.org/drawingml/2006/main">
               <a:ext uri="{FF2B5EF4-FFF2-40B4-BE49-F238E27FC236}">
-                <a16:creationId xmlns:a16="http://schemas.microsoft.com/office/drawing/2014/main" id="{EFC93FCF-0C2B-44FD-94BA-BFBE48089250}"/>
+                <a16:creationId xmlns:a16="http://schemas.microsoft.com/office/drawing/2014/main" id="{B069E8EF-BF02-4EF6-A716-0DA1D0C6C99E}"/>
               </a:ext>
             </a:extLst>
           </p:cNvPr>
@@ -11802,7 +11800,7 @@
           <p:cNvPr id="29" name="">
             <a:extLst xmlns:a="http://schemas.openxmlformats.org/drawingml/2006/main">
               <a:ext uri="{FF2B5EF4-FFF2-40B4-BE49-F238E27FC236}">
-                <a16:creationId xmlns:a16="http://schemas.microsoft.com/office/drawing/2014/main" id="{3BA4978E-8967-4BD0-B46F-FA02DE3D1ABF}"/>
+                <a16:creationId xmlns:a16="http://schemas.microsoft.com/office/drawing/2014/main" id="{0A159545-CC8B-427C-B21A-4DE3E06DC8A0}"/>
               </a:ext>
             </a:extLst>
           </p:cNvPr>
@@ -11866,7 +11864,7 @@
           <p:cNvPr id="30" name="">
             <a:extLst xmlns:a="http://schemas.openxmlformats.org/drawingml/2006/main">
               <a:ext uri="{FF2B5EF4-FFF2-40B4-BE49-F238E27FC236}">
-                <a16:creationId xmlns:a16="http://schemas.microsoft.com/office/drawing/2014/main" id="{41A337A4-3C88-4226-8696-3DC4842CB390}"/>
+                <a16:creationId xmlns:a16="http://schemas.microsoft.com/office/drawing/2014/main" id="{3F8DDEBF-6BBC-46A2-A051-413001A1F0B4}"/>
               </a:ext>
             </a:extLst>
           </p:cNvPr>
@@ -11930,7 +11928,7 @@
           <p:cNvPr id="31" name="">
             <a:extLst xmlns:a="http://schemas.openxmlformats.org/drawingml/2006/main">
               <a:ext uri="{FF2B5EF4-FFF2-40B4-BE49-F238E27FC236}">
-                <a16:creationId xmlns:a16="http://schemas.microsoft.com/office/drawing/2014/main" id="{E2715564-18E8-4862-944F-749A652E19C4}"/>
+                <a16:creationId xmlns:a16="http://schemas.microsoft.com/office/drawing/2014/main" id="{25FE1566-1112-45E8-A240-CE5DDA38C811}"/>
               </a:ext>
             </a:extLst>
           </p:cNvPr>
@@ -11965,7 +11963,7 @@
           <p:cNvPr id="32" name="">
             <a:extLst xmlns:a="http://schemas.openxmlformats.org/drawingml/2006/main">
               <a:ext uri="{FF2B5EF4-FFF2-40B4-BE49-F238E27FC236}">
-                <a16:creationId xmlns:a16="http://schemas.microsoft.com/office/drawing/2014/main" id="{326ECFDE-DA24-467D-AE2E-03922F7D4AB7}"/>
+                <a16:creationId xmlns:a16="http://schemas.microsoft.com/office/drawing/2014/main" id="{C0118659-F845-44F4-9CA1-B82FD068FE0B}"/>
               </a:ext>
             </a:extLst>
           </p:cNvPr>
@@ -12000,7 +11998,7 @@
           <p:cNvPr id="33" name="">
             <a:extLst xmlns:a="http://schemas.openxmlformats.org/drawingml/2006/main">
               <a:ext uri="{FF2B5EF4-FFF2-40B4-BE49-F238E27FC236}">
-                <a16:creationId xmlns:a16="http://schemas.microsoft.com/office/drawing/2014/main" id="{7EA34B6E-8A40-45D5-A8AE-775AECF6C890}"/>
+                <a16:creationId xmlns:a16="http://schemas.microsoft.com/office/drawing/2014/main" id="{FAE6A7E0-F908-4FE5-9EF7-1CF3540CB183}"/>
               </a:ext>
             </a:extLst>
           </p:cNvPr>
@@ -12064,7 +12062,7 @@
           <p:cNvPr id="34" name="">
             <a:extLst xmlns:a="http://schemas.openxmlformats.org/drawingml/2006/main">
               <a:ext uri="{FF2B5EF4-FFF2-40B4-BE49-F238E27FC236}">
-                <a16:creationId xmlns:a16="http://schemas.microsoft.com/office/drawing/2014/main" id="{89BA465E-90D7-4F9D-877F-240A1603E756}"/>
+                <a16:creationId xmlns:a16="http://schemas.microsoft.com/office/drawing/2014/main" id="{ABCC3F87-3552-4854-B9B8-DF48782902C3}"/>
               </a:ext>
             </a:extLst>
           </p:cNvPr>
@@ -12128,7 +12126,7 @@
           <p:cNvPr id="35" name="">
             <a:extLst xmlns:a="http://schemas.openxmlformats.org/drawingml/2006/main">
               <a:ext uri="{FF2B5EF4-FFF2-40B4-BE49-F238E27FC236}">
-                <a16:creationId xmlns:a16="http://schemas.microsoft.com/office/drawing/2014/main" id="{2AE376E7-0293-49A2-B1D7-E22F35329931}"/>
+                <a16:creationId xmlns:a16="http://schemas.microsoft.com/office/drawing/2014/main" id="{8928A329-A92E-46E9-AAD8-12EAB97A9CD5}"/>
               </a:ext>
             </a:extLst>
           </p:cNvPr>
@@ -12192,7 +12190,7 @@
           <p:cNvPr id="36" name="">
             <a:extLst xmlns:a="http://schemas.openxmlformats.org/drawingml/2006/main">
               <a:ext uri="{FF2B5EF4-FFF2-40B4-BE49-F238E27FC236}">
-                <a16:creationId xmlns:a16="http://schemas.microsoft.com/office/drawing/2014/main" id="{F2FE638F-35EC-48C3-B6F6-D49AB71960F6}"/>
+                <a16:creationId xmlns:a16="http://schemas.microsoft.com/office/drawing/2014/main" id="{41D9AB4E-E066-487B-A652-84068B128CD8}"/>
               </a:ext>
             </a:extLst>
           </p:cNvPr>
@@ -12227,7 +12225,7 @@
           <p:cNvPr id="37" name="">
             <a:extLst xmlns:a="http://schemas.openxmlformats.org/drawingml/2006/main">
               <a:ext uri="{FF2B5EF4-FFF2-40B4-BE49-F238E27FC236}">
-                <a16:creationId xmlns:a16="http://schemas.microsoft.com/office/drawing/2014/main" id="{4C9EAC35-41BE-4DE5-B79C-ABB09EC92D2C}"/>
+                <a16:creationId xmlns:a16="http://schemas.microsoft.com/office/drawing/2014/main" id="{3A49BD4E-4F5C-4C72-8799-9812F671AA78}"/>
               </a:ext>
             </a:extLst>
           </p:cNvPr>
@@ -12291,7 +12289,7 @@
           <p:cNvPr id="38" name="">
             <a:extLst xmlns:a="http://schemas.openxmlformats.org/drawingml/2006/main">
               <a:ext uri="{FF2B5EF4-FFF2-40B4-BE49-F238E27FC236}">
-                <a16:creationId xmlns:a16="http://schemas.microsoft.com/office/drawing/2014/main" id="{AB05A4AC-CB5B-48BB-8E89-A91ED3E847FA}"/>
+                <a16:creationId xmlns:a16="http://schemas.microsoft.com/office/drawing/2014/main" id="{D9D066CD-CCCB-4E90-8C54-970D32B62939}"/>
               </a:ext>
             </a:extLst>
           </p:cNvPr>
@@ -12355,7 +12353,7 @@
           <p:cNvPr id="39" name="">
             <a:extLst xmlns:a="http://schemas.openxmlformats.org/drawingml/2006/main">
               <a:ext uri="{FF2B5EF4-FFF2-40B4-BE49-F238E27FC236}">
-                <a16:creationId xmlns:a16="http://schemas.microsoft.com/office/drawing/2014/main" id="{E365F633-0C99-49D4-83CC-C993B85A554E}"/>
+                <a16:creationId xmlns:a16="http://schemas.microsoft.com/office/drawing/2014/main" id="{F9DAC10D-8E4B-4884-81EE-D9D731D885BA}"/>
               </a:ext>
             </a:extLst>
           </p:cNvPr>
@@ -12419,7 +12417,7 @@
           <p:cNvPr id="40" name="">
             <a:extLst xmlns:a="http://schemas.openxmlformats.org/drawingml/2006/main">
               <a:ext uri="{FF2B5EF4-FFF2-40B4-BE49-F238E27FC236}">
-                <a16:creationId xmlns:a16="http://schemas.microsoft.com/office/drawing/2014/main" id="{E958E103-CFFC-4F4F-BE5B-3457A3129DD4}"/>
+                <a16:creationId xmlns:a16="http://schemas.microsoft.com/office/drawing/2014/main" id="{D6EA43AF-8B22-46FD-9C5F-23D6D1497DC1}"/>
               </a:ext>
             </a:extLst>
           </p:cNvPr>
@@ -12454,7 +12452,7 @@
           <p:cNvPr id="41" name="">
             <a:extLst xmlns:a="http://schemas.openxmlformats.org/drawingml/2006/main">
               <a:ext uri="{FF2B5EF4-FFF2-40B4-BE49-F238E27FC236}">
-                <a16:creationId xmlns:a16="http://schemas.microsoft.com/office/drawing/2014/main" id="{E01D8636-4A31-426F-82ED-76FF21D6D1D6}"/>
+                <a16:creationId xmlns:a16="http://schemas.microsoft.com/office/drawing/2014/main" id="{555E4E5B-C696-49B1-AD9E-C62E106CB1F4}"/>
               </a:ext>
             </a:extLst>
           </p:cNvPr>
@@ -12489,7 +12487,7 @@
           <p:cNvPr id="42" name="">
             <a:extLst xmlns:a="http://schemas.openxmlformats.org/drawingml/2006/main">
               <a:ext uri="{FF2B5EF4-FFF2-40B4-BE49-F238E27FC236}">
-                <a16:creationId xmlns:a16="http://schemas.microsoft.com/office/drawing/2014/main" id="{EF43BFC9-09B7-4421-B06D-009AC2BF8499}"/>
+                <a16:creationId xmlns:a16="http://schemas.microsoft.com/office/drawing/2014/main" id="{05E09047-A473-4728-A098-8E3B9E586728}"/>
               </a:ext>
             </a:extLst>
           </p:cNvPr>
@@ -12524,7 +12522,7 @@
           <p:cNvPr id="43" name="kicker-07-marker">
             <a:extLst xmlns:a="http://schemas.openxmlformats.org/drawingml/2006/main">
               <a:ext uri="{FF2B5EF4-FFF2-40B4-BE49-F238E27FC236}">
-                <a16:creationId xmlns:a16="http://schemas.microsoft.com/office/drawing/2014/main" id="{D9E431D3-CAD3-433A-9E1F-1A4C4911C489}"/>
+                <a16:creationId xmlns:a16="http://schemas.microsoft.com/office/drawing/2014/main" id="{A833A0ED-D16E-4863-BE9A-EC4F8FDE109D}"/>
               </a:ext>
             </a:extLst>
           </p:cNvPr>
@@ -12559,7 +12557,7 @@
           <p:cNvPr id="44" name="kicker-07-label">
             <a:extLst xmlns:a="http://schemas.openxmlformats.org/drawingml/2006/main">
               <a:ext uri="{FF2B5EF4-FFF2-40B4-BE49-F238E27FC236}">
-                <a16:creationId xmlns:a16="http://schemas.microsoft.com/office/drawing/2014/main" id="{B138F2B6-CD2C-43A2-8649-F2E52FC5A7C7}"/>
+                <a16:creationId xmlns:a16="http://schemas.microsoft.com/office/drawing/2014/main" id="{8344DB8B-66E7-42C2-9F93-D4219B99A2BC}"/>
               </a:ext>
             </a:extLst>
           </p:cNvPr>
@@ -12623,7 +12621,7 @@
           <p:cNvPr id="45" name="">
             <a:extLst xmlns:a="http://schemas.openxmlformats.org/drawingml/2006/main">
               <a:ext uri="{FF2B5EF4-FFF2-40B4-BE49-F238E27FC236}">
-                <a16:creationId xmlns:a16="http://schemas.microsoft.com/office/drawing/2014/main" id="{1627B0EF-ECAA-4922-8B81-C17F8B7E6B7A}"/>
+                <a16:creationId xmlns:a16="http://schemas.microsoft.com/office/drawing/2014/main" id="{C134E939-EE39-464C-9272-05014715CFF2}"/>
               </a:ext>
             </a:extLst>
           </p:cNvPr>
@@ -12687,7 +12685,7 @@
           <p:cNvPr id="46" name="">
             <a:extLst xmlns:a="http://schemas.openxmlformats.org/drawingml/2006/main">
               <a:ext uri="{FF2B5EF4-FFF2-40B4-BE49-F238E27FC236}">
-                <a16:creationId xmlns:a16="http://schemas.microsoft.com/office/drawing/2014/main" id="{F55EA68F-7C2A-4ACE-A094-F1C1C924B81C}"/>
+                <a16:creationId xmlns:a16="http://schemas.microsoft.com/office/drawing/2014/main" id="{F3B5140D-F707-4F95-9EF2-D78172C84DB1}"/>
               </a:ext>
             </a:extLst>
           </p:cNvPr>
@@ -12751,7 +12749,7 @@
           <p:cNvPr id="47" name="">
             <a:extLst xmlns:a="http://schemas.openxmlformats.org/drawingml/2006/main">
               <a:ext uri="{FF2B5EF4-FFF2-40B4-BE49-F238E27FC236}">
-                <a16:creationId xmlns:a16="http://schemas.microsoft.com/office/drawing/2014/main" id="{F13FE60C-E781-476D-A24A-4C37F6E4F7DD}"/>
+                <a16:creationId xmlns:a16="http://schemas.microsoft.com/office/drawing/2014/main" id="{DC8A4BCA-C504-4300-AB42-71BC7434E91F}"/>
               </a:ext>
             </a:extLst>
           </p:cNvPr>
@@ -12786,7 +12784,7 @@
           <p:cNvPr id="48" name="">
             <a:extLst xmlns:a="http://schemas.openxmlformats.org/drawingml/2006/main">
               <a:ext uri="{FF2B5EF4-FFF2-40B4-BE49-F238E27FC236}">
-                <a16:creationId xmlns:a16="http://schemas.microsoft.com/office/drawing/2014/main" id="{A673435A-8AEA-4BD7-A68A-BAE4B10DC3F5}"/>
+                <a16:creationId xmlns:a16="http://schemas.microsoft.com/office/drawing/2014/main" id="{3ADECEE6-95E3-48C0-8BB8-B6EFBE3E3E57}"/>
               </a:ext>
             </a:extLst>
           </p:cNvPr>
@@ -12821,7 +12819,7 @@
           <p:cNvPr id="49" name="">
             <a:extLst xmlns:a="http://schemas.openxmlformats.org/drawingml/2006/main">
               <a:ext uri="{FF2B5EF4-FFF2-40B4-BE49-F238E27FC236}">
-                <a16:creationId xmlns:a16="http://schemas.microsoft.com/office/drawing/2014/main" id="{5F20CFED-CA68-41E3-BC89-D6B38B42C7DE}"/>
+                <a16:creationId xmlns:a16="http://schemas.microsoft.com/office/drawing/2014/main" id="{890EE242-F55C-46FC-99AF-29A922A3E46B}"/>
               </a:ext>
             </a:extLst>
           </p:cNvPr>
@@ -12856,7 +12854,7 @@
           <p:cNvPr id="50" name="">
             <a:extLst xmlns:a="http://schemas.openxmlformats.org/drawingml/2006/main">
               <a:ext uri="{FF2B5EF4-FFF2-40B4-BE49-F238E27FC236}">
-                <a16:creationId xmlns:a16="http://schemas.microsoft.com/office/drawing/2014/main" id="{D1DDCB12-F8DF-4205-B3CE-BDBDC0FBBD2A}"/>
+                <a16:creationId xmlns:a16="http://schemas.microsoft.com/office/drawing/2014/main" id="{17AF8AEC-A470-43A1-960B-6A02C901B609}"/>
               </a:ext>
             </a:extLst>
           </p:cNvPr>
@@ -12891,7 +12889,7 @@
           <p:cNvPr id="51" name="">
             <a:extLst xmlns:a="http://schemas.openxmlformats.org/drawingml/2006/main">
               <a:ext uri="{FF2B5EF4-FFF2-40B4-BE49-F238E27FC236}">
-                <a16:creationId xmlns:a16="http://schemas.microsoft.com/office/drawing/2014/main" id="{CF19C7B7-C8C8-4DC7-B68F-CC92D574912E}"/>
+                <a16:creationId xmlns:a16="http://schemas.microsoft.com/office/drawing/2014/main" id="{138EB95E-4957-4A64-8E4E-3A99A7CEBC35}"/>
               </a:ext>
             </a:extLst>
           </p:cNvPr>
@@ -12955,7 +12953,7 @@
           <p:cNvPr id="52" name="">
             <a:extLst xmlns:a="http://schemas.openxmlformats.org/drawingml/2006/main">
               <a:ext uri="{FF2B5EF4-FFF2-40B4-BE49-F238E27FC236}">
-                <a16:creationId xmlns:a16="http://schemas.microsoft.com/office/drawing/2014/main" id="{042193C7-B990-4562-BC18-47FDACA9614A}"/>
+                <a16:creationId xmlns:a16="http://schemas.microsoft.com/office/drawing/2014/main" id="{FCA6679E-8C84-4B31-A2B6-F5799DFB33AC}"/>
               </a:ext>
             </a:extLst>
           </p:cNvPr>
@@ -13019,7 +13017,7 @@
           <p:cNvPr id="53" name="">
             <a:extLst xmlns:a="http://schemas.openxmlformats.org/drawingml/2006/main">
               <a:ext uri="{FF2B5EF4-FFF2-40B4-BE49-F238E27FC236}">
-                <a16:creationId xmlns:a16="http://schemas.microsoft.com/office/drawing/2014/main" id="{9E6CB342-478B-4257-B307-DDDF38138CAA}"/>
+                <a16:creationId xmlns:a16="http://schemas.microsoft.com/office/drawing/2014/main" id="{9D86B595-85D4-4BC7-95D0-32ACB809112A}"/>
               </a:ext>
             </a:extLst>
           </p:cNvPr>
@@ -13081,7 +13079,7 @@
     </p:spTree>
     <p:extLst>
       <p:ext uri="{BB962C8B-B14F-4D97-AF65-F5344CB8AC3E}">
-        <p14:creationId xmlns:p14="http://schemas.microsoft.com/office/powerpoint/2010/main" val="739061025"/>
+        <p14:creationId xmlns:p14="http://schemas.microsoft.com/office/powerpoint/2010/main" val="978101628"/>
       </p:ext>
     </p:extLst>
   </p:cSld>
@@ -13105,7 +13103,7 @@
           <p:cNvPr id="1" name="">
             <a:extLst xmlns:a="http://schemas.openxmlformats.org/drawingml/2006/main">
               <a:ext uri="{FF2B5EF4-FFF2-40B4-BE49-F238E27FC236}">
-                <a16:creationId xmlns:a16="http://schemas.microsoft.com/office/drawing/2014/main" id="{A7162856-B90C-4D7A-8F2A-012A02E6F81F}"/>
+                <a16:creationId xmlns:a16="http://schemas.microsoft.com/office/drawing/2014/main" id="{85E286D2-DBC8-4B51-9766-E6FB8587AF2D}"/>
               </a:ext>
             </a:extLst>
           </p:cNvPr>
@@ -13140,7 +13138,7 @@
           <p:cNvPr id="2" name="">
             <a:extLst xmlns:a="http://schemas.openxmlformats.org/drawingml/2006/main">
               <a:ext uri="{FF2B5EF4-FFF2-40B4-BE49-F238E27FC236}">
-                <a16:creationId xmlns:a16="http://schemas.microsoft.com/office/drawing/2014/main" id="{09F42300-84A4-4149-AF41-DAA1B055EC2F}"/>
+                <a16:creationId xmlns:a16="http://schemas.microsoft.com/office/drawing/2014/main" id="{279B3B78-76CB-4998-B67C-DB71A7AD0A69}"/>
               </a:ext>
             </a:extLst>
           </p:cNvPr>
@@ -13175,7 +13173,7 @@
           <p:cNvPr id="3" name="">
             <a:extLst xmlns:a="http://schemas.openxmlformats.org/drawingml/2006/main">
               <a:ext uri="{FF2B5EF4-FFF2-40B4-BE49-F238E27FC236}">
-                <a16:creationId xmlns:a16="http://schemas.microsoft.com/office/drawing/2014/main" id="{BC98ABEE-4040-4741-83F3-08E2A92991B8}"/>
+                <a16:creationId xmlns:a16="http://schemas.microsoft.com/office/drawing/2014/main" id="{F2513F62-9D07-4839-80D6-A91CF6CA579C}"/>
               </a:ext>
             </a:extLst>
           </p:cNvPr>
@@ -13210,7 +13208,7 @@
           <p:cNvPr id="4" name="kicker-07-marker">
             <a:extLst xmlns:a="http://schemas.openxmlformats.org/drawingml/2006/main">
               <a:ext uri="{FF2B5EF4-FFF2-40B4-BE49-F238E27FC236}">
-                <a16:creationId xmlns:a16="http://schemas.microsoft.com/office/drawing/2014/main" id="{28198C71-FAB2-42F1-A0CB-24533D74AA5D}"/>
+                <a16:creationId xmlns:a16="http://schemas.microsoft.com/office/drawing/2014/main" id="{BB6BDBE2-9C9D-486E-9CC4-5E9BAAD2A2EB}"/>
               </a:ext>
             </a:extLst>
           </p:cNvPr>
@@ -13245,7 +13243,7 @@
           <p:cNvPr id="5" name="kicker-07-label">
             <a:extLst xmlns:a="http://schemas.openxmlformats.org/drawingml/2006/main">
               <a:ext uri="{FF2B5EF4-FFF2-40B4-BE49-F238E27FC236}">
-                <a16:creationId xmlns:a16="http://schemas.microsoft.com/office/drawing/2014/main" id="{B8561668-F422-439B-ADDA-D0D0C5619158}"/>
+                <a16:creationId xmlns:a16="http://schemas.microsoft.com/office/drawing/2014/main" id="{7F0B94A7-37BE-4D9B-BBD1-2D75C66460D2}"/>
               </a:ext>
             </a:extLst>
           </p:cNvPr>
@@ -13309,7 +13307,7 @@
           <p:cNvPr id="6" name="">
             <a:extLst xmlns:a="http://schemas.openxmlformats.org/drawingml/2006/main">
               <a:ext uri="{FF2B5EF4-FFF2-40B4-BE49-F238E27FC236}">
-                <a16:creationId xmlns:a16="http://schemas.microsoft.com/office/drawing/2014/main" id="{F8C0A8E0-5093-4BE0-842A-EDC0AD45D1D3}"/>
+                <a16:creationId xmlns:a16="http://schemas.microsoft.com/office/drawing/2014/main" id="{2E37F0ED-253B-4FCE-B096-13E32F40D8DE}"/>
               </a:ext>
             </a:extLst>
           </p:cNvPr>
@@ -13373,7 +13371,7 @@
           <p:cNvPr id="7" name="">
             <a:extLst xmlns:a="http://schemas.openxmlformats.org/drawingml/2006/main">
               <a:ext uri="{FF2B5EF4-FFF2-40B4-BE49-F238E27FC236}">
-                <a16:creationId xmlns:a16="http://schemas.microsoft.com/office/drawing/2014/main" id="{A55637BD-CFB0-47F5-8FC8-CA0F6092C0C9}"/>
+                <a16:creationId xmlns:a16="http://schemas.microsoft.com/office/drawing/2014/main" id="{41397079-26BD-4FD1-86AB-48D72AA8F404}"/>
               </a:ext>
             </a:extLst>
           </p:cNvPr>
@@ -13437,7 +13435,7 @@
           <p:cNvPr id="8" name="">
             <a:extLst xmlns:a="http://schemas.openxmlformats.org/drawingml/2006/main">
               <a:ext uri="{FF2B5EF4-FFF2-40B4-BE49-F238E27FC236}">
-                <a16:creationId xmlns:a16="http://schemas.microsoft.com/office/drawing/2014/main" id="{4345F5A8-1E75-4D73-8534-DC92933B7337}"/>
+                <a16:creationId xmlns:a16="http://schemas.microsoft.com/office/drawing/2014/main" id="{0F62492B-3B50-4F60-A67A-70737E812A01}"/>
               </a:ext>
             </a:extLst>
           </p:cNvPr>
@@ -13472,7 +13470,7 @@
           <p:cNvPr id="9" name="">
             <a:extLst xmlns:a="http://schemas.openxmlformats.org/drawingml/2006/main">
               <a:ext uri="{FF2B5EF4-FFF2-40B4-BE49-F238E27FC236}">
-                <a16:creationId xmlns:a16="http://schemas.microsoft.com/office/drawing/2014/main" id="{5443D8AD-3279-4B5D-A6CA-2568CAAEB9D2}"/>
+                <a16:creationId xmlns:a16="http://schemas.microsoft.com/office/drawing/2014/main" id="{B7ABD4ED-4F91-45DA-A39A-E1BF69C56428}"/>
               </a:ext>
             </a:extLst>
           </p:cNvPr>
@@ -13536,7 +13534,7 @@
           <p:cNvPr id="10" name="">
             <a:extLst xmlns:a="http://schemas.openxmlformats.org/drawingml/2006/main">
               <a:ext uri="{FF2B5EF4-FFF2-40B4-BE49-F238E27FC236}">
-                <a16:creationId xmlns:a16="http://schemas.microsoft.com/office/drawing/2014/main" id="{63DD63A9-CEE3-4312-AFA0-9F153CB9FC13}"/>
+                <a16:creationId xmlns:a16="http://schemas.microsoft.com/office/drawing/2014/main" id="{481D95A9-80EE-47B0-99ED-5C008E12D77F}"/>
               </a:ext>
             </a:extLst>
           </p:cNvPr>
@@ -13600,7 +13598,7 @@
           <p:cNvPr id="11" name="">
             <a:extLst xmlns:a="http://schemas.openxmlformats.org/drawingml/2006/main">
               <a:ext uri="{FF2B5EF4-FFF2-40B4-BE49-F238E27FC236}">
-                <a16:creationId xmlns:a16="http://schemas.microsoft.com/office/drawing/2014/main" id="{F7DDC935-8EA9-4B4B-A840-2CD5BDC07CAF}"/>
+                <a16:creationId xmlns:a16="http://schemas.microsoft.com/office/drawing/2014/main" id="{DE8C07AC-9F3B-494C-8915-9239E26E3A13}"/>
               </a:ext>
             </a:extLst>
           </p:cNvPr>
@@ -13664,7 +13662,7 @@
           <p:cNvPr id="12" name="">
             <a:extLst xmlns:a="http://schemas.openxmlformats.org/drawingml/2006/main">
               <a:ext uri="{FF2B5EF4-FFF2-40B4-BE49-F238E27FC236}">
-                <a16:creationId xmlns:a16="http://schemas.microsoft.com/office/drawing/2014/main" id="{8DF667FC-8529-4BFA-A466-FDDD2FA63A70}"/>
+                <a16:creationId xmlns:a16="http://schemas.microsoft.com/office/drawing/2014/main" id="{823EFF19-0F59-4C7D-A8C8-017B846BF4FD}"/>
               </a:ext>
             </a:extLst>
           </p:cNvPr>
@@ -13699,7 +13697,7 @@
           <p:cNvPr id="13" name="">
             <a:extLst xmlns:a="http://schemas.openxmlformats.org/drawingml/2006/main">
               <a:ext uri="{FF2B5EF4-FFF2-40B4-BE49-F238E27FC236}">
-                <a16:creationId xmlns:a16="http://schemas.microsoft.com/office/drawing/2014/main" id="{FC8422F8-3575-4794-B482-9B7643B8E027}"/>
+                <a16:creationId xmlns:a16="http://schemas.microsoft.com/office/drawing/2014/main" id="{205947E1-6051-49DC-B437-3FF244BF50FB}"/>
               </a:ext>
             </a:extLst>
           </p:cNvPr>
@@ -13732,7 +13730,7 @@
           <p:cNvPr id="14" name="">
             <a:extLst xmlns:a="http://schemas.openxmlformats.org/drawingml/2006/main">
               <a:ext uri="{FF2B5EF4-FFF2-40B4-BE49-F238E27FC236}">
-                <a16:creationId xmlns:a16="http://schemas.microsoft.com/office/drawing/2014/main" id="{474EB673-ACBC-4523-ABBC-35FA80C6D4D2}"/>
+                <a16:creationId xmlns:a16="http://schemas.microsoft.com/office/drawing/2014/main" id="{F16866DC-3D52-4FEF-803A-FFCD5328530A}"/>
               </a:ext>
             </a:extLst>
           </p:cNvPr>
@@ -13767,7 +13765,7 @@
           <p:cNvPr id="15" name="">
             <a:extLst xmlns:a="http://schemas.openxmlformats.org/drawingml/2006/main">
               <a:ext uri="{FF2B5EF4-FFF2-40B4-BE49-F238E27FC236}">
-                <a16:creationId xmlns:a16="http://schemas.microsoft.com/office/drawing/2014/main" id="{02ED1406-B134-4F26-A536-EA45F2D496EF}"/>
+                <a16:creationId xmlns:a16="http://schemas.microsoft.com/office/drawing/2014/main" id="{75F5F7BE-F8EE-4E2A-9CD3-31F93D572EED}"/>
               </a:ext>
             </a:extLst>
           </p:cNvPr>
@@ -13831,7 +13829,7 @@
           <p:cNvPr id="16" name="">
             <a:extLst xmlns:a="http://schemas.openxmlformats.org/drawingml/2006/main">
               <a:ext uri="{FF2B5EF4-FFF2-40B4-BE49-F238E27FC236}">
-                <a16:creationId xmlns:a16="http://schemas.microsoft.com/office/drawing/2014/main" id="{439AB52F-EBAF-41F6-84C7-D2941C372CDC}"/>
+                <a16:creationId xmlns:a16="http://schemas.microsoft.com/office/drawing/2014/main" id="{DEBF2FD3-B184-42B9-85F6-801046BFF52F}"/>
               </a:ext>
             </a:extLst>
           </p:cNvPr>
@@ -13866,7 +13864,7 @@
           <p:cNvPr id="17" name="">
             <a:extLst xmlns:a="http://schemas.openxmlformats.org/drawingml/2006/main">
               <a:ext uri="{FF2B5EF4-FFF2-40B4-BE49-F238E27FC236}">
-                <a16:creationId xmlns:a16="http://schemas.microsoft.com/office/drawing/2014/main" id="{91589112-519E-4129-A181-812A1FAE2A03}"/>
+                <a16:creationId xmlns:a16="http://schemas.microsoft.com/office/drawing/2014/main" id="{4DDE8D4F-1E79-4988-9006-AC7EBC74181B}"/>
               </a:ext>
             </a:extLst>
           </p:cNvPr>
@@ -13930,7 +13928,7 @@
           <p:cNvPr id="18" name="">
             <a:extLst xmlns:a="http://schemas.openxmlformats.org/drawingml/2006/main">
               <a:ext uri="{FF2B5EF4-FFF2-40B4-BE49-F238E27FC236}">
-                <a16:creationId xmlns:a16="http://schemas.microsoft.com/office/drawing/2014/main" id="{37B8BA1E-91D7-44B8-B548-CF8E74F52BC8}"/>
+                <a16:creationId xmlns:a16="http://schemas.microsoft.com/office/drawing/2014/main" id="{EB1EF052-C88F-4C1A-89AF-DCFF4183CE8B}"/>
               </a:ext>
             </a:extLst>
           </p:cNvPr>
@@ -13965,7 +13963,7 @@
           <p:cNvPr id="19" name="">
             <a:extLst xmlns:a="http://schemas.openxmlformats.org/drawingml/2006/main">
               <a:ext uri="{FF2B5EF4-FFF2-40B4-BE49-F238E27FC236}">
-                <a16:creationId xmlns:a16="http://schemas.microsoft.com/office/drawing/2014/main" id="{84568D7B-697C-4EEC-B695-506542CC9E8D}"/>
+                <a16:creationId xmlns:a16="http://schemas.microsoft.com/office/drawing/2014/main" id="{65965DF5-6142-4869-B46B-6D58CFC3F52C}"/>
               </a:ext>
             </a:extLst>
           </p:cNvPr>
@@ -14029,7 +14027,7 @@
           <p:cNvPr id="20" name="">
             <a:extLst xmlns:a="http://schemas.openxmlformats.org/drawingml/2006/main">
               <a:ext uri="{FF2B5EF4-FFF2-40B4-BE49-F238E27FC236}">
-                <a16:creationId xmlns:a16="http://schemas.microsoft.com/office/drawing/2014/main" id="{1205CDE6-F9B8-4435-89AF-44742D1CD380}"/>
+                <a16:creationId xmlns:a16="http://schemas.microsoft.com/office/drawing/2014/main" id="{4040D760-5E9C-4D01-AF26-5EFA45D5669D}"/>
               </a:ext>
             </a:extLst>
           </p:cNvPr>
@@ -14064,7 +14062,7 @@
           <p:cNvPr id="21" name="">
             <a:extLst xmlns:a="http://schemas.openxmlformats.org/drawingml/2006/main">
               <a:ext uri="{FF2B5EF4-FFF2-40B4-BE49-F238E27FC236}">
-                <a16:creationId xmlns:a16="http://schemas.microsoft.com/office/drawing/2014/main" id="{73CA9B0E-4E77-4A89-9E0D-A8D4BA27F508}"/>
+                <a16:creationId xmlns:a16="http://schemas.microsoft.com/office/drawing/2014/main" id="{CDE522B2-AFA4-4B6E-8DD8-9DD854AACBE1}"/>
               </a:ext>
             </a:extLst>
           </p:cNvPr>
@@ -14128,7 +14126,7 @@
           <p:cNvPr id="22" name="">
             <a:extLst xmlns:a="http://schemas.openxmlformats.org/drawingml/2006/main">
               <a:ext uri="{FF2B5EF4-FFF2-40B4-BE49-F238E27FC236}">
-                <a16:creationId xmlns:a16="http://schemas.microsoft.com/office/drawing/2014/main" id="{E84A2B84-F35D-4FC3-A6E5-ADF3CAFE429E}"/>
+                <a16:creationId xmlns:a16="http://schemas.microsoft.com/office/drawing/2014/main" id="{C7955B49-8D0C-46D8-AFF2-6D3634006FD6}"/>
               </a:ext>
             </a:extLst>
           </p:cNvPr>
@@ -14163,7 +14161,7 @@
           <p:cNvPr id="23" name="">
             <a:extLst xmlns:a="http://schemas.openxmlformats.org/drawingml/2006/main">
               <a:ext uri="{FF2B5EF4-FFF2-40B4-BE49-F238E27FC236}">
-                <a16:creationId xmlns:a16="http://schemas.microsoft.com/office/drawing/2014/main" id="{84504A74-EBD0-40B0-A465-A4D88B8A8E01}"/>
+                <a16:creationId xmlns:a16="http://schemas.microsoft.com/office/drawing/2014/main" id="{94373772-AC75-4684-A486-4C111BE88D15}"/>
               </a:ext>
             </a:extLst>
           </p:cNvPr>
@@ -14227,7 +14225,7 @@
           <p:cNvPr id="24" name="">
             <a:extLst xmlns:a="http://schemas.openxmlformats.org/drawingml/2006/main">
               <a:ext uri="{FF2B5EF4-FFF2-40B4-BE49-F238E27FC236}">
-                <a16:creationId xmlns:a16="http://schemas.microsoft.com/office/drawing/2014/main" id="{135803FE-4174-4A21-9C55-070D181CD7E0}"/>
+                <a16:creationId xmlns:a16="http://schemas.microsoft.com/office/drawing/2014/main" id="{E4A18740-811E-486B-849A-6D56E1AC6FF2}"/>
               </a:ext>
             </a:extLst>
           </p:cNvPr>
@@ -14262,7 +14260,7 @@
           <p:cNvPr id="25" name="">
             <a:extLst xmlns:a="http://schemas.openxmlformats.org/drawingml/2006/main">
               <a:ext uri="{FF2B5EF4-FFF2-40B4-BE49-F238E27FC236}">
-                <a16:creationId xmlns:a16="http://schemas.microsoft.com/office/drawing/2014/main" id="{6819965E-31E1-4360-997A-7302BDE00C95}"/>
+                <a16:creationId xmlns:a16="http://schemas.microsoft.com/office/drawing/2014/main" id="{6CE5141E-7B24-4998-A55A-4535D2A0FA1F}"/>
               </a:ext>
             </a:extLst>
           </p:cNvPr>
@@ -14326,7 +14324,7 @@
           <p:cNvPr id="26" name="">
             <a:extLst xmlns:a="http://schemas.openxmlformats.org/drawingml/2006/main">
               <a:ext uri="{FF2B5EF4-FFF2-40B4-BE49-F238E27FC236}">
-                <a16:creationId xmlns:a16="http://schemas.microsoft.com/office/drawing/2014/main" id="{D2EC5EFD-356A-46DF-B71F-9239D5C466EB}"/>
+                <a16:creationId xmlns:a16="http://schemas.microsoft.com/office/drawing/2014/main" id="{3A54FD15-2C8F-49A7-967D-AD76FC2582BF}"/>
               </a:ext>
             </a:extLst>
           </p:cNvPr>
@@ -14361,7 +14359,7 @@
           <p:cNvPr id="27" name="">
             <a:extLst xmlns:a="http://schemas.openxmlformats.org/drawingml/2006/main">
               <a:ext uri="{FF2B5EF4-FFF2-40B4-BE49-F238E27FC236}">
-                <a16:creationId xmlns:a16="http://schemas.microsoft.com/office/drawing/2014/main" id="{CA4354B8-BF73-4F09-A921-14B16A22F262}"/>
+                <a16:creationId xmlns:a16="http://schemas.microsoft.com/office/drawing/2014/main" id="{F20F1E36-DA38-4FC4-9835-C17B9372DA01}"/>
               </a:ext>
             </a:extLst>
           </p:cNvPr>
@@ -14425,7 +14423,7 @@
           <p:cNvPr id="28" name="">
             <a:extLst xmlns:a="http://schemas.openxmlformats.org/drawingml/2006/main">
               <a:ext uri="{FF2B5EF4-FFF2-40B4-BE49-F238E27FC236}">
-                <a16:creationId xmlns:a16="http://schemas.microsoft.com/office/drawing/2014/main" id="{25D18762-B850-44DA-A43F-77726B6F5F91}"/>
+                <a16:creationId xmlns:a16="http://schemas.microsoft.com/office/drawing/2014/main" id="{96A46A62-2081-4D46-A426-240AFBA80E46}"/>
               </a:ext>
             </a:extLst>
           </p:cNvPr>
@@ -14460,7 +14458,7 @@
           <p:cNvPr id="29" name="">
             <a:extLst xmlns:a="http://schemas.openxmlformats.org/drawingml/2006/main">
               <a:ext uri="{FF2B5EF4-FFF2-40B4-BE49-F238E27FC236}">
-                <a16:creationId xmlns:a16="http://schemas.microsoft.com/office/drawing/2014/main" id="{6A283F3A-618C-44D9-863C-13AD647F8768}"/>
+                <a16:creationId xmlns:a16="http://schemas.microsoft.com/office/drawing/2014/main" id="{19F241C2-9EB6-4644-8706-09CC7CA961E1}"/>
               </a:ext>
             </a:extLst>
           </p:cNvPr>
@@ -14524,7 +14522,7 @@
           <p:cNvPr id="30" name="">
             <a:extLst xmlns:a="http://schemas.openxmlformats.org/drawingml/2006/main">
               <a:ext uri="{FF2B5EF4-FFF2-40B4-BE49-F238E27FC236}">
-                <a16:creationId xmlns:a16="http://schemas.microsoft.com/office/drawing/2014/main" id="{541396A0-D1A4-4A77-A253-3C4BDE25BCC8}"/>
+                <a16:creationId xmlns:a16="http://schemas.microsoft.com/office/drawing/2014/main" id="{6DD612A2-2C9C-4ADF-BCFD-5621512D83D2}"/>
               </a:ext>
             </a:extLst>
           </p:cNvPr>
@@ -14557,7 +14555,7 @@
           <p:cNvPr id="31" name="">
             <a:extLst xmlns:a="http://schemas.openxmlformats.org/drawingml/2006/main">
               <a:ext uri="{FF2B5EF4-FFF2-40B4-BE49-F238E27FC236}">
-                <a16:creationId xmlns:a16="http://schemas.microsoft.com/office/drawing/2014/main" id="{0A8E9499-9100-4209-9C0D-630180BEF0DC}"/>
+                <a16:creationId xmlns:a16="http://schemas.microsoft.com/office/drawing/2014/main" id="{9943E973-2D8D-48E3-9F8F-C437F072B178}"/>
               </a:ext>
             </a:extLst>
           </p:cNvPr>
@@ -14592,7 +14590,7 @@
           <p:cNvPr id="32" name="">
             <a:extLst xmlns:a="http://schemas.openxmlformats.org/drawingml/2006/main">
               <a:ext uri="{FF2B5EF4-FFF2-40B4-BE49-F238E27FC236}">
-                <a16:creationId xmlns:a16="http://schemas.microsoft.com/office/drawing/2014/main" id="{CDD45B5D-A4E2-4CDA-A7E3-95B7479ED194}"/>
+                <a16:creationId xmlns:a16="http://schemas.microsoft.com/office/drawing/2014/main" id="{2E0FBF68-50C2-4806-A01D-C30F64FB843E}"/>
               </a:ext>
             </a:extLst>
           </p:cNvPr>
@@ -14656,7 +14654,7 @@
           <p:cNvPr id="33" name="">
             <a:extLst xmlns:a="http://schemas.openxmlformats.org/drawingml/2006/main">
               <a:ext uri="{FF2B5EF4-FFF2-40B4-BE49-F238E27FC236}">
-                <a16:creationId xmlns:a16="http://schemas.microsoft.com/office/drawing/2014/main" id="{BFF35120-3340-40D9-8259-3581D48F0307}"/>
+                <a16:creationId xmlns:a16="http://schemas.microsoft.com/office/drawing/2014/main" id="{7C159518-1CAF-4C79-A4D3-211E09C2EF0F}"/>
               </a:ext>
             </a:extLst>
           </p:cNvPr>
@@ -14710,7 +14708,7 @@
                 <a:ea typeface="Aptos Display"/>
                 <a:cs typeface="Aptos Display"/>
               </a:rPr>
-              <a:t>The artifact passes only if sales, marketing, RevOps, leadership, and an AI agent could inspect it and know what to do next.</a:t>
+              <a:t>The artifact passes only if sales, marketing, RevOps, and leadership can inspect it and know what to do next.</a:t>
             </a:r>
           </a:p>
         </p:txBody>
@@ -14720,7 +14718,7 @@
           <p:cNvPr id="34" name="">
             <a:extLst xmlns:a="http://schemas.openxmlformats.org/drawingml/2006/main">
               <a:ext uri="{FF2B5EF4-FFF2-40B4-BE49-F238E27FC236}">
-                <a16:creationId xmlns:a16="http://schemas.microsoft.com/office/drawing/2014/main" id="{F506C4F7-2601-44DF-B623-3378DB876F70}"/>
+                <a16:creationId xmlns:a16="http://schemas.microsoft.com/office/drawing/2014/main" id="{0B80262E-2E78-4982-88AD-2993C628C1A3}"/>
               </a:ext>
             </a:extLst>
           </p:cNvPr>
@@ -14784,7 +14782,7 @@
           <p:cNvPr id="35" name="">
             <a:extLst xmlns:a="http://schemas.openxmlformats.org/drawingml/2006/main">
               <a:ext uri="{FF2B5EF4-FFF2-40B4-BE49-F238E27FC236}">
-                <a16:creationId xmlns:a16="http://schemas.microsoft.com/office/drawing/2014/main" id="{5ACCDC8E-2B2F-4A7D-8153-581728791240}"/>
+                <a16:creationId xmlns:a16="http://schemas.microsoft.com/office/drawing/2014/main" id="{E3BEFC12-CD0F-488B-980D-3A1CDB48775D}"/>
               </a:ext>
             </a:extLst>
           </p:cNvPr>
@@ -14819,7 +14817,7 @@
           <p:cNvPr id="36" name="">
             <a:extLst xmlns:a="http://schemas.openxmlformats.org/drawingml/2006/main">
               <a:ext uri="{FF2B5EF4-FFF2-40B4-BE49-F238E27FC236}">
-                <a16:creationId xmlns:a16="http://schemas.microsoft.com/office/drawing/2014/main" id="{02964562-FB58-4FAB-BF33-B9DDAFC73E38}"/>
+                <a16:creationId xmlns:a16="http://schemas.microsoft.com/office/drawing/2014/main" id="{414B027A-2798-43D9-88E8-53096719ACF2}"/>
               </a:ext>
             </a:extLst>
           </p:cNvPr>
@@ -14883,7 +14881,7 @@
           <p:cNvPr id="37" name="">
             <a:extLst xmlns:a="http://schemas.openxmlformats.org/drawingml/2006/main">
               <a:ext uri="{FF2B5EF4-FFF2-40B4-BE49-F238E27FC236}">
-                <a16:creationId xmlns:a16="http://schemas.microsoft.com/office/drawing/2014/main" id="{9D8EF7C4-1B7E-47D4-8A11-39A0352DAA90}"/>
+                <a16:creationId xmlns:a16="http://schemas.microsoft.com/office/drawing/2014/main" id="{05AD4790-CE7A-413A-BA13-2A8393F798BD}"/>
               </a:ext>
             </a:extLst>
           </p:cNvPr>
@@ -14947,7 +14945,7 @@
           <p:cNvPr id="38" name="">
             <a:extLst xmlns:a="http://schemas.openxmlformats.org/drawingml/2006/main">
               <a:ext uri="{FF2B5EF4-FFF2-40B4-BE49-F238E27FC236}">
-                <a16:creationId xmlns:a16="http://schemas.microsoft.com/office/drawing/2014/main" id="{7CAF5DFF-1FA5-4A4C-9735-C90E52F7D5CA}"/>
+                <a16:creationId xmlns:a16="http://schemas.microsoft.com/office/drawing/2014/main" id="{F50E501E-4322-4D08-9B3A-8D758DE866B3}"/>
               </a:ext>
             </a:extLst>
           </p:cNvPr>
@@ -15011,7 +15009,7 @@
           <p:cNvPr id="39" name="">
             <a:extLst xmlns:a="http://schemas.openxmlformats.org/drawingml/2006/main">
               <a:ext uri="{FF2B5EF4-FFF2-40B4-BE49-F238E27FC236}">
-                <a16:creationId xmlns:a16="http://schemas.microsoft.com/office/drawing/2014/main" id="{8FEA5F72-05C2-4FFC-ADD2-FB883F6E33AB}"/>
+                <a16:creationId xmlns:a16="http://schemas.microsoft.com/office/drawing/2014/main" id="{41F7261F-B7E0-4F70-9BFF-0FC05DD9EFB6}"/>
               </a:ext>
             </a:extLst>
           </p:cNvPr>
@@ -15046,7 +15044,7 @@
           <p:cNvPr id="40" name="">
             <a:extLst xmlns:a="http://schemas.openxmlformats.org/drawingml/2006/main">
               <a:ext uri="{FF2B5EF4-FFF2-40B4-BE49-F238E27FC236}">
-                <a16:creationId xmlns:a16="http://schemas.microsoft.com/office/drawing/2014/main" id="{6221D96A-2F8A-49E6-BBF8-F0AAEE1495D5}"/>
+                <a16:creationId xmlns:a16="http://schemas.microsoft.com/office/drawing/2014/main" id="{C1C010A0-C206-4C0C-977F-4864D4A9FA10}"/>
               </a:ext>
             </a:extLst>
           </p:cNvPr>
@@ -15081,7 +15079,7 @@
           <p:cNvPr id="41" name="">
             <a:extLst xmlns:a="http://schemas.openxmlformats.org/drawingml/2006/main">
               <a:ext uri="{FF2B5EF4-FFF2-40B4-BE49-F238E27FC236}">
-                <a16:creationId xmlns:a16="http://schemas.microsoft.com/office/drawing/2014/main" id="{D1D977A5-27B2-4A77-91DB-224AD9C10270}"/>
+                <a16:creationId xmlns:a16="http://schemas.microsoft.com/office/drawing/2014/main" id="{63AA2D37-A657-4380-A3F5-4BF36D8263CB}"/>
               </a:ext>
             </a:extLst>
           </p:cNvPr>
@@ -15116,7 +15114,7 @@
           <p:cNvPr id="42" name="kicker-07-marker">
             <a:extLst xmlns:a="http://schemas.openxmlformats.org/drawingml/2006/main">
               <a:ext uri="{FF2B5EF4-FFF2-40B4-BE49-F238E27FC236}">
-                <a16:creationId xmlns:a16="http://schemas.microsoft.com/office/drawing/2014/main" id="{8FB9AEE7-9680-4EFE-8549-C1F27365CC65}"/>
+                <a16:creationId xmlns:a16="http://schemas.microsoft.com/office/drawing/2014/main" id="{5FAE6BB8-8686-4B69-BCB8-6EA499A4D584}"/>
               </a:ext>
             </a:extLst>
           </p:cNvPr>
@@ -15151,7 +15149,7 @@
           <p:cNvPr id="43" name="kicker-07-label">
             <a:extLst xmlns:a="http://schemas.openxmlformats.org/drawingml/2006/main">
               <a:ext uri="{FF2B5EF4-FFF2-40B4-BE49-F238E27FC236}">
-                <a16:creationId xmlns:a16="http://schemas.microsoft.com/office/drawing/2014/main" id="{30F81F3B-5064-442E-8ED4-F6137C95832B}"/>
+                <a16:creationId xmlns:a16="http://schemas.microsoft.com/office/drawing/2014/main" id="{CCDC60FF-E47B-4DEC-8DF3-F1891FA2CAA8}"/>
               </a:ext>
             </a:extLst>
           </p:cNvPr>
@@ -15215,7 +15213,7 @@
           <p:cNvPr id="44" name="">
             <a:extLst xmlns:a="http://schemas.openxmlformats.org/drawingml/2006/main">
               <a:ext uri="{FF2B5EF4-FFF2-40B4-BE49-F238E27FC236}">
-                <a16:creationId xmlns:a16="http://schemas.microsoft.com/office/drawing/2014/main" id="{0C4E9C59-8783-4F63-8288-73676AC5BE74}"/>
+                <a16:creationId xmlns:a16="http://schemas.microsoft.com/office/drawing/2014/main" id="{01E92AB2-E2F7-4C5A-95A5-64C879D61B3D}"/>
               </a:ext>
             </a:extLst>
           </p:cNvPr>
@@ -15279,7 +15277,7 @@
           <p:cNvPr id="45" name="">
             <a:extLst xmlns:a="http://schemas.openxmlformats.org/drawingml/2006/main">
               <a:ext uri="{FF2B5EF4-FFF2-40B4-BE49-F238E27FC236}">
-                <a16:creationId xmlns:a16="http://schemas.microsoft.com/office/drawing/2014/main" id="{B8B549B9-94A7-4246-9E86-07C23B706C24}"/>
+                <a16:creationId xmlns:a16="http://schemas.microsoft.com/office/drawing/2014/main" id="{B3C988EE-2E39-4227-A8A6-FA22C723A8A0}"/>
               </a:ext>
             </a:extLst>
           </p:cNvPr>
@@ -15343,7 +15341,7 @@
           <p:cNvPr id="46" name="">
             <a:extLst xmlns:a="http://schemas.openxmlformats.org/drawingml/2006/main">
               <a:ext uri="{FF2B5EF4-FFF2-40B4-BE49-F238E27FC236}">
-                <a16:creationId xmlns:a16="http://schemas.microsoft.com/office/drawing/2014/main" id="{B36BF06C-2FD1-4EF5-8A7A-EAC9F62F8993}"/>
+                <a16:creationId xmlns:a16="http://schemas.microsoft.com/office/drawing/2014/main" id="{FCC373E4-1F10-4805-B1A3-D2C26F84CD9F}"/>
               </a:ext>
             </a:extLst>
           </p:cNvPr>
@@ -15378,7 +15376,7 @@
           <p:cNvPr id="47" name="">
             <a:extLst xmlns:a="http://schemas.openxmlformats.org/drawingml/2006/main">
               <a:ext uri="{FF2B5EF4-FFF2-40B4-BE49-F238E27FC236}">
-                <a16:creationId xmlns:a16="http://schemas.microsoft.com/office/drawing/2014/main" id="{87AEDEBB-0BFA-4BC9-8B48-6FD838F44F71}"/>
+                <a16:creationId xmlns:a16="http://schemas.microsoft.com/office/drawing/2014/main" id="{53142C9A-A5D0-4204-8301-E7992D863E0F}"/>
               </a:ext>
             </a:extLst>
           </p:cNvPr>
@@ -15413,7 +15411,7 @@
           <p:cNvPr id="48" name="">
             <a:extLst xmlns:a="http://schemas.openxmlformats.org/drawingml/2006/main">
               <a:ext uri="{FF2B5EF4-FFF2-40B4-BE49-F238E27FC236}">
-                <a16:creationId xmlns:a16="http://schemas.microsoft.com/office/drawing/2014/main" id="{5D1C1664-E235-46FB-8CD4-5AA1116C6E96}"/>
+                <a16:creationId xmlns:a16="http://schemas.microsoft.com/office/drawing/2014/main" id="{884DB80D-E49C-454C-8B82-11C9404F145E}"/>
               </a:ext>
             </a:extLst>
           </p:cNvPr>
@@ -15448,7 +15446,7 @@
           <p:cNvPr id="49" name="">
             <a:extLst xmlns:a="http://schemas.openxmlformats.org/drawingml/2006/main">
               <a:ext uri="{FF2B5EF4-FFF2-40B4-BE49-F238E27FC236}">
-                <a16:creationId xmlns:a16="http://schemas.microsoft.com/office/drawing/2014/main" id="{637ABAE3-1552-4F10-BEBA-F0A6FD6EF6CA}"/>
+                <a16:creationId xmlns:a16="http://schemas.microsoft.com/office/drawing/2014/main" id="{13180107-64A8-42C6-AF69-4E7EA74D6F5D}"/>
               </a:ext>
             </a:extLst>
           </p:cNvPr>
@@ -15483,7 +15481,7 @@
           <p:cNvPr id="50" name="">
             <a:extLst xmlns:a="http://schemas.openxmlformats.org/drawingml/2006/main">
               <a:ext uri="{FF2B5EF4-FFF2-40B4-BE49-F238E27FC236}">
-                <a16:creationId xmlns:a16="http://schemas.microsoft.com/office/drawing/2014/main" id="{857924A1-E412-4F01-AAB9-23253A945E50}"/>
+                <a16:creationId xmlns:a16="http://schemas.microsoft.com/office/drawing/2014/main" id="{8EFD844D-4D1F-4C3F-9610-45079DF26A97}"/>
               </a:ext>
             </a:extLst>
           </p:cNvPr>
@@ -15547,7 +15545,7 @@
           <p:cNvPr id="51" name="">
             <a:extLst xmlns:a="http://schemas.openxmlformats.org/drawingml/2006/main">
               <a:ext uri="{FF2B5EF4-FFF2-40B4-BE49-F238E27FC236}">
-                <a16:creationId xmlns:a16="http://schemas.microsoft.com/office/drawing/2014/main" id="{517278A1-0C88-4A67-97B4-73626846EAF0}"/>
+                <a16:creationId xmlns:a16="http://schemas.microsoft.com/office/drawing/2014/main" id="{4C41DC55-207E-4B24-A36A-864C8F4E0031}"/>
               </a:ext>
             </a:extLst>
           </p:cNvPr>
@@ -15611,7 +15609,7 @@
           <p:cNvPr id="52" name="">
             <a:extLst xmlns:a="http://schemas.openxmlformats.org/drawingml/2006/main">
               <a:ext uri="{FF2B5EF4-FFF2-40B4-BE49-F238E27FC236}">
-                <a16:creationId xmlns:a16="http://schemas.microsoft.com/office/drawing/2014/main" id="{44C64D4D-C121-44AD-9E12-F52C8EEFAD60}"/>
+                <a16:creationId xmlns:a16="http://schemas.microsoft.com/office/drawing/2014/main" id="{9179CF9F-5034-4AA2-A2CC-BE9068ECD996}"/>
               </a:ext>
             </a:extLst>
           </p:cNvPr>
@@ -15673,7 +15671,7 @@
     </p:spTree>
     <p:extLst>
       <p:ext uri="{BB962C8B-B14F-4D97-AF65-F5344CB8AC3E}">
-        <p14:creationId xmlns:p14="http://schemas.microsoft.com/office/powerpoint/2010/main" val="1304447145"/>
+        <p14:creationId xmlns:p14="http://schemas.microsoft.com/office/powerpoint/2010/main" val="556324280"/>
       </p:ext>
     </p:extLst>
   </p:cSld>
@@ -15697,7 +15695,7 @@
           <p:cNvPr id="1" name="">
             <a:extLst xmlns:a="http://schemas.openxmlformats.org/drawingml/2006/main">
               <a:ext uri="{FF2B5EF4-FFF2-40B4-BE49-F238E27FC236}">
-                <a16:creationId xmlns:a16="http://schemas.microsoft.com/office/drawing/2014/main" id="{3C6F9884-2A2D-45C1-AF6E-518D49384FD3}"/>
+                <a16:creationId xmlns:a16="http://schemas.microsoft.com/office/drawing/2014/main" id="{2948301C-DF04-4A8F-8D28-6183C83FCAF8}"/>
               </a:ext>
             </a:extLst>
           </p:cNvPr>
@@ -15732,7 +15730,7 @@
           <p:cNvPr id="2" name="">
             <a:extLst xmlns:a="http://schemas.openxmlformats.org/drawingml/2006/main">
               <a:ext uri="{FF2B5EF4-FFF2-40B4-BE49-F238E27FC236}">
-                <a16:creationId xmlns:a16="http://schemas.microsoft.com/office/drawing/2014/main" id="{9969E8E6-637D-46C6-AAEC-70981B6349C7}"/>
+                <a16:creationId xmlns:a16="http://schemas.microsoft.com/office/drawing/2014/main" id="{F831A142-0632-40BF-8427-E133F771D777}"/>
               </a:ext>
             </a:extLst>
           </p:cNvPr>
@@ -15767,7 +15765,7 @@
           <p:cNvPr id="3" name="">
             <a:extLst xmlns:a="http://schemas.openxmlformats.org/drawingml/2006/main">
               <a:ext uri="{FF2B5EF4-FFF2-40B4-BE49-F238E27FC236}">
-                <a16:creationId xmlns:a16="http://schemas.microsoft.com/office/drawing/2014/main" id="{05892752-BC9B-4471-9FC4-F97592C39510}"/>
+                <a16:creationId xmlns:a16="http://schemas.microsoft.com/office/drawing/2014/main" id="{E005220E-48A1-474F-B4EA-2191D6BC25C7}"/>
               </a:ext>
             </a:extLst>
           </p:cNvPr>
@@ -15802,7 +15800,7 @@
           <p:cNvPr id="4" name="kicker-07-marker">
             <a:extLst xmlns:a="http://schemas.openxmlformats.org/drawingml/2006/main">
               <a:ext uri="{FF2B5EF4-FFF2-40B4-BE49-F238E27FC236}">
-                <a16:creationId xmlns:a16="http://schemas.microsoft.com/office/drawing/2014/main" id="{F53894F1-12B2-4EDD-9E4E-31E9A5C0EF28}"/>
+                <a16:creationId xmlns:a16="http://schemas.microsoft.com/office/drawing/2014/main" id="{ED338103-3560-4E62-B074-2DA8E205D9A8}"/>
               </a:ext>
             </a:extLst>
           </p:cNvPr>
@@ -15837,7 +15835,7 @@
           <p:cNvPr id="5" name="kicker-07-label">
             <a:extLst xmlns:a="http://schemas.openxmlformats.org/drawingml/2006/main">
               <a:ext uri="{FF2B5EF4-FFF2-40B4-BE49-F238E27FC236}">
-                <a16:creationId xmlns:a16="http://schemas.microsoft.com/office/drawing/2014/main" id="{B3198041-B1C4-450F-ACAC-37A5DE94FCBB}"/>
+                <a16:creationId xmlns:a16="http://schemas.microsoft.com/office/drawing/2014/main" id="{0F1E7EA4-C4EA-496C-8C5C-FA1A10C1D914}"/>
               </a:ext>
             </a:extLst>
           </p:cNvPr>
@@ -15901,7 +15899,7 @@
           <p:cNvPr id="6" name="">
             <a:extLst xmlns:a="http://schemas.openxmlformats.org/drawingml/2006/main">
               <a:ext uri="{FF2B5EF4-FFF2-40B4-BE49-F238E27FC236}">
-                <a16:creationId xmlns:a16="http://schemas.microsoft.com/office/drawing/2014/main" id="{44AEF908-99AA-469A-9709-D8D01C4066C9}"/>
+                <a16:creationId xmlns:a16="http://schemas.microsoft.com/office/drawing/2014/main" id="{6D1228BB-5D3C-4A48-BF9F-835A84D08EC9}"/>
               </a:ext>
             </a:extLst>
           </p:cNvPr>
@@ -15965,7 +15963,7 @@
           <p:cNvPr id="7" name="">
             <a:extLst xmlns:a="http://schemas.openxmlformats.org/drawingml/2006/main">
               <a:ext uri="{FF2B5EF4-FFF2-40B4-BE49-F238E27FC236}">
-                <a16:creationId xmlns:a16="http://schemas.microsoft.com/office/drawing/2014/main" id="{7067ED93-0D6A-4843-B15A-EFA74871E2D2}"/>
+                <a16:creationId xmlns:a16="http://schemas.microsoft.com/office/drawing/2014/main" id="{372693FC-34CA-4941-89AC-A1029BFE8427}"/>
               </a:ext>
             </a:extLst>
           </p:cNvPr>
@@ -15998,7 +15996,7 @@
           <p:cNvPr id="8" name="">
             <a:extLst xmlns:a="http://schemas.openxmlformats.org/drawingml/2006/main">
               <a:ext uri="{FF2B5EF4-FFF2-40B4-BE49-F238E27FC236}">
-                <a16:creationId xmlns:a16="http://schemas.microsoft.com/office/drawing/2014/main" id="{C38F5487-88BA-429C-B350-B6163A7982A4}"/>
+                <a16:creationId xmlns:a16="http://schemas.microsoft.com/office/drawing/2014/main" id="{1E2A21DF-8861-4F00-BAA5-3B0D010CA2D1}"/>
               </a:ext>
             </a:extLst>
           </p:cNvPr>
@@ -16033,7 +16031,7 @@
           <p:cNvPr id="9" name="">
             <a:extLst xmlns:a="http://schemas.openxmlformats.org/drawingml/2006/main">
               <a:ext uri="{FF2B5EF4-FFF2-40B4-BE49-F238E27FC236}">
-                <a16:creationId xmlns:a16="http://schemas.microsoft.com/office/drawing/2014/main" id="{46DEC7B4-4FD8-4056-A6FC-9730B3346618}"/>
+                <a16:creationId xmlns:a16="http://schemas.microsoft.com/office/drawing/2014/main" id="{D73A45ED-80F5-4281-92F5-E2EEE3FEDE88}"/>
               </a:ext>
             </a:extLst>
           </p:cNvPr>
@@ -16097,7 +16095,7 @@
           <p:cNvPr id="10" name="">
             <a:extLst xmlns:a="http://schemas.openxmlformats.org/drawingml/2006/main">
               <a:ext uri="{FF2B5EF4-FFF2-40B4-BE49-F238E27FC236}">
-                <a16:creationId xmlns:a16="http://schemas.microsoft.com/office/drawing/2014/main" id="{1A89FDF1-9E1F-4F30-9FE2-1D107AA336BA}"/>
+                <a16:creationId xmlns:a16="http://schemas.microsoft.com/office/drawing/2014/main" id="{42CF3C3B-79EE-48E4-9F7D-6FEC62ADC230}"/>
               </a:ext>
             </a:extLst>
           </p:cNvPr>
@@ -16161,7 +16159,7 @@
           <p:cNvPr id="11" name="">
             <a:extLst xmlns:a="http://schemas.openxmlformats.org/drawingml/2006/main">
               <a:ext uri="{FF2B5EF4-FFF2-40B4-BE49-F238E27FC236}">
-                <a16:creationId xmlns:a16="http://schemas.microsoft.com/office/drawing/2014/main" id="{1C41F246-829E-4DAC-B850-0AA8730B5F8D}"/>
+                <a16:creationId xmlns:a16="http://schemas.microsoft.com/office/drawing/2014/main" id="{8A0A91E0-ACA5-45E8-BAE7-75A0A394FF94}"/>
               </a:ext>
             </a:extLst>
           </p:cNvPr>
@@ -16194,7 +16192,7 @@
           <p:cNvPr id="12" name="">
             <a:extLst xmlns:a="http://schemas.openxmlformats.org/drawingml/2006/main">
               <a:ext uri="{FF2B5EF4-FFF2-40B4-BE49-F238E27FC236}">
-                <a16:creationId xmlns:a16="http://schemas.microsoft.com/office/drawing/2014/main" id="{E016D7CC-53E9-4300-B06A-4DDA795A42EC}"/>
+                <a16:creationId xmlns:a16="http://schemas.microsoft.com/office/drawing/2014/main" id="{5303137D-C113-4846-846E-3A875CEE420E}"/>
               </a:ext>
             </a:extLst>
           </p:cNvPr>
@@ -16229,7 +16227,7 @@
           <p:cNvPr id="13" name="">
             <a:extLst xmlns:a="http://schemas.openxmlformats.org/drawingml/2006/main">
               <a:ext uri="{FF2B5EF4-FFF2-40B4-BE49-F238E27FC236}">
-                <a16:creationId xmlns:a16="http://schemas.microsoft.com/office/drawing/2014/main" id="{5579AFF0-63E8-437F-B367-273A8DB2A37B}"/>
+                <a16:creationId xmlns:a16="http://schemas.microsoft.com/office/drawing/2014/main" id="{AFB8108A-AA1E-480D-8C00-CABB93AE4E35}"/>
               </a:ext>
             </a:extLst>
           </p:cNvPr>
@@ -16293,7 +16291,7 @@
           <p:cNvPr id="14" name="">
             <a:extLst xmlns:a="http://schemas.openxmlformats.org/drawingml/2006/main">
               <a:ext uri="{FF2B5EF4-FFF2-40B4-BE49-F238E27FC236}">
-                <a16:creationId xmlns:a16="http://schemas.microsoft.com/office/drawing/2014/main" id="{2DF0C26B-B3D2-4726-947C-A19A6CD9AAF0}"/>
+                <a16:creationId xmlns:a16="http://schemas.microsoft.com/office/drawing/2014/main" id="{24584C3D-C9E6-4E97-8482-31E87C2AB023}"/>
               </a:ext>
             </a:extLst>
           </p:cNvPr>
@@ -16357,7 +16355,7 @@
           <p:cNvPr id="15" name="">
             <a:extLst xmlns:a="http://schemas.openxmlformats.org/drawingml/2006/main">
               <a:ext uri="{FF2B5EF4-FFF2-40B4-BE49-F238E27FC236}">
-                <a16:creationId xmlns:a16="http://schemas.microsoft.com/office/drawing/2014/main" id="{D2CC1B2C-DA2A-44F1-886C-408FB860C34C}"/>
+                <a16:creationId xmlns:a16="http://schemas.microsoft.com/office/drawing/2014/main" id="{24B883AD-0350-4391-9ABF-437106F789C0}"/>
               </a:ext>
             </a:extLst>
           </p:cNvPr>
@@ -16390,7 +16388,7 @@
           <p:cNvPr id="16" name="">
             <a:extLst xmlns:a="http://schemas.openxmlformats.org/drawingml/2006/main">
               <a:ext uri="{FF2B5EF4-FFF2-40B4-BE49-F238E27FC236}">
-                <a16:creationId xmlns:a16="http://schemas.microsoft.com/office/drawing/2014/main" id="{2F5197D0-50D4-4195-B6FA-A4F3154E0746}"/>
+                <a16:creationId xmlns:a16="http://schemas.microsoft.com/office/drawing/2014/main" id="{93F7492B-445E-444C-9A75-94E2B0985D9F}"/>
               </a:ext>
             </a:extLst>
           </p:cNvPr>
@@ -16444,7 +16442,7 @@
                 <a:ea typeface="Aptos"/>
                 <a:cs typeface="Aptos"/>
               </a:rPr>
-              <a:t>Recurring instructor check: sales impact / signal / RevOps field / buyer content / AI risk / industrial failure mode</a:t>
+              <a:t>Recurring instructor check: sales impact / signal / RevOps field / buyer content / review risk / industrial failure mode</a:t>
             </a:r>
           </a:p>
         </p:txBody>
@@ -16454,7 +16452,7 @@
           <p:cNvPr id="17" name="">
             <a:extLst xmlns:a="http://schemas.openxmlformats.org/drawingml/2006/main">
               <a:ext uri="{FF2B5EF4-FFF2-40B4-BE49-F238E27FC236}">
-                <a16:creationId xmlns:a16="http://schemas.microsoft.com/office/drawing/2014/main" id="{B42790EF-5BE4-49E3-9653-CD176ECD3D75}"/>
+                <a16:creationId xmlns:a16="http://schemas.microsoft.com/office/drawing/2014/main" id="{48737E9A-BA44-4185-AAD2-FBFF7481D05D}"/>
               </a:ext>
             </a:extLst>
           </p:cNvPr>
@@ -16489,7 +16487,7 @@
           <p:cNvPr id="18" name="">
             <a:extLst xmlns:a="http://schemas.openxmlformats.org/drawingml/2006/main">
               <a:ext uri="{FF2B5EF4-FFF2-40B4-BE49-F238E27FC236}">
-                <a16:creationId xmlns:a16="http://schemas.microsoft.com/office/drawing/2014/main" id="{85BF92E7-5F9B-4409-803B-12FB22D9D85C}"/>
+                <a16:creationId xmlns:a16="http://schemas.microsoft.com/office/drawing/2014/main" id="{2B551F82-E939-4A99-9E55-5659AD49CD50}"/>
               </a:ext>
             </a:extLst>
           </p:cNvPr>
@@ -16553,7 +16551,7 @@
           <p:cNvPr id="19" name="">
             <a:extLst xmlns:a="http://schemas.openxmlformats.org/drawingml/2006/main">
               <a:ext uri="{FF2B5EF4-FFF2-40B4-BE49-F238E27FC236}">
-                <a16:creationId xmlns:a16="http://schemas.microsoft.com/office/drawing/2014/main" id="{9E834562-C763-42E0-A8FC-682D812BD32C}"/>
+                <a16:creationId xmlns:a16="http://schemas.microsoft.com/office/drawing/2014/main" id="{6EDB0DE9-B841-4A15-A99E-F073B362E348}"/>
               </a:ext>
             </a:extLst>
           </p:cNvPr>
@@ -16617,7 +16615,7 @@
           <p:cNvPr id="20" name="">
             <a:extLst xmlns:a="http://schemas.openxmlformats.org/drawingml/2006/main">
               <a:ext uri="{FF2B5EF4-FFF2-40B4-BE49-F238E27FC236}">
-                <a16:creationId xmlns:a16="http://schemas.microsoft.com/office/drawing/2014/main" id="{CE3D7513-AFEA-4DE3-906C-32468E707C53}"/>
+                <a16:creationId xmlns:a16="http://schemas.microsoft.com/office/drawing/2014/main" id="{DBD42941-1FDE-4564-97E8-B6BE9D4D1E01}"/>
               </a:ext>
             </a:extLst>
           </p:cNvPr>
@@ -16679,7 +16677,7 @@
     </p:spTree>
     <p:extLst>
       <p:ext uri="{BB962C8B-B14F-4D97-AF65-F5344CB8AC3E}">
-        <p14:creationId xmlns:p14="http://schemas.microsoft.com/office/powerpoint/2010/main" val="1281691226"/>
+        <p14:creationId xmlns:p14="http://schemas.microsoft.com/office/powerpoint/2010/main" val="147779367"/>
       </p:ext>
     </p:extLst>
   </p:cSld>
@@ -16703,7 +16701,7 @@
           <p:cNvPr id="1" name="">
             <a:extLst xmlns:a="http://schemas.openxmlformats.org/drawingml/2006/main">
               <a:ext uri="{FF2B5EF4-FFF2-40B4-BE49-F238E27FC236}">
-                <a16:creationId xmlns:a16="http://schemas.microsoft.com/office/drawing/2014/main" id="{D6FF197A-0415-4E5E-B38F-9F5D340C3054}"/>
+                <a16:creationId xmlns:a16="http://schemas.microsoft.com/office/drawing/2014/main" id="{DBCE56DE-07E2-4BDD-9015-8598AEDB058D}"/>
               </a:ext>
             </a:extLst>
           </p:cNvPr>
@@ -16738,7 +16736,7 @@
           <p:cNvPr id="2" name="">
             <a:extLst xmlns:a="http://schemas.openxmlformats.org/drawingml/2006/main">
               <a:ext uri="{FF2B5EF4-FFF2-40B4-BE49-F238E27FC236}">
-                <a16:creationId xmlns:a16="http://schemas.microsoft.com/office/drawing/2014/main" id="{85B31903-8F94-4996-910B-D13CAFC296FB}"/>
+                <a16:creationId xmlns:a16="http://schemas.microsoft.com/office/drawing/2014/main" id="{674A944C-E4EE-4E81-966D-C1FE88A18746}"/>
               </a:ext>
             </a:extLst>
           </p:cNvPr>
@@ -16773,7 +16771,7 @@
           <p:cNvPr id="3" name="">
             <a:extLst xmlns:a="http://schemas.openxmlformats.org/drawingml/2006/main">
               <a:ext uri="{FF2B5EF4-FFF2-40B4-BE49-F238E27FC236}">
-                <a16:creationId xmlns:a16="http://schemas.microsoft.com/office/drawing/2014/main" id="{83D144DB-FB81-4064-A393-4CB1F5959848}"/>
+                <a16:creationId xmlns:a16="http://schemas.microsoft.com/office/drawing/2014/main" id="{D94F9340-EE80-4D35-904B-49004DE0CCBA}"/>
               </a:ext>
             </a:extLst>
           </p:cNvPr>
@@ -16808,7 +16806,7 @@
           <p:cNvPr id="4" name="kicker-07-marker">
             <a:extLst xmlns:a="http://schemas.openxmlformats.org/drawingml/2006/main">
               <a:ext uri="{FF2B5EF4-FFF2-40B4-BE49-F238E27FC236}">
-                <a16:creationId xmlns:a16="http://schemas.microsoft.com/office/drawing/2014/main" id="{88BCAE44-554B-41C4-959C-66356D2398C9}"/>
+                <a16:creationId xmlns:a16="http://schemas.microsoft.com/office/drawing/2014/main" id="{DC808853-9303-426F-ADFC-52E51C4B953D}"/>
               </a:ext>
             </a:extLst>
           </p:cNvPr>
@@ -16843,7 +16841,7 @@
           <p:cNvPr id="5" name="kicker-07-label">
             <a:extLst xmlns:a="http://schemas.openxmlformats.org/drawingml/2006/main">
               <a:ext uri="{FF2B5EF4-FFF2-40B4-BE49-F238E27FC236}">
-                <a16:creationId xmlns:a16="http://schemas.microsoft.com/office/drawing/2014/main" id="{E77ED13C-745F-4582-A959-65C48B6CB59C}"/>
+                <a16:creationId xmlns:a16="http://schemas.microsoft.com/office/drawing/2014/main" id="{B0DE9C98-B8D1-423E-B612-C534EE9A70A0}"/>
               </a:ext>
             </a:extLst>
           </p:cNvPr>
@@ -16907,7 +16905,7 @@
           <p:cNvPr id="6" name="">
             <a:extLst xmlns:a="http://schemas.openxmlformats.org/drawingml/2006/main">
               <a:ext uri="{FF2B5EF4-FFF2-40B4-BE49-F238E27FC236}">
-                <a16:creationId xmlns:a16="http://schemas.microsoft.com/office/drawing/2014/main" id="{2636CC7E-C311-4D5B-A086-4CE44C5C2106}"/>
+                <a16:creationId xmlns:a16="http://schemas.microsoft.com/office/drawing/2014/main" id="{D81866CB-6428-441B-AB46-8424EF92F368}"/>
               </a:ext>
             </a:extLst>
           </p:cNvPr>
@@ -16971,7 +16969,7 @@
           <p:cNvPr id="7" name="">
             <a:extLst xmlns:a="http://schemas.openxmlformats.org/drawingml/2006/main">
               <a:ext uri="{FF2B5EF4-FFF2-40B4-BE49-F238E27FC236}">
-                <a16:creationId xmlns:a16="http://schemas.microsoft.com/office/drawing/2014/main" id="{FC73E313-4F6F-4FF4-A553-24F556834443}"/>
+                <a16:creationId xmlns:a16="http://schemas.microsoft.com/office/drawing/2014/main" id="{C0792450-39C8-414D-B657-00B30A8D03E8}"/>
               </a:ext>
             </a:extLst>
           </p:cNvPr>
@@ -17035,7 +17033,7 @@
           <p:cNvPr id="8" name="">
             <a:extLst xmlns:a="http://schemas.openxmlformats.org/drawingml/2006/main">
               <a:ext uri="{FF2B5EF4-FFF2-40B4-BE49-F238E27FC236}">
-                <a16:creationId xmlns:a16="http://schemas.microsoft.com/office/drawing/2014/main" id="{74F8FBB5-ACD9-4334-98AE-B12A7C0A997E}"/>
+                <a16:creationId xmlns:a16="http://schemas.microsoft.com/office/drawing/2014/main" id="{67C2CCE8-068C-41C1-A739-665102989D11}"/>
               </a:ext>
             </a:extLst>
           </p:cNvPr>
@@ -17070,7 +17068,7 @@
           <p:cNvPr id="9" name="">
             <a:extLst xmlns:a="http://schemas.openxmlformats.org/drawingml/2006/main">
               <a:ext uri="{FF2B5EF4-FFF2-40B4-BE49-F238E27FC236}">
-                <a16:creationId xmlns:a16="http://schemas.microsoft.com/office/drawing/2014/main" id="{5F76FD74-19EA-4BE7-9FFF-93CE2C247EA5}"/>
+                <a16:creationId xmlns:a16="http://schemas.microsoft.com/office/drawing/2014/main" id="{2C9A066B-7EDF-42BD-B761-88CAFD5A7679}"/>
               </a:ext>
             </a:extLst>
           </p:cNvPr>
@@ -17134,7 +17132,7 @@
           <p:cNvPr id="10" name="">
             <a:extLst xmlns:a="http://schemas.openxmlformats.org/drawingml/2006/main">
               <a:ext uri="{FF2B5EF4-FFF2-40B4-BE49-F238E27FC236}">
-                <a16:creationId xmlns:a16="http://schemas.microsoft.com/office/drawing/2014/main" id="{049D4F27-6ABD-41C8-B756-8A2245F28F5F}"/>
+                <a16:creationId xmlns:a16="http://schemas.microsoft.com/office/drawing/2014/main" id="{46AB2F41-4F7D-4845-B56A-ECB9677CC5C3}"/>
               </a:ext>
             </a:extLst>
           </p:cNvPr>
@@ -17198,7 +17196,7 @@
           <p:cNvPr id="11" name="">
             <a:extLst xmlns:a="http://schemas.openxmlformats.org/drawingml/2006/main">
               <a:ext uri="{FF2B5EF4-FFF2-40B4-BE49-F238E27FC236}">
-                <a16:creationId xmlns:a16="http://schemas.microsoft.com/office/drawing/2014/main" id="{7410CEF6-32BD-46BD-9923-25E085DFC71B}"/>
+                <a16:creationId xmlns:a16="http://schemas.microsoft.com/office/drawing/2014/main" id="{AF05C8EF-8AAC-4355-8EE1-7CD4185F9718}"/>
               </a:ext>
             </a:extLst>
           </p:cNvPr>
@@ -17262,7 +17260,7 @@
           <p:cNvPr id="12" name="">
             <a:extLst xmlns:a="http://schemas.openxmlformats.org/drawingml/2006/main">
               <a:ext uri="{FF2B5EF4-FFF2-40B4-BE49-F238E27FC236}">
-                <a16:creationId xmlns:a16="http://schemas.microsoft.com/office/drawing/2014/main" id="{BE4E1A5E-536B-4006-86A5-815967E57156}"/>
+                <a16:creationId xmlns:a16="http://schemas.microsoft.com/office/drawing/2014/main" id="{B4AB35A2-97A1-44D3-86E3-A0175E1E965D}"/>
               </a:ext>
             </a:extLst>
           </p:cNvPr>
@@ -17295,7 +17293,7 @@
           <p:cNvPr id="13" name="">
             <a:extLst xmlns:a="http://schemas.openxmlformats.org/drawingml/2006/main">
               <a:ext uri="{FF2B5EF4-FFF2-40B4-BE49-F238E27FC236}">
-                <a16:creationId xmlns:a16="http://schemas.microsoft.com/office/drawing/2014/main" id="{342B8BD3-157A-4899-83E5-A993EF51BE94}"/>
+                <a16:creationId xmlns:a16="http://schemas.microsoft.com/office/drawing/2014/main" id="{4052F574-1A2A-4AC5-8223-E244E4A94C0E}"/>
               </a:ext>
             </a:extLst>
           </p:cNvPr>
@@ -17359,7 +17357,7 @@
           <p:cNvPr id="14" name="">
             <a:extLst xmlns:a="http://schemas.openxmlformats.org/drawingml/2006/main">
               <a:ext uri="{FF2B5EF4-FFF2-40B4-BE49-F238E27FC236}">
-                <a16:creationId xmlns:a16="http://schemas.microsoft.com/office/drawing/2014/main" id="{C42C3C28-70D7-4DA7-8748-343513FCA699}"/>
+                <a16:creationId xmlns:a16="http://schemas.microsoft.com/office/drawing/2014/main" id="{17BBF3BA-733B-47EA-90CC-FDFA6DFA58DB}"/>
               </a:ext>
             </a:extLst>
           </p:cNvPr>
@@ -17394,7 +17392,7 @@
           <p:cNvPr id="15" name="">
             <a:extLst xmlns:a="http://schemas.openxmlformats.org/drawingml/2006/main">
               <a:ext uri="{FF2B5EF4-FFF2-40B4-BE49-F238E27FC236}">
-                <a16:creationId xmlns:a16="http://schemas.microsoft.com/office/drawing/2014/main" id="{2A5A99A2-779C-480A-976B-58F0C7785295}"/>
+                <a16:creationId xmlns:a16="http://schemas.microsoft.com/office/drawing/2014/main" id="{F4179CDC-E3C7-420B-8BF2-C76432695026}"/>
               </a:ext>
             </a:extLst>
           </p:cNvPr>
@@ -17458,7 +17456,7 @@
           <p:cNvPr id="16" name="">
             <a:extLst xmlns:a="http://schemas.openxmlformats.org/drawingml/2006/main">
               <a:ext uri="{FF2B5EF4-FFF2-40B4-BE49-F238E27FC236}">
-                <a16:creationId xmlns:a16="http://schemas.microsoft.com/office/drawing/2014/main" id="{8B702F16-5FEF-45F3-A1E1-59A038A9A634}"/>
+                <a16:creationId xmlns:a16="http://schemas.microsoft.com/office/drawing/2014/main" id="{B61A8495-FA2E-4908-BDFF-919171DAD1D8}"/>
               </a:ext>
             </a:extLst>
           </p:cNvPr>
@@ -17491,7 +17489,7 @@
           <p:cNvPr id="17" name="">
             <a:extLst xmlns:a="http://schemas.openxmlformats.org/drawingml/2006/main">
               <a:ext uri="{FF2B5EF4-FFF2-40B4-BE49-F238E27FC236}">
-                <a16:creationId xmlns:a16="http://schemas.microsoft.com/office/drawing/2014/main" id="{0A616DAB-38BE-46F1-827D-E5E2A88D8035}"/>
+                <a16:creationId xmlns:a16="http://schemas.microsoft.com/office/drawing/2014/main" id="{8C125C9F-433A-4FDE-A5FE-3467A9AAFD16}"/>
               </a:ext>
             </a:extLst>
           </p:cNvPr>
@@ -17526,7 +17524,7 @@
           <p:cNvPr id="18" name="">
             <a:extLst xmlns:a="http://schemas.openxmlformats.org/drawingml/2006/main">
               <a:ext uri="{FF2B5EF4-FFF2-40B4-BE49-F238E27FC236}">
-                <a16:creationId xmlns:a16="http://schemas.microsoft.com/office/drawing/2014/main" id="{CC3946D0-2806-4D38-84DC-2CBA75C52D55}"/>
+                <a16:creationId xmlns:a16="http://schemas.microsoft.com/office/drawing/2014/main" id="{C48A85F8-E8DC-480E-80DD-A6EF2E6DE3E0}"/>
               </a:ext>
             </a:extLst>
           </p:cNvPr>
@@ -17590,7 +17588,7 @@
           <p:cNvPr id="19" name="">
             <a:extLst xmlns:a="http://schemas.openxmlformats.org/drawingml/2006/main">
               <a:ext uri="{FF2B5EF4-FFF2-40B4-BE49-F238E27FC236}">
-                <a16:creationId xmlns:a16="http://schemas.microsoft.com/office/drawing/2014/main" id="{E31BD705-8946-4DA8-9AC8-510A4558BA3B}"/>
+                <a16:creationId xmlns:a16="http://schemas.microsoft.com/office/drawing/2014/main" id="{4942B493-699F-4945-8009-CFF53D544AE8}"/>
               </a:ext>
             </a:extLst>
           </p:cNvPr>
@@ -17625,7 +17623,7 @@
           <p:cNvPr id="20" name="">
             <a:extLst xmlns:a="http://schemas.openxmlformats.org/drawingml/2006/main">
               <a:ext uri="{FF2B5EF4-FFF2-40B4-BE49-F238E27FC236}">
-                <a16:creationId xmlns:a16="http://schemas.microsoft.com/office/drawing/2014/main" id="{B1338A13-35CA-45E2-B6AE-1DA05B0D5B44}"/>
+                <a16:creationId xmlns:a16="http://schemas.microsoft.com/office/drawing/2014/main" id="{BC7BA88E-7249-4137-AD6C-5ABEFAD77A2A}"/>
               </a:ext>
             </a:extLst>
           </p:cNvPr>
@@ -17689,7 +17687,7 @@
           <p:cNvPr id="21" name="">
             <a:extLst xmlns:a="http://schemas.openxmlformats.org/drawingml/2006/main">
               <a:ext uri="{FF2B5EF4-FFF2-40B4-BE49-F238E27FC236}">
-                <a16:creationId xmlns:a16="http://schemas.microsoft.com/office/drawing/2014/main" id="{DDDB6959-48C3-494D-BF91-1CF3B20C9936}"/>
+                <a16:creationId xmlns:a16="http://schemas.microsoft.com/office/drawing/2014/main" id="{A7A948A9-4DFA-409A-93EE-420F337159C0}"/>
               </a:ext>
             </a:extLst>
           </p:cNvPr>
@@ -17724,7 +17722,7 @@
           <p:cNvPr id="22" name="">
             <a:extLst xmlns:a="http://schemas.openxmlformats.org/drawingml/2006/main">
               <a:ext uri="{FF2B5EF4-FFF2-40B4-BE49-F238E27FC236}">
-                <a16:creationId xmlns:a16="http://schemas.microsoft.com/office/drawing/2014/main" id="{327C5218-38F4-4D2F-B54B-CA0DA631C5DF}"/>
+                <a16:creationId xmlns:a16="http://schemas.microsoft.com/office/drawing/2014/main" id="{D059BEB4-43B1-45FD-BB3D-08C65E0D056B}"/>
               </a:ext>
             </a:extLst>
           </p:cNvPr>
@@ -17788,7 +17786,7 @@
           <p:cNvPr id="23" name="">
             <a:extLst xmlns:a="http://schemas.openxmlformats.org/drawingml/2006/main">
               <a:ext uri="{FF2B5EF4-FFF2-40B4-BE49-F238E27FC236}">
-                <a16:creationId xmlns:a16="http://schemas.microsoft.com/office/drawing/2014/main" id="{1728C6F2-DBC1-42D6-9D9E-038B3E6045A6}"/>
+                <a16:creationId xmlns:a16="http://schemas.microsoft.com/office/drawing/2014/main" id="{E718EC7D-143E-4EB5-B49F-A846C2289411}"/>
               </a:ext>
             </a:extLst>
           </p:cNvPr>
@@ -17823,7 +17821,7 @@
           <p:cNvPr id="24" name="">
             <a:extLst xmlns:a="http://schemas.openxmlformats.org/drawingml/2006/main">
               <a:ext uri="{FF2B5EF4-FFF2-40B4-BE49-F238E27FC236}">
-                <a16:creationId xmlns:a16="http://schemas.microsoft.com/office/drawing/2014/main" id="{14F0FC98-9FAB-4A36-A7A9-7756FACE0B05}"/>
+                <a16:creationId xmlns:a16="http://schemas.microsoft.com/office/drawing/2014/main" id="{2CD8AD27-EE61-45F7-8793-AE1CA2B0D900}"/>
               </a:ext>
             </a:extLst>
           </p:cNvPr>
@@ -17877,7 +17875,7 @@
                 <a:ea typeface="Aptos"/>
                 <a:cs typeface="Aptos"/>
               </a:rPr>
-              <a:t>Keep AI useful but subordinate to human correction.</a:t>
+              <a:t>Keep first drafts subordinate to human correction.</a:t>
             </a:r>
           </a:p>
         </p:txBody>
@@ -17887,7 +17885,7 @@
           <p:cNvPr id="25" name="">
             <a:extLst xmlns:a="http://schemas.openxmlformats.org/drawingml/2006/main">
               <a:ext uri="{FF2B5EF4-FFF2-40B4-BE49-F238E27FC236}">
-                <a16:creationId xmlns:a16="http://schemas.microsoft.com/office/drawing/2014/main" id="{737AD22B-4ADC-4929-9C13-F51CC28D9DDE}"/>
+                <a16:creationId xmlns:a16="http://schemas.microsoft.com/office/drawing/2014/main" id="{5B7DBF82-AC13-4EBF-8F00-24FFD933514A}"/>
               </a:ext>
             </a:extLst>
           </p:cNvPr>
@@ -17922,7 +17920,7 @@
           <p:cNvPr id="26" name="">
             <a:extLst xmlns:a="http://schemas.openxmlformats.org/drawingml/2006/main">
               <a:ext uri="{FF2B5EF4-FFF2-40B4-BE49-F238E27FC236}">
-                <a16:creationId xmlns:a16="http://schemas.microsoft.com/office/drawing/2014/main" id="{5E8724B3-8D8B-4504-B895-8E3EE12AF3F1}"/>
+                <a16:creationId xmlns:a16="http://schemas.microsoft.com/office/drawing/2014/main" id="{AEB4D21A-0F09-4745-848F-4AB8AE7CFBA9}"/>
               </a:ext>
             </a:extLst>
           </p:cNvPr>
@@ -17986,7 +17984,7 @@
           <p:cNvPr id="27" name="">
             <a:extLst xmlns:a="http://schemas.openxmlformats.org/drawingml/2006/main">
               <a:ext uri="{FF2B5EF4-FFF2-40B4-BE49-F238E27FC236}">
-                <a16:creationId xmlns:a16="http://schemas.microsoft.com/office/drawing/2014/main" id="{AA08CD79-15CD-4FE6-A8E0-D95359B3E5F8}"/>
+                <a16:creationId xmlns:a16="http://schemas.microsoft.com/office/drawing/2014/main" id="{0C0EEFC7-7C77-4AC6-A62C-A24114A4EB39}"/>
               </a:ext>
             </a:extLst>
           </p:cNvPr>
@@ -18021,7 +18019,7 @@
           <p:cNvPr id="28" name="">
             <a:extLst xmlns:a="http://schemas.openxmlformats.org/drawingml/2006/main">
               <a:ext uri="{FF2B5EF4-FFF2-40B4-BE49-F238E27FC236}">
-                <a16:creationId xmlns:a16="http://schemas.microsoft.com/office/drawing/2014/main" id="{8186EB0F-EC9A-4ECF-A33A-FB31256D34B4}"/>
+                <a16:creationId xmlns:a16="http://schemas.microsoft.com/office/drawing/2014/main" id="{0063D0E5-D697-4F01-B037-E2199F4765FB}"/>
               </a:ext>
             </a:extLst>
           </p:cNvPr>
@@ -18085,7 +18083,7 @@
           <p:cNvPr id="29" name="">
             <a:extLst xmlns:a="http://schemas.openxmlformats.org/drawingml/2006/main">
               <a:ext uri="{FF2B5EF4-FFF2-40B4-BE49-F238E27FC236}">
-                <a16:creationId xmlns:a16="http://schemas.microsoft.com/office/drawing/2014/main" id="{ED89A645-A67E-495C-A576-7629C4EA3787}"/>
+                <a16:creationId xmlns:a16="http://schemas.microsoft.com/office/drawing/2014/main" id="{0B2DB1CA-3850-4A33-88F4-090EFA67DC88}"/>
               </a:ext>
             </a:extLst>
           </p:cNvPr>
@@ -18149,7 +18147,7 @@
           <p:cNvPr id="30" name="">
             <a:extLst xmlns:a="http://schemas.openxmlformats.org/drawingml/2006/main">
               <a:ext uri="{FF2B5EF4-FFF2-40B4-BE49-F238E27FC236}">
-                <a16:creationId xmlns:a16="http://schemas.microsoft.com/office/drawing/2014/main" id="{FB01BF69-7ED7-40A4-92A5-DD94D5A010F0}"/>
+                <a16:creationId xmlns:a16="http://schemas.microsoft.com/office/drawing/2014/main" id="{F7248C11-EDAC-4245-90A9-2BA7BB8564D6}"/>
               </a:ext>
             </a:extLst>
           </p:cNvPr>
@@ -18211,7 +18209,7 @@
     </p:spTree>
     <p:extLst>
       <p:ext uri="{BB962C8B-B14F-4D97-AF65-F5344CB8AC3E}">
-        <p14:creationId xmlns:p14="http://schemas.microsoft.com/office/powerpoint/2010/main" val="2003602735"/>
+        <p14:creationId xmlns:p14="http://schemas.microsoft.com/office/powerpoint/2010/main" val="441044791"/>
       </p:ext>
     </p:extLst>
   </p:cSld>
@@ -18235,7 +18233,7 @@
           <p:cNvPr id="1" name="">
             <a:extLst xmlns:a="http://schemas.openxmlformats.org/drawingml/2006/main">
               <a:ext uri="{FF2B5EF4-FFF2-40B4-BE49-F238E27FC236}">
-                <a16:creationId xmlns:a16="http://schemas.microsoft.com/office/drawing/2014/main" id="{750AC5AE-CD90-4F6D-82D1-3EF7164E9F7B}"/>
+                <a16:creationId xmlns:a16="http://schemas.microsoft.com/office/drawing/2014/main" id="{94D8B720-D626-48B3-932F-24103FDA5C2E}"/>
               </a:ext>
             </a:extLst>
           </p:cNvPr>
@@ -18270,7 +18268,7 @@
           <p:cNvPr id="2" name="">
             <a:extLst xmlns:a="http://schemas.openxmlformats.org/drawingml/2006/main">
               <a:ext uri="{FF2B5EF4-FFF2-40B4-BE49-F238E27FC236}">
-                <a16:creationId xmlns:a16="http://schemas.microsoft.com/office/drawing/2014/main" id="{34364482-6FCF-4672-B5C2-1A636B29735C}"/>
+                <a16:creationId xmlns:a16="http://schemas.microsoft.com/office/drawing/2014/main" id="{5492E184-304C-4A4A-BA4C-C9A53C51161F}"/>
               </a:ext>
             </a:extLst>
           </p:cNvPr>
@@ -18305,7 +18303,7 @@
           <p:cNvPr id="3" name="">
             <a:extLst xmlns:a="http://schemas.openxmlformats.org/drawingml/2006/main">
               <a:ext uri="{FF2B5EF4-FFF2-40B4-BE49-F238E27FC236}">
-                <a16:creationId xmlns:a16="http://schemas.microsoft.com/office/drawing/2014/main" id="{1EBDC44C-F919-40EF-AFE6-9BE17EB9EFA8}"/>
+                <a16:creationId xmlns:a16="http://schemas.microsoft.com/office/drawing/2014/main" id="{DCFB919F-BD4D-4B61-93D5-A6CC01AE8BFE}"/>
               </a:ext>
             </a:extLst>
           </p:cNvPr>
@@ -18340,7 +18338,7 @@
           <p:cNvPr id="4" name="kicker-07-marker">
             <a:extLst xmlns:a="http://schemas.openxmlformats.org/drawingml/2006/main">
               <a:ext uri="{FF2B5EF4-FFF2-40B4-BE49-F238E27FC236}">
-                <a16:creationId xmlns:a16="http://schemas.microsoft.com/office/drawing/2014/main" id="{E7DDD1EB-3F75-4EAF-91E1-C286E02DB9E9}"/>
+                <a16:creationId xmlns:a16="http://schemas.microsoft.com/office/drawing/2014/main" id="{4F8BD848-6CA9-40FA-B45C-C757F185DD11}"/>
               </a:ext>
             </a:extLst>
           </p:cNvPr>
@@ -18375,7 +18373,7 @@
           <p:cNvPr id="5" name="kicker-07-label">
             <a:extLst xmlns:a="http://schemas.openxmlformats.org/drawingml/2006/main">
               <a:ext uri="{FF2B5EF4-FFF2-40B4-BE49-F238E27FC236}">
-                <a16:creationId xmlns:a16="http://schemas.microsoft.com/office/drawing/2014/main" id="{B00F954F-3AC0-41F5-A170-BDE94DDCE838}"/>
+                <a16:creationId xmlns:a16="http://schemas.microsoft.com/office/drawing/2014/main" id="{3629FC5F-C89D-4BE0-ADA5-0D84D5C7A655}"/>
               </a:ext>
             </a:extLst>
           </p:cNvPr>
@@ -18439,7 +18437,7 @@
           <p:cNvPr id="6" name="">
             <a:extLst xmlns:a="http://schemas.openxmlformats.org/drawingml/2006/main">
               <a:ext uri="{FF2B5EF4-FFF2-40B4-BE49-F238E27FC236}">
-                <a16:creationId xmlns:a16="http://schemas.microsoft.com/office/drawing/2014/main" id="{4C7D7DA0-6A8D-4070-8F69-95AB0DE546E2}"/>
+                <a16:creationId xmlns:a16="http://schemas.microsoft.com/office/drawing/2014/main" id="{75EF932E-08BA-46B7-BDD8-E9A8BDA65386}"/>
               </a:ext>
             </a:extLst>
           </p:cNvPr>
@@ -18503,7 +18501,7 @@
           <p:cNvPr id="7" name="">
             <a:extLst xmlns:a="http://schemas.openxmlformats.org/drawingml/2006/main">
               <a:ext uri="{FF2B5EF4-FFF2-40B4-BE49-F238E27FC236}">
-                <a16:creationId xmlns:a16="http://schemas.microsoft.com/office/drawing/2014/main" id="{790C8031-D54E-4171-BFA1-1F862D807BC3}"/>
+                <a16:creationId xmlns:a16="http://schemas.microsoft.com/office/drawing/2014/main" id="{EAEA72B7-9286-4995-9B62-3E5A05D2CCDD}"/>
               </a:ext>
             </a:extLst>
           </p:cNvPr>
@@ -18567,7 +18565,7 @@
           <p:cNvPr id="8" name="">
             <a:extLst xmlns:a="http://schemas.openxmlformats.org/drawingml/2006/main">
               <a:ext uri="{FF2B5EF4-FFF2-40B4-BE49-F238E27FC236}">
-                <a16:creationId xmlns:a16="http://schemas.microsoft.com/office/drawing/2014/main" id="{1056F21A-F021-4CEB-B2BF-F22843FE6FA6}"/>
+                <a16:creationId xmlns:a16="http://schemas.microsoft.com/office/drawing/2014/main" id="{86E51C55-642F-4148-839E-A7D1004E9F23}"/>
               </a:ext>
             </a:extLst>
           </p:cNvPr>
@@ -18602,7 +18600,7 @@
           <p:cNvPr id="9" name="">
             <a:extLst xmlns:a="http://schemas.openxmlformats.org/drawingml/2006/main">
               <a:ext uri="{FF2B5EF4-FFF2-40B4-BE49-F238E27FC236}">
-                <a16:creationId xmlns:a16="http://schemas.microsoft.com/office/drawing/2014/main" id="{1B174A69-BEB9-49F3-A996-191E44AD1DFC}"/>
+                <a16:creationId xmlns:a16="http://schemas.microsoft.com/office/drawing/2014/main" id="{A99BDA15-6652-4256-94C2-8912C01F7376}"/>
               </a:ext>
             </a:extLst>
           </p:cNvPr>
@@ -18666,7 +18664,7 @@
           <p:cNvPr id="10" name="">
             <a:extLst xmlns:a="http://schemas.openxmlformats.org/drawingml/2006/main">
               <a:ext uri="{FF2B5EF4-FFF2-40B4-BE49-F238E27FC236}">
-                <a16:creationId xmlns:a16="http://schemas.microsoft.com/office/drawing/2014/main" id="{1E256131-E0EF-469F-A2BB-03B4B4C98051}"/>
+                <a16:creationId xmlns:a16="http://schemas.microsoft.com/office/drawing/2014/main" id="{69959D6F-C992-4D61-AEB5-542568E5C460}"/>
               </a:ext>
             </a:extLst>
           </p:cNvPr>
@@ -18730,7 +18728,7 @@
           <p:cNvPr id="11" name="">
             <a:extLst xmlns:a="http://schemas.openxmlformats.org/drawingml/2006/main">
               <a:ext uri="{FF2B5EF4-FFF2-40B4-BE49-F238E27FC236}">
-                <a16:creationId xmlns:a16="http://schemas.microsoft.com/office/drawing/2014/main" id="{21F00FD9-CC9A-4BB6-B751-90ECC7EF8943}"/>
+                <a16:creationId xmlns:a16="http://schemas.microsoft.com/office/drawing/2014/main" id="{617BA3D7-F1DC-4364-8718-6E1A132DA345}"/>
               </a:ext>
             </a:extLst>
           </p:cNvPr>
@@ -18794,7 +18792,7 @@
           <p:cNvPr id="12" name="">
             <a:extLst xmlns:a="http://schemas.openxmlformats.org/drawingml/2006/main">
               <a:ext uri="{FF2B5EF4-FFF2-40B4-BE49-F238E27FC236}">
-                <a16:creationId xmlns:a16="http://schemas.microsoft.com/office/drawing/2014/main" id="{9492FB02-ECC6-4BC2-9B2F-B12D90C5F742}"/>
+                <a16:creationId xmlns:a16="http://schemas.microsoft.com/office/drawing/2014/main" id="{7FC787B0-7E0D-4F1C-B02A-C9154F0FEF7F}"/>
               </a:ext>
             </a:extLst>
           </p:cNvPr>
@@ -18827,7 +18825,7 @@
           <p:cNvPr id="13" name="">
             <a:extLst xmlns:a="http://schemas.openxmlformats.org/drawingml/2006/main">
               <a:ext uri="{FF2B5EF4-FFF2-40B4-BE49-F238E27FC236}">
-                <a16:creationId xmlns:a16="http://schemas.microsoft.com/office/drawing/2014/main" id="{C6C3D95E-EB84-4D30-96E2-7B78AA22E856}"/>
+                <a16:creationId xmlns:a16="http://schemas.microsoft.com/office/drawing/2014/main" id="{0FD6D7BA-FB6C-468E-80DC-FC9EE302DAE2}"/>
               </a:ext>
             </a:extLst>
           </p:cNvPr>
@@ -18862,7 +18860,7 @@
           <p:cNvPr id="14" name="">
             <a:extLst xmlns:a="http://schemas.openxmlformats.org/drawingml/2006/main">
               <a:ext uri="{FF2B5EF4-FFF2-40B4-BE49-F238E27FC236}">
-                <a16:creationId xmlns:a16="http://schemas.microsoft.com/office/drawing/2014/main" id="{E192E4F6-CEF2-4328-B2E9-BA4CA890DF68}"/>
+                <a16:creationId xmlns:a16="http://schemas.microsoft.com/office/drawing/2014/main" id="{C67EA48F-62EF-47BC-9D66-B020D8D3DD29}"/>
               </a:ext>
             </a:extLst>
           </p:cNvPr>
@@ -18926,7 +18924,7 @@
           <p:cNvPr id="15" name="">
             <a:extLst xmlns:a="http://schemas.openxmlformats.org/drawingml/2006/main">
               <a:ext uri="{FF2B5EF4-FFF2-40B4-BE49-F238E27FC236}">
-                <a16:creationId xmlns:a16="http://schemas.microsoft.com/office/drawing/2014/main" id="{4CE2F36F-98DB-48AD-8D0A-B6059197739B}"/>
+                <a16:creationId xmlns:a16="http://schemas.microsoft.com/office/drawing/2014/main" id="{DB1B872E-7C04-463B-9EC8-2CACA67A32F9}"/>
               </a:ext>
             </a:extLst>
           </p:cNvPr>
@@ -18961,7 +18959,7 @@
           <p:cNvPr id="16" name="">
             <a:extLst xmlns:a="http://schemas.openxmlformats.org/drawingml/2006/main">
               <a:ext uri="{FF2B5EF4-FFF2-40B4-BE49-F238E27FC236}">
-                <a16:creationId xmlns:a16="http://schemas.microsoft.com/office/drawing/2014/main" id="{44F98E87-C99B-48B0-A57E-5EB72A0D4483}"/>
+                <a16:creationId xmlns:a16="http://schemas.microsoft.com/office/drawing/2014/main" id="{2CE2DA65-2BF0-4826-9902-44DD54C80B20}"/>
               </a:ext>
             </a:extLst>
           </p:cNvPr>
@@ -19025,7 +19023,7 @@
           <p:cNvPr id="17" name="">
             <a:extLst xmlns:a="http://schemas.openxmlformats.org/drawingml/2006/main">
               <a:ext uri="{FF2B5EF4-FFF2-40B4-BE49-F238E27FC236}">
-                <a16:creationId xmlns:a16="http://schemas.microsoft.com/office/drawing/2014/main" id="{5A55EAAA-8BC9-47C6-A427-080EFA4D6189}"/>
+                <a16:creationId xmlns:a16="http://schemas.microsoft.com/office/drawing/2014/main" id="{1C0FDDBC-EC95-4920-AF51-5AED9980173C}"/>
               </a:ext>
             </a:extLst>
           </p:cNvPr>
@@ -19060,7 +19058,7 @@
           <p:cNvPr id="18" name="">
             <a:extLst xmlns:a="http://schemas.openxmlformats.org/drawingml/2006/main">
               <a:ext uri="{FF2B5EF4-FFF2-40B4-BE49-F238E27FC236}">
-                <a16:creationId xmlns:a16="http://schemas.microsoft.com/office/drawing/2014/main" id="{A9347ABF-22AB-4650-9E69-0CD4CB2DD0B6}"/>
+                <a16:creationId xmlns:a16="http://schemas.microsoft.com/office/drawing/2014/main" id="{51D8E6D5-7E74-41C9-B082-865335A5978C}"/>
               </a:ext>
             </a:extLst>
           </p:cNvPr>
@@ -19124,7 +19122,7 @@
           <p:cNvPr id="19" name="">
             <a:extLst xmlns:a="http://schemas.openxmlformats.org/drawingml/2006/main">
               <a:ext uri="{FF2B5EF4-FFF2-40B4-BE49-F238E27FC236}">
-                <a16:creationId xmlns:a16="http://schemas.microsoft.com/office/drawing/2014/main" id="{29E68644-F7C5-4793-8B72-F133313AC79B}"/>
+                <a16:creationId xmlns:a16="http://schemas.microsoft.com/office/drawing/2014/main" id="{C52A30DE-A5B4-4543-991B-422EFA7127D4}"/>
               </a:ext>
             </a:extLst>
           </p:cNvPr>
@@ -19159,7 +19157,7 @@
           <p:cNvPr id="20" name="">
             <a:extLst xmlns:a="http://schemas.openxmlformats.org/drawingml/2006/main">
               <a:ext uri="{FF2B5EF4-FFF2-40B4-BE49-F238E27FC236}">
-                <a16:creationId xmlns:a16="http://schemas.microsoft.com/office/drawing/2014/main" id="{D390B76E-6FD6-468B-8363-93B6D3A70149}"/>
+                <a16:creationId xmlns:a16="http://schemas.microsoft.com/office/drawing/2014/main" id="{C2AB0AAB-F234-45D8-B478-FBFC7953891F}"/>
               </a:ext>
             </a:extLst>
           </p:cNvPr>
@@ -19223,7 +19221,7 @@
           <p:cNvPr id="21" name="">
             <a:extLst xmlns:a="http://schemas.openxmlformats.org/drawingml/2006/main">
               <a:ext uri="{FF2B5EF4-FFF2-40B4-BE49-F238E27FC236}">
-                <a16:creationId xmlns:a16="http://schemas.microsoft.com/office/drawing/2014/main" id="{A07CD5F3-D5A5-4902-AA79-E7BCCD9BABAF}"/>
+                <a16:creationId xmlns:a16="http://schemas.microsoft.com/office/drawing/2014/main" id="{750B52DC-5D47-446B-B8A6-4E4AC25EA9E2}"/>
               </a:ext>
             </a:extLst>
           </p:cNvPr>
@@ -19258,7 +19256,7 @@
           <p:cNvPr id="22" name="">
             <a:extLst xmlns:a="http://schemas.openxmlformats.org/drawingml/2006/main">
               <a:ext uri="{FF2B5EF4-FFF2-40B4-BE49-F238E27FC236}">
-                <a16:creationId xmlns:a16="http://schemas.microsoft.com/office/drawing/2014/main" id="{A84E516C-8070-405E-A40B-51E21C258262}"/>
+                <a16:creationId xmlns:a16="http://schemas.microsoft.com/office/drawing/2014/main" id="{9BC9B9CE-C013-4532-B897-039F9281BACB}"/>
               </a:ext>
             </a:extLst>
           </p:cNvPr>
@@ -19322,7 +19320,7 @@
           <p:cNvPr id="23" name="">
             <a:extLst xmlns:a="http://schemas.openxmlformats.org/drawingml/2006/main">
               <a:ext uri="{FF2B5EF4-FFF2-40B4-BE49-F238E27FC236}">
-                <a16:creationId xmlns:a16="http://schemas.microsoft.com/office/drawing/2014/main" id="{D096562E-3209-4347-B2CB-D9629E166036}"/>
+                <a16:creationId xmlns:a16="http://schemas.microsoft.com/office/drawing/2014/main" id="{A0785620-D648-4BB4-9955-E031325493D3}"/>
               </a:ext>
             </a:extLst>
           </p:cNvPr>
@@ -19355,7 +19353,7 @@
           <p:cNvPr id="24" name="">
             <a:extLst xmlns:a="http://schemas.openxmlformats.org/drawingml/2006/main">
               <a:ext uri="{FF2B5EF4-FFF2-40B4-BE49-F238E27FC236}">
-                <a16:creationId xmlns:a16="http://schemas.microsoft.com/office/drawing/2014/main" id="{623DA80C-3327-4A76-A52B-D4A0B818EB29}"/>
+                <a16:creationId xmlns:a16="http://schemas.microsoft.com/office/drawing/2014/main" id="{180E038F-24EC-468D-B6E1-9C8839EB5F99}"/>
               </a:ext>
             </a:extLst>
           </p:cNvPr>
@@ -19390,7 +19388,7 @@
           <p:cNvPr id="25" name="">
             <a:extLst xmlns:a="http://schemas.openxmlformats.org/drawingml/2006/main">
               <a:ext uri="{FF2B5EF4-FFF2-40B4-BE49-F238E27FC236}">
-                <a16:creationId xmlns:a16="http://schemas.microsoft.com/office/drawing/2014/main" id="{FA049BA2-D4C1-48FC-9111-E84975390070}"/>
+                <a16:creationId xmlns:a16="http://schemas.microsoft.com/office/drawing/2014/main" id="{020D8EDD-E46A-4346-BE3D-92BCB0EF1F94}"/>
               </a:ext>
             </a:extLst>
           </p:cNvPr>
@@ -19454,7 +19452,7 @@
           <p:cNvPr id="26" name="">
             <a:extLst xmlns:a="http://schemas.openxmlformats.org/drawingml/2006/main">
               <a:ext uri="{FF2B5EF4-FFF2-40B4-BE49-F238E27FC236}">
-                <a16:creationId xmlns:a16="http://schemas.microsoft.com/office/drawing/2014/main" id="{7E9F3BA0-1FB8-43C2-9D4C-BFB54E4C1075}"/>
+                <a16:creationId xmlns:a16="http://schemas.microsoft.com/office/drawing/2014/main" id="{81C38241-C614-4829-88F4-D1909289CDAC}"/>
               </a:ext>
             </a:extLst>
           </p:cNvPr>
@@ -19487,7 +19485,7 @@
           <p:cNvPr id="27" name="">
             <a:extLst xmlns:a="http://schemas.openxmlformats.org/drawingml/2006/main">
               <a:ext uri="{FF2B5EF4-FFF2-40B4-BE49-F238E27FC236}">
-                <a16:creationId xmlns:a16="http://schemas.microsoft.com/office/drawing/2014/main" id="{21B6B313-4014-4D08-8D5A-134A70C75CBF}"/>
+                <a16:creationId xmlns:a16="http://schemas.microsoft.com/office/drawing/2014/main" id="{FF86E88F-62B5-4E1C-BDA3-47C911E351CE}"/>
               </a:ext>
             </a:extLst>
           </p:cNvPr>
@@ -19551,7 +19549,7 @@
           <p:cNvPr id="28" name="">
             <a:extLst xmlns:a="http://schemas.openxmlformats.org/drawingml/2006/main">
               <a:ext uri="{FF2B5EF4-FFF2-40B4-BE49-F238E27FC236}">
-                <a16:creationId xmlns:a16="http://schemas.microsoft.com/office/drawing/2014/main" id="{93E15E39-E6F1-4B16-9DF2-ADB8DACD85F8}"/>
+                <a16:creationId xmlns:a16="http://schemas.microsoft.com/office/drawing/2014/main" id="{D2E2A02F-74BA-4BA9-8922-504277040B74}"/>
               </a:ext>
             </a:extLst>
           </p:cNvPr>
@@ -19615,7 +19613,7 @@
           <p:cNvPr id="29" name="">
             <a:extLst xmlns:a="http://schemas.openxmlformats.org/drawingml/2006/main">
               <a:ext uri="{FF2B5EF4-FFF2-40B4-BE49-F238E27FC236}">
-                <a16:creationId xmlns:a16="http://schemas.microsoft.com/office/drawing/2014/main" id="{8F94B427-3F3E-444F-AAC8-6CCED7259AF4}"/>
+                <a16:creationId xmlns:a16="http://schemas.microsoft.com/office/drawing/2014/main" id="{C86B7C2E-14E6-4CDA-A7B8-392354364CC6}"/>
               </a:ext>
             </a:extLst>
           </p:cNvPr>
@@ -19648,7 +19646,7 @@
           <p:cNvPr id="30" name="">
             <a:extLst xmlns:a="http://schemas.openxmlformats.org/drawingml/2006/main">
               <a:ext uri="{FF2B5EF4-FFF2-40B4-BE49-F238E27FC236}">
-                <a16:creationId xmlns:a16="http://schemas.microsoft.com/office/drawing/2014/main" id="{161C36DC-FE25-432B-AF77-89EB33590DE1}"/>
+                <a16:creationId xmlns:a16="http://schemas.microsoft.com/office/drawing/2014/main" id="{FCC282DA-8B99-4D13-94FC-68AB7AB57884}"/>
               </a:ext>
             </a:extLst>
           </p:cNvPr>
@@ -19712,7 +19710,7 @@
           <p:cNvPr id="31" name="">
             <a:extLst xmlns:a="http://schemas.openxmlformats.org/drawingml/2006/main">
               <a:ext uri="{FF2B5EF4-FFF2-40B4-BE49-F238E27FC236}">
-                <a16:creationId xmlns:a16="http://schemas.microsoft.com/office/drawing/2014/main" id="{612A8592-0277-4983-864F-74E9BAEDED41}"/>
+                <a16:creationId xmlns:a16="http://schemas.microsoft.com/office/drawing/2014/main" id="{4E23C434-226A-4D5F-8A99-A4D94AED1745}"/>
               </a:ext>
             </a:extLst>
           </p:cNvPr>
@@ -19776,7 +19774,7 @@
           <p:cNvPr id="32" name="">
             <a:extLst xmlns:a="http://schemas.openxmlformats.org/drawingml/2006/main">
               <a:ext uri="{FF2B5EF4-FFF2-40B4-BE49-F238E27FC236}">
-                <a16:creationId xmlns:a16="http://schemas.microsoft.com/office/drawing/2014/main" id="{82F33BD9-D94F-4E24-B463-7729C07CC0FA}"/>
+                <a16:creationId xmlns:a16="http://schemas.microsoft.com/office/drawing/2014/main" id="{B172DE68-738D-43A4-8A87-BEB744FBB120}"/>
               </a:ext>
             </a:extLst>
           </p:cNvPr>
@@ -19809,7 +19807,7 @@
           <p:cNvPr id="33" name="">
             <a:extLst xmlns:a="http://schemas.openxmlformats.org/drawingml/2006/main">
               <a:ext uri="{FF2B5EF4-FFF2-40B4-BE49-F238E27FC236}">
-                <a16:creationId xmlns:a16="http://schemas.microsoft.com/office/drawing/2014/main" id="{28CAB799-10F2-49FB-864E-4D1CF80BE316}"/>
+                <a16:creationId xmlns:a16="http://schemas.microsoft.com/office/drawing/2014/main" id="{39090235-8D12-449A-A6AD-7CE5E129B022}"/>
               </a:ext>
             </a:extLst>
           </p:cNvPr>
@@ -19873,7 +19871,7 @@
           <p:cNvPr id="34" name="">
             <a:extLst xmlns:a="http://schemas.openxmlformats.org/drawingml/2006/main">
               <a:ext uri="{FF2B5EF4-FFF2-40B4-BE49-F238E27FC236}">
-                <a16:creationId xmlns:a16="http://schemas.microsoft.com/office/drawing/2014/main" id="{B784E53C-91A8-4B5D-BA26-ECAFEDD369C2}"/>
+                <a16:creationId xmlns:a16="http://schemas.microsoft.com/office/drawing/2014/main" id="{8B632E39-EBF2-44E3-A100-69C0D4495AE1}"/>
               </a:ext>
             </a:extLst>
           </p:cNvPr>
@@ -19937,7 +19935,7 @@
           <p:cNvPr id="35" name="">
             <a:extLst xmlns:a="http://schemas.openxmlformats.org/drawingml/2006/main">
               <a:ext uri="{FF2B5EF4-FFF2-40B4-BE49-F238E27FC236}">
-                <a16:creationId xmlns:a16="http://schemas.microsoft.com/office/drawing/2014/main" id="{F8D1B3EF-60A1-4DD5-B49F-1FD7D8A61D64}"/>
+                <a16:creationId xmlns:a16="http://schemas.microsoft.com/office/drawing/2014/main" id="{59713882-83A8-46D3-B3EA-EE053B8672F8}"/>
               </a:ext>
             </a:extLst>
           </p:cNvPr>
@@ -19970,7 +19968,7 @@
           <p:cNvPr id="36" name="">
             <a:extLst xmlns:a="http://schemas.openxmlformats.org/drawingml/2006/main">
               <a:ext uri="{FF2B5EF4-FFF2-40B4-BE49-F238E27FC236}">
-                <a16:creationId xmlns:a16="http://schemas.microsoft.com/office/drawing/2014/main" id="{C9F0262D-0DEC-4EDC-92C6-AF13EBD6449C}"/>
+                <a16:creationId xmlns:a16="http://schemas.microsoft.com/office/drawing/2014/main" id="{FDDB68C4-D53C-4714-BB70-01DA55211A2F}"/>
               </a:ext>
             </a:extLst>
           </p:cNvPr>
@@ -20034,7 +20032,7 @@
           <p:cNvPr id="37" name="">
             <a:extLst xmlns:a="http://schemas.openxmlformats.org/drawingml/2006/main">
               <a:ext uri="{FF2B5EF4-FFF2-40B4-BE49-F238E27FC236}">
-                <a16:creationId xmlns:a16="http://schemas.microsoft.com/office/drawing/2014/main" id="{446F1E2E-EA84-4AF7-A8AB-7050140866C0}"/>
+                <a16:creationId xmlns:a16="http://schemas.microsoft.com/office/drawing/2014/main" id="{3EDEAA5C-1D63-4187-8128-B66CC65DA17C}"/>
               </a:ext>
             </a:extLst>
           </p:cNvPr>
@@ -20098,7 +20096,7 @@
           <p:cNvPr id="38" name="">
             <a:extLst xmlns:a="http://schemas.openxmlformats.org/drawingml/2006/main">
               <a:ext uri="{FF2B5EF4-FFF2-40B4-BE49-F238E27FC236}">
-                <a16:creationId xmlns:a16="http://schemas.microsoft.com/office/drawing/2014/main" id="{78317FDF-F412-493A-B1EC-FDA203890F79}"/>
+                <a16:creationId xmlns:a16="http://schemas.microsoft.com/office/drawing/2014/main" id="{F1962412-681E-4E90-83A8-DCA33CCA5ABE}"/>
               </a:ext>
             </a:extLst>
           </p:cNvPr>
@@ -20131,7 +20129,7 @@
           <p:cNvPr id="39" name="">
             <a:extLst xmlns:a="http://schemas.openxmlformats.org/drawingml/2006/main">
               <a:ext uri="{FF2B5EF4-FFF2-40B4-BE49-F238E27FC236}">
-                <a16:creationId xmlns:a16="http://schemas.microsoft.com/office/drawing/2014/main" id="{865D1C9E-578A-46B6-91D0-164674C16CE5}"/>
+                <a16:creationId xmlns:a16="http://schemas.microsoft.com/office/drawing/2014/main" id="{D8F85BBF-1F68-46AB-A3A6-AFA1E555EB66}"/>
               </a:ext>
             </a:extLst>
           </p:cNvPr>
@@ -20195,7 +20193,7 @@
           <p:cNvPr id="40" name="">
             <a:extLst xmlns:a="http://schemas.openxmlformats.org/drawingml/2006/main">
               <a:ext uri="{FF2B5EF4-FFF2-40B4-BE49-F238E27FC236}">
-                <a16:creationId xmlns:a16="http://schemas.microsoft.com/office/drawing/2014/main" id="{EDB9B3E7-32BB-431B-B2A9-6DB80E0F94CD}"/>
+                <a16:creationId xmlns:a16="http://schemas.microsoft.com/office/drawing/2014/main" id="{3A467AF7-F51F-458B-B4F4-E347B73DC3A2}"/>
               </a:ext>
             </a:extLst>
           </p:cNvPr>
@@ -20259,7 +20257,7 @@
           <p:cNvPr id="41" name="">
             <a:extLst xmlns:a="http://schemas.openxmlformats.org/drawingml/2006/main">
               <a:ext uri="{FF2B5EF4-FFF2-40B4-BE49-F238E27FC236}">
-                <a16:creationId xmlns:a16="http://schemas.microsoft.com/office/drawing/2014/main" id="{47465C88-C119-450F-89D6-7BC6ACCCF64F}"/>
+                <a16:creationId xmlns:a16="http://schemas.microsoft.com/office/drawing/2014/main" id="{03D90926-2211-4952-8DAF-27AC9E9D3F5F}"/>
               </a:ext>
             </a:extLst>
           </p:cNvPr>
@@ -20294,7 +20292,7 @@
           <p:cNvPr id="42" name="">
             <a:extLst xmlns:a="http://schemas.openxmlformats.org/drawingml/2006/main">
               <a:ext uri="{FF2B5EF4-FFF2-40B4-BE49-F238E27FC236}">
-                <a16:creationId xmlns:a16="http://schemas.microsoft.com/office/drawing/2014/main" id="{FEDC1E3A-71CC-4747-B794-AD00DCD79974}"/>
+                <a16:creationId xmlns:a16="http://schemas.microsoft.com/office/drawing/2014/main" id="{FD659B45-90BD-4B31-B9DD-DE7C6870BBAE}"/>
               </a:ext>
             </a:extLst>
           </p:cNvPr>
@@ -20358,7 +20356,7 @@
           <p:cNvPr id="43" name="">
             <a:extLst xmlns:a="http://schemas.openxmlformats.org/drawingml/2006/main">
               <a:ext uri="{FF2B5EF4-FFF2-40B4-BE49-F238E27FC236}">
-                <a16:creationId xmlns:a16="http://schemas.microsoft.com/office/drawing/2014/main" id="{25CE44D4-2756-46D5-B4D4-B432B28FFBB6}"/>
+                <a16:creationId xmlns:a16="http://schemas.microsoft.com/office/drawing/2014/main" id="{15A20E95-3136-4F3E-950F-3EC22FF6A7EF}"/>
               </a:ext>
             </a:extLst>
           </p:cNvPr>
@@ -20422,7 +20420,7 @@
           <p:cNvPr id="44" name="">
             <a:extLst xmlns:a="http://schemas.openxmlformats.org/drawingml/2006/main">
               <a:ext uri="{FF2B5EF4-FFF2-40B4-BE49-F238E27FC236}">
-                <a16:creationId xmlns:a16="http://schemas.microsoft.com/office/drawing/2014/main" id="{012C1A1C-48E6-4BF8-82FE-DF0202FC9282}"/>
+                <a16:creationId xmlns:a16="http://schemas.microsoft.com/office/drawing/2014/main" id="{06EC94FC-3729-4AC0-8944-C56018D8B5D4}"/>
               </a:ext>
             </a:extLst>
           </p:cNvPr>
@@ -20484,7 +20482,7 @@
     </p:spTree>
     <p:extLst>
       <p:ext uri="{BB962C8B-B14F-4D97-AF65-F5344CB8AC3E}">
-        <p14:creationId xmlns:p14="http://schemas.microsoft.com/office/powerpoint/2010/main" val="413390601"/>
+        <p14:creationId xmlns:p14="http://schemas.microsoft.com/office/powerpoint/2010/main" val="1201892800"/>
       </p:ext>
     </p:extLst>
   </p:cSld>
@@ -20508,7 +20506,7 @@
           <p:cNvPr id="1" name="">
             <a:extLst xmlns:a="http://schemas.openxmlformats.org/drawingml/2006/main">
               <a:ext uri="{FF2B5EF4-FFF2-40B4-BE49-F238E27FC236}">
-                <a16:creationId xmlns:a16="http://schemas.microsoft.com/office/drawing/2014/main" id="{C527BA67-4233-4ECB-B6D3-63FDA209A5A1}"/>
+                <a16:creationId xmlns:a16="http://schemas.microsoft.com/office/drawing/2014/main" id="{524B1ECA-EE1F-46A4-AD4A-B82403E0AFB4}"/>
               </a:ext>
             </a:extLst>
           </p:cNvPr>
@@ -20543,7 +20541,7 @@
           <p:cNvPr id="2" name="">
             <a:extLst xmlns:a="http://schemas.openxmlformats.org/drawingml/2006/main">
               <a:ext uri="{FF2B5EF4-FFF2-40B4-BE49-F238E27FC236}">
-                <a16:creationId xmlns:a16="http://schemas.microsoft.com/office/drawing/2014/main" id="{D4465176-29AE-4C21-ADA9-8F0671C2DEA2}"/>
+                <a16:creationId xmlns:a16="http://schemas.microsoft.com/office/drawing/2014/main" id="{F2045064-D798-46DE-A0D7-DDA8D6E1A979}"/>
               </a:ext>
             </a:extLst>
           </p:cNvPr>
@@ -20578,7 +20576,7 @@
           <p:cNvPr id="3" name="">
             <a:extLst xmlns:a="http://schemas.openxmlformats.org/drawingml/2006/main">
               <a:ext uri="{FF2B5EF4-FFF2-40B4-BE49-F238E27FC236}">
-                <a16:creationId xmlns:a16="http://schemas.microsoft.com/office/drawing/2014/main" id="{F9023B2E-4704-4735-B14D-F99487F91051}"/>
+                <a16:creationId xmlns:a16="http://schemas.microsoft.com/office/drawing/2014/main" id="{14588470-B7E3-4B73-84CF-077E75F3ABBB}"/>
               </a:ext>
             </a:extLst>
           </p:cNvPr>
@@ -20613,7 +20611,7 @@
           <p:cNvPr id="4" name="kicker-07-marker">
             <a:extLst xmlns:a="http://schemas.openxmlformats.org/drawingml/2006/main">
               <a:ext uri="{FF2B5EF4-FFF2-40B4-BE49-F238E27FC236}">
-                <a16:creationId xmlns:a16="http://schemas.microsoft.com/office/drawing/2014/main" id="{44F77243-437E-4BDE-9D02-ACB78D351A48}"/>
+                <a16:creationId xmlns:a16="http://schemas.microsoft.com/office/drawing/2014/main" id="{CE261E47-FC0F-4C8D-A37E-74F04C7322BE}"/>
               </a:ext>
             </a:extLst>
           </p:cNvPr>
@@ -20648,7 +20646,7 @@
           <p:cNvPr id="5" name="kicker-07-label">
             <a:extLst xmlns:a="http://schemas.openxmlformats.org/drawingml/2006/main">
               <a:ext uri="{FF2B5EF4-FFF2-40B4-BE49-F238E27FC236}">
-                <a16:creationId xmlns:a16="http://schemas.microsoft.com/office/drawing/2014/main" id="{41253E34-773A-483C-A2C4-7B79B7DFD070}"/>
+                <a16:creationId xmlns:a16="http://schemas.microsoft.com/office/drawing/2014/main" id="{31EF21F1-3E48-42EB-A1DE-5359D25FADE2}"/>
               </a:ext>
             </a:extLst>
           </p:cNvPr>
@@ -20712,7 +20710,7 @@
           <p:cNvPr id="6" name="">
             <a:extLst xmlns:a="http://schemas.openxmlformats.org/drawingml/2006/main">
               <a:ext uri="{FF2B5EF4-FFF2-40B4-BE49-F238E27FC236}">
-                <a16:creationId xmlns:a16="http://schemas.microsoft.com/office/drawing/2014/main" id="{BFEF74EC-1B0E-4314-BA9A-40B9E9B0E0F9}"/>
+                <a16:creationId xmlns:a16="http://schemas.microsoft.com/office/drawing/2014/main" id="{7B7C2082-0CCC-42A8-AA1C-170BC22D0D17}"/>
               </a:ext>
             </a:extLst>
           </p:cNvPr>
@@ -20776,7 +20774,7 @@
           <p:cNvPr id="7" name="">
             <a:extLst xmlns:a="http://schemas.openxmlformats.org/drawingml/2006/main">
               <a:ext uri="{FF2B5EF4-FFF2-40B4-BE49-F238E27FC236}">
-                <a16:creationId xmlns:a16="http://schemas.microsoft.com/office/drawing/2014/main" id="{58E89061-8D95-4F7F-B796-201EC3F0F7B0}"/>
+                <a16:creationId xmlns:a16="http://schemas.microsoft.com/office/drawing/2014/main" id="{450C58B0-A7FB-468B-A075-C3F8310F09C2}"/>
               </a:ext>
             </a:extLst>
           </p:cNvPr>
@@ -20840,7 +20838,7 @@
           <p:cNvPr id="8" name="">
             <a:extLst xmlns:a="http://schemas.openxmlformats.org/drawingml/2006/main">
               <a:ext uri="{FF2B5EF4-FFF2-40B4-BE49-F238E27FC236}">
-                <a16:creationId xmlns:a16="http://schemas.microsoft.com/office/drawing/2014/main" id="{4A6C0F17-216D-478A-AE4D-5DFF050DB2A9}"/>
+                <a16:creationId xmlns:a16="http://schemas.microsoft.com/office/drawing/2014/main" id="{593DEBBE-170F-469F-8966-968A0E827DA0}"/>
               </a:ext>
             </a:extLst>
           </p:cNvPr>
@@ -20875,7 +20873,7 @@
           <p:cNvPr id="9" name="">
             <a:extLst xmlns:a="http://schemas.openxmlformats.org/drawingml/2006/main">
               <a:ext uri="{FF2B5EF4-FFF2-40B4-BE49-F238E27FC236}">
-                <a16:creationId xmlns:a16="http://schemas.microsoft.com/office/drawing/2014/main" id="{23E36A82-E151-4D75-9ED1-DB26E8A9768C}"/>
+                <a16:creationId xmlns:a16="http://schemas.microsoft.com/office/drawing/2014/main" id="{39A36624-33BF-44DA-BB37-2E03CAB4B148}"/>
               </a:ext>
             </a:extLst>
           </p:cNvPr>
@@ -20939,7 +20937,7 @@
           <p:cNvPr id="10" name="">
             <a:extLst xmlns:a="http://schemas.openxmlformats.org/drawingml/2006/main">
               <a:ext uri="{FF2B5EF4-FFF2-40B4-BE49-F238E27FC236}">
-                <a16:creationId xmlns:a16="http://schemas.microsoft.com/office/drawing/2014/main" id="{62CE911F-7B9C-4829-8B88-B7E50D47D6F0}"/>
+                <a16:creationId xmlns:a16="http://schemas.microsoft.com/office/drawing/2014/main" id="{0C9E651E-E21D-4C90-A9D2-28C25BD10D97}"/>
               </a:ext>
             </a:extLst>
           </p:cNvPr>
@@ -21003,7 +21001,7 @@
           <p:cNvPr id="11" name="">
             <a:extLst xmlns:a="http://schemas.openxmlformats.org/drawingml/2006/main">
               <a:ext uri="{FF2B5EF4-FFF2-40B4-BE49-F238E27FC236}">
-                <a16:creationId xmlns:a16="http://schemas.microsoft.com/office/drawing/2014/main" id="{890EEA9E-2D94-4092-9B58-4FC3B0AAA73D}"/>
+                <a16:creationId xmlns:a16="http://schemas.microsoft.com/office/drawing/2014/main" id="{BC0BF01B-8C75-45C5-A0CF-78DB1A3FEA26}"/>
               </a:ext>
             </a:extLst>
           </p:cNvPr>
@@ -21067,7 +21065,7 @@
           <p:cNvPr id="12" name="">
             <a:extLst xmlns:a="http://schemas.openxmlformats.org/drawingml/2006/main">
               <a:ext uri="{FF2B5EF4-FFF2-40B4-BE49-F238E27FC236}">
-                <a16:creationId xmlns:a16="http://schemas.microsoft.com/office/drawing/2014/main" id="{7642BCCD-B26D-464D-B5C0-149D81D58678}"/>
+                <a16:creationId xmlns:a16="http://schemas.microsoft.com/office/drawing/2014/main" id="{F99C05EA-35D2-44C0-87CE-FA6FF55B91AE}"/>
               </a:ext>
             </a:extLst>
           </p:cNvPr>
@@ -21102,7 +21100,7 @@
           <p:cNvPr id="13" name="">
             <a:extLst xmlns:a="http://schemas.openxmlformats.org/drawingml/2006/main">
               <a:ext uri="{FF2B5EF4-FFF2-40B4-BE49-F238E27FC236}">
-                <a16:creationId xmlns:a16="http://schemas.microsoft.com/office/drawing/2014/main" id="{F7D21D6D-4788-4F54-9DBB-BABDDD81900D}"/>
+                <a16:creationId xmlns:a16="http://schemas.microsoft.com/office/drawing/2014/main" id="{ED7A6B4D-CE57-434F-B2EF-C1B5D3DD7A65}"/>
               </a:ext>
             </a:extLst>
           </p:cNvPr>
@@ -21135,7 +21133,7 @@
           <p:cNvPr id="14" name="">
             <a:extLst xmlns:a="http://schemas.openxmlformats.org/drawingml/2006/main">
               <a:ext uri="{FF2B5EF4-FFF2-40B4-BE49-F238E27FC236}">
-                <a16:creationId xmlns:a16="http://schemas.microsoft.com/office/drawing/2014/main" id="{FF12968E-658E-44C9-B9F5-CCA46C6E113C}"/>
+                <a16:creationId xmlns:a16="http://schemas.microsoft.com/office/drawing/2014/main" id="{5762B995-70CA-47F7-BF0B-C13BD80C82FA}"/>
               </a:ext>
             </a:extLst>
           </p:cNvPr>
@@ -21170,7 +21168,7 @@
           <p:cNvPr id="15" name="">
             <a:extLst xmlns:a="http://schemas.openxmlformats.org/drawingml/2006/main">
               <a:ext uri="{FF2B5EF4-FFF2-40B4-BE49-F238E27FC236}">
-                <a16:creationId xmlns:a16="http://schemas.microsoft.com/office/drawing/2014/main" id="{9BF4CAF4-3B83-4634-B139-8170707759DB}"/>
+                <a16:creationId xmlns:a16="http://schemas.microsoft.com/office/drawing/2014/main" id="{77E630E0-6685-48DC-943F-706A60040E22}"/>
               </a:ext>
             </a:extLst>
           </p:cNvPr>
@@ -21234,7 +21232,7 @@
           <p:cNvPr id="16" name="">
             <a:extLst xmlns:a="http://schemas.openxmlformats.org/drawingml/2006/main">
               <a:ext uri="{FF2B5EF4-FFF2-40B4-BE49-F238E27FC236}">
-                <a16:creationId xmlns:a16="http://schemas.microsoft.com/office/drawing/2014/main" id="{574C6B5F-4E54-4F6C-849A-F79EC6877A9D}"/>
+                <a16:creationId xmlns:a16="http://schemas.microsoft.com/office/drawing/2014/main" id="{D5F26F3D-5924-47AA-8465-92B735D55568}"/>
               </a:ext>
             </a:extLst>
           </p:cNvPr>
@@ -21267,7 +21265,7 @@
           <p:cNvPr id="17" name="">
             <a:extLst xmlns:a="http://schemas.openxmlformats.org/drawingml/2006/main">
               <a:ext uri="{FF2B5EF4-FFF2-40B4-BE49-F238E27FC236}">
-                <a16:creationId xmlns:a16="http://schemas.microsoft.com/office/drawing/2014/main" id="{6579AA26-8BDE-41A1-98A8-EDE27BDDF4D3}"/>
+                <a16:creationId xmlns:a16="http://schemas.microsoft.com/office/drawing/2014/main" id="{36C3443C-4881-45E7-9BCE-AD90C0612D95}"/>
               </a:ext>
             </a:extLst>
           </p:cNvPr>
@@ -21302,7 +21300,7 @@
           <p:cNvPr id="18" name="">
             <a:extLst xmlns:a="http://schemas.openxmlformats.org/drawingml/2006/main">
               <a:ext uri="{FF2B5EF4-FFF2-40B4-BE49-F238E27FC236}">
-                <a16:creationId xmlns:a16="http://schemas.microsoft.com/office/drawing/2014/main" id="{18820A4C-250C-4560-97BE-20C036A2AE64}"/>
+                <a16:creationId xmlns:a16="http://schemas.microsoft.com/office/drawing/2014/main" id="{32D4F9AF-B3C8-4325-BE01-111BD9211B3C}"/>
               </a:ext>
             </a:extLst>
           </p:cNvPr>
@@ -21366,7 +21364,7 @@
           <p:cNvPr id="19" name="">
             <a:extLst xmlns:a="http://schemas.openxmlformats.org/drawingml/2006/main">
               <a:ext uri="{FF2B5EF4-FFF2-40B4-BE49-F238E27FC236}">
-                <a16:creationId xmlns:a16="http://schemas.microsoft.com/office/drawing/2014/main" id="{765B7890-1CCA-45A3-84C8-593D19E684CF}"/>
+                <a16:creationId xmlns:a16="http://schemas.microsoft.com/office/drawing/2014/main" id="{C98987F1-73A0-4B31-89CB-296BCE4FA01E}"/>
               </a:ext>
             </a:extLst>
           </p:cNvPr>
@@ -21430,7 +21428,7 @@
           <p:cNvPr id="20" name="">
             <a:extLst xmlns:a="http://schemas.openxmlformats.org/drawingml/2006/main">
               <a:ext uri="{FF2B5EF4-FFF2-40B4-BE49-F238E27FC236}">
-                <a16:creationId xmlns:a16="http://schemas.microsoft.com/office/drawing/2014/main" id="{4FE75D4B-674F-4F7F-A5A2-32A8D66B0A0B}"/>
+                <a16:creationId xmlns:a16="http://schemas.microsoft.com/office/drawing/2014/main" id="{2EF5B645-30B9-4F5F-9434-B3B038986887}"/>
               </a:ext>
             </a:extLst>
           </p:cNvPr>
@@ -21465,7 +21463,7 @@
           <p:cNvPr id="21" name="">
             <a:extLst xmlns:a="http://schemas.openxmlformats.org/drawingml/2006/main">
               <a:ext uri="{FF2B5EF4-FFF2-40B4-BE49-F238E27FC236}">
-                <a16:creationId xmlns:a16="http://schemas.microsoft.com/office/drawing/2014/main" id="{346B6724-DDE3-40D3-BBFE-87448A2C0850}"/>
+                <a16:creationId xmlns:a16="http://schemas.microsoft.com/office/drawing/2014/main" id="{F0BC88C6-D268-4796-A205-35642C202316}"/>
               </a:ext>
             </a:extLst>
           </p:cNvPr>
@@ -21498,7 +21496,7 @@
           <p:cNvPr id="22" name="">
             <a:extLst xmlns:a="http://schemas.openxmlformats.org/drawingml/2006/main">
               <a:ext uri="{FF2B5EF4-FFF2-40B4-BE49-F238E27FC236}">
-                <a16:creationId xmlns:a16="http://schemas.microsoft.com/office/drawing/2014/main" id="{9E20BD12-1CBD-4D0A-BA37-359A632DCDFF}"/>
+                <a16:creationId xmlns:a16="http://schemas.microsoft.com/office/drawing/2014/main" id="{DF8CD747-D588-43AD-B78A-6375439C2C66}"/>
               </a:ext>
             </a:extLst>
           </p:cNvPr>
@@ -21533,7 +21531,7 @@
           <p:cNvPr id="23" name="">
             <a:extLst xmlns:a="http://schemas.openxmlformats.org/drawingml/2006/main">
               <a:ext uri="{FF2B5EF4-FFF2-40B4-BE49-F238E27FC236}">
-                <a16:creationId xmlns:a16="http://schemas.microsoft.com/office/drawing/2014/main" id="{4B937826-AFE8-4595-9E9D-16F9F4A72357}"/>
+                <a16:creationId xmlns:a16="http://schemas.microsoft.com/office/drawing/2014/main" id="{E54F2385-5A69-4AA4-B4FB-7375C0499EAD}"/>
               </a:ext>
             </a:extLst>
           </p:cNvPr>
@@ -21597,7 +21595,7 @@
           <p:cNvPr id="24" name="">
             <a:extLst xmlns:a="http://schemas.openxmlformats.org/drawingml/2006/main">
               <a:ext uri="{FF2B5EF4-FFF2-40B4-BE49-F238E27FC236}">
-                <a16:creationId xmlns:a16="http://schemas.microsoft.com/office/drawing/2014/main" id="{8E0EC125-0ABD-4871-A282-3C2BD2876710}"/>
+                <a16:creationId xmlns:a16="http://schemas.microsoft.com/office/drawing/2014/main" id="{B90FF6A6-D7C1-44F1-A4A8-8CF6F1A1B909}"/>
               </a:ext>
             </a:extLst>
           </p:cNvPr>
@@ -21661,7 +21659,7 @@
           <p:cNvPr id="25" name="">
             <a:extLst xmlns:a="http://schemas.openxmlformats.org/drawingml/2006/main">
               <a:ext uri="{FF2B5EF4-FFF2-40B4-BE49-F238E27FC236}">
-                <a16:creationId xmlns:a16="http://schemas.microsoft.com/office/drawing/2014/main" id="{B123066A-C4DE-4BDC-8E1B-426AD7F19945}"/>
+                <a16:creationId xmlns:a16="http://schemas.microsoft.com/office/drawing/2014/main" id="{65C9BD3D-285A-4CB0-9B5F-AFABBC7DBA2E}"/>
               </a:ext>
             </a:extLst>
           </p:cNvPr>
@@ -21696,7 +21694,7 @@
           <p:cNvPr id="26" name="">
             <a:extLst xmlns:a="http://schemas.openxmlformats.org/drawingml/2006/main">
               <a:ext uri="{FF2B5EF4-FFF2-40B4-BE49-F238E27FC236}">
-                <a16:creationId xmlns:a16="http://schemas.microsoft.com/office/drawing/2014/main" id="{AB1B6C5A-5F54-453F-8D1C-9A7A28369D12}"/>
+                <a16:creationId xmlns:a16="http://schemas.microsoft.com/office/drawing/2014/main" id="{DDE52608-F516-4F47-BFDC-00AD78DA60AE}"/>
               </a:ext>
             </a:extLst>
           </p:cNvPr>
@@ -21729,7 +21727,7 @@
           <p:cNvPr id="27" name="">
             <a:extLst xmlns:a="http://schemas.openxmlformats.org/drawingml/2006/main">
               <a:ext uri="{FF2B5EF4-FFF2-40B4-BE49-F238E27FC236}">
-                <a16:creationId xmlns:a16="http://schemas.microsoft.com/office/drawing/2014/main" id="{E5A8A183-FA33-4701-8AFF-A01EFEC26ADD}"/>
+                <a16:creationId xmlns:a16="http://schemas.microsoft.com/office/drawing/2014/main" id="{671369CC-F2F3-41F9-A4C1-A10F0AF8CF1C}"/>
               </a:ext>
             </a:extLst>
           </p:cNvPr>
@@ -21764,7 +21762,7 @@
           <p:cNvPr id="28" name="">
             <a:extLst xmlns:a="http://schemas.openxmlformats.org/drawingml/2006/main">
               <a:ext uri="{FF2B5EF4-FFF2-40B4-BE49-F238E27FC236}">
-                <a16:creationId xmlns:a16="http://schemas.microsoft.com/office/drawing/2014/main" id="{8303EC3B-0645-4FA9-BA71-29D4E50EC6BF}"/>
+                <a16:creationId xmlns:a16="http://schemas.microsoft.com/office/drawing/2014/main" id="{80F6C9E0-0ECC-4759-9826-A748185E6034}"/>
               </a:ext>
             </a:extLst>
           </p:cNvPr>
@@ -21828,7 +21826,7 @@
           <p:cNvPr id="29" name="">
             <a:extLst xmlns:a="http://schemas.openxmlformats.org/drawingml/2006/main">
               <a:ext uri="{FF2B5EF4-FFF2-40B4-BE49-F238E27FC236}">
-                <a16:creationId xmlns:a16="http://schemas.microsoft.com/office/drawing/2014/main" id="{49F46142-0DE1-4F53-81B4-E0B99664A6E0}"/>
+                <a16:creationId xmlns:a16="http://schemas.microsoft.com/office/drawing/2014/main" id="{0A7E7730-35E8-4F24-B30B-57332B2E4454}"/>
               </a:ext>
             </a:extLst>
           </p:cNvPr>
@@ -21892,7 +21890,7 @@
           <p:cNvPr id="30" name="">
             <a:extLst xmlns:a="http://schemas.openxmlformats.org/drawingml/2006/main">
               <a:ext uri="{FF2B5EF4-FFF2-40B4-BE49-F238E27FC236}">
-                <a16:creationId xmlns:a16="http://schemas.microsoft.com/office/drawing/2014/main" id="{B55E374C-D974-46AC-ABF5-1ABBAC1B3885}"/>
+                <a16:creationId xmlns:a16="http://schemas.microsoft.com/office/drawing/2014/main" id="{DA74FD89-1FBE-4A68-9A74-42EA505AF920}"/>
               </a:ext>
             </a:extLst>
           </p:cNvPr>
@@ -21927,7 +21925,7 @@
           <p:cNvPr id="31" name="">
             <a:extLst xmlns:a="http://schemas.openxmlformats.org/drawingml/2006/main">
               <a:ext uri="{FF2B5EF4-FFF2-40B4-BE49-F238E27FC236}">
-                <a16:creationId xmlns:a16="http://schemas.microsoft.com/office/drawing/2014/main" id="{0236B3DF-F4C4-4E6F-89D0-40D23AD3F844}"/>
+                <a16:creationId xmlns:a16="http://schemas.microsoft.com/office/drawing/2014/main" id="{636586DF-3FE8-4E7F-808C-F71763FDAFE6}"/>
               </a:ext>
             </a:extLst>
           </p:cNvPr>
@@ -21960,7 +21958,7 @@
           <p:cNvPr id="32" name="">
             <a:extLst xmlns:a="http://schemas.openxmlformats.org/drawingml/2006/main">
               <a:ext uri="{FF2B5EF4-FFF2-40B4-BE49-F238E27FC236}">
-                <a16:creationId xmlns:a16="http://schemas.microsoft.com/office/drawing/2014/main" id="{8C4F4392-145E-43BD-9925-1545F36ED0EA}"/>
+                <a16:creationId xmlns:a16="http://schemas.microsoft.com/office/drawing/2014/main" id="{E0D8AE75-E500-4742-AE5E-22092AC51E96}"/>
               </a:ext>
             </a:extLst>
           </p:cNvPr>
@@ -21995,7 +21993,7 @@
           <p:cNvPr id="33" name="">
             <a:extLst xmlns:a="http://schemas.openxmlformats.org/drawingml/2006/main">
               <a:ext uri="{FF2B5EF4-FFF2-40B4-BE49-F238E27FC236}">
-                <a16:creationId xmlns:a16="http://schemas.microsoft.com/office/drawing/2014/main" id="{C896E1D0-1B35-4A38-AC8C-E4508A833167}"/>
+                <a16:creationId xmlns:a16="http://schemas.microsoft.com/office/drawing/2014/main" id="{F3B2CF48-7BBF-4B33-9335-D67B3F2712E9}"/>
               </a:ext>
             </a:extLst>
           </p:cNvPr>
@@ -22059,7 +22057,7 @@
           <p:cNvPr id="34" name="">
             <a:extLst xmlns:a="http://schemas.openxmlformats.org/drawingml/2006/main">
               <a:ext uri="{FF2B5EF4-FFF2-40B4-BE49-F238E27FC236}">
-                <a16:creationId xmlns:a16="http://schemas.microsoft.com/office/drawing/2014/main" id="{24F58AAB-12D1-4E29-B058-79C6E687BE13}"/>
+                <a16:creationId xmlns:a16="http://schemas.microsoft.com/office/drawing/2014/main" id="{3065F02D-8576-4E64-B7E5-3A9882CF047A}"/>
               </a:ext>
             </a:extLst>
           </p:cNvPr>
@@ -22123,7 +22121,7 @@
           <p:cNvPr id="35" name="">
             <a:extLst xmlns:a="http://schemas.openxmlformats.org/drawingml/2006/main">
               <a:ext uri="{FF2B5EF4-FFF2-40B4-BE49-F238E27FC236}">
-                <a16:creationId xmlns:a16="http://schemas.microsoft.com/office/drawing/2014/main" id="{2683404A-2426-480E-85EB-D3DD48A91EB3}"/>
+                <a16:creationId xmlns:a16="http://schemas.microsoft.com/office/drawing/2014/main" id="{B43FE640-0C2A-4E30-9E92-FCCA4D61B629}"/>
               </a:ext>
             </a:extLst>
           </p:cNvPr>
@@ -22156,7 +22154,7 @@
           <p:cNvPr id="36" name="">
             <a:extLst xmlns:a="http://schemas.openxmlformats.org/drawingml/2006/main">
               <a:ext uri="{FF2B5EF4-FFF2-40B4-BE49-F238E27FC236}">
-                <a16:creationId xmlns:a16="http://schemas.microsoft.com/office/drawing/2014/main" id="{D217E247-DE01-4F43-BA68-BC893E5C47E3}"/>
+                <a16:creationId xmlns:a16="http://schemas.microsoft.com/office/drawing/2014/main" id="{86428DBD-90D9-4166-91B7-D58A28B78E08}"/>
               </a:ext>
             </a:extLst>
           </p:cNvPr>
@@ -22191,7 +22189,7 @@
           <p:cNvPr id="37" name="">
             <a:extLst xmlns:a="http://schemas.openxmlformats.org/drawingml/2006/main">
               <a:ext uri="{FF2B5EF4-FFF2-40B4-BE49-F238E27FC236}">
-                <a16:creationId xmlns:a16="http://schemas.microsoft.com/office/drawing/2014/main" id="{E3DAD765-1FEC-4B4E-8DD7-4354CBE33DB1}"/>
+                <a16:creationId xmlns:a16="http://schemas.microsoft.com/office/drawing/2014/main" id="{21D724C4-5076-4643-A453-A667746A3AD0}"/>
               </a:ext>
             </a:extLst>
           </p:cNvPr>
@@ -22255,7 +22253,7 @@
           <p:cNvPr id="38" name="">
             <a:extLst xmlns:a="http://schemas.openxmlformats.org/drawingml/2006/main">
               <a:ext uri="{FF2B5EF4-FFF2-40B4-BE49-F238E27FC236}">
-                <a16:creationId xmlns:a16="http://schemas.microsoft.com/office/drawing/2014/main" id="{E8FBAA4B-4D4C-41F8-B0F3-48260D359253}"/>
+                <a16:creationId xmlns:a16="http://schemas.microsoft.com/office/drawing/2014/main" id="{C877306C-843A-40F7-8EB4-92C8C47CA1D3}"/>
               </a:ext>
             </a:extLst>
           </p:cNvPr>
@@ -22319,7 +22317,7 @@
           <p:cNvPr id="39" name="">
             <a:extLst xmlns:a="http://schemas.openxmlformats.org/drawingml/2006/main">
               <a:ext uri="{FF2B5EF4-FFF2-40B4-BE49-F238E27FC236}">
-                <a16:creationId xmlns:a16="http://schemas.microsoft.com/office/drawing/2014/main" id="{D55C337A-E35E-4A28-9D1E-6077A92B168B}"/>
+                <a16:creationId xmlns:a16="http://schemas.microsoft.com/office/drawing/2014/main" id="{D4CF0075-8F62-4EAA-9854-D77225E15824}"/>
               </a:ext>
             </a:extLst>
           </p:cNvPr>
@@ -22352,7 +22350,7 @@
           <p:cNvPr id="40" name="">
             <a:extLst xmlns:a="http://schemas.openxmlformats.org/drawingml/2006/main">
               <a:ext uri="{FF2B5EF4-FFF2-40B4-BE49-F238E27FC236}">
-                <a16:creationId xmlns:a16="http://schemas.microsoft.com/office/drawing/2014/main" id="{BBAC5964-46B2-40D5-BEA6-1DE961234E65}"/>
+                <a16:creationId xmlns:a16="http://schemas.microsoft.com/office/drawing/2014/main" id="{D70B2FA4-0DFE-4E88-95AD-3925D83D9CA7}"/>
               </a:ext>
             </a:extLst>
           </p:cNvPr>
@@ -22416,7 +22414,7 @@
           <p:cNvPr id="41" name="">
             <a:extLst xmlns:a="http://schemas.openxmlformats.org/drawingml/2006/main">
               <a:ext uri="{FF2B5EF4-FFF2-40B4-BE49-F238E27FC236}">
-                <a16:creationId xmlns:a16="http://schemas.microsoft.com/office/drawing/2014/main" id="{AEDF494F-E63D-4850-A0E5-2AFAC2935009}"/>
+                <a16:creationId xmlns:a16="http://schemas.microsoft.com/office/drawing/2014/main" id="{D9096019-B7F6-4448-ABFF-372E4BCC60D9}"/>
               </a:ext>
             </a:extLst>
           </p:cNvPr>
@@ -22451,7 +22449,7 @@
           <p:cNvPr id="42" name="">
             <a:extLst xmlns:a="http://schemas.openxmlformats.org/drawingml/2006/main">
               <a:ext uri="{FF2B5EF4-FFF2-40B4-BE49-F238E27FC236}">
-                <a16:creationId xmlns:a16="http://schemas.microsoft.com/office/drawing/2014/main" id="{B3942846-9104-40FA-A776-02DE7C02B443}"/>
+                <a16:creationId xmlns:a16="http://schemas.microsoft.com/office/drawing/2014/main" id="{D012464E-E8D6-4DFE-8964-4E89C3DA48DA}"/>
               </a:ext>
             </a:extLst>
           </p:cNvPr>
@@ -22515,7 +22513,7 @@
           <p:cNvPr id="43" name="">
             <a:extLst xmlns:a="http://schemas.openxmlformats.org/drawingml/2006/main">
               <a:ext uri="{FF2B5EF4-FFF2-40B4-BE49-F238E27FC236}">
-                <a16:creationId xmlns:a16="http://schemas.microsoft.com/office/drawing/2014/main" id="{D1052304-F7C6-49AD-BD73-609936A40EFA}"/>
+                <a16:creationId xmlns:a16="http://schemas.microsoft.com/office/drawing/2014/main" id="{4627BB9B-2503-43CF-A897-E7ED3001E056}"/>
               </a:ext>
             </a:extLst>
           </p:cNvPr>
@@ -22579,7 +22577,7 @@
           <p:cNvPr id="44" name="">
             <a:extLst xmlns:a="http://schemas.openxmlformats.org/drawingml/2006/main">
               <a:ext uri="{FF2B5EF4-FFF2-40B4-BE49-F238E27FC236}">
-                <a16:creationId xmlns:a16="http://schemas.microsoft.com/office/drawing/2014/main" id="{AF68F9FC-8F7A-4575-A89B-7357E5751F90}"/>
+                <a16:creationId xmlns:a16="http://schemas.microsoft.com/office/drawing/2014/main" id="{0EC8FA36-9381-4493-B45D-C734219D3E7C}"/>
               </a:ext>
             </a:extLst>
           </p:cNvPr>
@@ -22643,7 +22641,7 @@
           <p:cNvPr id="45" name="">
             <a:extLst xmlns:a="http://schemas.openxmlformats.org/drawingml/2006/main">
               <a:ext uri="{FF2B5EF4-FFF2-40B4-BE49-F238E27FC236}">
-                <a16:creationId xmlns:a16="http://schemas.microsoft.com/office/drawing/2014/main" id="{176379DC-40F0-4284-AA06-101F0B0F102B}"/>
+                <a16:creationId xmlns:a16="http://schemas.microsoft.com/office/drawing/2014/main" id="{C37A8AD3-A5C0-4FAD-BFA4-A11FDA379D58}"/>
               </a:ext>
             </a:extLst>
           </p:cNvPr>
@@ -22678,7 +22676,7 @@
           <p:cNvPr id="46" name="">
             <a:extLst xmlns:a="http://schemas.openxmlformats.org/drawingml/2006/main">
               <a:ext uri="{FF2B5EF4-FFF2-40B4-BE49-F238E27FC236}">
-                <a16:creationId xmlns:a16="http://schemas.microsoft.com/office/drawing/2014/main" id="{6C420FC6-8113-4A47-AB20-8671B3811FB4}"/>
+                <a16:creationId xmlns:a16="http://schemas.microsoft.com/office/drawing/2014/main" id="{C0632FFD-98CF-4A86-BD9E-C35D41949A30}"/>
               </a:ext>
             </a:extLst>
           </p:cNvPr>
@@ -22713,7 +22711,7 @@
           <p:cNvPr id="47" name="">
             <a:extLst xmlns:a="http://schemas.openxmlformats.org/drawingml/2006/main">
               <a:ext uri="{FF2B5EF4-FFF2-40B4-BE49-F238E27FC236}">
-                <a16:creationId xmlns:a16="http://schemas.microsoft.com/office/drawing/2014/main" id="{18F0C382-2CE1-47E9-820E-ADC815D09113}"/>
+                <a16:creationId xmlns:a16="http://schemas.microsoft.com/office/drawing/2014/main" id="{38F95F73-EF58-4E09-8C5F-E40DB0C23E1E}"/>
               </a:ext>
             </a:extLst>
           </p:cNvPr>
@@ -22748,7 +22746,7 @@
           <p:cNvPr id="48" name="kicker-07-marker">
             <a:extLst xmlns:a="http://schemas.openxmlformats.org/drawingml/2006/main">
               <a:ext uri="{FF2B5EF4-FFF2-40B4-BE49-F238E27FC236}">
-                <a16:creationId xmlns:a16="http://schemas.microsoft.com/office/drawing/2014/main" id="{70907F34-B9CA-4985-8780-6BB995605827}"/>
+                <a16:creationId xmlns:a16="http://schemas.microsoft.com/office/drawing/2014/main" id="{B124971D-410B-4790-A726-5705DBAB62F9}"/>
               </a:ext>
             </a:extLst>
           </p:cNvPr>
@@ -22783,7 +22781,7 @@
           <p:cNvPr id="49" name="kicker-07-label">
             <a:extLst xmlns:a="http://schemas.openxmlformats.org/drawingml/2006/main">
               <a:ext uri="{FF2B5EF4-FFF2-40B4-BE49-F238E27FC236}">
-                <a16:creationId xmlns:a16="http://schemas.microsoft.com/office/drawing/2014/main" id="{C47CB304-6DE8-4133-A355-D31D5CF1DC18}"/>
+                <a16:creationId xmlns:a16="http://schemas.microsoft.com/office/drawing/2014/main" id="{92B9C9C2-0441-49E2-A301-DEEDD419DAD0}"/>
               </a:ext>
             </a:extLst>
           </p:cNvPr>
@@ -22847,7 +22845,7 @@
           <p:cNvPr id="50" name="">
             <a:extLst xmlns:a="http://schemas.openxmlformats.org/drawingml/2006/main">
               <a:ext uri="{FF2B5EF4-FFF2-40B4-BE49-F238E27FC236}">
-                <a16:creationId xmlns:a16="http://schemas.microsoft.com/office/drawing/2014/main" id="{FAAC7D00-FB74-4B30-A648-2E2350BDEF61}"/>
+                <a16:creationId xmlns:a16="http://schemas.microsoft.com/office/drawing/2014/main" id="{52534268-16A6-4A16-91AD-41F818AEC552}"/>
               </a:ext>
             </a:extLst>
           </p:cNvPr>
@@ -22911,7 +22909,7 @@
           <p:cNvPr id="51" name="">
             <a:extLst xmlns:a="http://schemas.openxmlformats.org/drawingml/2006/main">
               <a:ext uri="{FF2B5EF4-FFF2-40B4-BE49-F238E27FC236}">
-                <a16:creationId xmlns:a16="http://schemas.microsoft.com/office/drawing/2014/main" id="{AFF46EA3-D874-43C7-B730-FD74443CBC33}"/>
+                <a16:creationId xmlns:a16="http://schemas.microsoft.com/office/drawing/2014/main" id="{2D7D9CB5-449D-4C04-83EA-591103798943}"/>
               </a:ext>
             </a:extLst>
           </p:cNvPr>
@@ -22975,7 +22973,7 @@
           <p:cNvPr id="52" name="">
             <a:extLst xmlns:a="http://schemas.openxmlformats.org/drawingml/2006/main">
               <a:ext uri="{FF2B5EF4-FFF2-40B4-BE49-F238E27FC236}">
-                <a16:creationId xmlns:a16="http://schemas.microsoft.com/office/drawing/2014/main" id="{1FCB4C73-1FB7-4B2B-9C48-B38280AC941A}"/>
+                <a16:creationId xmlns:a16="http://schemas.microsoft.com/office/drawing/2014/main" id="{AE94F1FF-C685-4EC7-BB0C-8539B41240B6}"/>
               </a:ext>
             </a:extLst>
           </p:cNvPr>
@@ -23010,7 +23008,7 @@
           <p:cNvPr id="53" name="">
             <a:extLst xmlns:a="http://schemas.openxmlformats.org/drawingml/2006/main">
               <a:ext uri="{FF2B5EF4-FFF2-40B4-BE49-F238E27FC236}">
-                <a16:creationId xmlns:a16="http://schemas.microsoft.com/office/drawing/2014/main" id="{2C8E2F05-846E-45D9-904C-00BF4ADC05B8}"/>
+                <a16:creationId xmlns:a16="http://schemas.microsoft.com/office/drawing/2014/main" id="{70E2B1B6-FFFB-4D72-8F68-45C9077379F2}"/>
               </a:ext>
             </a:extLst>
           </p:cNvPr>
@@ -23045,7 +23043,7 @@
           <p:cNvPr id="54" name="">
             <a:extLst xmlns:a="http://schemas.openxmlformats.org/drawingml/2006/main">
               <a:ext uri="{FF2B5EF4-FFF2-40B4-BE49-F238E27FC236}">
-                <a16:creationId xmlns:a16="http://schemas.microsoft.com/office/drawing/2014/main" id="{8B490682-7A77-4FC7-B01F-6DB6851BF2DA}"/>
+                <a16:creationId xmlns:a16="http://schemas.microsoft.com/office/drawing/2014/main" id="{0500D192-BF44-4EBC-B482-2E88E02049E4}"/>
               </a:ext>
             </a:extLst>
           </p:cNvPr>
@@ -23080,7 +23078,7 @@
           <p:cNvPr id="55" name="">
             <a:extLst xmlns:a="http://schemas.openxmlformats.org/drawingml/2006/main">
               <a:ext uri="{FF2B5EF4-FFF2-40B4-BE49-F238E27FC236}">
-                <a16:creationId xmlns:a16="http://schemas.microsoft.com/office/drawing/2014/main" id="{7CD60AA4-ED03-4743-9B0F-091C1E067E30}"/>
+                <a16:creationId xmlns:a16="http://schemas.microsoft.com/office/drawing/2014/main" id="{495898DB-2243-4C23-83B5-40BA12DF5403}"/>
               </a:ext>
             </a:extLst>
           </p:cNvPr>
@@ -23115,7 +23113,7 @@
           <p:cNvPr id="56" name="">
             <a:extLst xmlns:a="http://schemas.openxmlformats.org/drawingml/2006/main">
               <a:ext uri="{FF2B5EF4-FFF2-40B4-BE49-F238E27FC236}">
-                <a16:creationId xmlns:a16="http://schemas.microsoft.com/office/drawing/2014/main" id="{139261F1-C157-495D-8C1E-EF294DC4D9CE}"/>
+                <a16:creationId xmlns:a16="http://schemas.microsoft.com/office/drawing/2014/main" id="{1D2AF2F5-A756-44BB-908B-B3AB0312B610}"/>
               </a:ext>
             </a:extLst>
           </p:cNvPr>
@@ -23179,7 +23177,7 @@
           <p:cNvPr id="57" name="">
             <a:extLst xmlns:a="http://schemas.openxmlformats.org/drawingml/2006/main">
               <a:ext uri="{FF2B5EF4-FFF2-40B4-BE49-F238E27FC236}">
-                <a16:creationId xmlns:a16="http://schemas.microsoft.com/office/drawing/2014/main" id="{581E027C-E3C4-4A26-BE62-F0BBDCD53989}"/>
+                <a16:creationId xmlns:a16="http://schemas.microsoft.com/office/drawing/2014/main" id="{A49E8CDE-FB46-447B-8620-DD994AB573BB}"/>
               </a:ext>
             </a:extLst>
           </p:cNvPr>
@@ -23243,7 +23241,7 @@
           <p:cNvPr id="58" name="">
             <a:extLst xmlns:a="http://schemas.openxmlformats.org/drawingml/2006/main">
               <a:ext uri="{FF2B5EF4-FFF2-40B4-BE49-F238E27FC236}">
-                <a16:creationId xmlns:a16="http://schemas.microsoft.com/office/drawing/2014/main" id="{F9BDACED-4DF5-45FB-9057-EAE042AEACAF}"/>
+                <a16:creationId xmlns:a16="http://schemas.microsoft.com/office/drawing/2014/main" id="{11E43E66-9F7A-4561-9F5E-41555119C10B}"/>
               </a:ext>
             </a:extLst>
           </p:cNvPr>
@@ -23305,7 +23303,7 @@
     </p:spTree>
     <p:extLst>
       <p:ext uri="{BB962C8B-B14F-4D97-AF65-F5344CB8AC3E}">
-        <p14:creationId xmlns:p14="http://schemas.microsoft.com/office/powerpoint/2010/main" val="617937557"/>
+        <p14:creationId xmlns:p14="http://schemas.microsoft.com/office/powerpoint/2010/main" val="384232597"/>
       </p:ext>
     </p:extLst>
   </p:cSld>
@@ -23329,7 +23327,7 @@
           <p:cNvPr id="1" name="">
             <a:extLst xmlns:a="http://schemas.openxmlformats.org/drawingml/2006/main">
               <a:ext uri="{FF2B5EF4-FFF2-40B4-BE49-F238E27FC236}">
-                <a16:creationId xmlns:a16="http://schemas.microsoft.com/office/drawing/2014/main" id="{E8EDE6ED-9C2D-43B0-8777-7701CA42FD15}"/>
+                <a16:creationId xmlns:a16="http://schemas.microsoft.com/office/drawing/2014/main" id="{236BCDEA-9788-42E1-9DD7-D4564B67F119}"/>
               </a:ext>
             </a:extLst>
           </p:cNvPr>
@@ -23364,7 +23362,7 @@
           <p:cNvPr id="2" name="">
             <a:extLst xmlns:a="http://schemas.openxmlformats.org/drawingml/2006/main">
               <a:ext uri="{FF2B5EF4-FFF2-40B4-BE49-F238E27FC236}">
-                <a16:creationId xmlns:a16="http://schemas.microsoft.com/office/drawing/2014/main" id="{21B9EB65-BB7D-4D10-A8C2-17C18079E5C4}"/>
+                <a16:creationId xmlns:a16="http://schemas.microsoft.com/office/drawing/2014/main" id="{0671EEBA-2F75-46BD-B0C5-D28D579CD573}"/>
               </a:ext>
             </a:extLst>
           </p:cNvPr>
@@ -23399,7 +23397,7 @@
           <p:cNvPr id="3" name="">
             <a:extLst xmlns:a="http://schemas.openxmlformats.org/drawingml/2006/main">
               <a:ext uri="{FF2B5EF4-FFF2-40B4-BE49-F238E27FC236}">
-                <a16:creationId xmlns:a16="http://schemas.microsoft.com/office/drawing/2014/main" id="{666EE541-5DA0-44DD-B9F0-FE946BD76D3D}"/>
+                <a16:creationId xmlns:a16="http://schemas.microsoft.com/office/drawing/2014/main" id="{8A2544C9-207D-4E42-9832-CA687BED957A}"/>
               </a:ext>
             </a:extLst>
           </p:cNvPr>
@@ -23434,7 +23432,7 @@
           <p:cNvPr id="4" name="kicker-07-marker">
             <a:extLst xmlns:a="http://schemas.openxmlformats.org/drawingml/2006/main">
               <a:ext uri="{FF2B5EF4-FFF2-40B4-BE49-F238E27FC236}">
-                <a16:creationId xmlns:a16="http://schemas.microsoft.com/office/drawing/2014/main" id="{CBA1DC20-7CA8-4DCF-AE67-A9F5F244F94B}"/>
+                <a16:creationId xmlns:a16="http://schemas.microsoft.com/office/drawing/2014/main" id="{FB8D214D-4B2E-4355-AC19-39B601F6A008}"/>
               </a:ext>
             </a:extLst>
           </p:cNvPr>
@@ -23469,7 +23467,7 @@
           <p:cNvPr id="5" name="kicker-07-label">
             <a:extLst xmlns:a="http://schemas.openxmlformats.org/drawingml/2006/main">
               <a:ext uri="{FF2B5EF4-FFF2-40B4-BE49-F238E27FC236}">
-                <a16:creationId xmlns:a16="http://schemas.microsoft.com/office/drawing/2014/main" id="{A7B8E7CC-0DF3-4A0A-BF39-185DA093E7E7}"/>
+                <a16:creationId xmlns:a16="http://schemas.microsoft.com/office/drawing/2014/main" id="{624E3246-EA49-4AC1-B4B9-0A198A795174}"/>
               </a:ext>
             </a:extLst>
           </p:cNvPr>
@@ -23533,7 +23531,7 @@
           <p:cNvPr id="6" name="">
             <a:extLst xmlns:a="http://schemas.openxmlformats.org/drawingml/2006/main">
               <a:ext uri="{FF2B5EF4-FFF2-40B4-BE49-F238E27FC236}">
-                <a16:creationId xmlns:a16="http://schemas.microsoft.com/office/drawing/2014/main" id="{8C8B680D-7D7F-4675-AFBF-E8A33AA5414D}"/>
+                <a16:creationId xmlns:a16="http://schemas.microsoft.com/office/drawing/2014/main" id="{AA41EEF8-0F1A-4111-8FCD-17447B68BADB}"/>
               </a:ext>
             </a:extLst>
           </p:cNvPr>
@@ -23597,7 +23595,7 @@
           <p:cNvPr id="7" name="">
             <a:extLst xmlns:a="http://schemas.openxmlformats.org/drawingml/2006/main">
               <a:ext uri="{FF2B5EF4-FFF2-40B4-BE49-F238E27FC236}">
-                <a16:creationId xmlns:a16="http://schemas.microsoft.com/office/drawing/2014/main" id="{ACB06F13-B6FD-49ED-8485-CC3BABFBCF8C}"/>
+                <a16:creationId xmlns:a16="http://schemas.microsoft.com/office/drawing/2014/main" id="{B163CB37-70C0-458C-8D02-0A4E01B27FB1}"/>
               </a:ext>
             </a:extLst>
           </p:cNvPr>
@@ -23661,7 +23659,7 @@
           <p:cNvPr id="8" name="">
             <a:extLst xmlns:a="http://schemas.openxmlformats.org/drawingml/2006/main">
               <a:ext uri="{FF2B5EF4-FFF2-40B4-BE49-F238E27FC236}">
-                <a16:creationId xmlns:a16="http://schemas.microsoft.com/office/drawing/2014/main" id="{BD10E332-F24C-4437-8514-602CB82852E4}"/>
+                <a16:creationId xmlns:a16="http://schemas.microsoft.com/office/drawing/2014/main" id="{635DF7B0-239A-4710-9A11-7AA577C02B58}"/>
               </a:ext>
             </a:extLst>
           </p:cNvPr>
@@ -23696,7 +23694,7 @@
           <p:cNvPr id="9" name="">
             <a:extLst xmlns:a="http://schemas.openxmlformats.org/drawingml/2006/main">
               <a:ext uri="{FF2B5EF4-FFF2-40B4-BE49-F238E27FC236}">
-                <a16:creationId xmlns:a16="http://schemas.microsoft.com/office/drawing/2014/main" id="{058E3F2A-E3F7-4586-977D-1614C423B0C8}"/>
+                <a16:creationId xmlns:a16="http://schemas.microsoft.com/office/drawing/2014/main" id="{6A7C5FC8-FAB6-41A2-BB2F-7E138BB6F228}"/>
               </a:ext>
             </a:extLst>
           </p:cNvPr>
@@ -23760,7 +23758,7 @@
           <p:cNvPr id="10" name="">
             <a:extLst xmlns:a="http://schemas.openxmlformats.org/drawingml/2006/main">
               <a:ext uri="{FF2B5EF4-FFF2-40B4-BE49-F238E27FC236}">
-                <a16:creationId xmlns:a16="http://schemas.microsoft.com/office/drawing/2014/main" id="{EFE7DA38-FE2C-4F81-8C9E-378F44906AC9}"/>
+                <a16:creationId xmlns:a16="http://schemas.microsoft.com/office/drawing/2014/main" id="{77FC5D79-D9F1-461D-9712-A6C571191F73}"/>
               </a:ext>
             </a:extLst>
           </p:cNvPr>
@@ -23824,7 +23822,7 @@
           <p:cNvPr id="11" name="">
             <a:extLst xmlns:a="http://schemas.openxmlformats.org/drawingml/2006/main">
               <a:ext uri="{FF2B5EF4-FFF2-40B4-BE49-F238E27FC236}">
-                <a16:creationId xmlns:a16="http://schemas.microsoft.com/office/drawing/2014/main" id="{84F00F8E-91A2-49D9-8C4E-9ABC8E501C15}"/>
+                <a16:creationId xmlns:a16="http://schemas.microsoft.com/office/drawing/2014/main" id="{99B0FB28-5E5A-4E9D-87EA-B92337DF2791}"/>
               </a:ext>
             </a:extLst>
           </p:cNvPr>
@@ -23888,7 +23886,7 @@
           <p:cNvPr id="12" name="">
             <a:extLst xmlns:a="http://schemas.openxmlformats.org/drawingml/2006/main">
               <a:ext uri="{FF2B5EF4-FFF2-40B4-BE49-F238E27FC236}">
-                <a16:creationId xmlns:a16="http://schemas.microsoft.com/office/drawing/2014/main" id="{A36F29AC-C5D0-4B7B-B1DB-B0F208CC9E3F}"/>
+                <a16:creationId xmlns:a16="http://schemas.microsoft.com/office/drawing/2014/main" id="{E7F36A0B-CCD9-40BB-90C8-654D850C82B5}"/>
               </a:ext>
             </a:extLst>
           </p:cNvPr>
@@ -23921,7 +23919,7 @@
           <p:cNvPr id="13" name="">
             <a:extLst xmlns:a="http://schemas.openxmlformats.org/drawingml/2006/main">
               <a:ext uri="{FF2B5EF4-FFF2-40B4-BE49-F238E27FC236}">
-                <a16:creationId xmlns:a16="http://schemas.microsoft.com/office/drawing/2014/main" id="{42D31439-539E-4D52-BB5C-C135B14A7705}"/>
+                <a16:creationId xmlns:a16="http://schemas.microsoft.com/office/drawing/2014/main" id="{A3A07194-22D7-4416-A102-364C10F1CA16}"/>
               </a:ext>
             </a:extLst>
           </p:cNvPr>
@@ -23956,7 +23954,7 @@
           <p:cNvPr id="14" name="">
             <a:extLst xmlns:a="http://schemas.openxmlformats.org/drawingml/2006/main">
               <a:ext uri="{FF2B5EF4-FFF2-40B4-BE49-F238E27FC236}">
-                <a16:creationId xmlns:a16="http://schemas.microsoft.com/office/drawing/2014/main" id="{0DFF6EF4-6615-43EB-9AAB-9187DFB180EE}"/>
+                <a16:creationId xmlns:a16="http://schemas.microsoft.com/office/drawing/2014/main" id="{2132305A-8098-43AC-BFCC-12475CB7E37E}"/>
               </a:ext>
             </a:extLst>
           </p:cNvPr>
@@ -24020,7 +24018,7 @@
           <p:cNvPr id="15" name="">
             <a:extLst xmlns:a="http://schemas.openxmlformats.org/drawingml/2006/main">
               <a:ext uri="{FF2B5EF4-FFF2-40B4-BE49-F238E27FC236}">
-                <a16:creationId xmlns:a16="http://schemas.microsoft.com/office/drawing/2014/main" id="{A5B181E0-AD9A-4512-AD9B-339FAC1BE26A}"/>
+                <a16:creationId xmlns:a16="http://schemas.microsoft.com/office/drawing/2014/main" id="{F9A46472-7565-4F35-9E64-AD543EFC69BD}"/>
               </a:ext>
             </a:extLst>
           </p:cNvPr>
@@ -24084,7 +24082,7 @@
           <p:cNvPr id="16" name="">
             <a:extLst xmlns:a="http://schemas.openxmlformats.org/drawingml/2006/main">
               <a:ext uri="{FF2B5EF4-FFF2-40B4-BE49-F238E27FC236}">
-                <a16:creationId xmlns:a16="http://schemas.microsoft.com/office/drawing/2014/main" id="{E8E38D98-9156-4B02-96C5-EA56F033B1B8}"/>
+                <a16:creationId xmlns:a16="http://schemas.microsoft.com/office/drawing/2014/main" id="{9B6C8459-F0FE-470D-A107-59D84525ED0B}"/>
               </a:ext>
             </a:extLst>
           </p:cNvPr>
@@ -24117,7 +24115,7 @@
           <p:cNvPr id="17" name="">
             <a:extLst xmlns:a="http://schemas.openxmlformats.org/drawingml/2006/main">
               <a:ext uri="{FF2B5EF4-FFF2-40B4-BE49-F238E27FC236}">
-                <a16:creationId xmlns:a16="http://schemas.microsoft.com/office/drawing/2014/main" id="{D1054B3A-743B-4DEE-B3F9-DC31DE005AAA}"/>
+                <a16:creationId xmlns:a16="http://schemas.microsoft.com/office/drawing/2014/main" id="{B510EF2F-1058-4F68-819F-50EC3631100C}"/>
               </a:ext>
             </a:extLst>
           </p:cNvPr>
@@ -24152,7 +24150,7 @@
           <p:cNvPr id="18" name="">
             <a:extLst xmlns:a="http://schemas.openxmlformats.org/drawingml/2006/main">
               <a:ext uri="{FF2B5EF4-FFF2-40B4-BE49-F238E27FC236}">
-                <a16:creationId xmlns:a16="http://schemas.microsoft.com/office/drawing/2014/main" id="{0C2FE45C-95B2-4ECC-AFC2-02B77B5FD6D7}"/>
+                <a16:creationId xmlns:a16="http://schemas.microsoft.com/office/drawing/2014/main" id="{78A01BC9-D534-4C18-A450-666F61DCCE2A}"/>
               </a:ext>
             </a:extLst>
           </p:cNvPr>
@@ -24216,7 +24214,7 @@
           <p:cNvPr id="19" name="">
             <a:extLst xmlns:a="http://schemas.openxmlformats.org/drawingml/2006/main">
               <a:ext uri="{FF2B5EF4-FFF2-40B4-BE49-F238E27FC236}">
-                <a16:creationId xmlns:a16="http://schemas.microsoft.com/office/drawing/2014/main" id="{3C10E4EC-6DB2-4476-839E-59635E7FB3B3}"/>
+                <a16:creationId xmlns:a16="http://schemas.microsoft.com/office/drawing/2014/main" id="{E38745CD-25E4-48EC-A287-C5992394D729}"/>
               </a:ext>
             </a:extLst>
           </p:cNvPr>
@@ -24280,7 +24278,7 @@
           <p:cNvPr id="20" name="">
             <a:extLst xmlns:a="http://schemas.openxmlformats.org/drawingml/2006/main">
               <a:ext uri="{FF2B5EF4-FFF2-40B4-BE49-F238E27FC236}">
-                <a16:creationId xmlns:a16="http://schemas.microsoft.com/office/drawing/2014/main" id="{51AB990D-6818-42DA-8564-A53570C2C7CB}"/>
+                <a16:creationId xmlns:a16="http://schemas.microsoft.com/office/drawing/2014/main" id="{DB6FDD5D-F122-44AF-833B-ACBBF17AC8EA}"/>
               </a:ext>
             </a:extLst>
           </p:cNvPr>
@@ -24313,7 +24311,7 @@
           <p:cNvPr id="21" name="">
             <a:extLst xmlns:a="http://schemas.openxmlformats.org/drawingml/2006/main">
               <a:ext uri="{FF2B5EF4-FFF2-40B4-BE49-F238E27FC236}">
-                <a16:creationId xmlns:a16="http://schemas.microsoft.com/office/drawing/2014/main" id="{4850DF71-38F6-4CC1-9DBA-2A8ABDA5F697}"/>
+                <a16:creationId xmlns:a16="http://schemas.microsoft.com/office/drawing/2014/main" id="{74FE20FE-32CE-4EAF-8E3A-3AB66D2BAC5A}"/>
               </a:ext>
             </a:extLst>
           </p:cNvPr>
@@ -24348,7 +24346,7 @@
           <p:cNvPr id="22" name="">
             <a:extLst xmlns:a="http://schemas.openxmlformats.org/drawingml/2006/main">
               <a:ext uri="{FF2B5EF4-FFF2-40B4-BE49-F238E27FC236}">
-                <a16:creationId xmlns:a16="http://schemas.microsoft.com/office/drawing/2014/main" id="{890D2E19-599B-4310-8670-2C4165CB5832}"/>
+                <a16:creationId xmlns:a16="http://schemas.microsoft.com/office/drawing/2014/main" id="{9B0E70C2-BAE9-4F77-A2DA-6A85A72ABC4A}"/>
               </a:ext>
             </a:extLst>
           </p:cNvPr>
@@ -24412,7 +24410,7 @@
           <p:cNvPr id="23" name="">
             <a:extLst xmlns:a="http://schemas.openxmlformats.org/drawingml/2006/main">
               <a:ext uri="{FF2B5EF4-FFF2-40B4-BE49-F238E27FC236}">
-                <a16:creationId xmlns:a16="http://schemas.microsoft.com/office/drawing/2014/main" id="{C4D0E966-BBD9-4B4C-A35C-D17CFA39A293}"/>
+                <a16:creationId xmlns:a16="http://schemas.microsoft.com/office/drawing/2014/main" id="{EAF4633B-8ED3-4151-A80A-E111BDD29681}"/>
               </a:ext>
             </a:extLst>
           </p:cNvPr>
@@ -24476,7 +24474,7 @@
           <p:cNvPr id="24" name="">
             <a:extLst xmlns:a="http://schemas.openxmlformats.org/drawingml/2006/main">
               <a:ext uri="{FF2B5EF4-FFF2-40B4-BE49-F238E27FC236}">
-                <a16:creationId xmlns:a16="http://schemas.microsoft.com/office/drawing/2014/main" id="{DB6DA95B-AFE0-416D-92DA-CA75DFCC5180}"/>
+                <a16:creationId xmlns:a16="http://schemas.microsoft.com/office/drawing/2014/main" id="{337A6F13-0133-4F3B-B97E-5F16F1024EDB}"/>
               </a:ext>
             </a:extLst>
           </p:cNvPr>
@@ -24509,7 +24507,7 @@
           <p:cNvPr id="25" name="">
             <a:extLst xmlns:a="http://schemas.openxmlformats.org/drawingml/2006/main">
               <a:ext uri="{FF2B5EF4-FFF2-40B4-BE49-F238E27FC236}">
-                <a16:creationId xmlns:a16="http://schemas.microsoft.com/office/drawing/2014/main" id="{351C8F53-4A43-44E3-94D3-D04685756BBB}"/>
+                <a16:creationId xmlns:a16="http://schemas.microsoft.com/office/drawing/2014/main" id="{D273D669-851E-426F-8B21-31293E378BF7}"/>
               </a:ext>
             </a:extLst>
           </p:cNvPr>
@@ -24544,7 +24542,7 @@
           <p:cNvPr id="26" name="">
             <a:extLst xmlns:a="http://schemas.openxmlformats.org/drawingml/2006/main">
               <a:ext uri="{FF2B5EF4-FFF2-40B4-BE49-F238E27FC236}">
-                <a16:creationId xmlns:a16="http://schemas.microsoft.com/office/drawing/2014/main" id="{052F187C-3E90-49A7-9E52-D3E9BF5A6A04}"/>
+                <a16:creationId xmlns:a16="http://schemas.microsoft.com/office/drawing/2014/main" id="{E6FCED78-0659-4394-9675-2F87798693A4}"/>
               </a:ext>
             </a:extLst>
           </p:cNvPr>
@@ -24608,7 +24606,7 @@
           <p:cNvPr id="27" name="">
             <a:extLst xmlns:a="http://schemas.openxmlformats.org/drawingml/2006/main">
               <a:ext uri="{FF2B5EF4-FFF2-40B4-BE49-F238E27FC236}">
-                <a16:creationId xmlns:a16="http://schemas.microsoft.com/office/drawing/2014/main" id="{6CA6D944-3C26-47A1-973C-3AB2549EA6C2}"/>
+                <a16:creationId xmlns:a16="http://schemas.microsoft.com/office/drawing/2014/main" id="{9840D849-3119-4916-B0C5-D203D9655A8A}"/>
               </a:ext>
             </a:extLst>
           </p:cNvPr>
@@ -24672,7 +24670,7 @@
           <p:cNvPr id="28" name="">
             <a:extLst xmlns:a="http://schemas.openxmlformats.org/drawingml/2006/main">
               <a:ext uri="{FF2B5EF4-FFF2-40B4-BE49-F238E27FC236}">
-                <a16:creationId xmlns:a16="http://schemas.microsoft.com/office/drawing/2014/main" id="{C649E780-38C7-4FD0-9953-B8183C2659AB}"/>
+                <a16:creationId xmlns:a16="http://schemas.microsoft.com/office/drawing/2014/main" id="{3FD27393-E12E-4CE8-8DB7-184685930A3A}"/>
               </a:ext>
             </a:extLst>
           </p:cNvPr>
@@ -24705,7 +24703,7 @@
           <p:cNvPr id="29" name="">
             <a:extLst xmlns:a="http://schemas.openxmlformats.org/drawingml/2006/main">
               <a:ext uri="{FF2B5EF4-FFF2-40B4-BE49-F238E27FC236}">
-                <a16:creationId xmlns:a16="http://schemas.microsoft.com/office/drawing/2014/main" id="{070334FC-9341-4201-BDAE-A67C5ADB22BB}"/>
+                <a16:creationId xmlns:a16="http://schemas.microsoft.com/office/drawing/2014/main" id="{E3706093-525E-4BBE-A714-3334F4F66D9E}"/>
               </a:ext>
             </a:extLst>
           </p:cNvPr>
@@ -24769,7 +24767,7 @@
           <p:cNvPr id="30" name="">
             <a:extLst xmlns:a="http://schemas.openxmlformats.org/drawingml/2006/main">
               <a:ext uri="{FF2B5EF4-FFF2-40B4-BE49-F238E27FC236}">
-                <a16:creationId xmlns:a16="http://schemas.microsoft.com/office/drawing/2014/main" id="{8CC47328-ED3F-4CDB-BDB8-75ED004CB46B}"/>
+                <a16:creationId xmlns:a16="http://schemas.microsoft.com/office/drawing/2014/main" id="{5EEB8A25-8BC5-4D83-A4FD-616E75DA06A4}"/>
               </a:ext>
             </a:extLst>
           </p:cNvPr>
@@ -24833,7 +24831,7 @@
           <p:cNvPr id="31" name="">
             <a:extLst xmlns:a="http://schemas.openxmlformats.org/drawingml/2006/main">
               <a:ext uri="{FF2B5EF4-FFF2-40B4-BE49-F238E27FC236}">
-                <a16:creationId xmlns:a16="http://schemas.microsoft.com/office/drawing/2014/main" id="{5B37FAE0-7D9B-45C5-957C-630B4CAEFFD9}"/>
+                <a16:creationId xmlns:a16="http://schemas.microsoft.com/office/drawing/2014/main" id="{7596ED08-CC84-473C-92B9-23D45F083546}"/>
               </a:ext>
             </a:extLst>
           </p:cNvPr>
@@ -24868,7 +24866,7 @@
           <p:cNvPr id="32" name="">
             <a:extLst xmlns:a="http://schemas.openxmlformats.org/drawingml/2006/main">
               <a:ext uri="{FF2B5EF4-FFF2-40B4-BE49-F238E27FC236}">
-                <a16:creationId xmlns:a16="http://schemas.microsoft.com/office/drawing/2014/main" id="{263B11AB-FAA2-419B-ADE4-49E2393B2B6E}"/>
+                <a16:creationId xmlns:a16="http://schemas.microsoft.com/office/drawing/2014/main" id="{8B745F8D-FA50-4383-B0B1-1E2E1F7AA59A}"/>
               </a:ext>
             </a:extLst>
           </p:cNvPr>
@@ -24932,7 +24930,7 @@
           <p:cNvPr id="33" name="">
             <a:extLst xmlns:a="http://schemas.openxmlformats.org/drawingml/2006/main">
               <a:ext uri="{FF2B5EF4-FFF2-40B4-BE49-F238E27FC236}">
-                <a16:creationId xmlns:a16="http://schemas.microsoft.com/office/drawing/2014/main" id="{E521828A-2E68-4D91-89E3-3127A1CD4E21}"/>
+                <a16:creationId xmlns:a16="http://schemas.microsoft.com/office/drawing/2014/main" id="{EFA13E94-3A0B-4A4B-83B1-B73197D6C339}"/>
               </a:ext>
             </a:extLst>
           </p:cNvPr>
@@ -24996,7 +24994,7 @@
           <p:cNvPr id="34" name="">
             <a:extLst xmlns:a="http://schemas.openxmlformats.org/drawingml/2006/main">
               <a:ext uri="{FF2B5EF4-FFF2-40B4-BE49-F238E27FC236}">
-                <a16:creationId xmlns:a16="http://schemas.microsoft.com/office/drawing/2014/main" id="{ACF19CFC-506C-495A-B405-46BC48B0A803}"/>
+                <a16:creationId xmlns:a16="http://schemas.microsoft.com/office/drawing/2014/main" id="{42506229-DB4F-4D7A-BF8A-A47D5D43F4E2}"/>
               </a:ext>
             </a:extLst>
           </p:cNvPr>
@@ -25058,7 +25056,7 @@
     </p:spTree>
     <p:extLst>
       <p:ext uri="{BB962C8B-B14F-4D97-AF65-F5344CB8AC3E}">
-        <p14:creationId xmlns:p14="http://schemas.microsoft.com/office/powerpoint/2010/main" val="230638691"/>
+        <p14:creationId xmlns:p14="http://schemas.microsoft.com/office/powerpoint/2010/main" val="575217125"/>
       </p:ext>
     </p:extLst>
   </p:cSld>
@@ -25082,7 +25080,7 @@
           <p:cNvPr id="1" name="">
             <a:extLst xmlns:a="http://schemas.openxmlformats.org/drawingml/2006/main">
               <a:ext uri="{FF2B5EF4-FFF2-40B4-BE49-F238E27FC236}">
-                <a16:creationId xmlns:a16="http://schemas.microsoft.com/office/drawing/2014/main" id="{319542E2-B348-4BDE-96C8-359E18E0C29D}"/>
+                <a16:creationId xmlns:a16="http://schemas.microsoft.com/office/drawing/2014/main" id="{49EABB1C-46F3-4A7D-9273-9D9575159AD6}"/>
               </a:ext>
             </a:extLst>
           </p:cNvPr>
@@ -25117,7 +25115,7 @@
           <p:cNvPr id="2" name="">
             <a:extLst xmlns:a="http://schemas.openxmlformats.org/drawingml/2006/main">
               <a:ext uri="{FF2B5EF4-FFF2-40B4-BE49-F238E27FC236}">
-                <a16:creationId xmlns:a16="http://schemas.microsoft.com/office/drawing/2014/main" id="{9035F041-BAEF-4A51-8BAB-BE9463E51DFB}"/>
+                <a16:creationId xmlns:a16="http://schemas.microsoft.com/office/drawing/2014/main" id="{99DE2FDD-DD52-4397-91CC-49C12B8FFF65}"/>
               </a:ext>
             </a:extLst>
           </p:cNvPr>
@@ -25152,7 +25150,7 @@
           <p:cNvPr id="3" name="">
             <a:extLst xmlns:a="http://schemas.openxmlformats.org/drawingml/2006/main">
               <a:ext uri="{FF2B5EF4-FFF2-40B4-BE49-F238E27FC236}">
-                <a16:creationId xmlns:a16="http://schemas.microsoft.com/office/drawing/2014/main" id="{C4C0479C-AFAB-4741-9476-B94BFD90629D}"/>
+                <a16:creationId xmlns:a16="http://schemas.microsoft.com/office/drawing/2014/main" id="{0552D7EA-D907-4E86-86A5-DBB5FA9401F3}"/>
               </a:ext>
             </a:extLst>
           </p:cNvPr>
@@ -25187,7 +25185,7 @@
           <p:cNvPr id="4" name="kicker-07-marker">
             <a:extLst xmlns:a="http://schemas.openxmlformats.org/drawingml/2006/main">
               <a:ext uri="{FF2B5EF4-FFF2-40B4-BE49-F238E27FC236}">
-                <a16:creationId xmlns:a16="http://schemas.microsoft.com/office/drawing/2014/main" id="{13FDC49F-AEDD-4B34-8FBD-41848177A5BF}"/>
+                <a16:creationId xmlns:a16="http://schemas.microsoft.com/office/drawing/2014/main" id="{8391CA91-2DDC-4CB5-A497-44B47328C49F}"/>
               </a:ext>
             </a:extLst>
           </p:cNvPr>
@@ -25222,7 +25220,7 @@
           <p:cNvPr id="5" name="kicker-07-label">
             <a:extLst xmlns:a="http://schemas.openxmlformats.org/drawingml/2006/main">
               <a:ext uri="{FF2B5EF4-FFF2-40B4-BE49-F238E27FC236}">
-                <a16:creationId xmlns:a16="http://schemas.microsoft.com/office/drawing/2014/main" id="{7DC8E591-CAE3-4323-91DD-E70E9CAB0285}"/>
+                <a16:creationId xmlns:a16="http://schemas.microsoft.com/office/drawing/2014/main" id="{5120CD1D-38FC-4568-921D-BD2DCA1D525C}"/>
               </a:ext>
             </a:extLst>
           </p:cNvPr>
@@ -25286,7 +25284,7 @@
           <p:cNvPr id="6" name="">
             <a:extLst xmlns:a="http://schemas.openxmlformats.org/drawingml/2006/main">
               <a:ext uri="{FF2B5EF4-FFF2-40B4-BE49-F238E27FC236}">
-                <a16:creationId xmlns:a16="http://schemas.microsoft.com/office/drawing/2014/main" id="{9DB36722-9802-4A21-A45B-943EA507D6BD}"/>
+                <a16:creationId xmlns:a16="http://schemas.microsoft.com/office/drawing/2014/main" id="{9A3DEEF5-FCEE-4959-87F8-83007C9BEB28}"/>
               </a:ext>
             </a:extLst>
           </p:cNvPr>
@@ -25350,7 +25348,7 @@
           <p:cNvPr id="7" name="">
             <a:extLst xmlns:a="http://schemas.openxmlformats.org/drawingml/2006/main">
               <a:ext uri="{FF2B5EF4-FFF2-40B4-BE49-F238E27FC236}">
-                <a16:creationId xmlns:a16="http://schemas.microsoft.com/office/drawing/2014/main" id="{E704B98C-3859-4097-9F52-3382EF0FC4B0}"/>
+                <a16:creationId xmlns:a16="http://schemas.microsoft.com/office/drawing/2014/main" id="{32125608-B56C-49F5-B817-32274A25A3BE}"/>
               </a:ext>
             </a:extLst>
           </p:cNvPr>
@@ -25414,7 +25412,7 @@
           <p:cNvPr id="8" name="">
             <a:extLst xmlns:a="http://schemas.openxmlformats.org/drawingml/2006/main">
               <a:ext uri="{FF2B5EF4-FFF2-40B4-BE49-F238E27FC236}">
-                <a16:creationId xmlns:a16="http://schemas.microsoft.com/office/drawing/2014/main" id="{5B73AD32-9AB8-4571-9139-EAF74E8A36AD}"/>
+                <a16:creationId xmlns:a16="http://schemas.microsoft.com/office/drawing/2014/main" id="{C7430A5D-1569-4155-9511-865AA0386AF7}"/>
               </a:ext>
             </a:extLst>
           </p:cNvPr>
@@ -25449,7 +25447,7 @@
           <p:cNvPr id="9" name="">
             <a:extLst xmlns:a="http://schemas.openxmlformats.org/drawingml/2006/main">
               <a:ext uri="{FF2B5EF4-FFF2-40B4-BE49-F238E27FC236}">
-                <a16:creationId xmlns:a16="http://schemas.microsoft.com/office/drawing/2014/main" id="{6D44BF5A-3BEF-46BE-8FC0-62ABA2ADFA33}"/>
+                <a16:creationId xmlns:a16="http://schemas.microsoft.com/office/drawing/2014/main" id="{4B95E121-1936-4791-91A8-2AE3F3E2504E}"/>
               </a:ext>
             </a:extLst>
           </p:cNvPr>
@@ -25513,7 +25511,7 @@
           <p:cNvPr id="10" name="">
             <a:extLst xmlns:a="http://schemas.openxmlformats.org/drawingml/2006/main">
               <a:ext uri="{FF2B5EF4-FFF2-40B4-BE49-F238E27FC236}">
-                <a16:creationId xmlns:a16="http://schemas.microsoft.com/office/drawing/2014/main" id="{39C65BF3-A24F-40B4-9D52-0FCA37874263}"/>
+                <a16:creationId xmlns:a16="http://schemas.microsoft.com/office/drawing/2014/main" id="{A8317C5E-FE4D-4ED5-8F6E-6675BAAF699F}"/>
               </a:ext>
             </a:extLst>
           </p:cNvPr>
@@ -25577,7 +25575,7 @@
           <p:cNvPr id="11" name="">
             <a:extLst xmlns:a="http://schemas.openxmlformats.org/drawingml/2006/main">
               <a:ext uri="{FF2B5EF4-FFF2-40B4-BE49-F238E27FC236}">
-                <a16:creationId xmlns:a16="http://schemas.microsoft.com/office/drawing/2014/main" id="{56AA4AD8-A860-4BE0-8D07-E6EF05E8ADE2}"/>
+                <a16:creationId xmlns:a16="http://schemas.microsoft.com/office/drawing/2014/main" id="{615C3297-6FCD-4CF7-8978-C8A33CE4A8A2}"/>
               </a:ext>
             </a:extLst>
           </p:cNvPr>
@@ -25641,7 +25639,7 @@
           <p:cNvPr id="12" name="">
             <a:extLst xmlns:a="http://schemas.openxmlformats.org/drawingml/2006/main">
               <a:ext uri="{FF2B5EF4-FFF2-40B4-BE49-F238E27FC236}">
-                <a16:creationId xmlns:a16="http://schemas.microsoft.com/office/drawing/2014/main" id="{DDE2458B-F9EC-4B2B-8E4F-BA59486E77BD}"/>
+                <a16:creationId xmlns:a16="http://schemas.microsoft.com/office/drawing/2014/main" id="{95E9FE6C-7C84-45FA-9781-2BD956CF2606}"/>
               </a:ext>
             </a:extLst>
           </p:cNvPr>
@@ -25676,7 +25674,7 @@
           <p:cNvPr id="13" name="">
             <a:extLst xmlns:a="http://schemas.openxmlformats.org/drawingml/2006/main">
               <a:ext uri="{FF2B5EF4-FFF2-40B4-BE49-F238E27FC236}">
-                <a16:creationId xmlns:a16="http://schemas.microsoft.com/office/drawing/2014/main" id="{F0694788-6DF3-4808-B367-7E92133250E9}"/>
+                <a16:creationId xmlns:a16="http://schemas.microsoft.com/office/drawing/2014/main" id="{CF891E47-4BC8-40B0-8F23-7A2C0FC657A5}"/>
               </a:ext>
             </a:extLst>
           </p:cNvPr>
@@ -25709,7 +25707,7 @@
           <p:cNvPr id="14" name="">
             <a:extLst xmlns:a="http://schemas.openxmlformats.org/drawingml/2006/main">
               <a:ext uri="{FF2B5EF4-FFF2-40B4-BE49-F238E27FC236}">
-                <a16:creationId xmlns:a16="http://schemas.microsoft.com/office/drawing/2014/main" id="{8150ADAA-69F3-4570-8C65-2B1CEA765F77}"/>
+                <a16:creationId xmlns:a16="http://schemas.microsoft.com/office/drawing/2014/main" id="{56EFD982-93DA-4A30-87D6-88C5159C7F65}"/>
               </a:ext>
             </a:extLst>
           </p:cNvPr>
@@ -25744,7 +25742,7 @@
           <p:cNvPr id="15" name="">
             <a:extLst xmlns:a="http://schemas.openxmlformats.org/drawingml/2006/main">
               <a:ext uri="{FF2B5EF4-FFF2-40B4-BE49-F238E27FC236}">
-                <a16:creationId xmlns:a16="http://schemas.microsoft.com/office/drawing/2014/main" id="{19B4A85F-0EEC-49EC-A9FC-CBEFE8EDDF92}"/>
+                <a16:creationId xmlns:a16="http://schemas.microsoft.com/office/drawing/2014/main" id="{CE4C280A-719B-444D-B5A7-BF9405EEAB70}"/>
               </a:ext>
             </a:extLst>
           </p:cNvPr>
@@ -25808,7 +25806,7 @@
           <p:cNvPr id="16" name="">
             <a:extLst xmlns:a="http://schemas.openxmlformats.org/drawingml/2006/main">
               <a:ext uri="{FF2B5EF4-FFF2-40B4-BE49-F238E27FC236}">
-                <a16:creationId xmlns:a16="http://schemas.microsoft.com/office/drawing/2014/main" id="{A73C78D2-2B67-4310-B819-95E472923D31}"/>
+                <a16:creationId xmlns:a16="http://schemas.microsoft.com/office/drawing/2014/main" id="{403A4894-3759-4A1E-9380-8CF75EC87994}"/>
               </a:ext>
             </a:extLst>
           </p:cNvPr>
@@ -25843,7 +25841,7 @@
           <p:cNvPr id="17" name="">
             <a:extLst xmlns:a="http://schemas.openxmlformats.org/drawingml/2006/main">
               <a:ext uri="{FF2B5EF4-FFF2-40B4-BE49-F238E27FC236}">
-                <a16:creationId xmlns:a16="http://schemas.microsoft.com/office/drawing/2014/main" id="{BEB1432B-D2AB-4351-8080-C8C07B2703F0}"/>
+                <a16:creationId xmlns:a16="http://schemas.microsoft.com/office/drawing/2014/main" id="{BE951862-19E0-4BDF-85F6-A9976C3306F3}"/>
               </a:ext>
             </a:extLst>
           </p:cNvPr>
@@ -25907,7 +25905,7 @@
           <p:cNvPr id="18" name="">
             <a:extLst xmlns:a="http://schemas.openxmlformats.org/drawingml/2006/main">
               <a:ext uri="{FF2B5EF4-FFF2-40B4-BE49-F238E27FC236}">
-                <a16:creationId xmlns:a16="http://schemas.microsoft.com/office/drawing/2014/main" id="{4E1D5E0C-83AA-4E3A-9CC5-829A7356A4AB}"/>
+                <a16:creationId xmlns:a16="http://schemas.microsoft.com/office/drawing/2014/main" id="{EF95E9A5-A3E4-48FE-B600-4CDC60D297C7}"/>
               </a:ext>
             </a:extLst>
           </p:cNvPr>
@@ -25942,7 +25940,7 @@
           <p:cNvPr id="19" name="">
             <a:extLst xmlns:a="http://schemas.openxmlformats.org/drawingml/2006/main">
               <a:ext uri="{FF2B5EF4-FFF2-40B4-BE49-F238E27FC236}">
-                <a16:creationId xmlns:a16="http://schemas.microsoft.com/office/drawing/2014/main" id="{2F63DEE8-D0AA-4793-A2DE-FD90A0BB9E05}"/>
+                <a16:creationId xmlns:a16="http://schemas.microsoft.com/office/drawing/2014/main" id="{2E634BAA-4A2B-4114-8F25-908DEA41B93E}"/>
               </a:ext>
             </a:extLst>
           </p:cNvPr>
@@ -26006,7 +26004,7 @@
           <p:cNvPr id="20" name="">
             <a:extLst xmlns:a="http://schemas.openxmlformats.org/drawingml/2006/main">
               <a:ext uri="{FF2B5EF4-FFF2-40B4-BE49-F238E27FC236}">
-                <a16:creationId xmlns:a16="http://schemas.microsoft.com/office/drawing/2014/main" id="{69E9EC29-7A6D-46CB-8156-D045B3C10632}"/>
+                <a16:creationId xmlns:a16="http://schemas.microsoft.com/office/drawing/2014/main" id="{CA3F5013-88B5-499B-BDC3-485262ADCCF1}"/>
               </a:ext>
             </a:extLst>
           </p:cNvPr>
@@ -26041,7 +26039,7 @@
           <p:cNvPr id="21" name="">
             <a:extLst xmlns:a="http://schemas.openxmlformats.org/drawingml/2006/main">
               <a:ext uri="{FF2B5EF4-FFF2-40B4-BE49-F238E27FC236}">
-                <a16:creationId xmlns:a16="http://schemas.microsoft.com/office/drawing/2014/main" id="{98C70EAB-A94C-4461-A3DC-C6F20A299E74}"/>
+                <a16:creationId xmlns:a16="http://schemas.microsoft.com/office/drawing/2014/main" id="{6C73E6C9-C496-44F4-B4DF-A383FC48F33D}"/>
               </a:ext>
             </a:extLst>
           </p:cNvPr>
@@ -26105,7 +26103,7 @@
           <p:cNvPr id="22" name="">
             <a:extLst xmlns:a="http://schemas.openxmlformats.org/drawingml/2006/main">
               <a:ext uri="{FF2B5EF4-FFF2-40B4-BE49-F238E27FC236}">
-                <a16:creationId xmlns:a16="http://schemas.microsoft.com/office/drawing/2014/main" id="{01EF4363-7A76-4258-9CF3-4DB6BE5FE37B}"/>
+                <a16:creationId xmlns:a16="http://schemas.microsoft.com/office/drawing/2014/main" id="{665774CF-2603-420E-9787-A4957B6BEFA9}"/>
               </a:ext>
             </a:extLst>
           </p:cNvPr>
@@ -26140,7 +26138,7 @@
           <p:cNvPr id="23" name="">
             <a:extLst xmlns:a="http://schemas.openxmlformats.org/drawingml/2006/main">
               <a:ext uri="{FF2B5EF4-FFF2-40B4-BE49-F238E27FC236}">
-                <a16:creationId xmlns:a16="http://schemas.microsoft.com/office/drawing/2014/main" id="{7B0EBDE9-AF56-4353-8C0A-CAB535C8F46B}"/>
+                <a16:creationId xmlns:a16="http://schemas.microsoft.com/office/drawing/2014/main" id="{BA68602F-7437-4B44-8AFB-468531B7E368}"/>
               </a:ext>
             </a:extLst>
           </p:cNvPr>
@@ -26204,7 +26202,7 @@
           <p:cNvPr id="24" name="">
             <a:extLst xmlns:a="http://schemas.openxmlformats.org/drawingml/2006/main">
               <a:ext uri="{FF2B5EF4-FFF2-40B4-BE49-F238E27FC236}">
-                <a16:creationId xmlns:a16="http://schemas.microsoft.com/office/drawing/2014/main" id="{2A6317DD-433B-4910-89E8-66C207722CF3}"/>
+                <a16:creationId xmlns:a16="http://schemas.microsoft.com/office/drawing/2014/main" id="{DCA4D723-CB4F-4CDD-9E2C-197D3E35EB62}"/>
               </a:ext>
             </a:extLst>
           </p:cNvPr>
@@ -26239,7 +26237,7 @@
           <p:cNvPr id="25" name="">
             <a:extLst xmlns:a="http://schemas.openxmlformats.org/drawingml/2006/main">
               <a:ext uri="{FF2B5EF4-FFF2-40B4-BE49-F238E27FC236}">
-                <a16:creationId xmlns:a16="http://schemas.microsoft.com/office/drawing/2014/main" id="{5E6B469C-DEB3-4DF3-B75B-705C67B4650F}"/>
+                <a16:creationId xmlns:a16="http://schemas.microsoft.com/office/drawing/2014/main" id="{CE5BE8D1-ADB3-45FD-A900-40B430CFC50D}"/>
               </a:ext>
             </a:extLst>
           </p:cNvPr>
@@ -26303,7 +26301,7 @@
           <p:cNvPr id="26" name="">
             <a:extLst xmlns:a="http://schemas.openxmlformats.org/drawingml/2006/main">
               <a:ext uri="{FF2B5EF4-FFF2-40B4-BE49-F238E27FC236}">
-                <a16:creationId xmlns:a16="http://schemas.microsoft.com/office/drawing/2014/main" id="{39AA9CCF-238C-43EB-9EE9-2923590F98AF}"/>
+                <a16:creationId xmlns:a16="http://schemas.microsoft.com/office/drawing/2014/main" id="{C216FC48-FF75-4FD9-97C4-D3B040B08728}"/>
               </a:ext>
             </a:extLst>
           </p:cNvPr>
@@ -26367,7 +26365,7 @@
           <p:cNvPr id="27" name="">
             <a:extLst xmlns:a="http://schemas.openxmlformats.org/drawingml/2006/main">
               <a:ext uri="{FF2B5EF4-FFF2-40B4-BE49-F238E27FC236}">
-                <a16:creationId xmlns:a16="http://schemas.microsoft.com/office/drawing/2014/main" id="{FC7C59D2-0660-42F5-B4CC-43EC383F1C48}"/>
+                <a16:creationId xmlns:a16="http://schemas.microsoft.com/office/drawing/2014/main" id="{FC57B8E4-5374-4B51-8DA6-BACB2F93EE2C}"/>
               </a:ext>
             </a:extLst>
           </p:cNvPr>
@@ -26431,7 +26429,7 @@
           <p:cNvPr id="28" name="">
             <a:extLst xmlns:a="http://schemas.openxmlformats.org/drawingml/2006/main">
               <a:ext uri="{FF2B5EF4-FFF2-40B4-BE49-F238E27FC236}">
-                <a16:creationId xmlns:a16="http://schemas.microsoft.com/office/drawing/2014/main" id="{C700AA3E-6438-4408-ABDD-F22231E3655C}"/>
+                <a16:creationId xmlns:a16="http://schemas.microsoft.com/office/drawing/2014/main" id="{33B9C3D3-32D1-487B-B08A-E8568FB0414D}"/>
               </a:ext>
             </a:extLst>
           </p:cNvPr>
@@ -26466,7 +26464,7 @@
           <p:cNvPr id="29" name="">
             <a:extLst xmlns:a="http://schemas.openxmlformats.org/drawingml/2006/main">
               <a:ext uri="{FF2B5EF4-FFF2-40B4-BE49-F238E27FC236}">
-                <a16:creationId xmlns:a16="http://schemas.microsoft.com/office/drawing/2014/main" id="{DEF8A205-2683-4041-AC8C-D44E2B0726AB}"/>
+                <a16:creationId xmlns:a16="http://schemas.microsoft.com/office/drawing/2014/main" id="{F2E615F6-EBF4-4510-8497-97496719E94A}"/>
               </a:ext>
             </a:extLst>
           </p:cNvPr>
@@ -26501,7 +26499,7 @@
           <p:cNvPr id="30" name="">
             <a:extLst xmlns:a="http://schemas.openxmlformats.org/drawingml/2006/main">
               <a:ext uri="{FF2B5EF4-FFF2-40B4-BE49-F238E27FC236}">
-                <a16:creationId xmlns:a16="http://schemas.microsoft.com/office/drawing/2014/main" id="{81816A50-6A2A-43D1-AE14-931AA03D1221}"/>
+                <a16:creationId xmlns:a16="http://schemas.microsoft.com/office/drawing/2014/main" id="{7A1AF1AC-0DF1-48A3-B98E-DC2357877E44}"/>
               </a:ext>
             </a:extLst>
           </p:cNvPr>
@@ -26536,7 +26534,7 @@
           <p:cNvPr id="31" name="kicker-07-marker">
             <a:extLst xmlns:a="http://schemas.openxmlformats.org/drawingml/2006/main">
               <a:ext uri="{FF2B5EF4-FFF2-40B4-BE49-F238E27FC236}">
-                <a16:creationId xmlns:a16="http://schemas.microsoft.com/office/drawing/2014/main" id="{D05929ED-308C-4B93-9C1C-A046FF6D1F8D}"/>
+                <a16:creationId xmlns:a16="http://schemas.microsoft.com/office/drawing/2014/main" id="{198BC609-237A-4A50-93C3-8DEBA57E0C4D}"/>
               </a:ext>
             </a:extLst>
           </p:cNvPr>
@@ -26571,7 +26569,7 @@
           <p:cNvPr id="32" name="kicker-07-label">
             <a:extLst xmlns:a="http://schemas.openxmlformats.org/drawingml/2006/main">
               <a:ext uri="{FF2B5EF4-FFF2-40B4-BE49-F238E27FC236}">
-                <a16:creationId xmlns:a16="http://schemas.microsoft.com/office/drawing/2014/main" id="{A3641B1A-58C8-4F23-A18E-7B914D1F594D}"/>
+                <a16:creationId xmlns:a16="http://schemas.microsoft.com/office/drawing/2014/main" id="{D3806634-597E-499D-846B-A8A827684F3A}"/>
               </a:ext>
             </a:extLst>
           </p:cNvPr>
@@ -26635,7 +26633,7 @@
           <p:cNvPr id="33" name="">
             <a:extLst xmlns:a="http://schemas.openxmlformats.org/drawingml/2006/main">
               <a:ext uri="{FF2B5EF4-FFF2-40B4-BE49-F238E27FC236}">
-                <a16:creationId xmlns:a16="http://schemas.microsoft.com/office/drawing/2014/main" id="{24109DA3-D692-497E-AAB1-D74728D1799E}"/>
+                <a16:creationId xmlns:a16="http://schemas.microsoft.com/office/drawing/2014/main" id="{783310C4-FF2C-4EF0-887B-13032A8026BE}"/>
               </a:ext>
             </a:extLst>
           </p:cNvPr>
@@ -26699,7 +26697,7 @@
           <p:cNvPr id="34" name="">
             <a:extLst xmlns:a="http://schemas.openxmlformats.org/drawingml/2006/main">
               <a:ext uri="{FF2B5EF4-FFF2-40B4-BE49-F238E27FC236}">
-                <a16:creationId xmlns:a16="http://schemas.microsoft.com/office/drawing/2014/main" id="{B70AB0D2-6F5D-4A4F-8499-9E528CF55DBB}"/>
+                <a16:creationId xmlns:a16="http://schemas.microsoft.com/office/drawing/2014/main" id="{43B99F04-F246-4D50-B949-8485B0EB6CD8}"/>
               </a:ext>
             </a:extLst>
           </p:cNvPr>
@@ -26763,7 +26761,7 @@
           <p:cNvPr id="35" name="">
             <a:extLst xmlns:a="http://schemas.openxmlformats.org/drawingml/2006/main">
               <a:ext uri="{FF2B5EF4-FFF2-40B4-BE49-F238E27FC236}">
-                <a16:creationId xmlns:a16="http://schemas.microsoft.com/office/drawing/2014/main" id="{B825F208-D52D-4241-BCE7-49E30E40B073}"/>
+                <a16:creationId xmlns:a16="http://schemas.microsoft.com/office/drawing/2014/main" id="{447B95E0-80B9-4086-8535-CD72A36956A8}"/>
               </a:ext>
             </a:extLst>
           </p:cNvPr>
@@ -26798,7 +26796,7 @@
           <p:cNvPr id="36" name="">
             <a:extLst xmlns:a="http://schemas.openxmlformats.org/drawingml/2006/main">
               <a:ext uri="{FF2B5EF4-FFF2-40B4-BE49-F238E27FC236}">
-                <a16:creationId xmlns:a16="http://schemas.microsoft.com/office/drawing/2014/main" id="{57884AE3-1801-4C1A-B4BD-637F50528F4F}"/>
+                <a16:creationId xmlns:a16="http://schemas.microsoft.com/office/drawing/2014/main" id="{8AFF7F6A-7120-4BF7-A2E3-726B36B2FFC1}"/>
               </a:ext>
             </a:extLst>
           </p:cNvPr>
@@ -26833,7 +26831,7 @@
           <p:cNvPr id="37" name="">
             <a:extLst xmlns:a="http://schemas.openxmlformats.org/drawingml/2006/main">
               <a:ext uri="{FF2B5EF4-FFF2-40B4-BE49-F238E27FC236}">
-                <a16:creationId xmlns:a16="http://schemas.microsoft.com/office/drawing/2014/main" id="{7BC99E4B-AB83-4DA4-9AF2-477915563D50}"/>
+                <a16:creationId xmlns:a16="http://schemas.microsoft.com/office/drawing/2014/main" id="{C9618DE5-A351-4B23-BF84-2DC09AC54F90}"/>
               </a:ext>
             </a:extLst>
           </p:cNvPr>
@@ -26868,7 +26866,7 @@
           <p:cNvPr id="38" name="">
             <a:extLst xmlns:a="http://schemas.openxmlformats.org/drawingml/2006/main">
               <a:ext uri="{FF2B5EF4-FFF2-40B4-BE49-F238E27FC236}">
-                <a16:creationId xmlns:a16="http://schemas.microsoft.com/office/drawing/2014/main" id="{E97A0664-ABDB-45FB-BAF1-6D7D47DF665A}"/>
+                <a16:creationId xmlns:a16="http://schemas.microsoft.com/office/drawing/2014/main" id="{ED61F078-7128-45B3-8D4F-0B41550D9B27}"/>
               </a:ext>
             </a:extLst>
           </p:cNvPr>
@@ -26903,7 +26901,7 @@
           <p:cNvPr id="39" name="">
             <a:extLst xmlns:a="http://schemas.openxmlformats.org/drawingml/2006/main">
               <a:ext uri="{FF2B5EF4-FFF2-40B4-BE49-F238E27FC236}">
-                <a16:creationId xmlns:a16="http://schemas.microsoft.com/office/drawing/2014/main" id="{2135D3DD-3E00-4586-A37A-017F8972AC30}"/>
+                <a16:creationId xmlns:a16="http://schemas.microsoft.com/office/drawing/2014/main" id="{3EAF83B6-F283-44AD-BBA1-A42D6AD15978}"/>
               </a:ext>
             </a:extLst>
           </p:cNvPr>
@@ -26967,7 +26965,7 @@
           <p:cNvPr id="40" name="">
             <a:extLst xmlns:a="http://schemas.openxmlformats.org/drawingml/2006/main">
               <a:ext uri="{FF2B5EF4-FFF2-40B4-BE49-F238E27FC236}">
-                <a16:creationId xmlns:a16="http://schemas.microsoft.com/office/drawing/2014/main" id="{7AECF894-746F-4D46-B16D-5F1797BDC576}"/>
+                <a16:creationId xmlns:a16="http://schemas.microsoft.com/office/drawing/2014/main" id="{3B781723-F13A-46CC-8F50-318383C16DCA}"/>
               </a:ext>
             </a:extLst>
           </p:cNvPr>
@@ -27031,7 +27029,7 @@
           <p:cNvPr id="41" name="">
             <a:extLst xmlns:a="http://schemas.openxmlformats.org/drawingml/2006/main">
               <a:ext uri="{FF2B5EF4-FFF2-40B4-BE49-F238E27FC236}">
-                <a16:creationId xmlns:a16="http://schemas.microsoft.com/office/drawing/2014/main" id="{1D0EFAFA-7556-4DAE-B80C-CCB305A63222}"/>
+                <a16:creationId xmlns:a16="http://schemas.microsoft.com/office/drawing/2014/main" id="{ADB5644A-B667-454F-AC6C-765C2335A106}"/>
               </a:ext>
             </a:extLst>
           </p:cNvPr>
@@ -27093,7 +27091,7 @@
     </p:spTree>
     <p:extLst>
       <p:ext uri="{BB962C8B-B14F-4D97-AF65-F5344CB8AC3E}">
-        <p14:creationId xmlns:p14="http://schemas.microsoft.com/office/powerpoint/2010/main" val="1830998663"/>
+        <p14:creationId xmlns:p14="http://schemas.microsoft.com/office/powerpoint/2010/main" val="1599240151"/>
       </p:ext>
     </p:extLst>
   </p:cSld>
@@ -27117,7 +27115,7 @@
           <p:cNvPr id="1" name="">
             <a:extLst xmlns:a="http://schemas.openxmlformats.org/drawingml/2006/main">
               <a:ext uri="{FF2B5EF4-FFF2-40B4-BE49-F238E27FC236}">
-                <a16:creationId xmlns:a16="http://schemas.microsoft.com/office/drawing/2014/main" id="{79560768-B79E-4FFE-B443-04521016E96D}"/>
+                <a16:creationId xmlns:a16="http://schemas.microsoft.com/office/drawing/2014/main" id="{9AB1E9A1-127B-44AE-BB0C-10DEC2536D66}"/>
               </a:ext>
             </a:extLst>
           </p:cNvPr>
@@ -27152,7 +27150,7 @@
           <p:cNvPr id="2" name="">
             <a:extLst xmlns:a="http://schemas.openxmlformats.org/drawingml/2006/main">
               <a:ext uri="{FF2B5EF4-FFF2-40B4-BE49-F238E27FC236}">
-                <a16:creationId xmlns:a16="http://schemas.microsoft.com/office/drawing/2014/main" id="{8D3C1101-F32B-4F15-8FD1-2704634A81A7}"/>
+                <a16:creationId xmlns:a16="http://schemas.microsoft.com/office/drawing/2014/main" id="{D3C5D29B-916E-436F-B6BF-F381843C4EB9}"/>
               </a:ext>
             </a:extLst>
           </p:cNvPr>
@@ -27187,7 +27185,7 @@
           <p:cNvPr id="3" name="">
             <a:extLst xmlns:a="http://schemas.openxmlformats.org/drawingml/2006/main">
               <a:ext uri="{FF2B5EF4-FFF2-40B4-BE49-F238E27FC236}">
-                <a16:creationId xmlns:a16="http://schemas.microsoft.com/office/drawing/2014/main" id="{074CC879-7FCD-43EE-A4D3-14F509822E43}"/>
+                <a16:creationId xmlns:a16="http://schemas.microsoft.com/office/drawing/2014/main" id="{C36ECF01-96A0-4CBA-9CB5-BBFE68E882A2}"/>
               </a:ext>
             </a:extLst>
           </p:cNvPr>
@@ -27222,7 +27220,7 @@
           <p:cNvPr id="4" name="kicker-07-marker">
             <a:extLst xmlns:a="http://schemas.openxmlformats.org/drawingml/2006/main">
               <a:ext uri="{FF2B5EF4-FFF2-40B4-BE49-F238E27FC236}">
-                <a16:creationId xmlns:a16="http://schemas.microsoft.com/office/drawing/2014/main" id="{E25AD52A-C5E7-4B62-8AB3-C252268B16E3}"/>
+                <a16:creationId xmlns:a16="http://schemas.microsoft.com/office/drawing/2014/main" id="{EFD1AA61-4C7E-4F28-8318-81A6BB2E44C5}"/>
               </a:ext>
             </a:extLst>
           </p:cNvPr>
@@ -27257,7 +27255,7 @@
           <p:cNvPr id="5" name="kicker-07-label">
             <a:extLst xmlns:a="http://schemas.openxmlformats.org/drawingml/2006/main">
               <a:ext uri="{FF2B5EF4-FFF2-40B4-BE49-F238E27FC236}">
-                <a16:creationId xmlns:a16="http://schemas.microsoft.com/office/drawing/2014/main" id="{A3AFB071-0697-4F99-A070-D2F5E2B277AD}"/>
+                <a16:creationId xmlns:a16="http://schemas.microsoft.com/office/drawing/2014/main" id="{3CD24FA2-A032-457B-B79B-14D0566B9071}"/>
               </a:ext>
             </a:extLst>
           </p:cNvPr>
@@ -27321,7 +27319,7 @@
           <p:cNvPr id="6" name="">
             <a:extLst xmlns:a="http://schemas.openxmlformats.org/drawingml/2006/main">
               <a:ext uri="{FF2B5EF4-FFF2-40B4-BE49-F238E27FC236}">
-                <a16:creationId xmlns:a16="http://schemas.microsoft.com/office/drawing/2014/main" id="{8B5EC04A-1C9D-4840-B61E-B8EEA417D2F2}"/>
+                <a16:creationId xmlns:a16="http://schemas.microsoft.com/office/drawing/2014/main" id="{10F9D96E-9817-400A-8AC6-F35CD6AEC898}"/>
               </a:ext>
             </a:extLst>
           </p:cNvPr>
@@ -27385,7 +27383,7 @@
           <p:cNvPr id="7" name="">
             <a:extLst xmlns:a="http://schemas.openxmlformats.org/drawingml/2006/main">
               <a:ext uri="{FF2B5EF4-FFF2-40B4-BE49-F238E27FC236}">
-                <a16:creationId xmlns:a16="http://schemas.microsoft.com/office/drawing/2014/main" id="{9EC6558A-DDCA-4EFA-87AE-D1D5697C08ED}"/>
+                <a16:creationId xmlns:a16="http://schemas.microsoft.com/office/drawing/2014/main" id="{E65D4404-F766-458F-8CC2-CD2339D6C963}"/>
               </a:ext>
             </a:extLst>
           </p:cNvPr>
@@ -27449,7 +27447,7 @@
           <p:cNvPr id="8" name="">
             <a:extLst xmlns:a="http://schemas.openxmlformats.org/drawingml/2006/main">
               <a:ext uri="{FF2B5EF4-FFF2-40B4-BE49-F238E27FC236}">
-                <a16:creationId xmlns:a16="http://schemas.microsoft.com/office/drawing/2014/main" id="{079629B4-7B65-408D-8FCB-C162FB904233}"/>
+                <a16:creationId xmlns:a16="http://schemas.microsoft.com/office/drawing/2014/main" id="{97E85D02-6B72-45B3-BDE1-EDC5CFC7A090}"/>
               </a:ext>
             </a:extLst>
           </p:cNvPr>
@@ -27484,7 +27482,7 @@
           <p:cNvPr id="9" name="">
             <a:extLst xmlns:a="http://schemas.openxmlformats.org/drawingml/2006/main">
               <a:ext uri="{FF2B5EF4-FFF2-40B4-BE49-F238E27FC236}">
-                <a16:creationId xmlns:a16="http://schemas.microsoft.com/office/drawing/2014/main" id="{262988DC-9A30-4752-AF9C-C026B7A99F10}"/>
+                <a16:creationId xmlns:a16="http://schemas.microsoft.com/office/drawing/2014/main" id="{08033893-53F3-406B-8C0B-39AC8B61B28B}"/>
               </a:ext>
             </a:extLst>
           </p:cNvPr>
@@ -27548,7 +27546,7 @@
           <p:cNvPr id="10" name="">
             <a:extLst xmlns:a="http://schemas.openxmlformats.org/drawingml/2006/main">
               <a:ext uri="{FF2B5EF4-FFF2-40B4-BE49-F238E27FC236}">
-                <a16:creationId xmlns:a16="http://schemas.microsoft.com/office/drawing/2014/main" id="{E3AC872E-E42C-4D84-8D2D-14D26B4900F0}"/>
+                <a16:creationId xmlns:a16="http://schemas.microsoft.com/office/drawing/2014/main" id="{E9789350-4D1A-4464-B5DC-51EBF2EBDF9C}"/>
               </a:ext>
             </a:extLst>
           </p:cNvPr>
@@ -27612,7 +27610,7 @@
           <p:cNvPr id="11" name="">
             <a:extLst xmlns:a="http://schemas.openxmlformats.org/drawingml/2006/main">
               <a:ext uri="{FF2B5EF4-FFF2-40B4-BE49-F238E27FC236}">
-                <a16:creationId xmlns:a16="http://schemas.microsoft.com/office/drawing/2014/main" id="{B7466BC1-4754-4510-B88A-84AA2AEB504E}"/>
+                <a16:creationId xmlns:a16="http://schemas.microsoft.com/office/drawing/2014/main" id="{25CFB5CE-133F-42A8-B3AF-B80C9206632F}"/>
               </a:ext>
             </a:extLst>
           </p:cNvPr>
@@ -27676,7 +27674,7 @@
           <p:cNvPr id="12" name="">
             <a:extLst xmlns:a="http://schemas.openxmlformats.org/drawingml/2006/main">
               <a:ext uri="{FF2B5EF4-FFF2-40B4-BE49-F238E27FC236}">
-                <a16:creationId xmlns:a16="http://schemas.microsoft.com/office/drawing/2014/main" id="{2111B32A-06C0-4B64-9469-C4CAE1027700}"/>
+                <a16:creationId xmlns:a16="http://schemas.microsoft.com/office/drawing/2014/main" id="{7B9F5358-C283-44C8-8FC1-EB44AC0D838C}"/>
               </a:ext>
             </a:extLst>
           </p:cNvPr>
@@ -27709,7 +27707,7 @@
           <p:cNvPr id="13" name="">
             <a:extLst xmlns:a="http://schemas.openxmlformats.org/drawingml/2006/main">
               <a:ext uri="{FF2B5EF4-FFF2-40B4-BE49-F238E27FC236}">
-                <a16:creationId xmlns:a16="http://schemas.microsoft.com/office/drawing/2014/main" id="{4BFAECAA-297C-4337-B238-F74A5CC8963A}"/>
+                <a16:creationId xmlns:a16="http://schemas.microsoft.com/office/drawing/2014/main" id="{015E219E-B1DA-43DB-A252-705A489C2EAF}"/>
               </a:ext>
             </a:extLst>
           </p:cNvPr>
@@ -27773,7 +27771,7 @@
           <p:cNvPr id="14" name="">
             <a:extLst xmlns:a="http://schemas.openxmlformats.org/drawingml/2006/main">
               <a:ext uri="{FF2B5EF4-FFF2-40B4-BE49-F238E27FC236}">
-                <a16:creationId xmlns:a16="http://schemas.microsoft.com/office/drawing/2014/main" id="{D3498B9E-B5A6-4F0B-8E60-E3C1A96A4749}"/>
+                <a16:creationId xmlns:a16="http://schemas.microsoft.com/office/drawing/2014/main" id="{B8D4B12D-DC45-4D07-B3E6-C64863954B44}"/>
               </a:ext>
             </a:extLst>
           </p:cNvPr>
@@ -27808,7 +27806,7 @@
           <p:cNvPr id="15" name="">
             <a:extLst xmlns:a="http://schemas.openxmlformats.org/drawingml/2006/main">
               <a:ext uri="{FF2B5EF4-FFF2-40B4-BE49-F238E27FC236}">
-                <a16:creationId xmlns:a16="http://schemas.microsoft.com/office/drawing/2014/main" id="{862C8C88-1A95-400D-BBF6-CC7A6AA8D5A8}"/>
+                <a16:creationId xmlns:a16="http://schemas.microsoft.com/office/drawing/2014/main" id="{BB0F6897-C4A0-4FBB-8BD6-C8FDF7508E6D}"/>
               </a:ext>
             </a:extLst>
           </p:cNvPr>
@@ -27862,7 +27860,7 @@
                 <a:ea typeface="Aptos"/>
                 <a:cs typeface="Aptos"/>
               </a:rPr>
-              <a:t>PROMPT STACK</a:t>
+              <a:t>QUESTION STACK</a:t>
             </a:r>
           </a:p>
         </p:txBody>
@@ -27872,7 +27870,7 @@
           <p:cNvPr id="16" name="">
             <a:extLst xmlns:a="http://schemas.openxmlformats.org/drawingml/2006/main">
               <a:ext uri="{FF2B5EF4-FFF2-40B4-BE49-F238E27FC236}">
-                <a16:creationId xmlns:a16="http://schemas.microsoft.com/office/drawing/2014/main" id="{9AB149AF-7A60-4983-AE69-EAEECE97C486}"/>
+                <a16:creationId xmlns:a16="http://schemas.microsoft.com/office/drawing/2014/main" id="{C9E7CA4D-AA8B-4A29-B04A-F6FFA87DD0D0}"/>
               </a:ext>
             </a:extLst>
           </p:cNvPr>
@@ -27907,7 +27905,7 @@
           <p:cNvPr id="17" name="">
             <a:extLst xmlns:a="http://schemas.openxmlformats.org/drawingml/2006/main">
               <a:ext uri="{FF2B5EF4-FFF2-40B4-BE49-F238E27FC236}">
-                <a16:creationId xmlns:a16="http://schemas.microsoft.com/office/drawing/2014/main" id="{16375BE6-D826-40C0-8D2B-3A3C1A7C320B}"/>
+                <a16:creationId xmlns:a16="http://schemas.microsoft.com/office/drawing/2014/main" id="{8B9083D6-8772-4F4F-BA80-3F51A1A4DACB}"/>
               </a:ext>
             </a:extLst>
           </p:cNvPr>
@@ -27971,7 +27969,7 @@
           <p:cNvPr id="18" name="">
             <a:extLst xmlns:a="http://schemas.openxmlformats.org/drawingml/2006/main">
               <a:ext uri="{FF2B5EF4-FFF2-40B4-BE49-F238E27FC236}">
-                <a16:creationId xmlns:a16="http://schemas.microsoft.com/office/drawing/2014/main" id="{35D5914A-197B-4D92-AE91-A35D8929E60F}"/>
+                <a16:creationId xmlns:a16="http://schemas.microsoft.com/office/drawing/2014/main" id="{BA38E061-0D4E-4C83-B8F5-E276C2DBB171}"/>
               </a:ext>
             </a:extLst>
           </p:cNvPr>
@@ -28006,7 +28004,7 @@
           <p:cNvPr id="19" name="">
             <a:extLst xmlns:a="http://schemas.openxmlformats.org/drawingml/2006/main">
               <a:ext uri="{FF2B5EF4-FFF2-40B4-BE49-F238E27FC236}">
-                <a16:creationId xmlns:a16="http://schemas.microsoft.com/office/drawing/2014/main" id="{34259527-D036-4140-8B82-55B049289548}"/>
+                <a16:creationId xmlns:a16="http://schemas.microsoft.com/office/drawing/2014/main" id="{97D54864-70F5-4711-B4BF-0DC3D60BFDD7}"/>
               </a:ext>
             </a:extLst>
           </p:cNvPr>
@@ -28070,7 +28068,7 @@
           <p:cNvPr id="20" name="">
             <a:extLst xmlns:a="http://schemas.openxmlformats.org/drawingml/2006/main">
               <a:ext uri="{FF2B5EF4-FFF2-40B4-BE49-F238E27FC236}">
-                <a16:creationId xmlns:a16="http://schemas.microsoft.com/office/drawing/2014/main" id="{C8A61229-C56B-4C51-8BDA-7C3294D4D347}"/>
+                <a16:creationId xmlns:a16="http://schemas.microsoft.com/office/drawing/2014/main" id="{F8A8C97B-B41F-4FC8-AE4E-3EE32C2FF1D9}"/>
               </a:ext>
             </a:extLst>
           </p:cNvPr>
@@ -28105,7 +28103,7 @@
           <p:cNvPr id="21" name="">
             <a:extLst xmlns:a="http://schemas.openxmlformats.org/drawingml/2006/main">
               <a:ext uri="{FF2B5EF4-FFF2-40B4-BE49-F238E27FC236}">
-                <a16:creationId xmlns:a16="http://schemas.microsoft.com/office/drawing/2014/main" id="{33CBBB90-9B57-4822-9AA2-75B3F791BD87}"/>
+                <a16:creationId xmlns:a16="http://schemas.microsoft.com/office/drawing/2014/main" id="{696F60FE-4A5D-4062-B042-8455C9CF4F91}"/>
               </a:ext>
             </a:extLst>
           </p:cNvPr>
@@ -28169,7 +28167,7 @@
           <p:cNvPr id="22" name="">
             <a:extLst xmlns:a="http://schemas.openxmlformats.org/drawingml/2006/main">
               <a:ext uri="{FF2B5EF4-FFF2-40B4-BE49-F238E27FC236}">
-                <a16:creationId xmlns:a16="http://schemas.microsoft.com/office/drawing/2014/main" id="{F290DCFF-916C-48BE-9B06-529AC470F886}"/>
+                <a16:creationId xmlns:a16="http://schemas.microsoft.com/office/drawing/2014/main" id="{56D292B5-B87B-48F2-82A0-E1ACAB5A8EB0}"/>
               </a:ext>
             </a:extLst>
           </p:cNvPr>
@@ -28204,7 +28202,7 @@
           <p:cNvPr id="23" name="">
             <a:extLst xmlns:a="http://schemas.openxmlformats.org/drawingml/2006/main">
               <a:ext uri="{FF2B5EF4-FFF2-40B4-BE49-F238E27FC236}">
-                <a16:creationId xmlns:a16="http://schemas.microsoft.com/office/drawing/2014/main" id="{5D6842A6-21B2-4263-B54E-A02543187BF4}"/>
+                <a16:creationId xmlns:a16="http://schemas.microsoft.com/office/drawing/2014/main" id="{68514841-9E7D-4A4D-B435-D9DC34188DC1}"/>
               </a:ext>
             </a:extLst>
           </p:cNvPr>
@@ -28268,7 +28266,7 @@
           <p:cNvPr id="24" name="">
             <a:extLst xmlns:a="http://schemas.openxmlformats.org/drawingml/2006/main">
               <a:ext uri="{FF2B5EF4-FFF2-40B4-BE49-F238E27FC236}">
-                <a16:creationId xmlns:a16="http://schemas.microsoft.com/office/drawing/2014/main" id="{10C1AD59-5033-4F6E-A7B8-78C2953A970B}"/>
+                <a16:creationId xmlns:a16="http://schemas.microsoft.com/office/drawing/2014/main" id="{8D0026C0-2DCB-4508-BB65-88822CDCB64B}"/>
               </a:ext>
             </a:extLst>
           </p:cNvPr>
@@ -28303,7 +28301,7 @@
           <p:cNvPr id="25" name="">
             <a:extLst xmlns:a="http://schemas.openxmlformats.org/drawingml/2006/main">
               <a:ext uri="{FF2B5EF4-FFF2-40B4-BE49-F238E27FC236}">
-                <a16:creationId xmlns:a16="http://schemas.microsoft.com/office/drawing/2014/main" id="{24F0FC17-FFB9-4D86-8E06-C5200F13878A}"/>
+                <a16:creationId xmlns:a16="http://schemas.microsoft.com/office/drawing/2014/main" id="{CA370F30-7097-4DFE-AF21-494F9D42DC3C}"/>
               </a:ext>
             </a:extLst>
           </p:cNvPr>
@@ -28367,7 +28365,7 @@
           <p:cNvPr id="26" name="">
             <a:extLst xmlns:a="http://schemas.openxmlformats.org/drawingml/2006/main">
               <a:ext uri="{FF2B5EF4-FFF2-40B4-BE49-F238E27FC236}">
-                <a16:creationId xmlns:a16="http://schemas.microsoft.com/office/drawing/2014/main" id="{16AB75EC-EAA4-4467-AEE7-7EA33907A612}"/>
+                <a16:creationId xmlns:a16="http://schemas.microsoft.com/office/drawing/2014/main" id="{63053C2A-94E3-4D61-8927-EEE9408BD078}"/>
               </a:ext>
             </a:extLst>
           </p:cNvPr>
@@ -28402,7 +28400,7 @@
           <p:cNvPr id="27" name="">
             <a:extLst xmlns:a="http://schemas.openxmlformats.org/drawingml/2006/main">
               <a:ext uri="{FF2B5EF4-FFF2-40B4-BE49-F238E27FC236}">
-                <a16:creationId xmlns:a16="http://schemas.microsoft.com/office/drawing/2014/main" id="{4BF1AC03-6A85-4C08-B455-B903C7A0054A}"/>
+                <a16:creationId xmlns:a16="http://schemas.microsoft.com/office/drawing/2014/main" id="{BF7CC894-9AC3-4A39-A948-C4DCD58F9CA2}"/>
               </a:ext>
             </a:extLst>
           </p:cNvPr>
@@ -28466,7 +28464,7 @@
           <p:cNvPr id="28" name="">
             <a:extLst xmlns:a="http://schemas.openxmlformats.org/drawingml/2006/main">
               <a:ext uri="{FF2B5EF4-FFF2-40B4-BE49-F238E27FC236}">
-                <a16:creationId xmlns:a16="http://schemas.microsoft.com/office/drawing/2014/main" id="{185B4162-FFFF-4A84-9B0C-0570EE281BF1}"/>
+                <a16:creationId xmlns:a16="http://schemas.microsoft.com/office/drawing/2014/main" id="{3A69458F-2EA1-4468-8E8A-E6548F1CDF7A}"/>
               </a:ext>
             </a:extLst>
           </p:cNvPr>
@@ -28501,7 +28499,7 @@
           <p:cNvPr id="29" name="">
             <a:extLst xmlns:a="http://schemas.openxmlformats.org/drawingml/2006/main">
               <a:ext uri="{FF2B5EF4-FFF2-40B4-BE49-F238E27FC236}">
-                <a16:creationId xmlns:a16="http://schemas.microsoft.com/office/drawing/2014/main" id="{5DC6E6F9-2F4B-4D7B-BA13-1D80A2AD0069}"/>
+                <a16:creationId xmlns:a16="http://schemas.microsoft.com/office/drawing/2014/main" id="{DD8FF3DD-CC95-4DCE-AC79-23B57E39738A}"/>
               </a:ext>
             </a:extLst>
           </p:cNvPr>
@@ -28565,7 +28563,7 @@
           <p:cNvPr id="30" name="">
             <a:extLst xmlns:a="http://schemas.openxmlformats.org/drawingml/2006/main">
               <a:ext uri="{FF2B5EF4-FFF2-40B4-BE49-F238E27FC236}">
-                <a16:creationId xmlns:a16="http://schemas.microsoft.com/office/drawing/2014/main" id="{76DA994D-1479-4674-83DE-F9595BF7EAA0}"/>
+                <a16:creationId xmlns:a16="http://schemas.microsoft.com/office/drawing/2014/main" id="{8962EF74-5427-4DD2-985B-178BA8C958A1}"/>
               </a:ext>
             </a:extLst>
           </p:cNvPr>
@@ -28629,7 +28627,7 @@
           <p:cNvPr id="31" name="">
             <a:extLst xmlns:a="http://schemas.openxmlformats.org/drawingml/2006/main">
               <a:ext uri="{FF2B5EF4-FFF2-40B4-BE49-F238E27FC236}">
-                <a16:creationId xmlns:a16="http://schemas.microsoft.com/office/drawing/2014/main" id="{2CC492D4-D3B9-451B-9807-6328AE1A9914}"/>
+                <a16:creationId xmlns:a16="http://schemas.microsoft.com/office/drawing/2014/main" id="{A776FAD1-92AA-44B7-BAD0-A1E14C8063CF}"/>
               </a:ext>
             </a:extLst>
           </p:cNvPr>
@@ -28691,7 +28689,7 @@
     </p:spTree>
     <p:extLst>
       <p:ext uri="{BB962C8B-B14F-4D97-AF65-F5344CB8AC3E}">
-        <p14:creationId xmlns:p14="http://schemas.microsoft.com/office/powerpoint/2010/main" val="1193434190"/>
+        <p14:creationId xmlns:p14="http://schemas.microsoft.com/office/powerpoint/2010/main" val="1370314840"/>
       </p:ext>
     </p:extLst>
   </p:cSld>
@@ -28715,7 +28713,7 @@
           <p:cNvPr id="1" name="">
             <a:extLst xmlns:a="http://schemas.openxmlformats.org/drawingml/2006/main">
               <a:ext uri="{FF2B5EF4-FFF2-40B4-BE49-F238E27FC236}">
-                <a16:creationId xmlns:a16="http://schemas.microsoft.com/office/drawing/2014/main" id="{55BDD610-9AB6-4FD1-9B14-A0DF836A7E32}"/>
+                <a16:creationId xmlns:a16="http://schemas.microsoft.com/office/drawing/2014/main" id="{17A4CB53-596D-45C5-9CF9-F7C7B2820BDB}"/>
               </a:ext>
             </a:extLst>
           </p:cNvPr>
@@ -28750,7 +28748,7 @@
           <p:cNvPr id="2" name="">
             <a:extLst xmlns:a="http://schemas.openxmlformats.org/drawingml/2006/main">
               <a:ext uri="{FF2B5EF4-FFF2-40B4-BE49-F238E27FC236}">
-                <a16:creationId xmlns:a16="http://schemas.microsoft.com/office/drawing/2014/main" id="{EBB2788F-28CA-45C7-9A7D-0C75A0793C8E}"/>
+                <a16:creationId xmlns:a16="http://schemas.microsoft.com/office/drawing/2014/main" id="{5A136452-F236-4EFE-A8BA-7092DB93C143}"/>
               </a:ext>
             </a:extLst>
           </p:cNvPr>
@@ -28785,7 +28783,7 @@
           <p:cNvPr id="3" name="">
             <a:extLst xmlns:a="http://schemas.openxmlformats.org/drawingml/2006/main">
               <a:ext uri="{FF2B5EF4-FFF2-40B4-BE49-F238E27FC236}">
-                <a16:creationId xmlns:a16="http://schemas.microsoft.com/office/drawing/2014/main" id="{F58B823A-34D5-4E34-B38F-A4712946B3C6}"/>
+                <a16:creationId xmlns:a16="http://schemas.microsoft.com/office/drawing/2014/main" id="{F99D3E97-0F81-4B22-BAF7-2477C99B811C}"/>
               </a:ext>
             </a:extLst>
           </p:cNvPr>
@@ -28820,7 +28818,7 @@
           <p:cNvPr id="4" name="kicker-07-marker">
             <a:extLst xmlns:a="http://schemas.openxmlformats.org/drawingml/2006/main">
               <a:ext uri="{FF2B5EF4-FFF2-40B4-BE49-F238E27FC236}">
-                <a16:creationId xmlns:a16="http://schemas.microsoft.com/office/drawing/2014/main" id="{E300CC2C-3DB0-42B5-86AA-21C63CD3B794}"/>
+                <a16:creationId xmlns:a16="http://schemas.microsoft.com/office/drawing/2014/main" id="{DD45CD2B-B1D8-4210-8BD9-C0AB10341C19}"/>
               </a:ext>
             </a:extLst>
           </p:cNvPr>
@@ -28855,7 +28853,7 @@
           <p:cNvPr id="5" name="kicker-07-label">
             <a:extLst xmlns:a="http://schemas.openxmlformats.org/drawingml/2006/main">
               <a:ext uri="{FF2B5EF4-FFF2-40B4-BE49-F238E27FC236}">
-                <a16:creationId xmlns:a16="http://schemas.microsoft.com/office/drawing/2014/main" id="{65B4BE2B-CC90-444D-9269-B6C055BB60BC}"/>
+                <a16:creationId xmlns:a16="http://schemas.microsoft.com/office/drawing/2014/main" id="{9A9A10D5-81B0-4813-9E0A-1ED3062BE7D5}"/>
               </a:ext>
             </a:extLst>
           </p:cNvPr>
@@ -28919,7 +28917,7 @@
           <p:cNvPr id="6" name="">
             <a:extLst xmlns:a="http://schemas.openxmlformats.org/drawingml/2006/main">
               <a:ext uri="{FF2B5EF4-FFF2-40B4-BE49-F238E27FC236}">
-                <a16:creationId xmlns:a16="http://schemas.microsoft.com/office/drawing/2014/main" id="{0B75AF6E-AC67-44B3-89EE-CBC782DEBA47}"/>
+                <a16:creationId xmlns:a16="http://schemas.microsoft.com/office/drawing/2014/main" id="{441AAE72-169B-4951-916A-6A346112D7DB}"/>
               </a:ext>
             </a:extLst>
           </p:cNvPr>
@@ -28983,7 +28981,7 @@
           <p:cNvPr id="7" name="">
             <a:extLst xmlns:a="http://schemas.openxmlformats.org/drawingml/2006/main">
               <a:ext uri="{FF2B5EF4-FFF2-40B4-BE49-F238E27FC236}">
-                <a16:creationId xmlns:a16="http://schemas.microsoft.com/office/drawing/2014/main" id="{5F95758A-2FE8-447E-97C5-04B1ECF625A0}"/>
+                <a16:creationId xmlns:a16="http://schemas.microsoft.com/office/drawing/2014/main" id="{0985859E-19D2-4B8E-BB10-35586B6B418D}"/>
               </a:ext>
             </a:extLst>
           </p:cNvPr>
@@ -29047,7 +29045,7 @@
           <p:cNvPr id="8" name="">
             <a:extLst xmlns:a="http://schemas.openxmlformats.org/drawingml/2006/main">
               <a:ext uri="{FF2B5EF4-FFF2-40B4-BE49-F238E27FC236}">
-                <a16:creationId xmlns:a16="http://schemas.microsoft.com/office/drawing/2014/main" id="{A039DBF8-8188-4333-A242-A13C2F057A91}"/>
+                <a16:creationId xmlns:a16="http://schemas.microsoft.com/office/drawing/2014/main" id="{ABF1D356-9696-4E48-B81A-2D3628779329}"/>
               </a:ext>
             </a:extLst>
           </p:cNvPr>
@@ -29082,7 +29080,7 @@
           <p:cNvPr id="9" name="">
             <a:extLst xmlns:a="http://schemas.openxmlformats.org/drawingml/2006/main">
               <a:ext uri="{FF2B5EF4-FFF2-40B4-BE49-F238E27FC236}">
-                <a16:creationId xmlns:a16="http://schemas.microsoft.com/office/drawing/2014/main" id="{066D8041-9BB3-4C4E-A16F-4A3E0B377AB4}"/>
+                <a16:creationId xmlns:a16="http://schemas.microsoft.com/office/drawing/2014/main" id="{14044937-8C96-4A1D-AC91-E50AE10394C6}"/>
               </a:ext>
             </a:extLst>
           </p:cNvPr>
@@ -29146,7 +29144,7 @@
           <p:cNvPr id="10" name="">
             <a:extLst xmlns:a="http://schemas.openxmlformats.org/drawingml/2006/main">
               <a:ext uri="{FF2B5EF4-FFF2-40B4-BE49-F238E27FC236}">
-                <a16:creationId xmlns:a16="http://schemas.microsoft.com/office/drawing/2014/main" id="{5D9DA472-59B5-4F6D-909C-6386729AAFB6}"/>
+                <a16:creationId xmlns:a16="http://schemas.microsoft.com/office/drawing/2014/main" id="{2AE85201-D132-43AC-B117-85803EB12E75}"/>
               </a:ext>
             </a:extLst>
           </p:cNvPr>
@@ -29210,7 +29208,7 @@
           <p:cNvPr id="11" name="">
             <a:extLst xmlns:a="http://schemas.openxmlformats.org/drawingml/2006/main">
               <a:ext uri="{FF2B5EF4-FFF2-40B4-BE49-F238E27FC236}">
-                <a16:creationId xmlns:a16="http://schemas.microsoft.com/office/drawing/2014/main" id="{DA23405D-1563-4D12-BB4E-94F542BD1C36}"/>
+                <a16:creationId xmlns:a16="http://schemas.microsoft.com/office/drawing/2014/main" id="{28207AB7-BC2B-456E-B3A9-C63372347A41}"/>
               </a:ext>
             </a:extLst>
           </p:cNvPr>
@@ -29274,7 +29272,7 @@
           <p:cNvPr id="12" name="">
             <a:extLst xmlns:a="http://schemas.openxmlformats.org/drawingml/2006/main">
               <a:ext uri="{FF2B5EF4-FFF2-40B4-BE49-F238E27FC236}">
-                <a16:creationId xmlns:a16="http://schemas.microsoft.com/office/drawing/2014/main" id="{3195113B-4F74-4DAB-8605-329F990F258F}"/>
+                <a16:creationId xmlns:a16="http://schemas.microsoft.com/office/drawing/2014/main" id="{F76BC8BD-344A-435F-9DCA-7EC1F3601B04}"/>
               </a:ext>
             </a:extLst>
           </p:cNvPr>
@@ -29307,7 +29305,7 @@
           <p:cNvPr id="13" name="">
             <a:extLst xmlns:a="http://schemas.openxmlformats.org/drawingml/2006/main">
               <a:ext uri="{FF2B5EF4-FFF2-40B4-BE49-F238E27FC236}">
-                <a16:creationId xmlns:a16="http://schemas.microsoft.com/office/drawing/2014/main" id="{0CF82AA5-EB0D-4C02-A35C-676AC7E7FD0E}"/>
+                <a16:creationId xmlns:a16="http://schemas.microsoft.com/office/drawing/2014/main" id="{4C5FBB90-8E54-443C-AC56-392181DE890B}"/>
               </a:ext>
             </a:extLst>
           </p:cNvPr>
@@ -29342,7 +29340,7 @@
           <p:cNvPr id="14" name="">
             <a:extLst xmlns:a="http://schemas.openxmlformats.org/drawingml/2006/main">
               <a:ext uri="{FF2B5EF4-FFF2-40B4-BE49-F238E27FC236}">
-                <a16:creationId xmlns:a16="http://schemas.microsoft.com/office/drawing/2014/main" id="{EF9BFEB6-2BA1-4ADC-90EC-A02B645B8914}"/>
+                <a16:creationId xmlns:a16="http://schemas.microsoft.com/office/drawing/2014/main" id="{73DCD85B-8F17-476B-BF5B-27FDDA17517B}"/>
               </a:ext>
             </a:extLst>
           </p:cNvPr>
@@ -29406,7 +29404,7 @@
           <p:cNvPr id="15" name="">
             <a:extLst xmlns:a="http://schemas.openxmlformats.org/drawingml/2006/main">
               <a:ext uri="{FF2B5EF4-FFF2-40B4-BE49-F238E27FC236}">
-                <a16:creationId xmlns:a16="http://schemas.microsoft.com/office/drawing/2014/main" id="{5CB2349F-787A-439D-811A-69F808B79EC3}"/>
+                <a16:creationId xmlns:a16="http://schemas.microsoft.com/office/drawing/2014/main" id="{EA3E7749-122D-4B53-86BA-2B2F044DC301}"/>
               </a:ext>
             </a:extLst>
           </p:cNvPr>
@@ -29470,7 +29468,7 @@
           <p:cNvPr id="16" name="">
             <a:extLst xmlns:a="http://schemas.openxmlformats.org/drawingml/2006/main">
               <a:ext uri="{FF2B5EF4-FFF2-40B4-BE49-F238E27FC236}">
-                <a16:creationId xmlns:a16="http://schemas.microsoft.com/office/drawing/2014/main" id="{689C0789-E334-4C62-AA05-B3663F8FC00F}"/>
+                <a16:creationId xmlns:a16="http://schemas.microsoft.com/office/drawing/2014/main" id="{5C52E1E5-4F1E-45D4-8791-27E902932280}"/>
               </a:ext>
             </a:extLst>
           </p:cNvPr>
@@ -29505,7 +29503,7 @@
           <p:cNvPr id="17" name="">
             <a:extLst xmlns:a="http://schemas.openxmlformats.org/drawingml/2006/main">
               <a:ext uri="{FF2B5EF4-FFF2-40B4-BE49-F238E27FC236}">
-                <a16:creationId xmlns:a16="http://schemas.microsoft.com/office/drawing/2014/main" id="{82A4F97A-272D-4A18-9878-AECA8B76FB0B}"/>
+                <a16:creationId xmlns:a16="http://schemas.microsoft.com/office/drawing/2014/main" id="{513B6CB0-C618-4E6F-BDCA-813B6524AC90}"/>
               </a:ext>
             </a:extLst>
           </p:cNvPr>
@@ -29569,7 +29567,7 @@
           <p:cNvPr id="18" name="">
             <a:extLst xmlns:a="http://schemas.openxmlformats.org/drawingml/2006/main">
               <a:ext uri="{FF2B5EF4-FFF2-40B4-BE49-F238E27FC236}">
-                <a16:creationId xmlns:a16="http://schemas.microsoft.com/office/drawing/2014/main" id="{576FDC90-AF1E-4227-A518-5691AC756114}"/>
+                <a16:creationId xmlns:a16="http://schemas.microsoft.com/office/drawing/2014/main" id="{59E6DE33-7D1A-42A2-BE72-F8CA5E8019F0}"/>
               </a:ext>
             </a:extLst>
           </p:cNvPr>
@@ -29633,7 +29631,7 @@
           <p:cNvPr id="19" name="">
             <a:extLst xmlns:a="http://schemas.openxmlformats.org/drawingml/2006/main">
               <a:ext uri="{FF2B5EF4-FFF2-40B4-BE49-F238E27FC236}">
-                <a16:creationId xmlns:a16="http://schemas.microsoft.com/office/drawing/2014/main" id="{F62E62EB-61D5-481D-8436-9C31B05A0117}"/>
+                <a16:creationId xmlns:a16="http://schemas.microsoft.com/office/drawing/2014/main" id="{CB35D830-7A4E-447F-A96C-28C09A2C05A2}"/>
               </a:ext>
             </a:extLst>
           </p:cNvPr>
@@ -29666,7 +29664,7 @@
           <p:cNvPr id="20" name="">
             <a:extLst xmlns:a="http://schemas.openxmlformats.org/drawingml/2006/main">
               <a:ext uri="{FF2B5EF4-FFF2-40B4-BE49-F238E27FC236}">
-                <a16:creationId xmlns:a16="http://schemas.microsoft.com/office/drawing/2014/main" id="{B7FFEFEB-BA26-48C1-94CB-D1AFC8BE45DD}"/>
+                <a16:creationId xmlns:a16="http://schemas.microsoft.com/office/drawing/2014/main" id="{12BCBA87-2D7F-44CF-A435-2FC605CD70BA}"/>
               </a:ext>
             </a:extLst>
           </p:cNvPr>
@@ -29701,7 +29699,7 @@
           <p:cNvPr id="21" name="">
             <a:extLst xmlns:a="http://schemas.openxmlformats.org/drawingml/2006/main">
               <a:ext uri="{FF2B5EF4-FFF2-40B4-BE49-F238E27FC236}">
-                <a16:creationId xmlns:a16="http://schemas.microsoft.com/office/drawing/2014/main" id="{B345E954-258C-4DA7-AE1D-669F978132B2}"/>
+                <a16:creationId xmlns:a16="http://schemas.microsoft.com/office/drawing/2014/main" id="{EBE57B7D-D751-4B0E-A1FB-A089B3C9950C}"/>
               </a:ext>
             </a:extLst>
           </p:cNvPr>
@@ -29765,7 +29763,7 @@
           <p:cNvPr id="22" name="">
             <a:extLst xmlns:a="http://schemas.openxmlformats.org/drawingml/2006/main">
               <a:ext uri="{FF2B5EF4-FFF2-40B4-BE49-F238E27FC236}">
-                <a16:creationId xmlns:a16="http://schemas.microsoft.com/office/drawing/2014/main" id="{04333DE8-0673-4966-91EA-D76925ED4C4D}"/>
+                <a16:creationId xmlns:a16="http://schemas.microsoft.com/office/drawing/2014/main" id="{07EBA5E3-25E0-4D2C-9A5D-3DF95409BCA1}"/>
               </a:ext>
             </a:extLst>
           </p:cNvPr>
@@ -29798,7 +29796,7 @@
           <p:cNvPr id="23" name="">
             <a:extLst xmlns:a="http://schemas.openxmlformats.org/drawingml/2006/main">
               <a:ext uri="{FF2B5EF4-FFF2-40B4-BE49-F238E27FC236}">
-                <a16:creationId xmlns:a16="http://schemas.microsoft.com/office/drawing/2014/main" id="{4AA4BB83-FAEF-4EB7-B512-08842E7E370C}"/>
+                <a16:creationId xmlns:a16="http://schemas.microsoft.com/office/drawing/2014/main" id="{41DE1DA2-861A-4636-8803-036DC0384E47}"/>
               </a:ext>
             </a:extLst>
           </p:cNvPr>
@@ -29862,7 +29860,7 @@
           <p:cNvPr id="24" name="">
             <a:extLst xmlns:a="http://schemas.openxmlformats.org/drawingml/2006/main">
               <a:ext uri="{FF2B5EF4-FFF2-40B4-BE49-F238E27FC236}">
-                <a16:creationId xmlns:a16="http://schemas.microsoft.com/office/drawing/2014/main" id="{2F8E300C-163E-4E05-A231-3F72A3A379C5}"/>
+                <a16:creationId xmlns:a16="http://schemas.microsoft.com/office/drawing/2014/main" id="{7E086A34-C746-4A56-847A-2DB81A590B86}"/>
               </a:ext>
             </a:extLst>
           </p:cNvPr>
@@ -29926,7 +29924,7 @@
           <p:cNvPr id="25" name="">
             <a:extLst xmlns:a="http://schemas.openxmlformats.org/drawingml/2006/main">
               <a:ext uri="{FF2B5EF4-FFF2-40B4-BE49-F238E27FC236}">
-                <a16:creationId xmlns:a16="http://schemas.microsoft.com/office/drawing/2014/main" id="{50074536-AF4D-4835-92CF-FBB0B3DA4229}"/>
+                <a16:creationId xmlns:a16="http://schemas.microsoft.com/office/drawing/2014/main" id="{D3F33202-D221-4D3C-B9D6-26D62E85D61F}"/>
               </a:ext>
             </a:extLst>
           </p:cNvPr>
@@ -29959,7 +29957,7 @@
           <p:cNvPr id="26" name="">
             <a:extLst xmlns:a="http://schemas.openxmlformats.org/drawingml/2006/main">
               <a:ext uri="{FF2B5EF4-FFF2-40B4-BE49-F238E27FC236}">
-                <a16:creationId xmlns:a16="http://schemas.microsoft.com/office/drawing/2014/main" id="{C951FAE6-16CD-4472-ACEF-C09C924D2ED0}"/>
+                <a16:creationId xmlns:a16="http://schemas.microsoft.com/office/drawing/2014/main" id="{A19FA5F4-B237-4FEC-8BF1-8B573B005F51}"/>
               </a:ext>
             </a:extLst>
           </p:cNvPr>
@@ -30023,7 +30021,7 @@
           <p:cNvPr id="27" name="">
             <a:extLst xmlns:a="http://schemas.openxmlformats.org/drawingml/2006/main">
               <a:ext uri="{FF2B5EF4-FFF2-40B4-BE49-F238E27FC236}">
-                <a16:creationId xmlns:a16="http://schemas.microsoft.com/office/drawing/2014/main" id="{E1D52D27-C7B5-441E-8882-FCB35F101D75}"/>
+                <a16:creationId xmlns:a16="http://schemas.microsoft.com/office/drawing/2014/main" id="{BEE2BF42-A9DC-41B0-838F-B8D85E205FCE}"/>
               </a:ext>
             </a:extLst>
           </p:cNvPr>
@@ -30087,7 +30085,7 @@
           <p:cNvPr id="28" name="">
             <a:extLst xmlns:a="http://schemas.openxmlformats.org/drawingml/2006/main">
               <a:ext uri="{FF2B5EF4-FFF2-40B4-BE49-F238E27FC236}">
-                <a16:creationId xmlns:a16="http://schemas.microsoft.com/office/drawing/2014/main" id="{52D7F76B-D3AB-48E4-9E7E-6447F15C1717}"/>
+                <a16:creationId xmlns:a16="http://schemas.microsoft.com/office/drawing/2014/main" id="{233D82AC-72F3-4AD4-ABF3-DCC24D65794A}"/>
               </a:ext>
             </a:extLst>
           </p:cNvPr>
@@ -30120,7 +30118,7 @@
           <p:cNvPr id="29" name="">
             <a:extLst xmlns:a="http://schemas.openxmlformats.org/drawingml/2006/main">
               <a:ext uri="{FF2B5EF4-FFF2-40B4-BE49-F238E27FC236}">
-                <a16:creationId xmlns:a16="http://schemas.microsoft.com/office/drawing/2014/main" id="{759609E7-C19B-4636-9A1B-6E78CB4476D0}"/>
+                <a16:creationId xmlns:a16="http://schemas.microsoft.com/office/drawing/2014/main" id="{D3F18856-D88F-4EFB-A01F-4EF5FDF46013}"/>
               </a:ext>
             </a:extLst>
           </p:cNvPr>
@@ -30184,7 +30182,7 @@
           <p:cNvPr id="30" name="">
             <a:extLst xmlns:a="http://schemas.openxmlformats.org/drawingml/2006/main">
               <a:ext uri="{FF2B5EF4-FFF2-40B4-BE49-F238E27FC236}">
-                <a16:creationId xmlns:a16="http://schemas.microsoft.com/office/drawing/2014/main" id="{22BEF2AD-054B-4F64-8A0F-2C58E3560A5B}"/>
+                <a16:creationId xmlns:a16="http://schemas.microsoft.com/office/drawing/2014/main" id="{542266BA-8451-44F3-B0EA-1AC2BA580E15}"/>
               </a:ext>
             </a:extLst>
           </p:cNvPr>
@@ -30248,7 +30246,7 @@
           <p:cNvPr id="31" name="">
             <a:extLst xmlns:a="http://schemas.openxmlformats.org/drawingml/2006/main">
               <a:ext uri="{FF2B5EF4-FFF2-40B4-BE49-F238E27FC236}">
-                <a16:creationId xmlns:a16="http://schemas.microsoft.com/office/drawing/2014/main" id="{9B95920C-1331-493F-812B-C33FB4B54E5A}"/>
+                <a16:creationId xmlns:a16="http://schemas.microsoft.com/office/drawing/2014/main" id="{61E003B7-741B-4E3B-B037-0AC0E8FBACCC}"/>
               </a:ext>
             </a:extLst>
           </p:cNvPr>
@@ -30283,7 +30281,7 @@
           <p:cNvPr id="32" name="">
             <a:extLst xmlns:a="http://schemas.openxmlformats.org/drawingml/2006/main">
               <a:ext uri="{FF2B5EF4-FFF2-40B4-BE49-F238E27FC236}">
-                <a16:creationId xmlns:a16="http://schemas.microsoft.com/office/drawing/2014/main" id="{7DC768C3-77EB-4B26-8F23-D0E90843C8CE}"/>
+                <a16:creationId xmlns:a16="http://schemas.microsoft.com/office/drawing/2014/main" id="{DF1AD7AC-8377-495E-83EA-93C2A62E24AA}"/>
               </a:ext>
             </a:extLst>
           </p:cNvPr>
@@ -30347,7 +30345,7 @@
           <p:cNvPr id="33" name="">
             <a:extLst xmlns:a="http://schemas.openxmlformats.org/drawingml/2006/main">
               <a:ext uri="{FF2B5EF4-FFF2-40B4-BE49-F238E27FC236}">
-                <a16:creationId xmlns:a16="http://schemas.microsoft.com/office/drawing/2014/main" id="{06F11DAD-8563-42C3-9AF8-A73F9175F49B}"/>
+                <a16:creationId xmlns:a16="http://schemas.microsoft.com/office/drawing/2014/main" id="{F2364890-1566-4FC6-B77C-8134661DC6C8}"/>
               </a:ext>
             </a:extLst>
           </p:cNvPr>
@@ -30411,7 +30409,7 @@
           <p:cNvPr id="34" name="">
             <a:extLst xmlns:a="http://schemas.openxmlformats.org/drawingml/2006/main">
               <a:ext uri="{FF2B5EF4-FFF2-40B4-BE49-F238E27FC236}">
-                <a16:creationId xmlns:a16="http://schemas.microsoft.com/office/drawing/2014/main" id="{4DB16836-0DAC-4564-8AF4-9FF9079E4982}"/>
+                <a16:creationId xmlns:a16="http://schemas.microsoft.com/office/drawing/2014/main" id="{B9A2939D-5C95-4075-ADA1-09915FCD1B73}"/>
               </a:ext>
             </a:extLst>
           </p:cNvPr>
@@ -30473,7 +30471,7 @@
     </p:spTree>
     <p:extLst>
       <p:ext uri="{BB962C8B-B14F-4D97-AF65-F5344CB8AC3E}">
-        <p14:creationId xmlns:p14="http://schemas.microsoft.com/office/powerpoint/2010/main" val="1442359295"/>
+        <p14:creationId xmlns:p14="http://schemas.microsoft.com/office/powerpoint/2010/main" val="1374390973"/>
       </p:ext>
     </p:extLst>
   </p:cSld>
@@ -30497,7 +30495,7 @@
           <p:cNvPr id="1" name="">
             <a:extLst xmlns:a="http://schemas.openxmlformats.org/drawingml/2006/main">
               <a:ext uri="{FF2B5EF4-FFF2-40B4-BE49-F238E27FC236}">
-                <a16:creationId xmlns:a16="http://schemas.microsoft.com/office/drawing/2014/main" id="{153A227B-DCC0-4DD1-8633-1E24A1B8C208}"/>
+                <a16:creationId xmlns:a16="http://schemas.microsoft.com/office/drawing/2014/main" id="{8717237F-9C2E-40F4-B14D-0BBBAB39FFC0}"/>
               </a:ext>
             </a:extLst>
           </p:cNvPr>
@@ -30532,7 +30530,7 @@
           <p:cNvPr id="2" name="">
             <a:extLst xmlns:a="http://schemas.openxmlformats.org/drawingml/2006/main">
               <a:ext uri="{FF2B5EF4-FFF2-40B4-BE49-F238E27FC236}">
-                <a16:creationId xmlns:a16="http://schemas.microsoft.com/office/drawing/2014/main" id="{288E0C12-62B1-4621-93F7-22CB3C126475}"/>
+                <a16:creationId xmlns:a16="http://schemas.microsoft.com/office/drawing/2014/main" id="{FB7DC4F7-F198-4C85-89B6-F67078A8387D}"/>
               </a:ext>
             </a:extLst>
           </p:cNvPr>
@@ -30567,7 +30565,7 @@
           <p:cNvPr id="3" name="">
             <a:extLst xmlns:a="http://schemas.openxmlformats.org/drawingml/2006/main">
               <a:ext uri="{FF2B5EF4-FFF2-40B4-BE49-F238E27FC236}">
-                <a16:creationId xmlns:a16="http://schemas.microsoft.com/office/drawing/2014/main" id="{E202BDD8-8251-4174-911B-85ABB297E4C7}"/>
+                <a16:creationId xmlns:a16="http://schemas.microsoft.com/office/drawing/2014/main" id="{2B226BBD-B23D-4ECF-BE94-4C4DCD52FCD7}"/>
               </a:ext>
             </a:extLst>
           </p:cNvPr>
@@ -30602,7 +30600,7 @@
           <p:cNvPr id="4" name="kicker-07-marker">
             <a:extLst xmlns:a="http://schemas.openxmlformats.org/drawingml/2006/main">
               <a:ext uri="{FF2B5EF4-FFF2-40B4-BE49-F238E27FC236}">
-                <a16:creationId xmlns:a16="http://schemas.microsoft.com/office/drawing/2014/main" id="{62651FBB-5C48-432D-A785-5A8E66DA7901}"/>
+                <a16:creationId xmlns:a16="http://schemas.microsoft.com/office/drawing/2014/main" id="{03FD03A8-D704-4865-ADA1-B3836C40F54D}"/>
               </a:ext>
             </a:extLst>
           </p:cNvPr>
@@ -30637,7 +30635,7 @@
           <p:cNvPr id="5" name="kicker-07-label">
             <a:extLst xmlns:a="http://schemas.openxmlformats.org/drawingml/2006/main">
               <a:ext uri="{FF2B5EF4-FFF2-40B4-BE49-F238E27FC236}">
-                <a16:creationId xmlns:a16="http://schemas.microsoft.com/office/drawing/2014/main" id="{35DC3A2C-366F-4E7A-8BBC-DDC0AFEDD158}"/>
+                <a16:creationId xmlns:a16="http://schemas.microsoft.com/office/drawing/2014/main" id="{0823CE44-FD1A-4C30-94AE-4AC045FB92B7}"/>
               </a:ext>
             </a:extLst>
           </p:cNvPr>
@@ -30701,7 +30699,7 @@
           <p:cNvPr id="6" name="">
             <a:extLst xmlns:a="http://schemas.openxmlformats.org/drawingml/2006/main">
               <a:ext uri="{FF2B5EF4-FFF2-40B4-BE49-F238E27FC236}">
-                <a16:creationId xmlns:a16="http://schemas.microsoft.com/office/drawing/2014/main" id="{9D2319E0-C826-4D14-AA42-19F2D74F38BE}"/>
+                <a16:creationId xmlns:a16="http://schemas.microsoft.com/office/drawing/2014/main" id="{96FE2B97-6C32-4335-B059-12C995372E30}"/>
               </a:ext>
             </a:extLst>
           </p:cNvPr>
@@ -30765,7 +30763,7 @@
           <p:cNvPr id="7" name="">
             <a:extLst xmlns:a="http://schemas.openxmlformats.org/drawingml/2006/main">
               <a:ext uri="{FF2B5EF4-FFF2-40B4-BE49-F238E27FC236}">
-                <a16:creationId xmlns:a16="http://schemas.microsoft.com/office/drawing/2014/main" id="{4952D21C-A119-4A39-9D2D-655940D4DE4A}"/>
+                <a16:creationId xmlns:a16="http://schemas.microsoft.com/office/drawing/2014/main" id="{949B339A-2856-4AC4-AC34-93D099D3C9D6}"/>
               </a:ext>
             </a:extLst>
           </p:cNvPr>
@@ -30829,7 +30827,7 @@
           <p:cNvPr id="8" name="">
             <a:extLst xmlns:a="http://schemas.openxmlformats.org/drawingml/2006/main">
               <a:ext uri="{FF2B5EF4-FFF2-40B4-BE49-F238E27FC236}">
-                <a16:creationId xmlns:a16="http://schemas.microsoft.com/office/drawing/2014/main" id="{007D1A8E-4FC7-4DBE-9500-134BC16BF9D2}"/>
+                <a16:creationId xmlns:a16="http://schemas.microsoft.com/office/drawing/2014/main" id="{F5906CFF-9F15-4CCF-8DF1-DC00802CF034}"/>
               </a:ext>
             </a:extLst>
           </p:cNvPr>
@@ -30864,7 +30862,7 @@
           <p:cNvPr id="9" name="">
             <a:extLst xmlns:a="http://schemas.openxmlformats.org/drawingml/2006/main">
               <a:ext uri="{FF2B5EF4-FFF2-40B4-BE49-F238E27FC236}">
-                <a16:creationId xmlns:a16="http://schemas.microsoft.com/office/drawing/2014/main" id="{D1371DD6-FB6C-4379-89F2-6B557CB96A15}"/>
+                <a16:creationId xmlns:a16="http://schemas.microsoft.com/office/drawing/2014/main" id="{CD2B69E2-FC73-42AF-A3DA-512D961A1E52}"/>
               </a:ext>
             </a:extLst>
           </p:cNvPr>
@@ -30928,7 +30926,7 @@
           <p:cNvPr id="10" name="">
             <a:extLst xmlns:a="http://schemas.openxmlformats.org/drawingml/2006/main">
               <a:ext uri="{FF2B5EF4-FFF2-40B4-BE49-F238E27FC236}">
-                <a16:creationId xmlns:a16="http://schemas.microsoft.com/office/drawing/2014/main" id="{0B39E6AA-456A-490A-8F7A-A0841B280C23}"/>
+                <a16:creationId xmlns:a16="http://schemas.microsoft.com/office/drawing/2014/main" id="{15E94431-5494-40F7-975D-21744DB7D891}"/>
               </a:ext>
             </a:extLst>
           </p:cNvPr>
@@ -30992,7 +30990,7 @@
           <p:cNvPr id="11" name="">
             <a:extLst xmlns:a="http://schemas.openxmlformats.org/drawingml/2006/main">
               <a:ext uri="{FF2B5EF4-FFF2-40B4-BE49-F238E27FC236}">
-                <a16:creationId xmlns:a16="http://schemas.microsoft.com/office/drawing/2014/main" id="{86448FB2-0060-4CDE-A5AF-8BCAC8070856}"/>
+                <a16:creationId xmlns:a16="http://schemas.microsoft.com/office/drawing/2014/main" id="{D9462FD5-1884-4734-B419-C0A721E8CAAD}"/>
               </a:ext>
             </a:extLst>
           </p:cNvPr>
@@ -31056,7 +31054,7 @@
           <p:cNvPr id="12" name="">
             <a:extLst xmlns:a="http://schemas.openxmlformats.org/drawingml/2006/main">
               <a:ext uri="{FF2B5EF4-FFF2-40B4-BE49-F238E27FC236}">
-                <a16:creationId xmlns:a16="http://schemas.microsoft.com/office/drawing/2014/main" id="{F346C871-D892-4396-93FF-2E492C990B14}"/>
+                <a16:creationId xmlns:a16="http://schemas.microsoft.com/office/drawing/2014/main" id="{471C45C9-8E35-4AA8-920F-8C6B1DA9607D}"/>
               </a:ext>
             </a:extLst>
           </p:cNvPr>
@@ -31091,7 +31089,7 @@
           <p:cNvPr id="13" name="">
             <a:extLst xmlns:a="http://schemas.openxmlformats.org/drawingml/2006/main">
               <a:ext uri="{FF2B5EF4-FFF2-40B4-BE49-F238E27FC236}">
-                <a16:creationId xmlns:a16="http://schemas.microsoft.com/office/drawing/2014/main" id="{8175481C-10A7-4AA1-979D-9B1497644D0E}"/>
+                <a16:creationId xmlns:a16="http://schemas.microsoft.com/office/drawing/2014/main" id="{9DB36A66-911C-4E0E-A8E5-5B7992535A78}"/>
               </a:ext>
             </a:extLst>
           </p:cNvPr>
@@ -31124,7 +31122,7 @@
           <p:cNvPr id="14" name="">
             <a:extLst xmlns:a="http://schemas.openxmlformats.org/drawingml/2006/main">
               <a:ext uri="{FF2B5EF4-FFF2-40B4-BE49-F238E27FC236}">
-                <a16:creationId xmlns:a16="http://schemas.microsoft.com/office/drawing/2014/main" id="{C9479B04-CD42-406B-97A9-C3C1E5BF4304}"/>
+                <a16:creationId xmlns:a16="http://schemas.microsoft.com/office/drawing/2014/main" id="{A33BC60D-A2BA-4C07-8A31-7431D35FCFBB}"/>
               </a:ext>
             </a:extLst>
           </p:cNvPr>
@@ -31159,7 +31157,7 @@
           <p:cNvPr id="15" name="">
             <a:extLst xmlns:a="http://schemas.openxmlformats.org/drawingml/2006/main">
               <a:ext uri="{FF2B5EF4-FFF2-40B4-BE49-F238E27FC236}">
-                <a16:creationId xmlns:a16="http://schemas.microsoft.com/office/drawing/2014/main" id="{326ACC9F-F898-4B0A-A9C7-1944504CB074}"/>
+                <a16:creationId xmlns:a16="http://schemas.microsoft.com/office/drawing/2014/main" id="{5B89774C-DF23-4938-83DF-793D21F0292A}"/>
               </a:ext>
             </a:extLst>
           </p:cNvPr>
@@ -31223,7 +31221,7 @@
           <p:cNvPr id="16" name="">
             <a:extLst xmlns:a="http://schemas.openxmlformats.org/drawingml/2006/main">
               <a:ext uri="{FF2B5EF4-FFF2-40B4-BE49-F238E27FC236}">
-                <a16:creationId xmlns:a16="http://schemas.microsoft.com/office/drawing/2014/main" id="{CA0D6FC7-7B3E-4D7B-95E2-EEBA0502981D}"/>
+                <a16:creationId xmlns:a16="http://schemas.microsoft.com/office/drawing/2014/main" id="{5D2EDA0A-C34D-44C6-A332-065DBD3FF76C}"/>
               </a:ext>
             </a:extLst>
           </p:cNvPr>
@@ -31256,7 +31254,7 @@
           <p:cNvPr id="17" name="">
             <a:extLst xmlns:a="http://schemas.openxmlformats.org/drawingml/2006/main">
               <a:ext uri="{FF2B5EF4-FFF2-40B4-BE49-F238E27FC236}">
-                <a16:creationId xmlns:a16="http://schemas.microsoft.com/office/drawing/2014/main" id="{BEDD7018-9A11-43D3-8192-1E7DC9C0690C}"/>
+                <a16:creationId xmlns:a16="http://schemas.microsoft.com/office/drawing/2014/main" id="{4F9829C9-1B08-4F77-BEF2-AEBD6C16EE27}"/>
               </a:ext>
             </a:extLst>
           </p:cNvPr>
@@ -31320,7 +31318,7 @@
           <p:cNvPr id="18" name="">
             <a:extLst xmlns:a="http://schemas.openxmlformats.org/drawingml/2006/main">
               <a:ext uri="{FF2B5EF4-FFF2-40B4-BE49-F238E27FC236}">
-                <a16:creationId xmlns:a16="http://schemas.microsoft.com/office/drawing/2014/main" id="{BC4215B5-CE9E-436B-986E-0AF3D805C56C}"/>
+                <a16:creationId xmlns:a16="http://schemas.microsoft.com/office/drawing/2014/main" id="{7D6BE64F-6521-4291-AF03-F321093A47FB}"/>
               </a:ext>
             </a:extLst>
           </p:cNvPr>
@@ -31384,7 +31382,7 @@
           <p:cNvPr id="19" name="">
             <a:extLst xmlns:a="http://schemas.openxmlformats.org/drawingml/2006/main">
               <a:ext uri="{FF2B5EF4-FFF2-40B4-BE49-F238E27FC236}">
-                <a16:creationId xmlns:a16="http://schemas.microsoft.com/office/drawing/2014/main" id="{6B0A7815-6413-49DF-9296-080293FF0317}"/>
+                <a16:creationId xmlns:a16="http://schemas.microsoft.com/office/drawing/2014/main" id="{FEC98BC2-9D5E-476E-82C5-3CF41A5ADAD9}"/>
               </a:ext>
             </a:extLst>
           </p:cNvPr>
@@ -31417,7 +31415,7 @@
           <p:cNvPr id="20" name="">
             <a:extLst xmlns:a="http://schemas.openxmlformats.org/drawingml/2006/main">
               <a:ext uri="{FF2B5EF4-FFF2-40B4-BE49-F238E27FC236}">
-                <a16:creationId xmlns:a16="http://schemas.microsoft.com/office/drawing/2014/main" id="{17B8E9FA-32C3-49A3-AF48-7F64946B6B06}"/>
+                <a16:creationId xmlns:a16="http://schemas.microsoft.com/office/drawing/2014/main" id="{D1F8AE60-5431-4E05-82CF-DBB35362951D}"/>
               </a:ext>
             </a:extLst>
           </p:cNvPr>
@@ -31481,7 +31479,7 @@
           <p:cNvPr id="21" name="">
             <a:extLst xmlns:a="http://schemas.openxmlformats.org/drawingml/2006/main">
               <a:ext uri="{FF2B5EF4-FFF2-40B4-BE49-F238E27FC236}">
-                <a16:creationId xmlns:a16="http://schemas.microsoft.com/office/drawing/2014/main" id="{07EA989B-499E-476A-AAC8-FD938ECF5E8A}"/>
+                <a16:creationId xmlns:a16="http://schemas.microsoft.com/office/drawing/2014/main" id="{E32D2BE6-29E3-4208-A68C-BF0975ECF8F0}"/>
               </a:ext>
             </a:extLst>
           </p:cNvPr>
@@ -31545,7 +31543,7 @@
           <p:cNvPr id="22" name="">
             <a:extLst xmlns:a="http://schemas.openxmlformats.org/drawingml/2006/main">
               <a:ext uri="{FF2B5EF4-FFF2-40B4-BE49-F238E27FC236}">
-                <a16:creationId xmlns:a16="http://schemas.microsoft.com/office/drawing/2014/main" id="{0558E7CE-CAAA-4A59-A8C0-E4653A62D4A6}"/>
+                <a16:creationId xmlns:a16="http://schemas.microsoft.com/office/drawing/2014/main" id="{801082FD-D110-45CC-988D-D0D993AAEAEB}"/>
               </a:ext>
             </a:extLst>
           </p:cNvPr>
@@ -31578,7 +31576,7 @@
           <p:cNvPr id="23" name="">
             <a:extLst xmlns:a="http://schemas.openxmlformats.org/drawingml/2006/main">
               <a:ext uri="{FF2B5EF4-FFF2-40B4-BE49-F238E27FC236}">
-                <a16:creationId xmlns:a16="http://schemas.microsoft.com/office/drawing/2014/main" id="{4D675023-159D-4255-BA42-D926F8AB4718}"/>
+                <a16:creationId xmlns:a16="http://schemas.microsoft.com/office/drawing/2014/main" id="{2B70A7FB-3A4E-4947-BA88-A301734ACD56}"/>
               </a:ext>
             </a:extLst>
           </p:cNvPr>
@@ -31642,7 +31640,7 @@
           <p:cNvPr id="24" name="">
             <a:extLst xmlns:a="http://schemas.openxmlformats.org/drawingml/2006/main">
               <a:ext uri="{FF2B5EF4-FFF2-40B4-BE49-F238E27FC236}">
-                <a16:creationId xmlns:a16="http://schemas.microsoft.com/office/drawing/2014/main" id="{980CDDAE-2D7B-45A4-84D1-4B9AA4046A24}"/>
+                <a16:creationId xmlns:a16="http://schemas.microsoft.com/office/drawing/2014/main" id="{6A857F34-AA09-4041-84D9-F4A12F27353D}"/>
               </a:ext>
             </a:extLst>
           </p:cNvPr>
@@ -31706,7 +31704,7 @@
           <p:cNvPr id="25" name="">
             <a:extLst xmlns:a="http://schemas.openxmlformats.org/drawingml/2006/main">
               <a:ext uri="{FF2B5EF4-FFF2-40B4-BE49-F238E27FC236}">
-                <a16:creationId xmlns:a16="http://schemas.microsoft.com/office/drawing/2014/main" id="{93D7727B-B82E-4A48-9CAE-720579201749}"/>
+                <a16:creationId xmlns:a16="http://schemas.microsoft.com/office/drawing/2014/main" id="{A0817105-F708-473B-AE0D-8247847B68F1}"/>
               </a:ext>
             </a:extLst>
           </p:cNvPr>
@@ -31741,7 +31739,7 @@
           <p:cNvPr id="26" name="">
             <a:extLst xmlns:a="http://schemas.openxmlformats.org/drawingml/2006/main">
               <a:ext uri="{FF2B5EF4-FFF2-40B4-BE49-F238E27FC236}">
-                <a16:creationId xmlns:a16="http://schemas.microsoft.com/office/drawing/2014/main" id="{88BC654C-2C02-4BA3-8AE6-6A0A03EE5A9F}"/>
+                <a16:creationId xmlns:a16="http://schemas.microsoft.com/office/drawing/2014/main" id="{63637890-EC28-4287-95A3-06EBB190D6B7}"/>
               </a:ext>
             </a:extLst>
           </p:cNvPr>
@@ -31805,7 +31803,7 @@
           <p:cNvPr id="27" name="">
             <a:extLst xmlns:a="http://schemas.openxmlformats.org/drawingml/2006/main">
               <a:ext uri="{FF2B5EF4-FFF2-40B4-BE49-F238E27FC236}">
-                <a16:creationId xmlns:a16="http://schemas.microsoft.com/office/drawing/2014/main" id="{28C4EC74-5384-414A-8D57-642F8ACB9F2E}"/>
+                <a16:creationId xmlns:a16="http://schemas.microsoft.com/office/drawing/2014/main" id="{8A41EFC6-756C-4B76-A997-22D953642C40}"/>
               </a:ext>
             </a:extLst>
           </p:cNvPr>
@@ -31838,7 +31836,7 @@
           <p:cNvPr id="28" name="">
             <a:extLst xmlns:a="http://schemas.openxmlformats.org/drawingml/2006/main">
               <a:ext uri="{FF2B5EF4-FFF2-40B4-BE49-F238E27FC236}">
-                <a16:creationId xmlns:a16="http://schemas.microsoft.com/office/drawing/2014/main" id="{B9F1D42F-11B6-40AE-B3E3-4C5B67C4E21B}"/>
+                <a16:creationId xmlns:a16="http://schemas.microsoft.com/office/drawing/2014/main" id="{392022A4-9305-4475-A5A9-432890B7152F}"/>
               </a:ext>
             </a:extLst>
           </p:cNvPr>
@@ -31902,7 +31900,7 @@
           <p:cNvPr id="29" name="">
             <a:extLst xmlns:a="http://schemas.openxmlformats.org/drawingml/2006/main">
               <a:ext uri="{FF2B5EF4-FFF2-40B4-BE49-F238E27FC236}">
-                <a16:creationId xmlns:a16="http://schemas.microsoft.com/office/drawing/2014/main" id="{9664A646-F4EB-477D-90B6-DEF8943D11D0}"/>
+                <a16:creationId xmlns:a16="http://schemas.microsoft.com/office/drawing/2014/main" id="{BA4A3462-201D-48B2-9854-9905588AB996}"/>
               </a:ext>
             </a:extLst>
           </p:cNvPr>
@@ -31966,7 +31964,7 @@
           <p:cNvPr id="30" name="">
             <a:extLst xmlns:a="http://schemas.openxmlformats.org/drawingml/2006/main">
               <a:ext uri="{FF2B5EF4-FFF2-40B4-BE49-F238E27FC236}">
-                <a16:creationId xmlns:a16="http://schemas.microsoft.com/office/drawing/2014/main" id="{D242355E-FD7D-4D00-BC05-06F9574EC3A8}"/>
+                <a16:creationId xmlns:a16="http://schemas.microsoft.com/office/drawing/2014/main" id="{8C9D1EFA-C856-4682-82EC-366CEC2EAF24}"/>
               </a:ext>
             </a:extLst>
           </p:cNvPr>
@@ -31999,7 +31997,7 @@
           <p:cNvPr id="31" name="">
             <a:extLst xmlns:a="http://schemas.openxmlformats.org/drawingml/2006/main">
               <a:ext uri="{FF2B5EF4-FFF2-40B4-BE49-F238E27FC236}">
-                <a16:creationId xmlns:a16="http://schemas.microsoft.com/office/drawing/2014/main" id="{B5F51962-94FD-41EF-8240-70878763476A}"/>
+                <a16:creationId xmlns:a16="http://schemas.microsoft.com/office/drawing/2014/main" id="{9818D179-D067-4481-B1E3-ACDA62E14EB2}"/>
               </a:ext>
             </a:extLst>
           </p:cNvPr>
@@ -32063,7 +32061,7 @@
           <p:cNvPr id="32" name="">
             <a:extLst xmlns:a="http://schemas.openxmlformats.org/drawingml/2006/main">
               <a:ext uri="{FF2B5EF4-FFF2-40B4-BE49-F238E27FC236}">
-                <a16:creationId xmlns:a16="http://schemas.microsoft.com/office/drawing/2014/main" id="{54CD0DAF-9523-43C1-A37E-926A28F32544}"/>
+                <a16:creationId xmlns:a16="http://schemas.microsoft.com/office/drawing/2014/main" id="{E94B2D23-139A-45AC-BFEF-408220E1E48C}"/>
               </a:ext>
             </a:extLst>
           </p:cNvPr>
@@ -32127,7 +32125,7 @@
           <p:cNvPr id="33" name="">
             <a:extLst xmlns:a="http://schemas.openxmlformats.org/drawingml/2006/main">
               <a:ext uri="{FF2B5EF4-FFF2-40B4-BE49-F238E27FC236}">
-                <a16:creationId xmlns:a16="http://schemas.microsoft.com/office/drawing/2014/main" id="{F8A7DA5B-5B63-4AE1-A626-5A45F9309A83}"/>
+                <a16:creationId xmlns:a16="http://schemas.microsoft.com/office/drawing/2014/main" id="{908709E3-C8D3-4C2E-90FD-B3F464AFB813}"/>
               </a:ext>
             </a:extLst>
           </p:cNvPr>
@@ -32162,7 +32160,7 @@
           <p:cNvPr id="34" name="">
             <a:extLst xmlns:a="http://schemas.openxmlformats.org/drawingml/2006/main">
               <a:ext uri="{FF2B5EF4-FFF2-40B4-BE49-F238E27FC236}">
-                <a16:creationId xmlns:a16="http://schemas.microsoft.com/office/drawing/2014/main" id="{FBDE5F63-6182-4344-B927-85DF3867E4BC}"/>
+                <a16:creationId xmlns:a16="http://schemas.microsoft.com/office/drawing/2014/main" id="{6CF87E19-F4C4-4BDC-8ECA-029E11F1EAAD}"/>
               </a:ext>
             </a:extLst>
           </p:cNvPr>
@@ -32226,7 +32224,7 @@
           <p:cNvPr id="35" name="">
             <a:extLst xmlns:a="http://schemas.openxmlformats.org/drawingml/2006/main">
               <a:ext uri="{FF2B5EF4-FFF2-40B4-BE49-F238E27FC236}">
-                <a16:creationId xmlns:a16="http://schemas.microsoft.com/office/drawing/2014/main" id="{5D050E00-7C58-45A8-A993-FA5490BA722A}"/>
+                <a16:creationId xmlns:a16="http://schemas.microsoft.com/office/drawing/2014/main" id="{04CCB199-7D66-4B49-99B5-A78B4557000E}"/>
               </a:ext>
             </a:extLst>
           </p:cNvPr>
@@ -32290,7 +32288,7 @@
           <p:cNvPr id="36" name="">
             <a:extLst xmlns:a="http://schemas.openxmlformats.org/drawingml/2006/main">
               <a:ext uri="{FF2B5EF4-FFF2-40B4-BE49-F238E27FC236}">
-                <a16:creationId xmlns:a16="http://schemas.microsoft.com/office/drawing/2014/main" id="{5D819782-0BF2-4A93-9A9C-E98BB5B75337}"/>
+                <a16:creationId xmlns:a16="http://schemas.microsoft.com/office/drawing/2014/main" id="{D2BD419E-0D36-40B1-B3A5-53D124184AEB}"/>
               </a:ext>
             </a:extLst>
           </p:cNvPr>
@@ -32354,7 +32352,7 @@
           <p:cNvPr id="37" name="">
             <a:extLst xmlns:a="http://schemas.openxmlformats.org/drawingml/2006/main">
               <a:ext uri="{FF2B5EF4-FFF2-40B4-BE49-F238E27FC236}">
-                <a16:creationId xmlns:a16="http://schemas.microsoft.com/office/drawing/2014/main" id="{19A3E8B1-0503-4DCE-8043-997F4C90C9A2}"/>
+                <a16:creationId xmlns:a16="http://schemas.microsoft.com/office/drawing/2014/main" id="{5A81BC7C-BFA9-4B77-A270-1188F3002B79}"/>
               </a:ext>
             </a:extLst>
           </p:cNvPr>
@@ -32389,7 +32387,7 @@
           <p:cNvPr id="38" name="">
             <a:extLst xmlns:a="http://schemas.openxmlformats.org/drawingml/2006/main">
               <a:ext uri="{FF2B5EF4-FFF2-40B4-BE49-F238E27FC236}">
-                <a16:creationId xmlns:a16="http://schemas.microsoft.com/office/drawing/2014/main" id="{A8A7F191-F2A8-4185-B189-6F37E8D27999}"/>
+                <a16:creationId xmlns:a16="http://schemas.microsoft.com/office/drawing/2014/main" id="{6383A946-5673-4A86-AF8A-0A6EF3801F06}"/>
               </a:ext>
             </a:extLst>
           </p:cNvPr>
@@ -32424,7 +32422,7 @@
           <p:cNvPr id="39" name="">
             <a:extLst xmlns:a="http://schemas.openxmlformats.org/drawingml/2006/main">
               <a:ext uri="{FF2B5EF4-FFF2-40B4-BE49-F238E27FC236}">
-                <a16:creationId xmlns:a16="http://schemas.microsoft.com/office/drawing/2014/main" id="{6E2D816C-E607-4C93-9AD5-C43227D2760E}"/>
+                <a16:creationId xmlns:a16="http://schemas.microsoft.com/office/drawing/2014/main" id="{81AC094C-D29F-4503-AB0C-F7DFC67D064B}"/>
               </a:ext>
             </a:extLst>
           </p:cNvPr>
@@ -32459,7 +32457,7 @@
           <p:cNvPr id="40" name="kicker-07-marker">
             <a:extLst xmlns:a="http://schemas.openxmlformats.org/drawingml/2006/main">
               <a:ext uri="{FF2B5EF4-FFF2-40B4-BE49-F238E27FC236}">
-                <a16:creationId xmlns:a16="http://schemas.microsoft.com/office/drawing/2014/main" id="{B20C2FBC-F587-4C55-9768-CEB0DE1FAA6F}"/>
+                <a16:creationId xmlns:a16="http://schemas.microsoft.com/office/drawing/2014/main" id="{0F198CF0-B4D6-4F5D-886C-B7D4AA975538}"/>
               </a:ext>
             </a:extLst>
           </p:cNvPr>
@@ -32494,7 +32492,7 @@
           <p:cNvPr id="41" name="kicker-07-label">
             <a:extLst xmlns:a="http://schemas.openxmlformats.org/drawingml/2006/main">
               <a:ext uri="{FF2B5EF4-FFF2-40B4-BE49-F238E27FC236}">
-                <a16:creationId xmlns:a16="http://schemas.microsoft.com/office/drawing/2014/main" id="{145874D7-3E28-4300-BF2D-DAD683691326}"/>
+                <a16:creationId xmlns:a16="http://schemas.microsoft.com/office/drawing/2014/main" id="{F0B436A1-CA2E-495F-BB30-2AAB05CC815E}"/>
               </a:ext>
             </a:extLst>
           </p:cNvPr>
@@ -32558,7 +32556,7 @@
           <p:cNvPr id="42" name="">
             <a:extLst xmlns:a="http://schemas.openxmlformats.org/drawingml/2006/main">
               <a:ext uri="{FF2B5EF4-FFF2-40B4-BE49-F238E27FC236}">
-                <a16:creationId xmlns:a16="http://schemas.microsoft.com/office/drawing/2014/main" id="{536AC59C-D235-488C-83BA-30DE9AFC1EBE}"/>
+                <a16:creationId xmlns:a16="http://schemas.microsoft.com/office/drawing/2014/main" id="{9291BDF9-02B7-493E-AD5D-AC1673B5E66D}"/>
               </a:ext>
             </a:extLst>
           </p:cNvPr>
@@ -32622,7 +32620,7 @@
           <p:cNvPr id="43" name="">
             <a:extLst xmlns:a="http://schemas.openxmlformats.org/drawingml/2006/main">
               <a:ext uri="{FF2B5EF4-FFF2-40B4-BE49-F238E27FC236}">
-                <a16:creationId xmlns:a16="http://schemas.microsoft.com/office/drawing/2014/main" id="{AA7C254B-AA29-4248-8ED3-F20F64ABE0A1}"/>
+                <a16:creationId xmlns:a16="http://schemas.microsoft.com/office/drawing/2014/main" id="{8A8AE4C2-9061-4390-B7E7-C12D3A939B68}"/>
               </a:ext>
             </a:extLst>
           </p:cNvPr>
@@ -32686,7 +32684,7 @@
           <p:cNvPr id="44" name="">
             <a:extLst xmlns:a="http://schemas.openxmlformats.org/drawingml/2006/main">
               <a:ext uri="{FF2B5EF4-FFF2-40B4-BE49-F238E27FC236}">
-                <a16:creationId xmlns:a16="http://schemas.microsoft.com/office/drawing/2014/main" id="{DF9F3974-1ECA-4D4C-85F9-A5AE39F3FC57}"/>
+                <a16:creationId xmlns:a16="http://schemas.microsoft.com/office/drawing/2014/main" id="{BA0C6D8B-2E3F-43B7-A08E-8E34CE2C4DBD}"/>
               </a:ext>
             </a:extLst>
           </p:cNvPr>
@@ -32721,7 +32719,7 @@
           <p:cNvPr id="45" name="">
             <a:extLst xmlns:a="http://schemas.openxmlformats.org/drawingml/2006/main">
               <a:ext uri="{FF2B5EF4-FFF2-40B4-BE49-F238E27FC236}">
-                <a16:creationId xmlns:a16="http://schemas.microsoft.com/office/drawing/2014/main" id="{EA799EC4-011A-4D5B-9EB1-A70E25586E66}"/>
+                <a16:creationId xmlns:a16="http://schemas.microsoft.com/office/drawing/2014/main" id="{50E90526-6EAF-4D28-8A6A-D43A39F843FF}"/>
               </a:ext>
             </a:extLst>
           </p:cNvPr>
@@ -32756,7 +32754,7 @@
           <p:cNvPr id="46" name="">
             <a:extLst xmlns:a="http://schemas.openxmlformats.org/drawingml/2006/main">
               <a:ext uri="{FF2B5EF4-FFF2-40B4-BE49-F238E27FC236}">
-                <a16:creationId xmlns:a16="http://schemas.microsoft.com/office/drawing/2014/main" id="{BC7AC530-F2D6-4F0F-A4A8-554CF1365678}"/>
+                <a16:creationId xmlns:a16="http://schemas.microsoft.com/office/drawing/2014/main" id="{A195ED00-ADEE-4937-9BC3-3ED8B8045A64}"/>
               </a:ext>
             </a:extLst>
           </p:cNvPr>
@@ -32791,7 +32789,7 @@
           <p:cNvPr id="47" name="">
             <a:extLst xmlns:a="http://schemas.openxmlformats.org/drawingml/2006/main">
               <a:ext uri="{FF2B5EF4-FFF2-40B4-BE49-F238E27FC236}">
-                <a16:creationId xmlns:a16="http://schemas.microsoft.com/office/drawing/2014/main" id="{04245E2A-6678-4946-820B-F638E8600C64}"/>
+                <a16:creationId xmlns:a16="http://schemas.microsoft.com/office/drawing/2014/main" id="{6C11C254-D3CC-4737-88AB-5250D84BEABA}"/>
               </a:ext>
             </a:extLst>
           </p:cNvPr>
@@ -32826,7 +32824,7 @@
           <p:cNvPr id="48" name="">
             <a:extLst xmlns:a="http://schemas.openxmlformats.org/drawingml/2006/main">
               <a:ext uri="{FF2B5EF4-FFF2-40B4-BE49-F238E27FC236}">
-                <a16:creationId xmlns:a16="http://schemas.microsoft.com/office/drawing/2014/main" id="{A8168928-8DAC-4C4E-97BD-DEA0EACE316B}"/>
+                <a16:creationId xmlns:a16="http://schemas.microsoft.com/office/drawing/2014/main" id="{163706D7-AA0B-4D36-9940-F7023FE88309}"/>
               </a:ext>
             </a:extLst>
           </p:cNvPr>
@@ -32890,7 +32888,7 @@
           <p:cNvPr id="49" name="">
             <a:extLst xmlns:a="http://schemas.openxmlformats.org/drawingml/2006/main">
               <a:ext uri="{FF2B5EF4-FFF2-40B4-BE49-F238E27FC236}">
-                <a16:creationId xmlns:a16="http://schemas.microsoft.com/office/drawing/2014/main" id="{D8146538-B4BA-4866-A836-52263F9F938B}"/>
+                <a16:creationId xmlns:a16="http://schemas.microsoft.com/office/drawing/2014/main" id="{AECC7D44-6DF6-4DA4-82DF-EB394FF0DA8E}"/>
               </a:ext>
             </a:extLst>
           </p:cNvPr>
@@ -32954,7 +32952,7 @@
           <p:cNvPr id="50" name="">
             <a:extLst xmlns:a="http://schemas.openxmlformats.org/drawingml/2006/main">
               <a:ext uri="{FF2B5EF4-FFF2-40B4-BE49-F238E27FC236}">
-                <a16:creationId xmlns:a16="http://schemas.microsoft.com/office/drawing/2014/main" id="{D576C359-430E-4A4A-AB8D-80273579DA39}"/>
+                <a16:creationId xmlns:a16="http://schemas.microsoft.com/office/drawing/2014/main" id="{378A99CD-1133-4999-8521-D89429D6D32E}"/>
               </a:ext>
             </a:extLst>
           </p:cNvPr>
@@ -33016,7 +33014,7 @@
     </p:spTree>
     <p:extLst>
       <p:ext uri="{BB962C8B-B14F-4D97-AF65-F5344CB8AC3E}">
-        <p14:creationId xmlns:p14="http://schemas.microsoft.com/office/powerpoint/2010/main" val="1950782156"/>
+        <p14:creationId xmlns:p14="http://schemas.microsoft.com/office/powerpoint/2010/main" val="495794491"/>
       </p:ext>
     </p:extLst>
   </p:cSld>
